--- a/web/rapports/mensuel/2026-10.pptx
+++ b/web/rapports/mensuel/2026-10.pptx
@@ -43,9 +43,10 @@
     <p:sldId id="291" r:id="rId37"/>
     <p:sldId id="292" r:id="rId38"/>
     <p:sldId id="293" r:id="rId39"/>
+    <p:sldId id="294" r:id="rId40"/>
   </p:sldIdLst>
   <p:notesMasterIdLst>
-    <p:notesMasterId r:id="rId40"/>
+    <p:notesMasterId r:id="rId41"/>
   </p:notesMasterIdLst>
   <p:sldSz cx="12192000" cy="6858000"/>
   <p:notesSz cx="6858000" cy="12192000"/>
@@ -3291,6 +3292,94 @@
             <a:fld id="{F7021451-1387-4CA6-816F-3879F97B5CBC}" type="slidenum">
               <a:rPr lang="en-US"/>
               <a:t>38</a:t>
+            </a:fld>
+            <a:endParaRPr lang="en-US"/>
+          </a:p>
+        </p:txBody>
+      </p:sp>
+    </p:spTree>
+    <p:extLst>
+      <p:ext uri="{BB962C8B-B14F-4D97-AF65-F5344CB8AC3E}">
+        <p14:creationId xmlns:p14="http://schemas.microsoft.com/office/powerpoint/2010/main" val="1024086991"/>
+      </p:ext>
+    </p:extLst>
+  </p:cSld>
+  <p:clrMapOvr>
+    <a:masterClrMapping/>
+  </p:clrMapOvr>
+</p:notes>
+</file>
+
+<file path=ppt/notesSlides/notesSlide39.xml><?xml version="1.0" encoding="utf-8"?>
+<p:notes xmlns:a="http://schemas.openxmlformats.org/drawingml/2006/main" xmlns:r="http://schemas.openxmlformats.org/officeDocument/2006/relationships" xmlns:p="http://schemas.openxmlformats.org/presentationml/2006/main">
+  <p:cSld>
+    <p:spTree>
+      <p:nvGrpSpPr>
+        <p:cNvPr id="1" name=""/>
+        <p:cNvGrpSpPr/>
+        <p:nvPr/>
+      </p:nvGrpSpPr>
+      <p:grpSpPr>
+        <a:xfrm>
+          <a:off x="0" y="0"/>
+          <a:ext cx="0" cy="0"/>
+          <a:chOff x="0" y="0"/>
+          <a:chExt cx="0" cy="0"/>
+        </a:xfrm>
+      </p:grpSpPr>
+      <p:sp>
+        <p:nvSpPr>
+          <p:cNvPr id="2" name="Slide Image Placeholder 1"/>
+          <p:cNvSpPr>
+            <a:spLocks noGrp="1" noRot="1" noChangeAspect="1"/>
+          </p:cNvSpPr>
+          <p:nvPr>
+            <p:ph type="sldImg"/>
+          </p:nvPr>
+        </p:nvSpPr>
+        <p:spPr/>
+      </p:sp>
+      <p:sp>
+        <p:nvSpPr>
+          <p:cNvPr id="3" name="Notes Placeholder 2"/>
+          <p:cNvSpPr>
+            <a:spLocks noGrp="1"/>
+          </p:cNvSpPr>
+          <p:nvPr>
+            <p:ph type="body" idx="1"/>
+          </p:nvPr>
+        </p:nvSpPr>
+        <p:spPr/>
+        <p:txBody>
+          <a:bodyPr/>
+          <a:lstStyle/>
+          <a:p>
+            <a:r>
+              <a:rPr lang="en-US" dirty="0"/>
+              <a:t/>
+            </a:r>
+            <a:endParaRPr lang="en-US" dirty="0"/>
+          </a:p>
+        </p:txBody>
+      </p:sp>
+      <p:sp>
+        <p:nvSpPr>
+          <p:cNvPr id="4" name="Slide Number Placeholder 3"/>
+          <p:cNvSpPr>
+            <a:spLocks noGrp="1"/>
+          </p:cNvSpPr>
+          <p:nvPr>
+            <p:ph type="sldNum" sz="quarter" idx="10"/>
+          </p:nvPr>
+        </p:nvSpPr>
+        <p:spPr/>
+        <p:txBody>
+          <a:bodyPr/>
+          <a:lstStyle/>
+          <a:p>
+            <a:fld id="{F7021451-1387-4CA6-816F-3879F97B5CBC}" type="slidenum">
+              <a:rPr lang="en-US"/>
+              <a:t>39</a:t>
             </a:fld>
             <a:endParaRPr lang="en-US"/>
           </a:p>
@@ -4350,7 +4439,7 @@
                 <a:ea typeface="Calibri" pitchFamily="34" charset="-122"/>
                 <a:cs typeface="Calibri" pitchFamily="34" charset="-120"/>
               </a:rPr>
-              <a:t>27 OCTOBRE 2026</a:t>
+              <a:t>28 OCTOBRE 2026</a:t>
             </a:r>
             <a:endParaRPr lang="en-US" sz="2000" dirty="0"/>
           </a:p>
@@ -4396,7 +4485,7 @@
                 <a:ea typeface="Calibri" pitchFamily="34" charset="-122"/>
                 <a:cs typeface="Calibri" pitchFamily="34" charset="-120"/>
               </a:rPr>
-              <a:t>Période du 1er au 27 octobre 2026</a:t>
+              <a:t>Période du 1er au 28 octobre 2026</a:t>
             </a:r>
             <a:endParaRPr lang="en-US" sz="1400" dirty="0"/>
           </a:p>
@@ -4504,7 +4593,7 @@
                 <a:ea typeface="Calibri" pitchFamily="34" charset="-122"/>
                 <a:cs typeface="Calibri" pitchFamily="34" charset="-120"/>
               </a:rPr>
-              <a:t>|  27/10/26   |   1</a:t>
+              <a:t>|  28/10/26   |   1</a:t>
             </a:r>
             <a:endParaRPr lang="en-US" sz="1000" dirty="0"/>
           </a:p>
@@ -5267,7 +5356,7 @@
                 <a:ea typeface="Calibri" pitchFamily="34" charset="-122"/>
                 <a:cs typeface="Calibri" pitchFamily="34" charset="-120"/>
               </a:rPr>
-              <a:t>|  27/10/26   |   10</a:t>
+              <a:t>|  28/10/26   |   10</a:t>
             </a:r>
             <a:endParaRPr lang="en-US" sz="1000" dirty="0"/>
           </a:p>
@@ -5533,7 +5622,7 @@
                 <a:ea typeface="Calibri" pitchFamily="34" charset="-122"/>
                 <a:cs typeface="Calibri" pitchFamily="34" charset="-120"/>
               </a:rPr>
-              <a:t>Indice de confiance : moyenne (incident vérifié le plus récent : 120 jours ; 2 signaux du jour)</a:t>
+              <a:t>Indice de confiance : faible (incident vérifié le plus récent : 121 jours ; aucun signal du jour)</a:t>
             </a:r>
             <a:endParaRPr lang="en-US" sz="1100" dirty="0"/>
           </a:p>
@@ -5871,7 +5960,7 @@
                 <a:ea typeface="Calibri" pitchFamily="34" charset="-122"/>
                 <a:cs typeface="Calibri" pitchFamily="34" charset="-120"/>
               </a:rPr>
-              <a:t>|  27/10/26   |   11</a:t>
+              <a:t>|  28/10/26   |   11</a:t>
             </a:r>
             <a:endParaRPr lang="en-US" sz="1000" dirty="0"/>
           </a:p>
@@ -6290,7 +6379,7 @@
                 <a:ea typeface="Calibri" pitchFamily="34" charset="-122"/>
                 <a:cs typeface="Calibri" pitchFamily="34" charset="-120"/>
               </a:rPr>
-              <a:t>|  27/10/26   |   12</a:t>
+              <a:t>|  28/10/26   |   12</a:t>
             </a:r>
             <a:endParaRPr lang="en-US" sz="1000" dirty="0"/>
           </a:p>
@@ -6492,7 +6581,7 @@
                 <a:ea typeface="Calibri" pitchFamily="34" charset="-122"/>
                 <a:cs typeface="Calibri" pitchFamily="34" charset="-120"/>
               </a:rPr>
-              <a:t>|  27/10/26   |   13</a:t>
+              <a:t>|  28/10/26   |   13</a:t>
             </a:r>
             <a:endParaRPr lang="en-US" sz="1000" dirty="0"/>
           </a:p>
@@ -6733,7 +6822,7 @@
                 <a:ea typeface="Calibri" pitchFamily="34" charset="-122"/>
                 <a:cs typeface="Calibri" pitchFamily="34" charset="-120"/>
               </a:rPr>
-              <a:t>Indice de confiance : faible (incident vérifié le plus récent : 120 jours ; aucun signal du jour)</a:t>
+              <a:t>Indice de confiance : moyenne (incident vérifié le plus récent : 121 jours ; 1 signal du jour)</a:t>
             </a:r>
             <a:endParaRPr lang="en-US" sz="1100" dirty="0"/>
           </a:p>
@@ -7088,7 +7177,7 @@
                 <a:ea typeface="Calibri" pitchFamily="34" charset="-122"/>
                 <a:cs typeface="Calibri" pitchFamily="34" charset="-120"/>
               </a:rPr>
-              <a:t>|  27/10/26   |   14</a:t>
+              <a:t>|  28/10/26   |   14</a:t>
             </a:r>
             <a:endParaRPr lang="en-US" sz="1000" dirty="0"/>
           </a:p>
@@ -7439,7 +7528,7 @@
                 <a:ea typeface="Calibri" pitchFamily="34" charset="-122"/>
                 <a:cs typeface="Calibri" pitchFamily="34" charset="-120"/>
               </a:rPr>
-              <a:t>SÉCURITÉ NUMÉRIQUE AU BURKINA : LA BCLCC LANCE LA 2ᵉ SEMAINE NATIONALE DE LUTTE CONTRE LA CYBERCRIMINALITÉ</a:t>
+              <a:t>ENTREPRENEURIAT FÉMININ À KORSIMORO : LE COMBAT INSPIRANT DES FEMMES POUR L’AUTONOMIE FINANCIÈRE</a:t>
             </a:r>
             <a:endParaRPr lang="en-US" sz="1300" dirty="0"/>
           </a:p>
@@ -7484,7 +7573,7 @@
                   </a:extLst>
                 </a:hlinkClick>
               </a:rPr>
-              <a:t>Faso7</a:t>
+              <a:t>Burkina24</a:t>
             </a:r>
             <a:pPr indent="0" marL="0">
               <a:spcAft>
@@ -7501,7 +7590,24 @@
                 <a:ea typeface="Calibri" pitchFamily="34" charset="-122"/>
                 <a:cs typeface="Calibri" pitchFamily="34" charset="-120"/>
               </a:rPr>
-              <a:t> — 24 octobre 2026, 13 h UTC</a:t>
+              <a:t> — 28 octobre 2026, 8 h UTC   ·   </a:t>
+            </a:r>
+            <a:pPr indent="0" marL="0">
+              <a:spcAft>
+                <a:spcPts val="200"/>
+              </a:spcAft>
+              <a:buNone/>
+            </a:pPr>
+            <a:r>
+              <a:rPr lang="en-US" sz="1300" b="1" dirty="0">
+                <a:solidFill>
+                  <a:srgbClr val="1F2937"/>
+                </a:solidFill>
+                <a:latin typeface="Calibri" pitchFamily="34" charset="0"/>
+                <a:ea typeface="Calibri" pitchFamily="34" charset="-122"/>
+                <a:cs typeface="Calibri" pitchFamily="34" charset="-120"/>
+              </a:rPr>
+              <a:t>Cotation : Probable</a:t>
             </a:r>
             <a:endParaRPr lang="en-US" sz="1300" dirty="0"/>
           </a:p>
@@ -7525,7 +7631,7 @@
                 <a:ea typeface="Calibri" pitchFamily="34" charset="-122"/>
                 <a:cs typeface="Calibri" pitchFamily="34" charset="-120"/>
               </a:rPr>
-              <a:t>COOPÉRATION: LE MINISTRE DE LA SÉCURITÉ REÇOIT UNE DÉLÉGATION DE L’UICN</a:t>
+              <a:t>SÉCURITÉ NUMÉRIQUE AU BURKINA : LA BCLCC LANCE LA 2ᵉ SEMAINE NATIONALE DE LUTTE CONTRE LA CYBERCRIMINALITÉ</a:t>
             </a:r>
             <a:endParaRPr lang="en-US" sz="1300" dirty="0"/>
           </a:p>
@@ -7570,7 +7676,7 @@
                   </a:extLst>
                 </a:hlinkClick>
               </a:rPr>
-              <a:t>Wakat Sera</a:t>
+              <a:t>Faso7</a:t>
             </a:r>
             <a:pPr indent="0" marL="0">
               <a:spcAft>
@@ -7587,7 +7693,7 @@
                 <a:ea typeface="Calibri" pitchFamily="34" charset="-122"/>
                 <a:cs typeface="Calibri" pitchFamily="34" charset="-120"/>
               </a:rPr>
-              <a:t> — 24 octobre 2026, 12 h UTC</a:t>
+              <a:t> — 24 octobre 2026, 13 h UTC</a:t>
             </a:r>
             <a:endParaRPr lang="en-US" sz="1300" dirty="0"/>
           </a:p>
@@ -7611,7 +7717,7 @@
                 <a:ea typeface="Calibri" pitchFamily="34" charset="-122"/>
                 <a:cs typeface="Calibri" pitchFamily="34" charset="-120"/>
               </a:rPr>
-              <a:t>CONSTRUCTION AU BURKINA FASO : L’ORDRE DES INGÉNIEURS ALERTE SUR LES RISQUES LIÉS AUX FAUX PROFESSIONNELS</a:t>
+              <a:t>COOPÉRATION: LE MINISTRE DE LA SÉCURITÉ REÇOIT UNE DÉLÉGATION DE L’UICN</a:t>
             </a:r>
             <a:endParaRPr lang="en-US" sz="1300" dirty="0"/>
           </a:p>
@@ -7656,7 +7762,7 @@
                   </a:extLst>
                 </a:hlinkClick>
               </a:rPr>
-              <a:t>Faso7</a:t>
+              <a:t>Wakat Sera</a:t>
             </a:r>
             <a:pPr indent="0" marL="0">
               <a:spcAft>
@@ -7673,7 +7779,7 @@
                 <a:ea typeface="Calibri" pitchFamily="34" charset="-122"/>
                 <a:cs typeface="Calibri" pitchFamily="34" charset="-120"/>
               </a:rPr>
-              <a:t> — 23 octobre 2026, 14 h UTC</a:t>
+              <a:t> — 24 octobre 2026, 12 h UTC</a:t>
             </a:r>
             <a:endParaRPr lang="en-US" sz="1300" dirty="0"/>
           </a:p>
@@ -7697,7 +7803,7 @@
                 <a:ea typeface="Calibri" pitchFamily="34" charset="-122"/>
                 <a:cs typeface="Calibri" pitchFamily="34" charset="-120"/>
               </a:rPr>
-              <a:t>BURKINA FASO-TURQUIE : UNE OFFENSIVE DIPLOMATIQUE D’ENVERGURE POUR CONSOLIDER LA COOPÉRATION BILATÉRALE</a:t>
+              <a:t>CONSTRUCTION AU BURKINA FASO : L’ORDRE DES INGÉNIEURS ALERTE SUR LES RISQUES LIÉS AUX FAUX PROFESSIONNELS</a:t>
             </a:r>
             <a:endParaRPr lang="en-US" sz="1300" dirty="0"/>
           </a:p>
@@ -7742,7 +7848,7 @@
                   </a:extLst>
                 </a:hlinkClick>
               </a:rPr>
-              <a:t>Alwihda Info (Tchad)</a:t>
+              <a:t>Faso7</a:t>
             </a:r>
             <a:pPr indent="0" marL="0">
               <a:spcAft>
@@ -7759,7 +7865,7 @@
                 <a:ea typeface="Calibri" pitchFamily="34" charset="-122"/>
                 <a:cs typeface="Calibri" pitchFamily="34" charset="-120"/>
               </a:rPr>
-              <a:t> — 23 octobre 2026, 9 h UTC</a:t>
+              <a:t> — 23 octobre 2026, 14 h UTC</a:t>
             </a:r>
             <a:endParaRPr lang="en-US" sz="1300" dirty="0"/>
           </a:p>
@@ -7843,7 +7949,7 @@
                 <a:ea typeface="Calibri" pitchFamily="34" charset="-122"/>
                 <a:cs typeface="Calibri" pitchFamily="34" charset="-120"/>
               </a:rPr>
-              <a:t>|  27/10/26   |   15</a:t>
+              <a:t>|  28/10/26   |   15</a:t>
             </a:r>
             <a:endParaRPr lang="en-US" sz="1000" dirty="0"/>
           </a:p>
@@ -8091,7 +8197,7 @@
                 <a:ea typeface="Calibri" pitchFamily="34" charset="-122"/>
                 <a:cs typeface="Calibri" pitchFamily="34" charset="-120"/>
               </a:rPr>
-              <a:t>EXPANSION GÉOGRAPHIQUE DU TERRORISME SAHÉLIEN - IMPLICATIONS POUR LE GHANA</a:t>
+              <a:t>BURKINA FASO-TURQUIE : UNE OFFENSIVE DIPLOMATIQUE D’ENVERGURE POUR CONSOLIDER LA COOPÉRATION BILATÉRALE</a:t>
             </a:r>
             <a:endParaRPr lang="en-US" sz="1300" dirty="0"/>
           </a:p>
@@ -8136,7 +8242,7 @@
                   </a:extLst>
                 </a:hlinkClick>
               </a:rPr>
-              <a:t>AllAfrica (GH)</a:t>
+              <a:t>Alwihda Info (Tchad)</a:t>
             </a:r>
             <a:pPr indent="0" marL="0">
               <a:spcAft>
@@ -8153,24 +8259,7 @@
                 <a:ea typeface="Calibri" pitchFamily="34" charset="-122"/>
                 <a:cs typeface="Calibri" pitchFamily="34" charset="-120"/>
               </a:rPr>
-              <a:t> — 17 octobre 2026, 19 h UTC   ·   </a:t>
-            </a:r>
-            <a:pPr indent="0" marL="0">
-              <a:spcAft>
-                <a:spcPts val="200"/>
-              </a:spcAft>
-              <a:buNone/>
-            </a:pPr>
-            <a:r>
-              <a:rPr lang="en-US" sz="1300" b="1" dirty="0">
-                <a:solidFill>
-                  <a:srgbClr val="1F2937"/>
-                </a:solidFill>
-                <a:latin typeface="Calibri" pitchFamily="34" charset="0"/>
-                <a:ea typeface="Calibri" pitchFamily="34" charset="-122"/>
-                <a:cs typeface="Calibri" pitchFamily="34" charset="-120"/>
-              </a:rPr>
-              <a:t>Cotation : Probable</a:t>
+              <a:t> — 23 octobre 2026, 9 h UTC</a:t>
             </a:r>
             <a:endParaRPr lang="en-US" sz="1300" dirty="0"/>
           </a:p>
@@ -8194,7 +8283,7 @@
                 <a:ea typeface="Calibri" pitchFamily="34" charset="-122"/>
                 <a:cs typeface="Calibri" pitchFamily="34" charset="-120"/>
               </a:rPr>
-              <a:t>VIS D’APPEL À CANDIDATURES POUR LE RECRUTEMENT DE PERSONNEL À LA RADIO CONFÉDÉRALE DAANDÈ LIPTAKO</a:t>
+              <a:t>EXPANSION GÉOGRAPHIQUE DU TERRORISME SAHÉLIEN - IMPLICATIONS POUR LE GHANA</a:t>
             </a:r>
             <a:endParaRPr lang="en-US" sz="1300" dirty="0"/>
           </a:p>
@@ -8239,7 +8328,7 @@
                   </a:extLst>
                 </a:hlinkClick>
               </a:rPr>
-              <a:t>Le Sahel</a:t>
+              <a:t>AllAfrica (GH)</a:t>
             </a:r>
             <a:pPr indent="0" marL="0">
               <a:spcAft>
@@ -8256,7 +8345,7 @@
                 <a:ea typeface="Calibri" pitchFamily="34" charset="-122"/>
                 <a:cs typeface="Calibri" pitchFamily="34" charset="-120"/>
               </a:rPr>
-              <a:t> — 27 octobre 2026, 16 h UTC   ·   </a:t>
+              <a:t> — 17 octobre 2026, 19 h UTC   ·   </a:t>
             </a:r>
             <a:pPr indent="0" marL="0">
               <a:spcAft>
@@ -8273,7 +8362,7 @@
                 <a:ea typeface="Calibri" pitchFamily="34" charset="-122"/>
                 <a:cs typeface="Calibri" pitchFamily="34" charset="-120"/>
               </a:rPr>
-              <a:t>Cotation : Non confirmé</a:t>
+              <a:t>Cotation : Probable</a:t>
             </a:r>
             <a:endParaRPr lang="en-US" sz="1300" dirty="0"/>
           </a:p>
@@ -8297,7 +8386,7 @@
                 <a:ea typeface="Calibri" pitchFamily="34" charset="-122"/>
                 <a:cs typeface="Calibri" pitchFamily="34" charset="-120"/>
               </a:rPr>
-              <a:t>ROAMING UEMOA : 4 PAYS UNISSENT LEURS RÉSEAUX POUR ALLÉGER LA FACTURE DES USAGERS</a:t>
+              <a:t>VIS D’APPEL À CANDIDATURES POUR LE RECRUTEMENT DE PERSONNEL À LA RADIO CONFÉDÉRALE DAANDÈ LIPTAKO</a:t>
             </a:r>
             <a:endParaRPr lang="en-US" sz="1300" dirty="0"/>
           </a:p>
@@ -8342,7 +8431,7 @@
                   </a:extLst>
                 </a:hlinkClick>
               </a:rPr>
-              <a:t>Linfodrome</a:t>
+              <a:t>Le Sahel</a:t>
             </a:r>
             <a:pPr indent="0" marL="0">
               <a:spcAft>
@@ -8359,7 +8448,24 @@
                 <a:ea typeface="Calibri" pitchFamily="34" charset="-122"/>
                 <a:cs typeface="Calibri" pitchFamily="34" charset="-120"/>
               </a:rPr>
-              <a:t> — 27 octobre 2026, 11 h UTC</a:t>
+              <a:t> — 27 octobre 2026, 16 h UTC   ·   </a:t>
+            </a:r>
+            <a:pPr indent="0" marL="0">
+              <a:spcAft>
+                <a:spcPts val="200"/>
+              </a:spcAft>
+              <a:buNone/>
+            </a:pPr>
+            <a:r>
+              <a:rPr lang="en-US" sz="1300" b="1" dirty="0">
+                <a:solidFill>
+                  <a:srgbClr val="1F2937"/>
+                </a:solidFill>
+                <a:latin typeface="Calibri" pitchFamily="34" charset="0"/>
+                <a:ea typeface="Calibri" pitchFamily="34" charset="-122"/>
+                <a:cs typeface="Calibri" pitchFamily="34" charset="-120"/>
+              </a:rPr>
+              <a:t>Cotation : Non confirmé</a:t>
             </a:r>
             <a:endParaRPr lang="en-US" sz="1300" dirty="0"/>
           </a:p>
@@ -8383,7 +8489,7 @@
                 <a:ea typeface="Calibri" pitchFamily="34" charset="-122"/>
                 <a:cs typeface="Calibri" pitchFamily="34" charset="-120"/>
               </a:rPr>
-              <a:t>BURKINA FASO : RIMTALBA JEAN EMMANUEL OUÉDRAOGO ATTENDU AU SOMMET RUSSIE-AFRIQUE À MOSCOU</a:t>
+              <a:t>ROAMING UEMOA : 4 PAYS UNISSENT LEURS RÉSEAUX POUR ALLÉGER LA FACTURE DES USAGERS</a:t>
             </a:r>
             <a:endParaRPr lang="en-US" sz="1300" dirty="0"/>
           </a:p>
@@ -8428,7 +8534,7 @@
                   </a:extLst>
                 </a:hlinkClick>
               </a:rPr>
-              <a:t>Malijet</a:t>
+              <a:t>Linfodrome</a:t>
             </a:r>
             <a:pPr indent="0" marL="0">
               <a:spcAft>
@@ -8445,7 +8551,7 @@
                 <a:ea typeface="Calibri" pitchFamily="34" charset="-122"/>
                 <a:cs typeface="Calibri" pitchFamily="34" charset="-120"/>
               </a:rPr>
-              <a:t> — 26 octobre 2026, 23 h UTC</a:t>
+              <a:t> — 27 octobre 2026, 11 h UTC</a:t>
             </a:r>
             <a:endParaRPr lang="en-US" sz="1300" dirty="0"/>
           </a:p>
@@ -8529,7 +8635,7 @@
                 <a:ea typeface="Calibri" pitchFamily="34" charset="-122"/>
                 <a:cs typeface="Calibri" pitchFamily="34" charset="-120"/>
               </a:rPr>
-              <a:t>|  27/10/26   |   16</a:t>
+              <a:t>|  28/10/26   |   16</a:t>
             </a:r>
             <a:endParaRPr lang="en-US" sz="1000" dirty="0"/>
           </a:p>
@@ -8795,7 +8901,7 @@
                 <a:ea typeface="Calibri" pitchFamily="34" charset="-122"/>
                 <a:cs typeface="Calibri" pitchFamily="34" charset="-120"/>
               </a:rPr>
-              <a:t>Indice de confiance : faible (incident vérifié le plus récent : 121 jours ; aucun signal du jour)</a:t>
+              <a:t>Indice de confiance : moyenne (incident vérifié le plus récent : 121 jours ; 4 signaux du jour)</a:t>
             </a:r>
             <a:endParaRPr lang="en-US" sz="1100" dirty="0"/>
           </a:p>
@@ -8849,7 +8955,7 @@
         <p:spPr>
           <a:xfrm>
             <a:off x="640080" y="2029968"/>
-            <a:ext cx="6812280" cy="3867912"/>
+            <a:ext cx="10972800" cy="3867912"/>
           </a:xfrm>
           <a:prstGeom prst="rect">
             <a:avLst/>
@@ -9072,81 +9178,9 @@
           </a:p>
         </p:txBody>
       </p:sp>
-      <p:pic>
-        <p:nvPicPr>
-          <p:cNvPr id="12" name="Image 0" descr="preencoded.png">
-            <a:hlinkClick r:id="rId3" tooltip=""/>
-          </p:cNvPr>
-          <p:cNvPicPr>
-            <a:picLocks noChangeAspect="1"/>
-          </p:cNvPicPr>
-          <p:nvPr/>
-        </p:nvPicPr>
-        <p:blipFill>
-          <a:blip r:embed="rId2"/>
-          <a:stretch>
-            <a:fillRect/>
-          </a:stretch>
-        </p:blipFill>
-        <p:spPr>
-          <a:xfrm>
-            <a:off x="7635240" y="2075688"/>
-            <a:ext cx="4114800" cy="3465433"/>
-          </a:xfrm>
-          <a:prstGeom prst="rect">
-            <a:avLst/>
-          </a:prstGeom>
-        </p:spPr>
-      </p:pic>
-      <p:sp>
-        <p:nvSpPr>
-          <p:cNvPr id="13" name="Text 10"/>
-          <p:cNvSpPr/>
-          <p:nvPr/>
-        </p:nvSpPr>
-        <p:spPr>
-          <a:xfrm>
-            <a:off x="7635240" y="5577697"/>
-            <a:ext cx="4114800" cy="256032"/>
-          </a:xfrm>
-          <a:prstGeom prst="rect">
-            <a:avLst/>
-          </a:prstGeom>
-          <a:noFill/>
-          <a:ln/>
-        </p:spPr>
-        <p:txBody>
-          <a:bodyPr wrap="square" rtlCol="0" anchor="ctr"/>
-          <a:lstStyle/>
-          <a:p>
-            <a:pPr algn="r" indent="0" marL="0">
-              <a:buNone/>
-            </a:pPr>
-            <a:r>
-              <a:rPr lang="en-US" sz="900" u="sng" dirty="0">
-                <a:solidFill>
-                  <a:srgbClr val="1F6B5E"/>
-                </a:solidFill>
-                <a:latin typeface="Calibri" pitchFamily="34" charset="0"/>
-                <a:ea typeface="Calibri" pitchFamily="34" charset="-122"/>
-                <a:cs typeface="Calibri" pitchFamily="34" charset="-120"/>
-                <a:hlinkClick r:id="rId4" invalidUrl="" action="" tgtFrame="" tooltip="" history="1" highlightClick="0" endSnd="0">
-                  <a:extLst>
-                    <a:ext uri="{A12FA001-AC4F-418D-AE19-62706E023703}">
-                      <ahyp:hlinkClr xmlns:ahyp="http://schemas.microsoft.com/office/drawing/2018/hyperlinkcolor" val="tx"/>
-                    </a:ext>
-                  </a:extLst>
-                </a:hlinkClick>
-              </a:rPr>
-              <a:t>Photo : © mali24.info</a:t>
-            </a:r>
-            <a:endParaRPr lang="en-US" sz="900" dirty="0"/>
-          </a:p>
-        </p:txBody>
-      </p:sp>
-      <p:sp>
-        <p:nvSpPr>
-          <p:cNvPr id="14" name="Text 11"/>
+      <p:sp>
+        <p:nvSpPr>
+          <p:cNvPr id="12" name="Text 10"/>
           <p:cNvSpPr/>
           <p:nvPr/>
         </p:nvSpPr>
@@ -9191,7 +9225,7 @@
       </p:sp>
       <p:sp>
         <p:nvSpPr>
-          <p:cNvPr id="15" name="Text 12"/>
+          <p:cNvPr id="13" name="Text 11"/>
           <p:cNvSpPr/>
           <p:nvPr/>
         </p:nvSpPr>
@@ -9222,7 +9256,7 @@
                 <a:ea typeface="Calibri" pitchFamily="34" charset="-122"/>
                 <a:cs typeface="Calibri" pitchFamily="34" charset="-120"/>
               </a:rPr>
-              <a:t>|  27/10/26   |   17</a:t>
+              <a:t>|  28/10/26   |   17</a:t>
             </a:r>
             <a:endParaRPr lang="en-US" sz="1000" dirty="0"/>
           </a:p>
@@ -10019,7 +10053,7 @@
                 <a:ea typeface="Calibri" pitchFamily="34" charset="-122"/>
                 <a:cs typeface="Calibri" pitchFamily="34" charset="-120"/>
               </a:rPr>
-              <a:t>|  27/10/26   |   18</a:t>
+              <a:t>|  28/10/26   |   18</a:t>
             </a:r>
             <a:endParaRPr lang="en-US" sz="1000" dirty="0"/>
           </a:p>
@@ -10730,7 +10764,7 @@
                 <a:ea typeface="Calibri" pitchFamily="34" charset="-122"/>
                 <a:cs typeface="Calibri" pitchFamily="34" charset="-120"/>
               </a:rPr>
-              <a:t>|  27/10/26   |   19</a:t>
+              <a:t>|  28/10/26   |   19</a:t>
             </a:r>
             <a:endParaRPr lang="en-US" sz="1000" dirty="0"/>
           </a:p>
@@ -11571,7 +11605,7 @@
                 <a:ea typeface="Calibri" pitchFamily="34" charset="-122"/>
                 <a:cs typeface="Calibri" pitchFamily="34" charset="-120"/>
               </a:rPr>
-              <a:t>TCHAD-NIGER : UNE NOUVELLE ESCALADE ENTRE MAHAMAT IDRISS DÉBY ET ABDOURAHAMANE TIANI</a:t>
+              <a:t>FRAPPE DE DRONE À AGADEZ : LE NIGER CONVOQUE L’AMBASSADEUR DU TCHAD ET ANNONCE DE…</a:t>
             </a:r>
             <a:endParaRPr lang="en-US" sz="900" dirty="0"/>
           </a:p>
@@ -11615,7 +11649,7 @@
                 <a:ea typeface="Calibri" pitchFamily="34" charset="-122"/>
                 <a:cs typeface="Calibri" pitchFamily="34" charset="-120"/>
               </a:rPr>
-              <a:t>SEVEN SHOT DEAD BY GUNMEN AT CHURCH FUNERAL IN JORDAN, OFFICIALS SAY</a:t>
+              <a:t>WOMAN KILLED BY TEMA-AFIENYA TRAIN AS RESIDENTS DEMAND FOOTBRIDGE</a:t>
             </a:r>
             <a:endParaRPr lang="en-US" sz="900" dirty="0"/>
           </a:p>
@@ -11791,7 +11825,7 @@
                 <a:ea typeface="Calibri" pitchFamily="34" charset="-122"/>
                 <a:cs typeface="Calibri" pitchFamily="34" charset="-120"/>
               </a:rPr>
-              <a:t>(EN) LIBERIA: DOLPHIN KILLED, BUTCHERED BEFORE NAFAA RESCUE TEAM ARRIVED</a:t>
+              <a:t>LIBÉRIA : UN DAUPHIN TUÉ ET MASSACRÉ AVANT L'ARRIVÉE DE L'ÉQUIPE DE SECOURS DE LA…</a:t>
             </a:r>
             <a:endParaRPr lang="en-US" sz="900" dirty="0"/>
           </a:p>
@@ -11835,7 +11869,7 @@
                 <a:ea typeface="Calibri" pitchFamily="34" charset="-122"/>
                 <a:cs typeface="Calibri" pitchFamily="34" charset="-120"/>
               </a:rPr>
-              <a:t>IMMEUBLE EFFONDRÉ À THIÈS : UN MORT ET DEUX BLESSÉS, SELON LE BILAN PROVISOIRE</a:t>
+              <a:t>TOUBA : UN DÉBAT SUR LES MOTEURS DE JAKARTA SE TERMINE PAR LA MORT DE BAYE M. DIOP</a:t>
             </a:r>
             <a:endParaRPr lang="en-US" sz="900" dirty="0"/>
           </a:p>
@@ -11919,7 +11953,7 @@
                 <a:ea typeface="Calibri" pitchFamily="34" charset="-122"/>
                 <a:cs typeface="Calibri" pitchFamily="34" charset="-120"/>
               </a:rPr>
-              <a:t>|  27/10/26   |   2</a:t>
+              <a:t>|  28/10/26   |   2</a:t>
             </a:r>
             <a:endParaRPr lang="en-US" sz="1000" dirty="0"/>
           </a:p>
@@ -12185,7 +12219,7 @@
                 <a:ea typeface="Calibri" pitchFamily="34" charset="-122"/>
                 <a:cs typeface="Calibri" pitchFamily="34" charset="-120"/>
               </a:rPr>
-              <a:t>Indice de confiance : moyenne (incident vérifié le plus récent : 118 jours ; 3 signaux du jour)</a:t>
+              <a:t>Indice de confiance : faible (incident vérifié le plus récent : 119 jours ; aucun signal du jour)</a:t>
             </a:r>
             <a:endParaRPr lang="en-US" sz="1100" dirty="0"/>
           </a:p>
@@ -12224,7 +12258,7 @@
                 <a:ea typeface="Arial Narrow" pitchFamily="34" charset="-122"/>
                 <a:cs typeface="Arial Narrow" pitchFamily="34" charset="-120"/>
               </a:rPr>
-              <a:t>Tchad-Niger : une nouvelle escalade entre Mahamat Idriss Déby et Abdourahamane Tiani</a:t>
+              <a:t>Frappe de drone à Agadez : le Niger convoque l’ambassadeur du Tchad et annonce des recours internationaux</a:t>
             </a:r>
             <a:endParaRPr lang="en-US" sz="2200" dirty="0"/>
           </a:p>
@@ -12261,7 +12295,7 @@
               <a:buNone/>
             </a:pPr>
             <a:r>
-              <a:rPr lang="en-US" sz="1500" b="1" dirty="0">
+              <a:rPr lang="en-US" sz="1200" b="1" dirty="0">
                 <a:solidFill>
                   <a:srgbClr val="1F6B5E"/>
                 </a:solidFill>
@@ -12271,7 +12305,7 @@
               </a:rPr>
               <a:t>Contexte</a:t>
             </a:r>
-            <a:endParaRPr lang="en-US" sz="1400" dirty="0"/>
+            <a:endParaRPr lang="en-US" sz="1100" dirty="0"/>
           </a:p>
           <a:p>
             <a:pPr indent="0" marL="0">
@@ -12281,17 +12315,17 @@
               <a:buNone/>
             </a:pPr>
             <a:r>
-              <a:rPr lang="en-US" sz="1400" dirty="0">
-                <a:solidFill>
-                  <a:srgbClr val="1F2937"/>
-                </a:solidFill>
-                <a:latin typeface="Calibri" pitchFamily="34" charset="0"/>
-                <a:ea typeface="Calibri" pitchFamily="34" charset="-122"/>
-                <a:cs typeface="Calibri" pitchFamily="34" charset="-120"/>
-              </a:rPr>
-              <a:t>Fait rapporté le mardi 27 octobre 2026. Lieu : Niamey, Niger. Actualité politique. Une seule source à ce stade (Jeune Afrique) : à confirmer par un second média.</a:t>
-            </a:r>
-            <a:endParaRPr lang="en-US" sz="1400" dirty="0"/>
+              <a:rPr lang="en-US" sz="1100" dirty="0">
+                <a:solidFill>
+                  <a:srgbClr val="1F2937"/>
+                </a:solidFill>
+                <a:latin typeface="Calibri" pitchFamily="34" charset="0"/>
+                <a:ea typeface="Calibri" pitchFamily="34" charset="-122"/>
+                <a:cs typeface="Calibri" pitchFamily="34" charset="-120"/>
+              </a:rPr>
+              <a:t>Fait rapporté le mercredi 28 octobre 2026. Lieu : Niamey, Niger. Actualité politique. Repris par 8 médias distincts (Maliactu, RFI Afrique, Malijet, ANP — Agence Nigérienne Presse, Journal du Tchad, Tchadinfos, Africanews — Chaine panafricaine, Africanews) : le fait est recoupé.</a:t>
+            </a:r>
+            <a:endParaRPr lang="en-US" sz="1100" dirty="0"/>
           </a:p>
           <a:p>
             <a:pPr indent="0" marL="0">
@@ -12304,7 +12338,7 @@
               <a:buNone/>
             </a:pPr>
             <a:r>
-              <a:rPr lang="en-US" sz="1500" b="1" dirty="0">
+              <a:rPr lang="en-US" sz="1200" b="1" dirty="0">
                 <a:solidFill>
                   <a:srgbClr val="1F6B5E"/>
                 </a:solidFill>
@@ -12314,7 +12348,7 @@
               </a:rPr>
               <a:t>Ce que rapportent les sources</a:t>
             </a:r>
-            <a:endParaRPr lang="en-US" sz="1400" dirty="0"/>
+            <a:endParaRPr lang="en-US" sz="1100" dirty="0"/>
           </a:p>
           <a:p>
             <a:pPr indent="0" marL="0">
@@ -12324,15 +12358,15 @@
               <a:buNone/>
             </a:pPr>
             <a:r>
-              <a:rPr lang="en-US" sz="1400" b="1" dirty="0">
-                <a:solidFill>
-                  <a:srgbClr val="1F2937"/>
-                </a:solidFill>
-                <a:latin typeface="Calibri" pitchFamily="34" charset="0"/>
-                <a:ea typeface="Calibri" pitchFamily="34" charset="-122"/>
-                <a:cs typeface="Calibri" pitchFamily="34" charset="-120"/>
-              </a:rPr>
-              <a:t>Jeune Afrique : </a:t>
+              <a:rPr lang="en-US" sz="1100" b="1" dirty="0">
+                <a:solidFill>
+                  <a:srgbClr val="1F2937"/>
+                </a:solidFill>
+                <a:latin typeface="Calibri" pitchFamily="34" charset="0"/>
+                <a:ea typeface="Calibri" pitchFamily="34" charset="-122"/>
+                <a:cs typeface="Calibri" pitchFamily="34" charset="-120"/>
+              </a:rPr>
+              <a:t>Maliactu : </a:t>
             </a:r>
             <a:pPr indent="0" marL="0">
               <a:spcAft>
@@ -12341,17 +12375,54 @@
               <a:buNone/>
             </a:pPr>
             <a:r>
-              <a:rPr lang="en-US" sz="1400" i="1" dirty="0">
-                <a:solidFill>
-                  <a:srgbClr val="1F2937"/>
-                </a:solidFill>
-                <a:latin typeface="Calibri" pitchFamily="34" charset="0"/>
-                <a:ea typeface="Calibri" pitchFamily="34" charset="-122"/>
-                <a:cs typeface="Calibri" pitchFamily="34" charset="-120"/>
-              </a:rPr>
-              <a:t>« Niamey accuse N’Djamena d’avoir lancé une frappe de drone sur son territoire, avec le soutien de la France. Une charge qui ravive la méfiance entre les deux voisins. »</a:t>
-            </a:r>
-            <a:endParaRPr lang="en-US" sz="1400" dirty="0"/>
+              <a:rPr lang="en-US" sz="1100" i="1" dirty="0">
+                <a:solidFill>
+                  <a:srgbClr val="1F2937"/>
+                </a:solidFill>
+                <a:latin typeface="Calibri" pitchFamily="34" charset="0"/>
+                <a:ea typeface="Calibri" pitchFamily="34" charset="-122"/>
+                <a:cs typeface="Calibri" pitchFamily="34" charset="-120"/>
+              </a:rPr>
+              <a:t>« Mali Actu - maliactu.net - Mali Actualités, Les Actus et Informations sur le Mali Mali Actu Frappe de drone à Agadez : le Niger convoque l’ambassadeur du Tchad et annonce des recours internationaux Les relations entre Niamey et N’Djamena connaissent une nouvelle tension après une frappe de drone signalée le 24 octobre dans la région nigérienne d’Agadez. »</a:t>
+            </a:r>
+            <a:endParaRPr lang="en-US" sz="1100" dirty="0"/>
+          </a:p>
+          <a:p>
+            <a:pPr indent="0" marL="0">
+              <a:spcAft>
+                <a:spcPts val="300"/>
+              </a:spcAft>
+              <a:buNone/>
+            </a:pPr>
+            <a:r>
+              <a:rPr lang="en-US" sz="1100" b="1" dirty="0">
+                <a:solidFill>
+                  <a:srgbClr val="1F2937"/>
+                </a:solidFill>
+                <a:latin typeface="Calibri" pitchFamily="34" charset="0"/>
+                <a:ea typeface="Calibri" pitchFamily="34" charset="-122"/>
+                <a:cs typeface="Calibri" pitchFamily="34" charset="-120"/>
+              </a:rPr>
+              <a:t>RFI Afrique : </a:t>
+            </a:r>
+            <a:pPr indent="0" marL="0">
+              <a:spcAft>
+                <a:spcPts val="300"/>
+              </a:spcAft>
+              <a:buNone/>
+            </a:pPr>
+            <a:r>
+              <a:rPr lang="en-US" sz="1100" i="1" dirty="0">
+                <a:solidFill>
+                  <a:srgbClr val="1F2937"/>
+                </a:solidFill>
+                <a:latin typeface="Calibri" pitchFamily="34" charset="0"/>
+                <a:ea typeface="Calibri" pitchFamily="34" charset="-122"/>
+                <a:cs typeface="Calibri" pitchFamily="34" charset="-120"/>
+              </a:rPr>
+              <a:t>« Le Niger accuse son voisin d’avoir mené « une frappe aérienne par drone menée depuis le territoire du Tchad » et à laquelle aurait, selon lui, participé la France. L’incident aurait eu lieu le 24 octobre à 1 heure du matin à l’est d’Emi Lulu, non loin des frontières algérienne et libyenne. »</a:t>
+            </a:r>
+            <a:endParaRPr lang="en-US" sz="1100" dirty="0"/>
           </a:p>
           <a:p>
             <a:pPr indent="0" marL="0">
@@ -12364,7 +12435,7 @@
               <a:buNone/>
             </a:pPr>
             <a:r>
-              <a:rPr lang="en-US" sz="1500" b="1" dirty="0">
+              <a:rPr lang="en-US" sz="1200" b="1" dirty="0">
                 <a:solidFill>
                   <a:srgbClr val="1F6B5E"/>
                 </a:solidFill>
@@ -12374,7 +12445,7 @@
               </a:rPr>
               <a:t>Enjeux sûreté</a:t>
             </a:r>
-            <a:endParaRPr lang="en-US" sz="1400" dirty="0"/>
+            <a:endParaRPr lang="en-US" sz="1100" dirty="0"/>
           </a:p>
           <a:p>
             <a:pPr indent="0" marL="0">
@@ -12384,7 +12455,7 @@
               <a:buNone/>
             </a:pPr>
             <a:r>
-              <a:rPr lang="en-US" sz="1400" dirty="0">
+              <a:rPr lang="en-US" sz="1100" dirty="0">
                 <a:solidFill>
                   <a:srgbClr val="1F2937"/>
                 </a:solidFill>
@@ -12394,7 +12465,7 @@
               </a:rPr>
               <a:t>Menace armée sur les axes et localités de la zone : réévaluer les déplacements terrestres (horaires, convois, itinéraires de repli) et les consignes des sites et des personnels présents à proximité.</a:t>
             </a:r>
-            <a:endParaRPr lang="en-US" sz="1400" dirty="0"/>
+            <a:endParaRPr lang="en-US" sz="1100" dirty="0"/>
           </a:p>
           <a:p>
             <a:pPr indent="0" marL="0">
@@ -12407,15 +12478,15 @@
               <a:buNone/>
             </a:pPr>
             <a:r>
-              <a:rPr lang="en-US" sz="1400" b="1" dirty="0">
-                <a:solidFill>
-                  <a:srgbClr val="1F2937"/>
-                </a:solidFill>
-                <a:latin typeface="Calibri" pitchFamily="34" charset="0"/>
-                <a:ea typeface="Calibri" pitchFamily="34" charset="-122"/>
-                <a:cs typeface="Calibri" pitchFamily="34" charset="-120"/>
-              </a:rPr>
-              <a:t>Source : </a:t>
+              <a:rPr lang="en-US" sz="1100" b="1" dirty="0">
+                <a:solidFill>
+                  <a:srgbClr val="1F2937"/>
+                </a:solidFill>
+                <a:latin typeface="Calibri" pitchFamily="34" charset="0"/>
+                <a:ea typeface="Calibri" pitchFamily="34" charset="-122"/>
+                <a:cs typeface="Calibri" pitchFamily="34" charset="-120"/>
+              </a:rPr>
+              <a:t>Sources : </a:t>
             </a:r>
             <a:pPr indent="0" marL="0">
               <a:spcAft>
@@ -12424,7 +12495,7 @@
               <a:buNone/>
             </a:pPr>
             <a:r>
-              <a:rPr lang="en-US" sz="1400" u="sng" dirty="0">
+              <a:rPr lang="en-US" sz="1100" u="sng" dirty="0">
                 <a:solidFill>
                   <a:srgbClr val="1F6B5E"/>
                 </a:solidFill>
@@ -12439,7 +12510,7 @@
                   </a:extLst>
                 </a:hlinkClick>
               </a:rPr>
-              <a:t>Jeune Afrique</a:t>
+              <a:t>Maliactu</a:t>
             </a:r>
             <a:pPr indent="0" marL="0">
               <a:spcAft>
@@ -12448,72 +12519,55 @@
               <a:buNone/>
             </a:pPr>
             <a:r>
-              <a:rPr lang="en-US" sz="1400" b="1" dirty="0">
-                <a:solidFill>
-                  <a:srgbClr val="1F2937"/>
-                </a:solidFill>
-                <a:latin typeface="Calibri" pitchFamily="34" charset="0"/>
-                <a:ea typeface="Calibri" pitchFamily="34" charset="-122"/>
-                <a:cs typeface="Calibri" pitchFamily="34" charset="-120"/>
-              </a:rPr>
-              <a:t> — 27 octobre 2026, 16 h UTC   ·   Cotation : Probable</a:t>
-            </a:r>
-            <a:endParaRPr lang="en-US" sz="1400" dirty="0"/>
-          </a:p>
-        </p:txBody>
-      </p:sp>
-      <p:pic>
-        <p:nvPicPr>
-          <p:cNvPr id="12" name="Image 0" descr="preencoded.png">
-            <a:hlinkClick r:id="rId3" tooltip=""/>
-          </p:cNvPr>
-          <p:cNvPicPr>
-            <a:picLocks noChangeAspect="1"/>
-          </p:cNvPicPr>
-          <p:nvPr/>
-        </p:nvPicPr>
-        <p:blipFill>
-          <a:blip r:embed="rId2"/>
-          <a:stretch>
-            <a:fillRect/>
-          </a:stretch>
-        </p:blipFill>
-        <p:spPr>
-          <a:xfrm>
-            <a:off x="7635240" y="2075688"/>
-            <a:ext cx="4114800" cy="2314575"/>
-          </a:xfrm>
-          <a:prstGeom prst="rect">
-            <a:avLst/>
-          </a:prstGeom>
-        </p:spPr>
-      </p:pic>
-      <p:sp>
-        <p:nvSpPr>
-          <p:cNvPr id="13" name="Text 10"/>
-          <p:cNvSpPr/>
-          <p:nvPr/>
-        </p:nvSpPr>
-        <p:spPr>
-          <a:xfrm>
-            <a:off x="7635240" y="4426839"/>
-            <a:ext cx="4114800" cy="256032"/>
-          </a:xfrm>
-          <a:prstGeom prst="rect">
-            <a:avLst/>
-          </a:prstGeom>
-          <a:noFill/>
-          <a:ln/>
-        </p:spPr>
-        <p:txBody>
-          <a:bodyPr wrap="square" rtlCol="0" anchor="ctr"/>
-          <a:lstStyle/>
-          <a:p>
-            <a:pPr algn="r" indent="0" marL="0">
-              <a:buNone/>
-            </a:pPr>
-            <a:r>
-              <a:rPr lang="en-US" sz="900" u="sng" dirty="0">
+              <a:rPr lang="en-US" sz="1100" u="sng" dirty="0">
+                <a:solidFill>
+                  <a:srgbClr val="1F6B5E"/>
+                </a:solidFill>
+                <a:latin typeface="Calibri" pitchFamily="34" charset="0"/>
+                <a:ea typeface="Calibri" pitchFamily="34" charset="-122"/>
+                <a:cs typeface="Calibri" pitchFamily="34" charset="-120"/>
+                <a:hlinkClick r:id="rId2" invalidUrl="" action="" tgtFrame="" tooltip="" history="1" highlightClick="0" endSnd="0">
+                  <a:extLst>
+                    <a:ext uri="{A12FA001-AC4F-418D-AE19-62706E023703}">
+                      <ahyp:hlinkClr xmlns:ahyp="http://schemas.microsoft.com/office/drawing/2018/hyperlinkcolor" val="tx"/>
+                    </a:ext>
+                  </a:extLst>
+                </a:hlinkClick>
+              </a:rPr>
+              <a:t> · RFI Afrique</a:t>
+            </a:r>
+            <a:pPr indent="0" marL="0">
+              <a:spcAft>
+                <a:spcPts val="300"/>
+              </a:spcAft>
+              <a:buNone/>
+            </a:pPr>
+            <a:r>
+              <a:rPr lang="en-US" sz="1100" u="sng" dirty="0">
+                <a:solidFill>
+                  <a:srgbClr val="1F6B5E"/>
+                </a:solidFill>
+                <a:latin typeface="Calibri" pitchFamily="34" charset="0"/>
+                <a:ea typeface="Calibri" pitchFamily="34" charset="-122"/>
+                <a:cs typeface="Calibri" pitchFamily="34" charset="-120"/>
+                <a:hlinkClick r:id="rId3" invalidUrl="" action="" tgtFrame="" tooltip="" history="1" highlightClick="0" endSnd="0">
+                  <a:extLst>
+                    <a:ext uri="{A12FA001-AC4F-418D-AE19-62706E023703}">
+                      <ahyp:hlinkClr xmlns:ahyp="http://schemas.microsoft.com/office/drawing/2018/hyperlinkcolor" val="tx"/>
+                    </a:ext>
+                  </a:extLst>
+                </a:hlinkClick>
+              </a:rPr>
+              <a:t> · Malijet</a:t>
+            </a:r>
+            <a:pPr indent="0" marL="0">
+              <a:spcAft>
+                <a:spcPts val="300"/>
+              </a:spcAft>
+              <a:buNone/>
+            </a:pPr>
+            <a:r>
+              <a:rPr lang="en-US" sz="1100" u="sng" dirty="0">
                 <a:solidFill>
                   <a:srgbClr val="1F6B5E"/>
                 </a:solidFill>
@@ -12528,7 +12582,113 @@
                   </a:extLst>
                 </a:hlinkClick>
               </a:rPr>
-              <a:t>Photo : © jeuneafrique.com</a:t>
+              <a:t> · ANP — Agence Nigérienne Presse</a:t>
+            </a:r>
+            <a:pPr indent="0" marL="0">
+              <a:spcAft>
+                <a:spcPts val="300"/>
+              </a:spcAft>
+              <a:buNone/>
+            </a:pPr>
+            <a:r>
+              <a:rPr lang="en-US" sz="1100" dirty="0">
+                <a:solidFill>
+                  <a:srgbClr val="1F2937"/>
+                </a:solidFill>
+                <a:latin typeface="Calibri" pitchFamily="34" charset="0"/>
+                <a:ea typeface="Calibri" pitchFamily="34" charset="-122"/>
+                <a:cs typeface="Calibri" pitchFamily="34" charset="-120"/>
+              </a:rPr>
+              <a:t> · Journal du Tchad · Tchadinfos · Africanews — Chaine panafricaine · Africanews</a:t>
+            </a:r>
+            <a:pPr indent="0" marL="0">
+              <a:spcAft>
+                <a:spcPts val="300"/>
+              </a:spcAft>
+              <a:buNone/>
+            </a:pPr>
+            <a:r>
+              <a:rPr lang="en-US" sz="1100" b="1" dirty="0">
+                <a:solidFill>
+                  <a:srgbClr val="1F2937"/>
+                </a:solidFill>
+                <a:latin typeface="Calibri" pitchFamily="34" charset="0"/>
+                <a:ea typeface="Calibri" pitchFamily="34" charset="-122"/>
+                <a:cs typeface="Calibri" pitchFamily="34" charset="-120"/>
+              </a:rPr>
+              <a:t> — 28 octobre 2026, 7 h UTC   ·   Cotation : Confirmé</a:t>
+            </a:r>
+            <a:endParaRPr lang="en-US" sz="1100" dirty="0"/>
+          </a:p>
+        </p:txBody>
+      </p:sp>
+      <p:pic>
+        <p:nvPicPr>
+          <p:cNvPr id="12" name="Image 0" descr="preencoded.png">
+            <a:hlinkClick r:id="rId6" tooltip=""/>
+          </p:cNvPr>
+          <p:cNvPicPr>
+            <a:picLocks noChangeAspect="1"/>
+          </p:cNvPicPr>
+          <p:nvPr/>
+        </p:nvPicPr>
+        <p:blipFill>
+          <a:blip r:embed="rId5"/>
+          <a:stretch>
+            <a:fillRect/>
+          </a:stretch>
+        </p:blipFill>
+        <p:spPr>
+          <a:xfrm>
+            <a:off x="7635240" y="2075688"/>
+            <a:ext cx="4114800" cy="2314575"/>
+          </a:xfrm>
+          <a:prstGeom prst="rect">
+            <a:avLst/>
+          </a:prstGeom>
+        </p:spPr>
+      </p:pic>
+      <p:sp>
+        <p:nvSpPr>
+          <p:cNvPr id="13" name="Text 10"/>
+          <p:cNvSpPr/>
+          <p:nvPr/>
+        </p:nvSpPr>
+        <p:spPr>
+          <a:xfrm>
+            <a:off x="7635240" y="4426839"/>
+            <a:ext cx="4114800" cy="256032"/>
+          </a:xfrm>
+          <a:prstGeom prst="rect">
+            <a:avLst/>
+          </a:prstGeom>
+          <a:noFill/>
+          <a:ln/>
+        </p:spPr>
+        <p:txBody>
+          <a:bodyPr wrap="square" rtlCol="0" anchor="ctr"/>
+          <a:lstStyle/>
+          <a:p>
+            <a:pPr algn="r" indent="0" marL="0">
+              <a:buNone/>
+            </a:pPr>
+            <a:r>
+              <a:rPr lang="en-US" sz="900" u="sng" dirty="0">
+                <a:solidFill>
+                  <a:srgbClr val="1F6B5E"/>
+                </a:solidFill>
+                <a:latin typeface="Calibri" pitchFamily="34" charset="0"/>
+                <a:ea typeface="Calibri" pitchFamily="34" charset="-122"/>
+                <a:cs typeface="Calibri" pitchFamily="34" charset="-120"/>
+                <a:hlinkClick r:id="rId7" invalidUrl="" action="" tgtFrame="" tooltip="" history="1" highlightClick="0" endSnd="0">
+                  <a:extLst>
+                    <a:ext uri="{A12FA001-AC4F-418D-AE19-62706E023703}">
+                      <ahyp:hlinkClr xmlns:ahyp="http://schemas.microsoft.com/office/drawing/2018/hyperlinkcolor" val="tx"/>
+                    </a:ext>
+                  </a:extLst>
+                </a:hlinkClick>
+              </a:rPr>
+              <a:t>Photo : © maliactu.net</a:t>
             </a:r>
             <a:endParaRPr lang="en-US" sz="900" dirty="0"/>
           </a:p>
@@ -12612,7 +12772,7 @@
                 <a:ea typeface="Calibri" pitchFamily="34" charset="-122"/>
                 <a:cs typeface="Calibri" pitchFamily="34" charset="-120"/>
               </a:rPr>
-              <a:t>|  27/10/26   |   20</a:t>
+              <a:t>|  28/10/26   |   20</a:t>
             </a:r>
             <a:endParaRPr lang="en-US" sz="1000" dirty="0"/>
           </a:p>
@@ -12885,7 +13045,7 @@
                 <a:ea typeface="Calibri" pitchFamily="34" charset="-122"/>
                 <a:cs typeface="Calibri" pitchFamily="34" charset="-120"/>
               </a:rPr>
-              <a:t>FRAPPE DE DRONE AU NIGER : NIAMEY ACCUSE LE TCHAD, N’DJAMENA REJETTE LES ACCUSATIONS</a:t>
+              <a:t>NIGER GOVERNOR’S CONVOY CRASH KILLS FOUR STUDENTS, DRIVER</a:t>
             </a:r>
             <a:endParaRPr lang="en-US" sz="1300" dirty="0"/>
           </a:p>
@@ -12930,7 +13090,7 @@
                   </a:extLst>
                 </a:hlinkClick>
               </a:rPr>
-              <a:t>Journal du Tchad · Tchadinfos · ANP — Agence Nigérienne Presse</a:t>
+              <a:t>Premium Times · Vanguard</a:t>
             </a:r>
             <a:pPr indent="0" marL="0">
               <a:spcAft>
@@ -12947,7 +13107,7 @@
                 <a:ea typeface="Calibri" pitchFamily="34" charset="-122"/>
                 <a:cs typeface="Calibri" pitchFamily="34" charset="-120"/>
               </a:rPr>
-              <a:t> — 27 octobre 2026, 13 h UTC   ·   </a:t>
+              <a:t> — 28 octobre 2026, 6 h UTC   ·   </a:t>
             </a:r>
             <a:pPr indent="0" marL="0">
               <a:spcAft>
@@ -12988,7 +13148,7 @@
                 <a:ea typeface="Calibri" pitchFamily="34" charset="-122"/>
                 <a:cs typeface="Calibri" pitchFamily="34" charset="-120"/>
               </a:rPr>
-              <a:t>LE NIGER AFFIRME QU'UNE FRAPPE DE DRONE DU TCHAD A TUÉ DEUX CIVILS</a:t>
+              <a:t>TCHAD-NIGER : UNE NOUVELLE ESCALADE ENTRE MAHAMAT IDRISS DÉBY ET ABDOURAHAMANE TIANI</a:t>
             </a:r>
             <a:endParaRPr lang="en-US" sz="1300" dirty="0"/>
           </a:p>
@@ -13009,7 +13169,7 @@
                 <a:ea typeface="Calibri" pitchFamily="34" charset="-122"/>
                 <a:cs typeface="Calibri" pitchFamily="34" charset="-120"/>
               </a:rPr>
-              <a:t>Sources : </a:t>
+              <a:t>Source : </a:t>
             </a:r>
             <a:pPr indent="0" marL="0">
               <a:spcAft>
@@ -13033,7 +13193,7 @@
                   </a:extLst>
                 </a:hlinkClick>
               </a:rPr>
-              <a:t>Africanews — Chaine panafricaine · Africanews</a:t>
+              <a:t>Jeune Afrique</a:t>
             </a:r>
             <a:pPr indent="0" marL="0">
               <a:spcAft>
@@ -13050,7 +13210,7 @@
                 <a:ea typeface="Calibri" pitchFamily="34" charset="-122"/>
                 <a:cs typeface="Calibri" pitchFamily="34" charset="-120"/>
               </a:rPr>
-              <a:t> — 27 octobre 2026, 9 h UTC   ·   </a:t>
+              <a:t> — 27 octobre 2026, 16 h UTC   ·   </a:t>
             </a:r>
             <a:pPr indent="0" marL="0">
               <a:spcAft>
@@ -13067,7 +13227,7 @@
                 <a:ea typeface="Calibri" pitchFamily="34" charset="-122"/>
                 <a:cs typeface="Calibri" pitchFamily="34" charset="-120"/>
               </a:rPr>
-              <a:t>Cotation : Confirmé</a:t>
+              <a:t>Cotation : Probable</a:t>
             </a:r>
             <a:endParaRPr lang="en-US" sz="1300" dirty="0"/>
           </a:p>
@@ -13091,7 +13251,7 @@
                 <a:ea typeface="Calibri" pitchFamily="34" charset="-122"/>
                 <a:cs typeface="Calibri" pitchFamily="34" charset="-120"/>
               </a:rPr>
-              <a:t>LE NIGER DÉNONCE UNE ATTAQUE DE DRONE DU TCHAD AVEC «L’APPUI DE LA FRANCE»</a:t>
+              <a:t>LE PAYS DÉNONCE UNE ATTAQUE DE DRONE DU TCHAD AVEC «L'APPUI DE LA FRANCE»</a:t>
             </a:r>
             <a:endParaRPr lang="en-US" sz="1300" dirty="0"/>
           </a:p>
@@ -13112,7 +13272,7 @@
                 <a:ea typeface="Calibri" pitchFamily="34" charset="-122"/>
                 <a:cs typeface="Calibri" pitchFamily="34" charset="-120"/>
               </a:rPr>
-              <a:t>Source : </a:t>
+              <a:t>Sources : </a:t>
             </a:r>
             <a:pPr indent="0" marL="0">
               <a:spcAft>
@@ -13136,7 +13296,7 @@
                   </a:extLst>
                 </a:hlinkClick>
               </a:rPr>
-              <a:t>RFI Afrique</a:t>
+              <a:t>AllAfrica (NE) · RFI Afrique</a:t>
             </a:r>
             <a:pPr indent="0" marL="0">
               <a:spcAft>
@@ -13153,7 +13313,7 @@
                 <a:ea typeface="Calibri" pitchFamily="34" charset="-122"/>
                 <a:cs typeface="Calibri" pitchFamily="34" charset="-120"/>
               </a:rPr>
-              <a:t> — 27 octobre 2026, 5 h UTC   ·   </a:t>
+              <a:t> — 27 octobre 2026, 9 h UTC   ·   </a:t>
             </a:r>
             <a:pPr indent="0" marL="0">
               <a:spcAft>
@@ -13443,7 +13603,7 @@
                 <a:ea typeface="Calibri" pitchFamily="34" charset="-122"/>
                 <a:cs typeface="Calibri" pitchFamily="34" charset="-120"/>
               </a:rPr>
-              <a:t>|  27/10/26   |   21</a:t>
+              <a:t>|  28/10/26   |   21</a:t>
             </a:r>
             <a:endParaRPr lang="en-US" sz="1000" dirty="0"/>
           </a:p>
@@ -13716,7 +13876,7 @@
                 <a:ea typeface="Calibri" pitchFamily="34" charset="-122"/>
                 <a:cs typeface="Calibri" pitchFamily="34" charset="-120"/>
               </a:rPr>
-              <a:t>4 STUDENTS, ONE LADY KILLED IN NIGER GOVERNOR’S CONVOY ROAD CRASH</a:t>
+              <a:t>POURQUOI N’DJAMÉNA SORT ENFIN DE SON SILENCE FACE À NIAMEY ?</a:t>
             </a:r>
             <a:endParaRPr lang="en-US" sz="1300" dirty="0"/>
           </a:p>
@@ -13761,7 +13921,7 @@
                   </a:extLst>
                 </a:hlinkClick>
               </a:rPr>
-              <a:t>Vanguard</a:t>
+              <a:t>Tchadinfos</a:t>
             </a:r>
             <a:pPr indent="0" marL="0">
               <a:spcAft>
@@ -13795,7 +13955,7 @@
                 <a:ea typeface="Calibri" pitchFamily="34" charset="-122"/>
                 <a:cs typeface="Calibri" pitchFamily="34" charset="-120"/>
               </a:rPr>
-              <a:t>Cotation : Probable</a:t>
+              <a:t>Cotation : Non confirmé</a:t>
             </a:r>
             <a:endParaRPr lang="en-US" sz="1300" dirty="0"/>
           </a:p>
@@ -13819,7 +13979,7 @@
                 <a:ea typeface="Calibri" pitchFamily="34" charset="-122"/>
                 <a:cs typeface="Calibri" pitchFamily="34" charset="-120"/>
               </a:rPr>
-              <a:t>POURQUOI N’DJAMÉNA SORT ENFIN DE SON SILENCE FACE À NIAMEY ?</a:t>
+              <a:t>AVIS À MANIFESTATION D’INTÉRÊT N°003/CA/TAFOUK TV/2026</a:t>
             </a:r>
             <a:endParaRPr lang="en-US" sz="1300" dirty="0"/>
           </a:p>
@@ -13864,7 +14024,7 @@
                   </a:extLst>
                 </a:hlinkClick>
               </a:rPr>
-              <a:t>Tchadinfos</a:t>
+              <a:t>Le Sahel</a:t>
             </a:r>
             <a:pPr indent="0" marL="0">
               <a:spcAft>
@@ -13881,7 +14041,7 @@
                 <a:ea typeface="Calibri" pitchFamily="34" charset="-122"/>
                 <a:cs typeface="Calibri" pitchFamily="34" charset="-120"/>
               </a:rPr>
-              <a:t> — 27 octobre 2026, 19 h UTC   ·   </a:t>
+              <a:t> — 27 octobre 2026, 14 h UTC   ·   </a:t>
             </a:r>
             <a:pPr indent="0" marL="0">
               <a:spcAft>
@@ -13922,7 +14082,7 @@
                 <a:ea typeface="Calibri" pitchFamily="34" charset="-122"/>
                 <a:cs typeface="Calibri" pitchFamily="34" charset="-120"/>
               </a:rPr>
-              <a:t>AVIS À MANIFESTATION D’INTÉRÊT N°003/CA/TAFOUK TV/2026</a:t>
+              <a:t>AGADEZ : LE GOUVERNEUR PRÉSIDE UNE RÉUNION ÉLARGIE DU CONSEIL RÉGIONAL DE SÉCURITÉ</a:t>
             </a:r>
             <a:endParaRPr lang="en-US" sz="1300" dirty="0"/>
           </a:p>
@@ -13967,7 +14127,7 @@
                   </a:extLst>
                 </a:hlinkClick>
               </a:rPr>
-              <a:t>Le Sahel</a:t>
+              <a:t>ANP — Agence Nigérienne Presse</a:t>
             </a:r>
             <a:pPr indent="0" marL="0">
               <a:spcAft>
@@ -13984,7 +14144,7 @@
                 <a:ea typeface="Calibri" pitchFamily="34" charset="-122"/>
                 <a:cs typeface="Calibri" pitchFamily="34" charset="-120"/>
               </a:rPr>
-              <a:t> — 27 octobre 2026, 14 h UTC   ·   </a:t>
+              <a:t> — 27 octobre 2026, 13 h UTC   ·   </a:t>
             </a:r>
             <a:pPr indent="0" marL="0">
               <a:spcAft>
@@ -14001,7 +14161,7 @@
                 <a:ea typeface="Calibri" pitchFamily="34" charset="-122"/>
                 <a:cs typeface="Calibri" pitchFamily="34" charset="-120"/>
               </a:rPr>
-              <a:t>Cotation : Non confirmé</a:t>
+              <a:t>Cotation : Probable</a:t>
             </a:r>
             <a:endParaRPr lang="en-US" sz="1300" dirty="0"/>
           </a:p>
@@ -14025,7 +14185,7 @@
                 <a:ea typeface="Calibri" pitchFamily="34" charset="-122"/>
                 <a:cs typeface="Calibri" pitchFamily="34" charset="-120"/>
               </a:rPr>
-              <a:t>AGADEZ : LE GOUVERNEUR PRÉSIDE UNE RÉUNION ÉLARGIE DU CONSEIL RÉGIONAL DE SÉCURITÉ</a:t>
+              <a:t>ALERTE – LA PRÉSIDENCE ANNONCE L’ENVOI D’UNITÉS DE L’ARMÉE NATIONALE AU NIGER</a:t>
             </a:r>
             <a:endParaRPr lang="en-US" sz="1300" dirty="0"/>
           </a:p>
@@ -14070,7 +14230,7 @@
                   </a:extLst>
                 </a:hlinkClick>
               </a:rPr>
-              <a:t>ANP — Agence Nigérienne Presse</a:t>
+              <a:t>tsa-algerie.com</a:t>
             </a:r>
             <a:pPr indent="0" marL="0">
               <a:spcAft>
@@ -14087,24 +14247,7 @@
                 <a:ea typeface="Calibri" pitchFamily="34" charset="-122"/>
                 <a:cs typeface="Calibri" pitchFamily="34" charset="-120"/>
               </a:rPr>
-              <a:t> — 27 octobre 2026, 13 h UTC   ·   </a:t>
-            </a:r>
-            <a:pPr indent="0" marL="0">
-              <a:spcAft>
-                <a:spcPts val="200"/>
-              </a:spcAft>
-              <a:buNone/>
-            </a:pPr>
-            <a:r>
-              <a:rPr lang="en-US" sz="1300" b="1" dirty="0">
-                <a:solidFill>
-                  <a:srgbClr val="1F2937"/>
-                </a:solidFill>
-                <a:latin typeface="Calibri" pitchFamily="34" charset="0"/>
-                <a:ea typeface="Calibri" pitchFamily="34" charset="-122"/>
-                <a:cs typeface="Calibri" pitchFamily="34" charset="-120"/>
-              </a:rPr>
-              <a:t>Cotation : Probable</a:t>
+              <a:t> — 26 octobre 2026, 15 h UTC</a:t>
             </a:r>
             <a:endParaRPr lang="en-US" sz="1300" dirty="0"/>
           </a:p>
@@ -14188,7 +14331,7 @@
                 <a:ea typeface="Calibri" pitchFamily="34" charset="-122"/>
                 <a:cs typeface="Calibri" pitchFamily="34" charset="-120"/>
               </a:rPr>
-              <a:t>|  27/10/26   |   22</a:t>
+              <a:t>|  28/10/26   |   22</a:t>
             </a:r>
             <a:endParaRPr lang="en-US" sz="1000" dirty="0"/>
           </a:p>
@@ -14454,7 +14597,7 @@
                 <a:ea typeface="Calibri" pitchFamily="34" charset="-122"/>
                 <a:cs typeface="Calibri" pitchFamily="34" charset="-120"/>
               </a:rPr>
-              <a:t>Indice de confiance : moyenne (incident vérifié le plus récent : 120 jours ; 2 signaux du jour)</a:t>
+              <a:t>Indice de confiance : faible (incident vérifié le plus récent : 121 jours ; aucun signal du jour)</a:t>
             </a:r>
             <a:endParaRPr lang="en-US" sz="1100" dirty="0"/>
           </a:p>
@@ -14493,7 +14636,7 @@
                 <a:ea typeface="Arial Narrow" pitchFamily="34" charset="-122"/>
                 <a:cs typeface="Arial Narrow" pitchFamily="34" charset="-120"/>
               </a:rPr>
-              <a:t>Seven shot dead by gunmen at church funeral in Jordan, officials say</a:t>
+              <a:t>Woman killed by Tema-Afienya train as residents demand footbridge</a:t>
             </a:r>
             <a:endParaRPr lang="en-US" sz="2200" dirty="0"/>
           </a:p>
@@ -14558,7 +14701,7 @@
                 <a:ea typeface="Calibri" pitchFamily="34" charset="-122"/>
                 <a:cs typeface="Calibri" pitchFamily="34" charset="-120"/>
               </a:rPr>
-              <a:t>Fait rapporté le vendredi 23 octobre 2026. Lieu : Ghana. Actualité sécuritaire. Une seule source à ce stade (JoyOnline) : à confirmer par un second média.</a:t>
+              <a:t>Fait rapporté le mercredi 28 octobre 2026. Lieu : Ghana. Actualité sécuritaire. Une seule source à ce stade (JoyOnline) : à confirmer par un second média.</a:t>
             </a:r>
             <a:endParaRPr lang="en-US" sz="1400" dirty="0"/>
           </a:p>
@@ -14593,15 +14736,32 @@
               <a:buNone/>
             </a:pPr>
             <a:r>
+              <a:rPr lang="en-US" sz="1400" b="1" dirty="0">
+                <a:solidFill>
+                  <a:srgbClr val="1F2937"/>
+                </a:solidFill>
+                <a:latin typeface="Calibri" pitchFamily="34" charset="0"/>
+                <a:ea typeface="Calibri" pitchFamily="34" charset="-122"/>
+                <a:cs typeface="Calibri" pitchFamily="34" charset="-120"/>
+              </a:rPr>
+              <a:t>JoyOnline : </a:t>
+            </a:r>
+            <a:pPr indent="0" marL="0">
+              <a:spcAft>
+                <a:spcPts val="300"/>
+              </a:spcAft>
+              <a:buNone/>
+            </a:pPr>
+            <a:r>
               <a:rPr lang="en-US" sz="1400" i="1" dirty="0">
                 <a:solidFill>
-                  <a:srgbClr val="6B7280"/>
-                </a:solidFill>
-                <a:latin typeface="Calibri" pitchFamily="34" charset="0"/>
-                <a:ea typeface="Calibri" pitchFamily="34" charset="-122"/>
-                <a:cs typeface="Calibri" pitchFamily="34" charset="-120"/>
-              </a:rPr>
-              <a:t>Les médias n'en publient que le titre dans leur flux : le détail est à lire dans l'article (lien ci-dessous).</a:t>
+                  <a:srgbClr val="1F2937"/>
+                </a:solidFill>
+                <a:latin typeface="Calibri" pitchFamily="34" charset="0"/>
+                <a:ea typeface="Calibri" pitchFamily="34" charset="-122"/>
+                <a:cs typeface="Calibri" pitchFamily="34" charset="-120"/>
+              </a:rPr>
+              <a:t>« Une femme non identifiée a été tuée après avoir été heurtée par un train de voyageurs sur la ligne ferroviaire Tema-Afienya à Mataheko-Sebrepo, incitant les habitants à renouveler leurs appels en faveur d'une passerelle pour assurer une traversée plus sûre entre les communautés de la région. »</a:t>
             </a:r>
             <a:endParaRPr lang="en-US" sz="1400" dirty="0"/>
           </a:p>
@@ -14644,7 +14804,7 @@
                 <a:ea typeface="Calibri" pitchFamily="34" charset="-122"/>
                 <a:cs typeface="Calibri" pitchFamily="34" charset="-120"/>
               </a:rPr>
-              <a:t>Menace armée sur les axes et localités de la zone : réévaluer les déplacements terrestres (horaires, convois, itinéraires de repli) et les consignes des sites et des personnels présents à proximité.</a:t>
+              <a:t>Fait sécuritaire à suivre : vérifier son incidence sur les sites, les itinéraires et les personnels présents dans la zone.</a:t>
             </a:r>
             <a:endParaRPr lang="en-US" sz="1400" dirty="0"/>
           </a:p>
@@ -14700,15 +14860,15 @@
               <a:buNone/>
             </a:pPr>
             <a:r>
-              <a:rPr lang="en-US" sz="1400" dirty="0">
-                <a:solidFill>
-                  <a:srgbClr val="1F2937"/>
-                </a:solidFill>
-                <a:latin typeface="Calibri" pitchFamily="34" charset="0"/>
-                <a:ea typeface="Calibri" pitchFamily="34" charset="-122"/>
-                <a:cs typeface="Calibri" pitchFamily="34" charset="-120"/>
-              </a:rPr>
-              <a:t> — 23 octobre 2026, 18 h UTC</a:t>
+              <a:rPr lang="en-US" sz="1400" b="1" dirty="0">
+                <a:solidFill>
+                  <a:srgbClr val="1F2937"/>
+                </a:solidFill>
+                <a:latin typeface="Calibri" pitchFamily="34" charset="0"/>
+                <a:ea typeface="Calibri" pitchFamily="34" charset="-122"/>
+                <a:cs typeface="Calibri" pitchFamily="34" charset="-120"/>
+              </a:rPr>
+              <a:t> — 28 octobre 2026, 7 h UTC   ·   Cotation : Probable</a:t>
             </a:r>
             <a:endParaRPr lang="en-US" sz="1400" dirty="0"/>
           </a:p>
@@ -14733,7 +14893,7 @@
         <p:spPr>
           <a:xfrm>
             <a:off x="7635240" y="2075688"/>
-            <a:ext cx="4114800" cy="2160270"/>
+            <a:ext cx="4114800" cy="2467273"/>
           </a:xfrm>
           <a:prstGeom prst="rect">
             <a:avLst/>
@@ -14748,7 +14908,7 @@
         </p:nvSpPr>
         <p:spPr>
           <a:xfrm>
-            <a:off x="7635240" y="4272534"/>
+            <a:off x="7635240" y="4579537"/>
             <a:ext cx="4114800" cy="256032"/>
           </a:xfrm>
           <a:prstGeom prst="rect">
@@ -14864,7 +15024,7 @@
                 <a:ea typeface="Calibri" pitchFamily="34" charset="-122"/>
                 <a:cs typeface="Calibri" pitchFamily="34" charset="-120"/>
               </a:rPr>
-              <a:t>|  27/10/26   |   23</a:t>
+              <a:t>|  28/10/26   |   23</a:t>
             </a:r>
             <a:endParaRPr lang="en-US" sz="1000" dirty="0"/>
           </a:p>
@@ -15137,7 +15297,7 @@
                 <a:ea typeface="Calibri" pitchFamily="34" charset="-122"/>
                 <a:cs typeface="Calibri" pitchFamily="34" charset="-120"/>
               </a:rPr>
-              <a:t>NPP WALEWALE CONSTITUENCY CONDEMNS PERSONAL ATTACKS AGAINST MP, URGES PARTY DISCIPLINE</a:t>
+              <a:t>SEVEN SHOT DEAD BY GUNMEN AT CHURCH FUNERAL IN JORDAN, OFFICIALS SAY</a:t>
             </a:r>
             <a:endParaRPr lang="en-US" sz="1300" dirty="0"/>
           </a:p>
@@ -15199,7 +15359,7 @@
                 <a:ea typeface="Calibri" pitchFamily="34" charset="-122"/>
                 <a:cs typeface="Calibri" pitchFamily="34" charset="-120"/>
               </a:rPr>
-              <a:t> — 23 octobre 2026, 15 h UTC</a:t>
+              <a:t> — 23 octobre 2026, 18 h UTC</a:t>
             </a:r>
             <a:endParaRPr lang="en-US" sz="1300" dirty="0"/>
           </a:p>
@@ -15223,7 +15383,7 @@
                 <a:ea typeface="Calibri" pitchFamily="34" charset="-122"/>
                 <a:cs typeface="Calibri" pitchFamily="34" charset="-120"/>
               </a:rPr>
-              <a:t>GAF TO STAGE LAND COMBAT FIREPOWER DEMONSTRATION AT BUNDASE ON OCTOBER 30</a:t>
+              <a:t>NPP WALEWALE CONSTITUENCY CONDEMNS PERSONAL ATTACKS AGAINST MP, URGES PARTY DISCIPLINE</a:t>
             </a:r>
             <a:endParaRPr lang="en-US" sz="1300" dirty="0"/>
           </a:p>
@@ -15285,7 +15445,7 @@
                 <a:ea typeface="Calibri" pitchFamily="34" charset="-122"/>
                 <a:cs typeface="Calibri" pitchFamily="34" charset="-120"/>
               </a:rPr>
-              <a:t> — 23 octobre 2026, 16 h UTC</a:t>
+              <a:t> — 23 octobre 2026, 15 h UTC</a:t>
             </a:r>
             <a:endParaRPr lang="en-US" sz="1300" dirty="0"/>
           </a:p>
@@ -15309,7 +15469,7 @@
                 <a:ea typeface="Calibri" pitchFamily="34" charset="-122"/>
                 <a:cs typeface="Calibri" pitchFamily="34" charset="-120"/>
               </a:rPr>
-              <a:t>LES FORTES PLUIES, PRINCIPALE MENACE POUR LA CULTURE DU CACAO</a:t>
+              <a:t>GAF TO STAGE LAND COMBAT FIREPOWER DEMONSTRATION AT BUNDASE ON OCTOBER 30</a:t>
             </a:r>
             <a:endParaRPr lang="en-US" sz="1300" dirty="0"/>
           </a:p>
@@ -15354,7 +15514,7 @@
                   </a:extLst>
                 </a:hlinkClick>
               </a:rPr>
-              <a:t>AllAfrica (GH)</a:t>
+              <a:t>JoyOnline</a:t>
             </a:r>
             <a:pPr indent="0" marL="0">
               <a:spcAft>
@@ -15371,24 +15531,7 @@
                 <a:ea typeface="Calibri" pitchFamily="34" charset="-122"/>
                 <a:cs typeface="Calibri" pitchFamily="34" charset="-120"/>
               </a:rPr>
-              <a:t> — 16 octobre 2026, 7 h UTC   ·   </a:t>
-            </a:r>
-            <a:pPr indent="0" marL="0">
-              <a:spcAft>
-                <a:spcPts val="200"/>
-              </a:spcAft>
-              <a:buNone/>
-            </a:pPr>
-            <a:r>
-              <a:rPr lang="en-US" sz="1300" b="1" dirty="0">
-                <a:solidFill>
-                  <a:srgbClr val="1F2937"/>
-                </a:solidFill>
-                <a:latin typeface="Calibri" pitchFamily="34" charset="0"/>
-                <a:ea typeface="Calibri" pitchFamily="34" charset="-122"/>
-                <a:cs typeface="Calibri" pitchFamily="34" charset="-120"/>
-              </a:rPr>
-              <a:t>Cotation : Probable</a:t>
+              <a:t> — 23 octobre 2026, 16 h UTC</a:t>
             </a:r>
             <a:endParaRPr lang="en-US" sz="1300" dirty="0"/>
           </a:p>
@@ -15412,7 +15555,7 @@
                 <a:ea typeface="Calibri" pitchFamily="34" charset="-122"/>
                 <a:cs typeface="Calibri" pitchFamily="34" charset="-120"/>
               </a:rPr>
-              <a:t>(EN) GRASAG PRESIDENT CALLS FOR SUSTAINABLE FUNDING FOR AGRICULTURAL RESEARCH IN AFRICA</a:t>
+              <a:t>LES FORTES PLUIES, PRINCIPALE MENACE POUR LA CULTURE DU CACAO</a:t>
             </a:r>
             <a:endParaRPr lang="en-US" sz="1300" dirty="0"/>
           </a:p>
@@ -15457,7 +15600,7 @@
                   </a:extLst>
                 </a:hlinkClick>
               </a:rPr>
-              <a:t>JoyOnline</a:t>
+              <a:t>AllAfrica (GH)</a:t>
             </a:r>
             <a:pPr indent="0" marL="0">
               <a:spcAft>
@@ -15474,7 +15617,7 @@
                 <a:ea typeface="Calibri" pitchFamily="34" charset="-122"/>
                 <a:cs typeface="Calibri" pitchFamily="34" charset="-120"/>
               </a:rPr>
-              <a:t> — 27 octobre 2026, 19 h UTC   ·   </a:t>
+              <a:t> — 16 octobre 2026, 7 h UTC   ·   </a:t>
             </a:r>
             <a:pPr indent="0" marL="0">
               <a:spcAft>
@@ -15515,7 +15658,7 @@
                 <a:ea typeface="Calibri" pitchFamily="34" charset="-122"/>
                 <a:cs typeface="Calibri" pitchFamily="34" charset="-120"/>
               </a:rPr>
-              <a:t>(EN) GHANA DEVELOPING FIRST NATIONAL ACTION PLAN ON YOUTH, PEACE AND SECURITY – OSMAN AYARIGA</a:t>
+              <a:t>LE PRÉSIDENT DU GRASAG APPELLE À UN FINANCEMENT DURABLE DE LA RECHERCHE AGRICOLE EN AFRIQUE</a:t>
             </a:r>
             <a:endParaRPr lang="en-US" sz="1300" dirty="0"/>
           </a:p>
@@ -15577,7 +15720,7 @@
                 <a:ea typeface="Calibri" pitchFamily="34" charset="-122"/>
                 <a:cs typeface="Calibri" pitchFamily="34" charset="-120"/>
               </a:rPr>
-              <a:t> — 27 octobre 2026, 18 h UTC   ·   </a:t>
+              <a:t> — 27 octobre 2026, 19 h UTC   ·   </a:t>
             </a:r>
             <a:pPr indent="0" marL="0">
               <a:spcAft>
@@ -15678,7 +15821,7 @@
                 <a:ea typeface="Calibri" pitchFamily="34" charset="-122"/>
                 <a:cs typeface="Calibri" pitchFamily="34" charset="-120"/>
               </a:rPr>
-              <a:t>|  27/10/26   |   24</a:t>
+              <a:t>|  28/10/26   |   24</a:t>
             </a:r>
             <a:endParaRPr lang="en-US" sz="1000" dirty="0"/>
           </a:p>
@@ -15951,7 +16094,7 @@
                 <a:ea typeface="Calibri" pitchFamily="34" charset="-122"/>
                 <a:cs typeface="Calibri" pitchFamily="34" charset="-120"/>
               </a:rPr>
-              <a:t>THREE ARRESTED IN ATEWA FOREST AS NAIMOS LAUNCHES OPERATION GREEN SHIELD</a:t>
+              <a:t>LE GHANA ÉLABORE SON PREMIER PLAN D’ACTION NATIONAL SUR LA JEUNESSE, LA PAIX ET LA SÉCURITÉ – OSMAN AYARIGA</a:t>
             </a:r>
             <a:endParaRPr lang="en-US" sz="1300" dirty="0"/>
           </a:p>
@@ -16013,7 +16156,7 @@
                 <a:ea typeface="Calibri" pitchFamily="34" charset="-122"/>
                 <a:cs typeface="Calibri" pitchFamily="34" charset="-120"/>
               </a:rPr>
-              <a:t> — 27 octobre 2026, 17 h UTC   ·   </a:t>
+              <a:t> — 27 octobre 2026, 18 h UTC   ·   </a:t>
             </a:r>
             <a:pPr indent="0" marL="0">
               <a:spcAft>
@@ -16054,7 +16197,7 @@
                 <a:ea typeface="Calibri" pitchFamily="34" charset="-122"/>
                 <a:cs typeface="Calibri" pitchFamily="34" charset="-120"/>
               </a:rPr>
-              <a:t>GHANA CHALLENGES UN TO TURN HISTORICAL JUSTICE PROMISES INTO ACTION</a:t>
+              <a:t>THREE ARRESTED IN ATEWA FOREST AS NAIMOS LAUNCHES OPERATION GREEN SHIELD</a:t>
             </a:r>
             <a:endParaRPr lang="en-US" sz="1300" dirty="0"/>
           </a:p>
@@ -16099,7 +16242,7 @@
                   </a:extLst>
                 </a:hlinkClick>
               </a:rPr>
-              <a:t>GBC Ghana Online</a:t>
+              <a:t>JoyOnline</a:t>
             </a:r>
             <a:pPr indent="0" marL="0">
               <a:spcAft>
@@ -16116,7 +16259,7 @@
                 <a:ea typeface="Calibri" pitchFamily="34" charset="-122"/>
                 <a:cs typeface="Calibri" pitchFamily="34" charset="-120"/>
               </a:rPr>
-              <a:t> — 27 octobre 2026, 15 h UTC   ·   </a:t>
+              <a:t> — 27 octobre 2026, 17 h UTC   ·   </a:t>
             </a:r>
             <a:pPr indent="0" marL="0">
               <a:spcAft>
@@ -16133,7 +16276,7 @@
                 <a:ea typeface="Calibri" pitchFamily="34" charset="-122"/>
                 <a:cs typeface="Calibri" pitchFamily="34" charset="-120"/>
               </a:rPr>
-              <a:t>Cotation : Non confirmé</a:t>
+              <a:t>Cotation : Probable</a:t>
             </a:r>
             <a:endParaRPr lang="en-US" sz="1300" dirty="0"/>
           </a:p>
@@ -16157,7 +16300,7 @@
                 <a:ea typeface="Calibri" pitchFamily="34" charset="-122"/>
                 <a:cs typeface="Calibri" pitchFamily="34" charset="-120"/>
               </a:rPr>
-              <a:t>(EN) GALAMSEY WILL PERSIST IF FINANCIERS GO UNTOUCHED — SECURITY ANALYST</a:t>
+              <a:t>GHANA CHALLENGES UN TO TURN HISTORICAL JUSTICE PROMISES INTO ACTION</a:t>
             </a:r>
             <a:endParaRPr lang="en-US" sz="1300" dirty="0"/>
           </a:p>
@@ -16219,7 +16362,24 @@
                 <a:ea typeface="Calibri" pitchFamily="34" charset="-122"/>
                 <a:cs typeface="Calibri" pitchFamily="34" charset="-120"/>
               </a:rPr>
-              <a:t> — 27 octobre 2026, 12 h UTC</a:t>
+              <a:t> — 27 octobre 2026, 15 h UTC   ·   </a:t>
+            </a:r>
+            <a:pPr indent="0" marL="0">
+              <a:spcAft>
+                <a:spcPts val="200"/>
+              </a:spcAft>
+              <a:buNone/>
+            </a:pPr>
+            <a:r>
+              <a:rPr lang="en-US" sz="1300" b="1" dirty="0">
+                <a:solidFill>
+                  <a:srgbClr val="1F2937"/>
+                </a:solidFill>
+                <a:latin typeface="Calibri" pitchFamily="34" charset="0"/>
+                <a:ea typeface="Calibri" pitchFamily="34" charset="-122"/>
+                <a:cs typeface="Calibri" pitchFamily="34" charset="-120"/>
+              </a:rPr>
+              <a:t>Cotation : Non confirmé</a:t>
             </a:r>
             <a:endParaRPr lang="en-US" sz="1300" dirty="0"/>
           </a:p>
@@ -16243,7 +16403,7 @@
                 <a:ea typeface="Calibri" pitchFamily="34" charset="-122"/>
                 <a:cs typeface="Calibri" pitchFamily="34" charset="-120"/>
               </a:rPr>
-              <a:t>GHANA MUST OWN DIGITAL INFRASTRUCTURE TO ENSURE DATA SECURITY — APAAK</a:t>
+              <a:t>GALAMSEY PERSISTERA SI LES FINANCIERS NE SONT PAS TOUCHÉS — ANALYSTE EN SÉCURITÉ</a:t>
             </a:r>
             <a:endParaRPr lang="en-US" sz="1300" dirty="0"/>
           </a:p>
@@ -16288,7 +16448,7 @@
                   </a:extLst>
                 </a:hlinkClick>
               </a:rPr>
-              <a:t>Ghanaian Times</a:t>
+              <a:t>GBC Ghana Online</a:t>
             </a:r>
             <a:pPr indent="0" marL="0">
               <a:spcAft>
@@ -16305,24 +16465,7 @@
                 <a:ea typeface="Calibri" pitchFamily="34" charset="-122"/>
                 <a:cs typeface="Calibri" pitchFamily="34" charset="-120"/>
               </a:rPr>
-              <a:t> — 27 octobre 2026, 8 h UTC   ·   </a:t>
-            </a:r>
-            <a:pPr indent="0" marL="0">
-              <a:spcAft>
-                <a:spcPts val="200"/>
-              </a:spcAft>
-              <a:buNone/>
-            </a:pPr>
-            <a:r>
-              <a:rPr lang="en-US" sz="1300" b="1" dirty="0">
-                <a:solidFill>
-                  <a:srgbClr val="1F2937"/>
-                </a:solidFill>
-                <a:latin typeface="Calibri" pitchFamily="34" charset="0"/>
-                <a:ea typeface="Calibri" pitchFamily="34" charset="-122"/>
-                <a:cs typeface="Calibri" pitchFamily="34" charset="-120"/>
-              </a:rPr>
-              <a:t>Cotation : Non confirmé</a:t>
+              <a:t> — 27 octobre 2026, 12 h UTC</a:t>
             </a:r>
             <a:endParaRPr lang="en-US" sz="1300" dirty="0"/>
           </a:p>
@@ -16406,7 +16549,7 @@
                 <a:ea typeface="Calibri" pitchFamily="34" charset="-122"/>
                 <a:cs typeface="Calibri" pitchFamily="34" charset="-120"/>
               </a:rPr>
-              <a:t>|  27/10/26   |   25</a:t>
+              <a:t>|  28/10/26   |   25</a:t>
             </a:r>
             <a:endParaRPr lang="en-US" sz="1000" dirty="0"/>
           </a:p>
@@ -16722,7 +16865,7 @@
                 <a:ea typeface="Calibri" pitchFamily="34" charset="-122"/>
                 <a:cs typeface="Calibri" pitchFamily="34" charset="-120"/>
               </a:rPr>
-              <a:t>Indice de confiance : moyenne (incident vérifié le plus récent : 121 jours ; 1 signal du jour)</a:t>
+              <a:t>Indice de confiance : faible (incident vérifié le plus récent : 122 jours ; aucun signal du jour)</a:t>
             </a:r>
             <a:endParaRPr lang="en-US" sz="1100" dirty="0"/>
           </a:p>
@@ -17149,7 +17292,7 @@
                 <a:ea typeface="Calibri" pitchFamily="34" charset="-122"/>
                 <a:cs typeface="Calibri" pitchFamily="34" charset="-120"/>
               </a:rPr>
-              <a:t>|  27/10/26   |   26</a:t>
+              <a:t>|  28/10/26   |   26</a:t>
             </a:r>
             <a:endParaRPr lang="en-US" sz="1000" dirty="0"/>
           </a:p>
@@ -17558,7 +17701,7 @@
                 <a:ea typeface="Calibri" pitchFamily="34" charset="-122"/>
                 <a:cs typeface="Calibri" pitchFamily="34" charset="-120"/>
               </a:rPr>
-              <a:t>SOUTENU PAR L’UNION AFRICAINE, LE TOGOLAIS GILBERT HOUNGBO RÉUSSIRA-T-IL À CONSERVER LA TÊTE DE L’OIT ?</a:t>
+              <a:t>GÉNIE IMHOTEP SAISON 3 : LE LYCÉE ZÉBÉVI STOPPE LE LYCÉE TOKOIN2 DANS SON ÉLAN</a:t>
             </a:r>
             <a:endParaRPr lang="en-US" sz="1300" dirty="0"/>
           </a:p>
@@ -17603,7 +17746,7 @@
                   </a:extLst>
                 </a:hlinkClick>
               </a:rPr>
-              <a:t>Jeune Afrique</a:t>
+              <a:t>Le Nouveau Reporter</a:t>
             </a:r>
             <a:pPr indent="0" marL="0">
               <a:spcAft>
@@ -17620,7 +17763,7 @@
                 <a:ea typeface="Calibri" pitchFamily="34" charset="-122"/>
                 <a:cs typeface="Calibri" pitchFamily="34" charset="-120"/>
               </a:rPr>
-              <a:t> — 27 octobre 2026, 13 h UTC   ·   </a:t>
+              <a:t> — 28 octobre 2026, 8 h UTC   ·   </a:t>
             </a:r>
             <a:pPr indent="0" marL="0">
               <a:spcAft>
@@ -17637,7 +17780,7 @@
                 <a:ea typeface="Calibri" pitchFamily="34" charset="-122"/>
                 <a:cs typeface="Calibri" pitchFamily="34" charset="-120"/>
               </a:rPr>
-              <a:t>Cotation : Probable</a:t>
+              <a:t>Cotation : Non confirmé</a:t>
             </a:r>
             <a:endParaRPr lang="en-US" sz="1300" dirty="0"/>
           </a:p>
@@ -17661,7 +17804,7 @@
                 <a:ea typeface="Calibri" pitchFamily="34" charset="-122"/>
                 <a:cs typeface="Calibri" pitchFamily="34" charset="-120"/>
               </a:rPr>
-              <a:t>VERS UNE PAIX DES CHAMPS ?</a:t>
+              <a:t>TOGO : LA SÉCURITÉ RENFORCÉE SUR LE LITTORAL DE LOMÉ APRÈS LE DÉMANTÈLEMENT DES INSTALLATIONS ILLÉGALES</a:t>
             </a:r>
             <a:endParaRPr lang="en-US" sz="1300" dirty="0"/>
           </a:p>
@@ -17682,7 +17825,7 @@
                 <a:ea typeface="Calibri" pitchFamily="34" charset="-122"/>
                 <a:cs typeface="Calibri" pitchFamily="34" charset="-120"/>
               </a:rPr>
-              <a:t>Source : </a:t>
+              <a:t>Sources : </a:t>
             </a:r>
             <a:pPr indent="0" marL="0">
               <a:spcAft>
@@ -17706,7 +17849,7 @@
                   </a:extLst>
                 </a:hlinkClick>
               </a:rPr>
-              <a:t>AllAfrica (TG)</a:t>
+              <a:t>24heureinfo.com · Togo Actualite · Icilome</a:t>
             </a:r>
             <a:pPr indent="0" marL="0">
               <a:spcAft>
@@ -17723,7 +17866,24 @@
                 <a:ea typeface="Calibri" pitchFamily="34" charset="-122"/>
                 <a:cs typeface="Calibri" pitchFamily="34" charset="-120"/>
               </a:rPr>
-              <a:t> — 26 octobre 2026, 15 h UTC</a:t>
+              <a:t> — 28 octobre 2026, 7 h UTC   ·   </a:t>
+            </a:r>
+            <a:pPr indent="0" marL="0">
+              <a:spcAft>
+                <a:spcPts val="200"/>
+              </a:spcAft>
+              <a:buNone/>
+            </a:pPr>
+            <a:r>
+              <a:rPr lang="en-US" sz="1300" b="1" dirty="0">
+                <a:solidFill>
+                  <a:srgbClr val="1F2937"/>
+                </a:solidFill>
+                <a:latin typeface="Calibri" pitchFamily="34" charset="0"/>
+                <a:ea typeface="Calibri" pitchFamily="34" charset="-122"/>
+                <a:cs typeface="Calibri" pitchFamily="34" charset="-120"/>
+              </a:rPr>
+              <a:t>Cotation : Confirmé</a:t>
             </a:r>
             <a:endParaRPr lang="en-US" sz="1300" dirty="0"/>
           </a:p>
@@ -17747,7 +17907,7 @@
                 <a:ea typeface="Calibri" pitchFamily="34" charset="-122"/>
                 <a:cs typeface="Calibri" pitchFamily="34" charset="-120"/>
               </a:rPr>
-              <a:t>LITTORAL DE LOMÉ : UN DISPOSITIF SÉCURITAIRE RENFORCÉ APRÈS LE DÉMANTÈLEMENT DES INSTALLATIONS ILLÉGALES</a:t>
+              <a:t>SOUTENU PAR L’UNION AFRICAINE, LE TOGOLAIS GILBERT HOUNGBO RÉUSSIRA-T-IL À CONSERVER LA TÊTE DE L’OIT ?</a:t>
             </a:r>
             <a:endParaRPr lang="en-US" sz="1300" dirty="0"/>
           </a:p>
@@ -17768,7 +17928,7 @@
                 <a:ea typeface="Calibri" pitchFamily="34" charset="-122"/>
                 <a:cs typeface="Calibri" pitchFamily="34" charset="-120"/>
               </a:rPr>
-              <a:t>Sources : </a:t>
+              <a:t>Source : </a:t>
             </a:r>
             <a:pPr indent="0" marL="0">
               <a:spcAft>
@@ -17792,7 +17952,7 @@
                   </a:extLst>
                 </a:hlinkClick>
               </a:rPr>
-              <a:t>Togo Actualite · Icilome</a:t>
+              <a:t>Jeune Afrique</a:t>
             </a:r>
             <a:pPr indent="0" marL="0">
               <a:spcAft>
@@ -17809,7 +17969,7 @@
                 <a:ea typeface="Calibri" pitchFamily="34" charset="-122"/>
                 <a:cs typeface="Calibri" pitchFamily="34" charset="-120"/>
               </a:rPr>
-              <a:t> — 26 octobre 2026, 15 h UTC   ·   </a:t>
+              <a:t> — 27 octobre 2026, 13 h UTC   ·   </a:t>
             </a:r>
             <a:pPr indent="0" marL="0">
               <a:spcAft>
@@ -17826,7 +17986,7 @@
                 <a:ea typeface="Calibri" pitchFamily="34" charset="-122"/>
                 <a:cs typeface="Calibri" pitchFamily="34" charset="-120"/>
               </a:rPr>
-              <a:t>Cotation : Confirmé</a:t>
+              <a:t>Cotation : Probable</a:t>
             </a:r>
             <a:endParaRPr lang="en-US" sz="1300" dirty="0"/>
           </a:p>
@@ -17850,7 +18010,7 @@
                 <a:ea typeface="Calibri" pitchFamily="34" charset="-122"/>
                 <a:cs typeface="Calibri" pitchFamily="34" charset="-120"/>
               </a:rPr>
-              <a:t>STOCKS DE SÉCURITÉ - RECORD DE 31 000 TONNES COLLECTÉES EN 2025</a:t>
+              <a:t>VERS UNE PAIX DES CHAMPS ?</a:t>
             </a:r>
             <a:endParaRPr lang="en-US" sz="1300" dirty="0"/>
           </a:p>
@@ -17912,7 +18072,7 @@
                 <a:ea typeface="Calibri" pitchFamily="34" charset="-122"/>
                 <a:cs typeface="Calibri" pitchFamily="34" charset="-120"/>
               </a:rPr>
-              <a:t> — 26 octobre 2026, 11 h UTC</a:t>
+              <a:t> — 26 octobre 2026, 15 h UTC</a:t>
             </a:r>
             <a:endParaRPr lang="en-US" sz="1300" dirty="0"/>
           </a:p>
@@ -17996,7 +18156,7 @@
                 <a:ea typeface="Calibri" pitchFamily="34" charset="-122"/>
                 <a:cs typeface="Calibri" pitchFamily="34" charset="-120"/>
               </a:rPr>
-              <a:t>|  27/10/26   |   27</a:t>
+              <a:t>|  28/10/26   |   27</a:t>
             </a:r>
             <a:endParaRPr lang="en-US" sz="1000" dirty="0"/>
           </a:p>
@@ -18319,7 +18479,7 @@
                 <a:ea typeface="Calibri" pitchFamily="34" charset="-122"/>
                 <a:cs typeface="Calibri" pitchFamily="34" charset="-120"/>
               </a:rPr>
-              <a:t>LA PLAGE DE LOMÉ SOUS SURVEILLANCE</a:t>
+              <a:t>STOCKS DE SÉCURITÉ - RECORD DE 31 000 TONNES COLLECTÉES EN 2025</a:t>
             </a:r>
             <a:endParaRPr lang="en-US" sz="1300" dirty="0"/>
           </a:p>
@@ -18405,7 +18565,7 @@
                 <a:ea typeface="Calibri" pitchFamily="34" charset="-122"/>
                 <a:cs typeface="Calibri" pitchFamily="34" charset="-120"/>
               </a:rPr>
-              <a:t>TSÉVIÉ : LES FORCES DE SÉCURITÉ DÉPLOYÉES SUR LE SITE DU MEETING REPORTÉ DU CNCC</a:t>
+              <a:t>LA PLAGE DE LOMÉ SOUS SURVEILLANCE</a:t>
             </a:r>
             <a:endParaRPr lang="en-US" sz="1300" dirty="0"/>
           </a:p>
@@ -18450,7 +18610,7 @@
                   </a:extLst>
                 </a:hlinkClick>
               </a:rPr>
-              <a:t>24heureinfo.com</a:t>
+              <a:t>AllAfrica (TG)</a:t>
             </a:r>
             <a:pPr indent="0" marL="0">
               <a:spcAft>
@@ -18467,7 +18627,7 @@
                 <a:ea typeface="Calibri" pitchFamily="34" charset="-122"/>
                 <a:cs typeface="Calibri" pitchFamily="34" charset="-120"/>
               </a:rPr>
-              <a:t> — 25 octobre 2026, 20 h UTC</a:t>
+              <a:t> — 26 octobre 2026, 11 h UTC</a:t>
             </a:r>
             <a:endParaRPr lang="en-US" sz="1300" dirty="0"/>
           </a:p>
@@ -18491,7 +18651,7 @@
                 <a:ea typeface="Calibri" pitchFamily="34" charset="-122"/>
                 <a:cs typeface="Calibri" pitchFamily="34" charset="-120"/>
               </a:rPr>
-              <a:t>EBOLA : AFRICA CDC CONVOQUE LES MINISTRES AFRICAINS DE LA SANTÉ EN URGENCE</a:t>
+              <a:t>TSÉVIÉ : LES FORCES DE SÉCURITÉ DÉPLOYÉES SUR LE SITE DU MEETING REPORTÉ DU CNCC</a:t>
             </a:r>
             <a:endParaRPr lang="en-US" sz="1300" dirty="0"/>
           </a:p>
@@ -18553,7 +18713,7 @@
                 <a:ea typeface="Calibri" pitchFamily="34" charset="-122"/>
                 <a:cs typeface="Calibri" pitchFamily="34" charset="-120"/>
               </a:rPr>
-              <a:t> — 25 octobre 2026, 10 h UTC</a:t>
+              <a:t> — 25 octobre 2026, 20 h UTC</a:t>
             </a:r>
             <a:endParaRPr lang="en-US" sz="1300" dirty="0"/>
           </a:p>
@@ -18577,7 +18737,7 @@
                 <a:ea typeface="Calibri" pitchFamily="34" charset="-122"/>
                 <a:cs typeface="Calibri" pitchFamily="34" charset="-120"/>
               </a:rPr>
-              <a:t>TOGO : AGRICULTURE, NUCLÉAIRE… LES DÉPUTÉS ADOPTENT QUATRE TEXTES STRATÉGIQUES</a:t>
+              <a:t>EBOLA : AFRICA CDC CONVOQUE LES MINISTRES AFRICAINS DE LA SANTÉ EN URGENCE</a:t>
             </a:r>
             <a:endParaRPr lang="en-US" sz="1300" dirty="0"/>
           </a:p>
@@ -18598,7 +18758,7 @@
                 <a:ea typeface="Calibri" pitchFamily="34" charset="-122"/>
                 <a:cs typeface="Calibri" pitchFamily="34" charset="-120"/>
               </a:rPr>
-              <a:t>Sources : </a:t>
+              <a:t>Source : </a:t>
             </a:r>
             <a:pPr indent="0" marL="0">
               <a:spcAft>
@@ -18622,7 +18782,7 @@
                   </a:extLst>
                 </a:hlinkClick>
               </a:rPr>
-              <a:t>24heureinfo.com · ATOP — Agence Togolaise Presse</a:t>
+              <a:t>24heureinfo.com</a:t>
             </a:r>
             <a:pPr indent="0" marL="0">
               <a:spcAft>
@@ -18639,24 +18799,7 @@
                 <a:ea typeface="Calibri" pitchFamily="34" charset="-122"/>
                 <a:cs typeface="Calibri" pitchFamily="34" charset="-120"/>
               </a:rPr>
-              <a:t> — 23 octobre 2026, 17 h UTC   ·   </a:t>
-            </a:r>
-            <a:pPr indent="0" marL="0">
-              <a:spcAft>
-                <a:spcPts val="200"/>
-              </a:spcAft>
-              <a:buNone/>
-            </a:pPr>
-            <a:r>
-              <a:rPr lang="en-US" sz="1300" b="1" dirty="0">
-                <a:solidFill>
-                  <a:srgbClr val="1F2937"/>
-                </a:solidFill>
-                <a:latin typeface="Calibri" pitchFamily="34" charset="0"/>
-                <a:ea typeface="Calibri" pitchFamily="34" charset="-122"/>
-                <a:cs typeface="Calibri" pitchFamily="34" charset="-120"/>
-              </a:rPr>
-              <a:t>Cotation : Confirmé</a:t>
+              <a:t> — 25 octobre 2026, 10 h UTC</a:t>
             </a:r>
             <a:endParaRPr lang="en-US" sz="1300" dirty="0"/>
           </a:p>
@@ -18740,7 +18883,7 @@
                 <a:ea typeface="Calibri" pitchFamily="34" charset="-122"/>
                 <a:cs typeface="Calibri" pitchFamily="34" charset="-120"/>
               </a:rPr>
-              <a:t>|  27/10/26   |   28</a:t>
+              <a:t>|  28/10/26   |   28</a:t>
             </a:r>
             <a:endParaRPr lang="en-US" sz="1000" dirty="0"/>
           </a:p>
@@ -19006,7 +19149,7 @@
                 <a:ea typeface="Calibri" pitchFamily="34" charset="-122"/>
                 <a:cs typeface="Calibri" pitchFamily="34" charset="-120"/>
               </a:rPr>
-              <a:t>Indice de confiance : faible (incident vérifié le plus récent : 120 jours ; aucun signal du jour)</a:t>
+              <a:t>Indice de confiance : faible (incident vérifié le plus récent : 121 jours ; aucun signal du jour)</a:t>
             </a:r>
             <a:endParaRPr lang="en-US" sz="1100" dirty="0"/>
           </a:p>
@@ -19416,7 +19559,7 @@
                 <a:ea typeface="Calibri" pitchFamily="34" charset="-122"/>
                 <a:cs typeface="Calibri" pitchFamily="34" charset="-120"/>
               </a:rPr>
-              <a:t>|  27/10/26   |   29</a:t>
+              <a:t>|  28/10/26   |   29</a:t>
             </a:r>
             <a:endParaRPr lang="en-US" sz="1000" dirty="0"/>
           </a:p>
@@ -19657,7 +19800,7 @@
                 <a:ea typeface="Calibri" pitchFamily="34" charset="-122"/>
                 <a:cs typeface="Calibri" pitchFamily="34" charset="-120"/>
               </a:rPr>
-              <a:t>|  27/10/26   |   3</a:t>
+              <a:t>|  28/10/26   |   3</a:t>
             </a:r>
             <a:endParaRPr lang="en-US" sz="1000" dirty="0"/>
           </a:p>
@@ -19923,7 +20066,7 @@
                 <a:ea typeface="Calibri" pitchFamily="34" charset="-122"/>
                 <a:cs typeface="Calibri" pitchFamily="34" charset="-120"/>
               </a:rPr>
-              <a:t>Indice de confiance : faible (incident vérifié le plus récent : 118 jours ; aucun signal du jour)</a:t>
+              <a:t>Indice de confiance : faible (incident vérifié le plus récent : 119 jours ; aucun signal du jour)</a:t>
             </a:r>
             <a:endParaRPr lang="en-US" sz="1100" dirty="0"/>
           </a:p>
@@ -20261,7 +20404,7 @@
                 <a:ea typeface="Calibri" pitchFamily="34" charset="-122"/>
                 <a:cs typeface="Calibri" pitchFamily="34" charset="-120"/>
               </a:rPr>
-              <a:t>|  27/10/26   |   30</a:t>
+              <a:t>|  28/10/26   |   30</a:t>
             </a:r>
             <a:endParaRPr lang="en-US" sz="1000" dirty="0"/>
           </a:p>
@@ -21024,7 +21167,7 @@
                 <a:ea typeface="Calibri" pitchFamily="34" charset="-122"/>
                 <a:cs typeface="Calibri" pitchFamily="34" charset="-120"/>
               </a:rPr>
-              <a:t>|  27/10/26   |   31</a:t>
+              <a:t>|  28/10/26   |   31</a:t>
             </a:r>
             <a:endParaRPr lang="en-US" sz="1000" dirty="0"/>
           </a:p>
@@ -21735,7 +21878,7 @@
                 <a:ea typeface="Calibri" pitchFamily="34" charset="-122"/>
                 <a:cs typeface="Calibri" pitchFamily="34" charset="-120"/>
               </a:rPr>
-              <a:t>|  27/10/26   |   32</a:t>
+              <a:t>|  28/10/26   |   32</a:t>
             </a:r>
             <a:endParaRPr lang="en-US" sz="1000" dirty="0"/>
           </a:p>
@@ -22051,7 +22194,7 @@
                 <a:ea typeface="Calibri" pitchFamily="34" charset="-122"/>
                 <a:cs typeface="Calibri" pitchFamily="34" charset="-120"/>
               </a:rPr>
-              <a:t>Indice de confiance : faible (incident vérifié le plus récent : 210 jours ; aucun signal du jour)</a:t>
+              <a:t>Indice de confiance : moyenne (incident vérifié le plus récent : 211 jours ; 1 signal du jour)</a:t>
             </a:r>
             <a:endParaRPr lang="en-US" sz="1100" dirty="0"/>
           </a:p>
@@ -22090,7 +22233,7 @@
                 <a:ea typeface="Arial Narrow" pitchFamily="34" charset="-122"/>
                 <a:cs typeface="Arial Narrow" pitchFamily="34" charset="-120"/>
               </a:rPr>
-              <a:t>Liberia: Dolphin Killed, Butchered Before NaFAA Rescue Team Arrived</a:t>
+              <a:t>Libéria : Un dauphin tué et massacré avant l'arrivée de l'équipe de secours de la NaFAA</a:t>
             </a:r>
             <a:endParaRPr lang="en-US" sz="2200" dirty="0"/>
           </a:p>
@@ -22215,7 +22358,7 @@
                 <a:ea typeface="Calibri" pitchFamily="34" charset="-122"/>
                 <a:cs typeface="Calibri" pitchFamily="34" charset="-120"/>
               </a:rPr>
-              <a:t>« Monrovia — What began as a moment of hope for conservationists ended in frustration after a dolphin that washed ashore at Miami Beach in Monrovia was killed and… »</a:t>
+              <a:t>« Monrovia — Ce qui a commencé comme un moment d'espoir pour les défenseurs de l'environnement s'est terminé par une frustration après qu'un dauphin qui s'est échoué à Miami Beach à Monrovia a été tué et… »</a:t>
             </a:r>
             <a:endParaRPr lang="en-US" sz="1400" dirty="0"/>
           </a:p>
@@ -22258,7 +22401,7 @@
                 <a:ea typeface="Calibri" pitchFamily="34" charset="-122"/>
                 <a:cs typeface="Calibri" pitchFamily="34" charset="-120"/>
               </a:rPr>
-              <a:t>Fait sécuritaire à suivre : vérifier son incidence sur les sites, les itinéraires et les personnels présents dans la zone.</a:t>
+              <a:t>Menace armée sur les axes et localités de la zone : réévaluer les déplacements terrestres (horaires, convois, itinéraires de repli) et les consignes des sites et des personnels présents à proximité.</a:t>
             </a:r>
             <a:endParaRPr lang="en-US" sz="1400" dirty="0"/>
           </a:p>
@@ -22406,7 +22549,7 @@
                 <a:ea typeface="Calibri" pitchFamily="34" charset="-122"/>
                 <a:cs typeface="Calibri" pitchFamily="34" charset="-120"/>
               </a:rPr>
-              <a:t>|  27/10/26   |   33</a:t>
+              <a:t>|  28/10/26   |   33</a:t>
             </a:r>
             <a:endParaRPr lang="en-US" sz="1000" dirty="0"/>
           </a:p>
@@ -22901,7 +23044,7 @@
                 <a:ea typeface="Calibri" pitchFamily="34" charset="-122"/>
                 <a:cs typeface="Calibri" pitchFamily="34" charset="-120"/>
               </a:rPr>
-              <a:t>(EN) A FORMER SECURITY CHIEF’S VISION FOR LIBERIA’S IMMIGRATION SERVICE FINALLY PLAYS</a:t>
+              <a:t>LIBÉRIA : DANS LE CADRE DE LA TENTATIVE DE LA DÉFENSE D’ANNULER LA CONDAMNATION DE PETER BON JALLAH</a:t>
             </a:r>
             <a:endParaRPr lang="en-US" sz="1300" dirty="0"/>
           </a:p>
@@ -22963,7 +23106,24 @@
                 <a:ea typeface="Calibri" pitchFamily="34" charset="-122"/>
                 <a:cs typeface="Calibri" pitchFamily="34" charset="-120"/>
               </a:rPr>
-              <a:t> — 26 octobre 2026, 6 h UTC</a:t>
+              <a:t> — 28 octobre 2026, 7 h UTC   ·   </a:t>
+            </a:r>
+            <a:pPr indent="0" marL="0">
+              <a:spcAft>
+                <a:spcPts val="200"/>
+              </a:spcAft>
+              <a:buNone/>
+            </a:pPr>
+            <a:r>
+              <a:rPr lang="en-US" sz="1300" b="1" dirty="0">
+                <a:solidFill>
+                  <a:srgbClr val="1F2937"/>
+                </a:solidFill>
+                <a:latin typeface="Calibri" pitchFamily="34" charset="0"/>
+                <a:ea typeface="Calibri" pitchFamily="34" charset="-122"/>
+                <a:cs typeface="Calibri" pitchFamily="34" charset="-120"/>
+              </a:rPr>
+              <a:t>Cotation : Probable</a:t>
             </a:r>
             <a:endParaRPr lang="en-US" sz="1300" dirty="0"/>
           </a:p>
@@ -22987,7 +23147,7 @@
                 <a:ea typeface="Calibri" pitchFamily="34" charset="-122"/>
                 <a:cs typeface="Calibri" pitchFamily="34" charset="-120"/>
               </a:rPr>
-              <a:t>(EN) LIBERIA IMPOSES 21-DAY ISOLATION AND MONITORING RULES FOR TRAVELERS AMID REGIONAL EBOLA THREAT</a:t>
+              <a:t>LA VISION D'UN ANCIEN CHEF DE LA SÉCURITÉ POUR LE SERVICE D'IMMIGRATION DU LIBÉRIA JOUE ENFIN</a:t>
             </a:r>
             <a:endParaRPr lang="en-US" sz="1300" dirty="0"/>
           </a:p>
@@ -23032,7 +23192,7 @@
                   </a:extLst>
                 </a:hlinkClick>
               </a:rPr>
-              <a:t>Global News Network Liberia</a:t>
+              <a:t>FrontPageAfrica — Liberia</a:t>
             </a:r>
             <a:pPr indent="0" marL="0">
               <a:spcAft>
@@ -23049,7 +23209,7 @@
                 <a:ea typeface="Calibri" pitchFamily="34" charset="-122"/>
                 <a:cs typeface="Calibri" pitchFamily="34" charset="-120"/>
               </a:rPr>
-              <a:t> — 24 octobre 2026, 22 h UTC</a:t>
+              <a:t> — 26 octobre 2026, 6 h UTC</a:t>
             </a:r>
             <a:endParaRPr lang="en-US" sz="1300" dirty="0"/>
           </a:p>
@@ -23073,7 +23233,7 @@
                 <a:ea typeface="Calibri" pitchFamily="34" charset="-122"/>
                 <a:cs typeface="Calibri" pitchFamily="34" charset="-120"/>
               </a:rPr>
-              <a:t>(EN) AFL FIRES TWO SOLDIERS OVER ASSAULT</a:t>
+              <a:t>LE LIBÉRIA IMPOSE DES RÈGLES D'ISOLEMENT ET DE SURVEILLANCE DE 21 JOURS AUX VOYAGEURS FACE À LA MENACE RÉGIONALE D'EBOLA</a:t>
             </a:r>
             <a:endParaRPr lang="en-US" sz="1300" dirty="0"/>
           </a:p>
@@ -23135,7 +23295,7 @@
                 <a:ea typeface="Calibri" pitchFamily="34" charset="-122"/>
                 <a:cs typeface="Calibri" pitchFamily="34" charset="-120"/>
               </a:rPr>
-              <a:t> — 22 octobre 2026, 17 h UTC</a:t>
+              <a:t> — 24 octobre 2026, 22 h UTC</a:t>
             </a:r>
             <a:endParaRPr lang="en-US" sz="1300" dirty="0"/>
           </a:p>
@@ -23219,7 +23379,7 @@
                 <a:ea typeface="Calibri" pitchFamily="34" charset="-122"/>
                 <a:cs typeface="Calibri" pitchFamily="34" charset="-120"/>
               </a:rPr>
-              <a:t>|  27/10/26   |   34</a:t>
+              <a:t>|  28/10/26   |   34</a:t>
             </a:r>
             <a:endParaRPr lang="en-US" sz="1000" dirty="0"/>
           </a:p>
@@ -23279,7 +23439,7 @@
               <a:buNone/>
             </a:pPr>
             <a:r>
-              <a:rPr lang="en-US" sz="2400" dirty="0">
+              <a:rPr lang="en-US" sz="1600" dirty="0">
                 <a:solidFill>
                   <a:srgbClr val="FFFFFF"/>
                 </a:solidFill>
@@ -23287,9 +23447,9 @@
                 <a:ea typeface="Arial Narrow" pitchFamily="34" charset="-122"/>
                 <a:cs typeface="Arial Narrow" pitchFamily="34" charset="-120"/>
               </a:rPr>
-              <a:t>IX</a:t>
-            </a:r>
-            <a:endParaRPr lang="en-US" sz="2400" dirty="0"/>
+              <a:t>VIII</a:t>
+            </a:r>
+            <a:endParaRPr lang="en-US" sz="1600" dirty="0"/>
           </a:p>
         </p:txBody>
       </p:sp>
@@ -23326,7 +23486,7 @@
                 <a:ea typeface="Arial Narrow" pitchFamily="34" charset="-122"/>
                 <a:cs typeface="Arial Narrow" pitchFamily="34" charset="-120"/>
               </a:rPr>
-              <a:t>Sénégal</a:t>
+              <a:t>Liberia</a:t>
             </a:r>
             <a:endParaRPr lang="en-US" sz="2800" dirty="0"/>
           </a:p>
@@ -23341,17 +23501,17 @@
         <p:spPr>
           <a:xfrm>
             <a:off x="10881360" y="274320"/>
-            <a:ext cx="301752" cy="566928"/>
+            <a:ext cx="905256" cy="113386"/>
           </a:xfrm>
           <a:prstGeom prst="rect">
             <a:avLst/>
           </a:prstGeom>
           <a:solidFill>
-            <a:srgbClr val="00853F"/>
+            <a:srgbClr val="BF0A30"/>
           </a:solidFill>
           <a:ln w="12700">
             <a:solidFill>
-              <a:srgbClr val="00853F"/>
+              <a:srgbClr val="BF0A30"/>
             </a:solidFill>
             <a:prstDash val="solid"/>
           </a:ln>
@@ -23365,18 +23525,18 @@
         </p:nvSpPr>
         <p:spPr>
           <a:xfrm>
-            <a:off x="11183112" y="274320"/>
-            <a:ext cx="301752" cy="566928"/>
+            <a:off x="10881360" y="387706"/>
+            <a:ext cx="905256" cy="113386"/>
           </a:xfrm>
           <a:prstGeom prst="rect">
             <a:avLst/>
           </a:prstGeom>
           <a:solidFill>
-            <a:srgbClr val="FDEF42"/>
+            <a:srgbClr val="FFFFFF"/>
           </a:solidFill>
           <a:ln w="12700">
             <a:solidFill>
-              <a:srgbClr val="FDEF42"/>
+              <a:srgbClr val="FFFFFF"/>
             </a:solidFill>
             <a:prstDash val="solid"/>
           </a:ln>
@@ -23390,18 +23550,18 @@
         </p:nvSpPr>
         <p:spPr>
           <a:xfrm>
-            <a:off x="11484864" y="274320"/>
-            <a:ext cx="301752" cy="566928"/>
+            <a:off x="10881360" y="501091"/>
+            <a:ext cx="905256" cy="113386"/>
           </a:xfrm>
           <a:prstGeom prst="rect">
             <a:avLst/>
           </a:prstGeom>
           <a:solidFill>
-            <a:srgbClr val="E31B23"/>
+            <a:srgbClr val="BF0A30"/>
           </a:solidFill>
           <a:ln w="12700">
             <a:solidFill>
-              <a:srgbClr val="E31B23"/>
+              <a:srgbClr val="BF0A30"/>
             </a:solidFill>
             <a:prstDash val="solid"/>
           </a:ln>
@@ -23410,6 +23570,56 @@
       <p:sp>
         <p:nvSpPr>
           <p:cNvPr id="7" name="Shape 5"/>
+          <p:cNvSpPr/>
+          <p:nvPr/>
+        </p:nvSpPr>
+        <p:spPr>
+          <a:xfrm>
+            <a:off x="10881360" y="614477"/>
+            <a:ext cx="905256" cy="113386"/>
+          </a:xfrm>
+          <a:prstGeom prst="rect">
+            <a:avLst/>
+          </a:prstGeom>
+          <a:solidFill>
+            <a:srgbClr val="FFFFFF"/>
+          </a:solidFill>
+          <a:ln w="12700">
+            <a:solidFill>
+              <a:srgbClr val="FFFFFF"/>
+            </a:solidFill>
+            <a:prstDash val="solid"/>
+          </a:ln>
+        </p:spPr>
+      </p:sp>
+      <p:sp>
+        <p:nvSpPr>
+          <p:cNvPr id="8" name="Shape 6"/>
+          <p:cNvSpPr/>
+          <p:nvPr/>
+        </p:nvSpPr>
+        <p:spPr>
+          <a:xfrm>
+            <a:off x="10881360" y="727862"/>
+            <a:ext cx="905256" cy="113386"/>
+          </a:xfrm>
+          <a:prstGeom prst="rect">
+            <a:avLst/>
+          </a:prstGeom>
+          <a:solidFill>
+            <a:srgbClr val="BF0A30"/>
+          </a:solidFill>
+          <a:ln w="12700">
+            <a:solidFill>
+              <a:srgbClr val="BF0A30"/>
+            </a:solidFill>
+            <a:prstDash val="solid"/>
+          </a:ln>
+        </p:spPr>
+      </p:sp>
+      <p:sp>
+        <p:nvSpPr>
+          <p:cNvPr id="9" name="Shape 7"/>
           <p:cNvSpPr/>
           <p:nvPr/>
         </p:nvSpPr>
@@ -23431,7 +23641,7 @@
       </p:sp>
       <p:sp>
         <p:nvSpPr>
-          <p:cNvPr id="8" name="Shape 6"/>
+          <p:cNvPr id="10" name="Shape 8"/>
           <p:cNvSpPr/>
           <p:nvPr/>
         </p:nvSpPr>
@@ -23454,14 +23664,14 @@
       </p:sp>
       <p:sp>
         <p:nvSpPr>
-          <p:cNvPr id="9" name="Text 7"/>
-          <p:cNvSpPr/>
-          <p:nvPr/>
-        </p:nvSpPr>
-        <p:spPr>
-          <a:xfrm>
-            <a:off x="640080" y="1024128"/>
-            <a:ext cx="10972800" cy="274320"/>
+          <p:cNvPr id="11" name="Text 9"/>
+          <p:cNvSpPr/>
+          <p:nvPr/>
+        </p:nvSpPr>
+        <p:spPr>
+          <a:xfrm>
+            <a:off x="640080" y="1188720"/>
+            <a:ext cx="10972800" cy="4663440"/>
           </a:xfrm>
           <a:prstGeom prst="rect">
             <a:avLst/>
@@ -23470,98 +23680,21 @@
           <a:ln/>
         </p:spPr>
         <p:txBody>
-          <a:bodyPr wrap="square" rtlCol="0" anchor="ctr"/>
-          <a:lstStyle/>
-          <a:p>
-            <a:pPr indent="0" marL="0">
-              <a:buNone/>
-            </a:pPr>
-            <a:r>
-              <a:rPr lang="en-US" sz="1100" i="1" dirty="0">
-                <a:solidFill>
-                  <a:srgbClr val="6B7280"/>
-                </a:solidFill>
-                <a:latin typeface="Calibri" pitchFamily="34" charset="0"/>
-                <a:ea typeface="Calibri" pitchFamily="34" charset="-122"/>
-                <a:cs typeface="Calibri" pitchFamily="34" charset="-120"/>
-              </a:rPr>
-              <a:t>Indice de confiance : moyenne (incident vérifié le plus récent : 120 jours ; 5 signaux du jour)</a:t>
-            </a:r>
-            <a:endParaRPr lang="en-US" sz="1100" dirty="0"/>
-          </a:p>
-        </p:txBody>
-      </p:sp>
-      <p:sp>
-        <p:nvSpPr>
-          <p:cNvPr id="10" name="Text 8"/>
-          <p:cNvSpPr/>
-          <p:nvPr/>
-        </p:nvSpPr>
-        <p:spPr>
-          <a:xfrm>
-            <a:off x="640080" y="1298448"/>
-            <a:ext cx="10972800" cy="685800"/>
-          </a:xfrm>
-          <a:prstGeom prst="rect">
-            <a:avLst/>
-          </a:prstGeom>
-          <a:noFill/>
-          <a:ln/>
-        </p:spPr>
-        <p:txBody>
           <a:bodyPr wrap="square" rtlCol="0" anchor="t"/>
           <a:lstStyle/>
           <a:p>
-            <a:pPr indent="0" marL="0">
-              <a:buNone/>
-            </a:pPr>
-            <a:r>
-              <a:rPr lang="en-US" sz="2200" b="1" dirty="0">
-                <a:solidFill>
-                  <a:srgbClr val="1F6B5E"/>
-                </a:solidFill>
-                <a:latin typeface="Arial Narrow" pitchFamily="34" charset="0"/>
-                <a:ea typeface="Arial Narrow" pitchFamily="34" charset="-122"/>
-                <a:cs typeface="Arial Narrow" pitchFamily="34" charset="-120"/>
-              </a:rPr>
-              <a:t>Immeuble effondré à Thiès : un mort et deux blessés, selon le bilan provisoire</a:t>
-            </a:r>
-            <a:endParaRPr lang="en-US" sz="2200" dirty="0"/>
-          </a:p>
-        </p:txBody>
-      </p:sp>
-      <p:sp>
-        <p:nvSpPr>
-          <p:cNvPr id="11" name="Text 9"/>
-          <p:cNvSpPr/>
-          <p:nvPr/>
-        </p:nvSpPr>
-        <p:spPr>
-          <a:xfrm>
-            <a:off x="640080" y="2029968"/>
-            <a:ext cx="6812280" cy="3867912"/>
-          </a:xfrm>
-          <a:prstGeom prst="rect">
-            <a:avLst/>
-          </a:prstGeom>
-          <a:noFill/>
-          <a:ln/>
-        </p:spPr>
-        <p:txBody>
-          <a:bodyPr wrap="square" rtlCol="0" anchor="t"/>
-          <a:lstStyle/>
-          <a:p>
-            <a:pPr indent="0" marL="0">
+            <a:pPr marL="342900" indent="-342900">
               <a:spcBef>
                 <a:spcPts val="800"/>
               </a:spcBef>
               <a:spcAft>
-                <a:spcPts val="300"/>
-              </a:spcAft>
-              <a:buNone/>
-            </a:pPr>
-            <a:r>
-              <a:rPr lang="en-US" sz="1400" b="1" dirty="0">
+                <a:spcPts val="200"/>
+              </a:spcAft>
+              <a:buSzPct val="100000"/>
+              <a:buChar char="❑"/>
+            </a:pPr>
+            <a:r>
+              <a:rPr lang="en-US" sz="1400" b="1" u="sng" dirty="0">
                 <a:solidFill>
                   <a:srgbClr val="1F6B5E"/>
                 </a:solidFill>
@@ -23569,16 +23702,17 @@
                 <a:ea typeface="Calibri" pitchFamily="34" charset="-122"/>
                 <a:cs typeface="Calibri" pitchFamily="34" charset="-120"/>
               </a:rPr>
-              <a:t>Contexte</a:t>
+              <a:t>L'AFL TIRE SUR DEUX SOLDATS À LA SUITE D'UN ASSAUT</a:t>
             </a:r>
             <a:endParaRPr lang="en-US" sz="1300" dirty="0"/>
           </a:p>
           <a:p>
-            <a:pPr indent="0" marL="0">
-              <a:spcAft>
-                <a:spcPts val="300"/>
-              </a:spcAft>
-              <a:buNone/>
+            <a:pPr lvl="1" marL="685800" indent="-342900">
+              <a:spcAft>
+                <a:spcPts val="200"/>
+              </a:spcAft>
+              <a:buSzPct val="100000"/>
+              <a:buChar char="▪"/>
             </a:pPr>
             <a:r>
               <a:rPr lang="en-US" sz="1300" dirty="0">
@@ -23589,174 +23723,11 @@
                 <a:ea typeface="Calibri" pitchFamily="34" charset="-122"/>
                 <a:cs typeface="Calibri" pitchFamily="34" charset="-120"/>
               </a:rPr>
-              <a:t>Fait rapporté le mardi 27 octobre 2026. Lieu : Thiès, Sénégal. Actualité sociale. Repris par 2 médias distincts (APS — Agence Sénégalaise Presse, Pressafrik) : le fait est recoupé.</a:t>
-            </a:r>
-            <a:endParaRPr lang="en-US" sz="1300" dirty="0"/>
-          </a:p>
-          <a:p>
-            <a:pPr indent="0" marL="0">
-              <a:spcBef>
-                <a:spcPts val="800"/>
-              </a:spcBef>
-              <a:spcAft>
-                <a:spcPts val="300"/>
-              </a:spcAft>
-              <a:buNone/>
-            </a:pPr>
-            <a:r>
-              <a:rPr lang="en-US" sz="1400" b="1" dirty="0">
-                <a:solidFill>
-                  <a:srgbClr val="1F6B5E"/>
-                </a:solidFill>
-                <a:latin typeface="Calibri" pitchFamily="34" charset="0"/>
-                <a:ea typeface="Calibri" pitchFamily="34" charset="-122"/>
-                <a:cs typeface="Calibri" pitchFamily="34" charset="-120"/>
-              </a:rPr>
-              <a:t>Ce que rapportent les sources</a:t>
-            </a:r>
-            <a:endParaRPr lang="en-US" sz="1300" dirty="0"/>
-          </a:p>
-          <a:p>
-            <a:pPr indent="0" marL="0">
-              <a:spcAft>
-                <a:spcPts val="300"/>
-              </a:spcAft>
-              <a:buNone/>
-            </a:pPr>
-            <a:r>
-              <a:rPr lang="en-US" sz="1300" b="1" dirty="0">
-                <a:solidFill>
-                  <a:srgbClr val="1F2937"/>
-                </a:solidFill>
-                <a:latin typeface="Calibri" pitchFamily="34" charset="0"/>
-                <a:ea typeface="Calibri" pitchFamily="34" charset="-122"/>
-                <a:cs typeface="Calibri" pitchFamily="34" charset="-120"/>
-              </a:rPr>
-              <a:t>APS — Agence Sénégalaise Presse : </a:t>
-            </a:r>
-            <a:pPr indent="0" marL="0">
-              <a:spcAft>
-                <a:spcPts val="300"/>
-              </a:spcAft>
-              <a:buNone/>
-            </a:pPr>
-            <a:r>
-              <a:rPr lang="en-US" sz="1300" i="1" dirty="0">
-                <a:solidFill>
-                  <a:srgbClr val="1F2937"/>
-                </a:solidFill>
-                <a:latin typeface="Calibri" pitchFamily="34" charset="0"/>
-                <a:ea typeface="Calibri" pitchFamily="34" charset="-122"/>
-                <a:cs typeface="Calibri" pitchFamily="34" charset="-120"/>
-              </a:rPr>
-              <a:t>« Thiès, 27 oct (APS) –L’effondrement d’un immeuble R+5 en construction mardi dans la commune de Thiès-Ouest a fait trois victimes, dont un mort et deux blessés extraits des décombres, selon le bilan provisoire tiré par le Groupement d’incendie et de secours numéro 2, couvrant les régions de Thiès et Diourbel. »</a:t>
-            </a:r>
-            <a:endParaRPr lang="en-US" sz="1300" dirty="0"/>
-          </a:p>
-          <a:p>
-            <a:pPr indent="0" marL="0">
-              <a:spcAft>
-                <a:spcPts val="300"/>
-              </a:spcAft>
-              <a:buNone/>
-            </a:pPr>
-            <a:r>
-              <a:rPr lang="en-US" sz="1300" b="1" dirty="0">
-                <a:solidFill>
-                  <a:srgbClr val="1F2937"/>
-                </a:solidFill>
-                <a:latin typeface="Calibri" pitchFamily="34" charset="0"/>
-                <a:ea typeface="Calibri" pitchFamily="34" charset="-122"/>
-                <a:cs typeface="Calibri" pitchFamily="34" charset="-120"/>
-              </a:rPr>
-              <a:t>Pressafrik : </a:t>
-            </a:r>
-            <a:pPr indent="0" marL="0">
-              <a:spcAft>
-                <a:spcPts val="300"/>
-              </a:spcAft>
-              <a:buNone/>
-            </a:pPr>
-            <a:r>
-              <a:rPr lang="en-US" sz="1300" i="1" dirty="0">
-                <a:solidFill>
-                  <a:srgbClr val="1F2937"/>
-                </a:solidFill>
-                <a:latin typeface="Calibri" pitchFamily="34" charset="0"/>
-                <a:ea typeface="Calibri" pitchFamily="34" charset="-122"/>
-                <a:cs typeface="Calibri" pitchFamily="34" charset="-120"/>
-              </a:rPr>
-              <a:t>« Les secours ont dégagé trois personnes des ruines de l’immeuble de deux étages en construction qu... www.pressafrik.com »</a:t>
-            </a:r>
-            <a:endParaRPr lang="en-US" sz="1300" dirty="0"/>
-          </a:p>
-          <a:p>
-            <a:pPr indent="0" marL="0">
-              <a:spcBef>
-                <a:spcPts val="800"/>
-              </a:spcBef>
-              <a:spcAft>
-                <a:spcPts val="300"/>
-              </a:spcAft>
-              <a:buNone/>
-            </a:pPr>
-            <a:r>
-              <a:rPr lang="en-US" sz="1400" b="1" dirty="0">
-                <a:solidFill>
-                  <a:srgbClr val="1F6B5E"/>
-                </a:solidFill>
-                <a:latin typeface="Calibri" pitchFamily="34" charset="0"/>
-                <a:ea typeface="Calibri" pitchFamily="34" charset="-122"/>
-                <a:cs typeface="Calibri" pitchFamily="34" charset="-120"/>
-              </a:rPr>
-              <a:t>Enjeux sûreté</a:t>
-            </a:r>
-            <a:endParaRPr lang="en-US" sz="1300" dirty="0"/>
-          </a:p>
-          <a:p>
-            <a:pPr indent="0" marL="0">
-              <a:spcAft>
-                <a:spcPts val="300"/>
-              </a:spcAft>
-              <a:buNone/>
-            </a:pPr>
-            <a:r>
-              <a:rPr lang="en-US" sz="1300" dirty="0">
-                <a:solidFill>
-                  <a:srgbClr val="1F2937"/>
-                </a:solidFill>
-                <a:latin typeface="Calibri" pitchFamily="34" charset="0"/>
-                <a:ea typeface="Calibri" pitchFamily="34" charset="-122"/>
-                <a:cs typeface="Calibri" pitchFamily="34" charset="-120"/>
-              </a:rPr>
-              <a:t>Risque accidentel ou technique : rappeler les consignes de sécurité routière et incendie, vérifier l'exposition des sites et des prestataires.</a:t>
-            </a:r>
-            <a:endParaRPr lang="en-US" sz="1300" dirty="0"/>
-          </a:p>
-          <a:p>
-            <a:pPr indent="0" marL="0">
-              <a:spcBef>
-                <a:spcPts val="800"/>
-              </a:spcBef>
-              <a:spcAft>
-                <a:spcPts val="300"/>
-              </a:spcAft>
-              <a:buNone/>
-            </a:pPr>
-            <a:r>
-              <a:rPr lang="en-US" sz="1300" b="1" dirty="0">
-                <a:solidFill>
-                  <a:srgbClr val="1F2937"/>
-                </a:solidFill>
-                <a:latin typeface="Calibri" pitchFamily="34" charset="0"/>
-                <a:ea typeface="Calibri" pitchFamily="34" charset="-122"/>
-                <a:cs typeface="Calibri" pitchFamily="34" charset="-120"/>
-              </a:rPr>
-              <a:t>Sources : </a:t>
-            </a:r>
-            <a:pPr indent="0" marL="0">
-              <a:spcAft>
-                <a:spcPts val="300"/>
+              <a:t>Source : </a:t>
+            </a:r>
+            <a:pPr indent="0" marL="0">
+              <a:spcAft>
+                <a:spcPts val="200"/>
               </a:spcAft>
               <a:buNone/>
             </a:pPr>
@@ -23776,128 +23747,32 @@
                   </a:extLst>
                 </a:hlinkClick>
               </a:rPr>
-              <a:t>APS — Agence Sénégalaise Presse</a:t>
-            </a:r>
-            <a:pPr indent="0" marL="0">
-              <a:spcAft>
-                <a:spcPts val="300"/>
-              </a:spcAft>
-              <a:buNone/>
-            </a:pPr>
-            <a:r>
-              <a:rPr lang="en-US" sz="1300" u="sng" dirty="0">
-                <a:solidFill>
-                  <a:srgbClr val="1F6B5E"/>
-                </a:solidFill>
-                <a:latin typeface="Calibri" pitchFamily="34" charset="0"/>
-                <a:ea typeface="Calibri" pitchFamily="34" charset="-122"/>
-                <a:cs typeface="Calibri" pitchFamily="34" charset="-120"/>
-                <a:hlinkClick r:id="rId2" invalidUrl="" action="" tgtFrame="" tooltip="" history="1" highlightClick="0" endSnd="0">
-                  <a:extLst>
-                    <a:ext uri="{A12FA001-AC4F-418D-AE19-62706E023703}">
-                      <ahyp:hlinkClr xmlns:ahyp="http://schemas.microsoft.com/office/drawing/2018/hyperlinkcolor" val="tx"/>
-                    </a:ext>
-                  </a:extLst>
-                </a:hlinkClick>
-              </a:rPr>
-              <a:t> · Pressafrik</a:t>
-            </a:r>
-            <a:pPr indent="0" marL="0">
-              <a:spcAft>
-                <a:spcPts val="300"/>
-              </a:spcAft>
-              <a:buNone/>
-            </a:pPr>
-            <a:r>
-              <a:rPr lang="en-US" sz="1300" b="1" dirty="0">
-                <a:solidFill>
-                  <a:srgbClr val="1F2937"/>
-                </a:solidFill>
-                <a:latin typeface="Calibri" pitchFamily="34" charset="0"/>
-                <a:ea typeface="Calibri" pitchFamily="34" charset="-122"/>
-                <a:cs typeface="Calibri" pitchFamily="34" charset="-120"/>
-              </a:rPr>
-              <a:t> — 27 octobre 2026, 19 h UTC   ·   Cotation : Confirmé</a:t>
+              <a:t>Global News Network Liberia</a:t>
+            </a:r>
+            <a:pPr indent="0" marL="0">
+              <a:spcAft>
+                <a:spcPts val="200"/>
+              </a:spcAft>
+              <a:buNone/>
+            </a:pPr>
+            <a:r>
+              <a:rPr lang="en-US" sz="1300" dirty="0">
+                <a:solidFill>
+                  <a:srgbClr val="1F2937"/>
+                </a:solidFill>
+                <a:latin typeface="Calibri" pitchFamily="34" charset="0"/>
+                <a:ea typeface="Calibri" pitchFamily="34" charset="-122"/>
+                <a:cs typeface="Calibri" pitchFamily="34" charset="-120"/>
+              </a:rPr>
+              <a:t> — 22 octobre 2026, 17 h UTC</a:t>
             </a:r>
             <a:endParaRPr lang="en-US" sz="1300" dirty="0"/>
           </a:p>
         </p:txBody>
       </p:sp>
-      <p:pic>
-        <p:nvPicPr>
-          <p:cNvPr id="12" name="Image 0" descr="preencoded.png">
-            <a:hlinkClick r:id="rId4" tooltip=""/>
-          </p:cNvPr>
-          <p:cNvPicPr>
-            <a:picLocks noChangeAspect="1"/>
-          </p:cNvPicPr>
-          <p:nvPr/>
-        </p:nvPicPr>
-        <p:blipFill>
-          <a:blip r:embed="rId3"/>
-          <a:stretch>
-            <a:fillRect/>
-          </a:stretch>
-        </p:blipFill>
-        <p:spPr>
-          <a:xfrm>
-            <a:off x="7635240" y="2075688"/>
-            <a:ext cx="4114800" cy="2447080"/>
-          </a:xfrm>
-          <a:prstGeom prst="rect">
-            <a:avLst/>
-          </a:prstGeom>
-        </p:spPr>
-      </p:pic>
-      <p:sp>
-        <p:nvSpPr>
-          <p:cNvPr id="13" name="Text 10"/>
-          <p:cNvSpPr/>
-          <p:nvPr/>
-        </p:nvSpPr>
-        <p:spPr>
-          <a:xfrm>
-            <a:off x="7635240" y="4559344"/>
-            <a:ext cx="4114800" cy="256032"/>
-          </a:xfrm>
-          <a:prstGeom prst="rect">
-            <a:avLst/>
-          </a:prstGeom>
-          <a:noFill/>
-          <a:ln/>
-        </p:spPr>
-        <p:txBody>
-          <a:bodyPr wrap="square" rtlCol="0" anchor="ctr"/>
-          <a:lstStyle/>
-          <a:p>
-            <a:pPr algn="r" indent="0" marL="0">
-              <a:buNone/>
-            </a:pPr>
-            <a:r>
-              <a:rPr lang="en-US" sz="900" u="sng" dirty="0">
-                <a:solidFill>
-                  <a:srgbClr val="1F6B5E"/>
-                </a:solidFill>
-                <a:latin typeface="Calibri" pitchFamily="34" charset="0"/>
-                <a:ea typeface="Calibri" pitchFamily="34" charset="-122"/>
-                <a:cs typeface="Calibri" pitchFamily="34" charset="-120"/>
-                <a:hlinkClick r:id="rId5" invalidUrl="" action="" tgtFrame="" tooltip="" history="1" highlightClick="0" endSnd="0">
-                  <a:extLst>
-                    <a:ext uri="{A12FA001-AC4F-418D-AE19-62706E023703}">
-                      <ahyp:hlinkClr xmlns:ahyp="http://schemas.microsoft.com/office/drawing/2018/hyperlinkcolor" val="tx"/>
-                    </a:ext>
-                  </a:extLst>
-                </a:hlinkClick>
-              </a:rPr>
-              <a:t>Photo : © pressafrik.com</a:t>
-            </a:r>
-            <a:endParaRPr lang="en-US" sz="900" dirty="0"/>
-          </a:p>
-        </p:txBody>
-      </p:sp>
-      <p:sp>
-        <p:nvSpPr>
-          <p:cNvPr id="14" name="Text 11"/>
+      <p:sp>
+        <p:nvSpPr>
+          <p:cNvPr id="12" name="Text 10"/>
           <p:cNvSpPr/>
           <p:nvPr/>
         </p:nvSpPr>
@@ -23942,7 +23817,7 @@
       </p:sp>
       <p:sp>
         <p:nvSpPr>
-          <p:cNvPr id="15" name="Text 12"/>
+          <p:cNvPr id="13" name="Text 11"/>
           <p:cNvSpPr/>
           <p:nvPr/>
         </p:nvSpPr>
@@ -23973,7 +23848,7 @@
                 <a:ea typeface="Calibri" pitchFamily="34" charset="-122"/>
                 <a:cs typeface="Calibri" pitchFamily="34" charset="-120"/>
               </a:rPr>
-              <a:t>|  27/10/26   |   35</a:t>
+              <a:t>|  28/10/26   |   35</a:t>
             </a:r>
             <a:endParaRPr lang="en-US" sz="1000" dirty="0"/>
           </a:p>
@@ -24214,8 +24089,8 @@
         </p:nvSpPr>
         <p:spPr>
           <a:xfrm>
-            <a:off x="640080" y="1188720"/>
-            <a:ext cx="10972800" cy="4663440"/>
+            <a:off x="640080" y="1024128"/>
+            <a:ext cx="10972800" cy="274320"/>
           </a:xfrm>
           <a:prstGeom prst="rect">
             <a:avLst/>
@@ -24224,21 +24099,98 @@
           <a:ln/>
         </p:spPr>
         <p:txBody>
+          <a:bodyPr wrap="square" rtlCol="0" anchor="ctr"/>
+          <a:lstStyle/>
+          <a:p>
+            <a:pPr indent="0" marL="0">
+              <a:buNone/>
+            </a:pPr>
+            <a:r>
+              <a:rPr lang="en-US" sz="1100" i="1" dirty="0">
+                <a:solidFill>
+                  <a:srgbClr val="6B7280"/>
+                </a:solidFill>
+                <a:latin typeface="Calibri" pitchFamily="34" charset="0"/>
+                <a:ea typeface="Calibri" pitchFamily="34" charset="-122"/>
+                <a:cs typeface="Calibri" pitchFamily="34" charset="-120"/>
+              </a:rPr>
+              <a:t>Indice de confiance : moyenne (incident vérifié le plus récent : 120 jours ; 5 signaux du jour)</a:t>
+            </a:r>
+            <a:endParaRPr lang="en-US" sz="1100" dirty="0"/>
+          </a:p>
+        </p:txBody>
+      </p:sp>
+      <p:sp>
+        <p:nvSpPr>
+          <p:cNvPr id="10" name="Text 8"/>
+          <p:cNvSpPr/>
+          <p:nvPr/>
+        </p:nvSpPr>
+        <p:spPr>
+          <a:xfrm>
+            <a:off x="640080" y="1298448"/>
+            <a:ext cx="10972800" cy="685800"/>
+          </a:xfrm>
+          <a:prstGeom prst="rect">
+            <a:avLst/>
+          </a:prstGeom>
+          <a:noFill/>
+          <a:ln/>
+        </p:spPr>
+        <p:txBody>
           <a:bodyPr wrap="square" rtlCol="0" anchor="t"/>
           <a:lstStyle/>
           <a:p>
-            <a:pPr marL="342900" indent="-342900">
+            <a:pPr indent="0" marL="0">
+              <a:buNone/>
+            </a:pPr>
+            <a:r>
+              <a:rPr lang="en-US" sz="2200" b="1" dirty="0">
+                <a:solidFill>
+                  <a:srgbClr val="1F6B5E"/>
+                </a:solidFill>
+                <a:latin typeface="Arial Narrow" pitchFamily="34" charset="0"/>
+                <a:ea typeface="Arial Narrow" pitchFamily="34" charset="-122"/>
+                <a:cs typeface="Arial Narrow" pitchFamily="34" charset="-120"/>
+              </a:rPr>
+              <a:t>Touba : un débat sur les moteurs de Jakarta se termine par la mort de Baye M. Diop</a:t>
+            </a:r>
+            <a:endParaRPr lang="en-US" sz="2200" dirty="0"/>
+          </a:p>
+        </p:txBody>
+      </p:sp>
+      <p:sp>
+        <p:nvSpPr>
+          <p:cNvPr id="11" name="Text 9"/>
+          <p:cNvSpPr/>
+          <p:nvPr/>
+        </p:nvSpPr>
+        <p:spPr>
+          <a:xfrm>
+            <a:off x="640080" y="2029968"/>
+            <a:ext cx="6812280" cy="3867912"/>
+          </a:xfrm>
+          <a:prstGeom prst="rect">
+            <a:avLst/>
+          </a:prstGeom>
+          <a:noFill/>
+          <a:ln/>
+        </p:spPr>
+        <p:txBody>
+          <a:bodyPr wrap="square" rtlCol="0" anchor="t"/>
+          <a:lstStyle/>
+          <a:p>
+            <a:pPr indent="0" marL="0">
               <a:spcBef>
                 <a:spcPts val="800"/>
               </a:spcBef>
               <a:spcAft>
-                <a:spcPts val="200"/>
-              </a:spcAft>
-              <a:buSzPct val="100000"/>
-              <a:buChar char="❑"/>
-            </a:pPr>
-            <a:r>
-              <a:rPr lang="en-US" sz="1400" b="1" u="sng" dirty="0">
+                <a:spcPts val="300"/>
+              </a:spcAft>
+              <a:buNone/>
+            </a:pPr>
+            <a:r>
+              <a:rPr lang="en-US" sz="1500" b="1" dirty="0">
                 <a:solidFill>
                   <a:srgbClr val="1F6B5E"/>
                 </a:solidFill>
@@ -24246,37 +24198,162 @@
                 <a:ea typeface="Calibri" pitchFamily="34" charset="-122"/>
                 <a:cs typeface="Calibri" pitchFamily="34" charset="-120"/>
               </a:rPr>
-              <a:t>PACTE DE STABILITÉ SOCIALE : LE GOUVERNEMENT VISE 71 % D’EXÉCUTION DES ENGAGEMENTS EN DÉCEMBRE</a:t>
-            </a:r>
-            <a:endParaRPr lang="en-US" sz="1300" dirty="0"/>
-          </a:p>
-          <a:p>
-            <a:pPr lvl="1" marL="685800" indent="-342900">
-              <a:spcAft>
-                <a:spcPts val="200"/>
-              </a:spcAft>
-              <a:buSzPct val="100000"/>
-              <a:buChar char="▪"/>
-            </a:pPr>
-            <a:r>
-              <a:rPr lang="en-US" sz="1300" dirty="0">
-                <a:solidFill>
-                  <a:srgbClr val="1F2937"/>
-                </a:solidFill>
-                <a:latin typeface="Calibri" pitchFamily="34" charset="0"/>
-                <a:ea typeface="Calibri" pitchFamily="34" charset="-122"/>
-                <a:cs typeface="Calibri" pitchFamily="34" charset="-120"/>
-              </a:rPr>
-              <a:t>Sources : </a:t>
-            </a:r>
-            <a:pPr indent="0" marL="0">
-              <a:spcAft>
-                <a:spcPts val="200"/>
-              </a:spcAft>
-              <a:buNone/>
-            </a:pPr>
-            <a:r>
-              <a:rPr lang="en-US" sz="1300" u="sng" dirty="0">
+              <a:t>Contexte</a:t>
+            </a:r>
+            <a:endParaRPr lang="en-US" sz="1400" dirty="0"/>
+          </a:p>
+          <a:p>
+            <a:pPr indent="0" marL="0">
+              <a:spcAft>
+                <a:spcPts val="300"/>
+              </a:spcAft>
+              <a:buNone/>
+            </a:pPr>
+            <a:r>
+              <a:rPr lang="en-US" sz="1400" dirty="0">
+                <a:solidFill>
+                  <a:srgbClr val="1F2937"/>
+                </a:solidFill>
+                <a:latin typeface="Calibri" pitchFamily="34" charset="0"/>
+                <a:ea typeface="Calibri" pitchFamily="34" charset="-122"/>
+                <a:cs typeface="Calibri" pitchFamily="34" charset="-120"/>
+              </a:rPr>
+              <a:t>Fait rapporté le mercredi 28 octobre 2026. Lieu : Sénégal. Actualité politique. Une seule source à ce stade (Dakar Actu) : à confirmer par un second média.</a:t>
+            </a:r>
+            <a:endParaRPr lang="en-US" sz="1400" dirty="0"/>
+          </a:p>
+          <a:p>
+            <a:pPr indent="0" marL="0">
+              <a:spcBef>
+                <a:spcPts val="800"/>
+              </a:spcBef>
+              <a:spcAft>
+                <a:spcPts val="300"/>
+              </a:spcAft>
+              <a:buNone/>
+            </a:pPr>
+            <a:r>
+              <a:rPr lang="en-US" sz="1500" b="1" dirty="0">
+                <a:solidFill>
+                  <a:srgbClr val="1F6B5E"/>
+                </a:solidFill>
+                <a:latin typeface="Calibri" pitchFamily="34" charset="0"/>
+                <a:ea typeface="Calibri" pitchFamily="34" charset="-122"/>
+                <a:cs typeface="Calibri" pitchFamily="34" charset="-120"/>
+              </a:rPr>
+              <a:t>Ce que rapportent les sources</a:t>
+            </a:r>
+            <a:endParaRPr lang="en-US" sz="1400" dirty="0"/>
+          </a:p>
+          <a:p>
+            <a:pPr indent="0" marL="0">
+              <a:spcAft>
+                <a:spcPts val="300"/>
+              </a:spcAft>
+              <a:buNone/>
+            </a:pPr>
+            <a:r>
+              <a:rPr lang="en-US" sz="1400" b="1" dirty="0">
+                <a:solidFill>
+                  <a:srgbClr val="1F2937"/>
+                </a:solidFill>
+                <a:latin typeface="Calibri" pitchFamily="34" charset="0"/>
+                <a:ea typeface="Calibri" pitchFamily="34" charset="-122"/>
+                <a:cs typeface="Calibri" pitchFamily="34" charset="-120"/>
+              </a:rPr>
+              <a:t>Dakar Actu : </a:t>
+            </a:r>
+            <a:pPr indent="0" marL="0">
+              <a:spcAft>
+                <a:spcPts val="300"/>
+              </a:spcAft>
+              <a:buNone/>
+            </a:pPr>
+            <a:r>
+              <a:rPr lang="en-US" sz="1400" i="1" dirty="0">
+                <a:solidFill>
+                  <a:srgbClr val="1F2937"/>
+                </a:solidFill>
+                <a:latin typeface="Calibri" pitchFamily="34" charset="0"/>
+                <a:ea typeface="Calibri" pitchFamily="34" charset="-122"/>
+                <a:cs typeface="Calibri" pitchFamily="34" charset="-120"/>
+              </a:rPr>
+              <a:t>« Une discussion entre deux amis a dégénéré dans la nuit du 26 au 27 octobre à Darou Khoudoss. Selon L’Observateur, Baye M. Diop a été mortellement poignardé par un conducteur de Jakarta qui a pris la fuite. Le différend portait sur la puissance et les caractéristiques des moteurs de motos Jakarta. Il s’est achevé par la mort de Baye M. »</a:t>
+            </a:r>
+            <a:endParaRPr lang="en-US" sz="1400" dirty="0"/>
+          </a:p>
+          <a:p>
+            <a:pPr indent="0" marL="0">
+              <a:spcBef>
+                <a:spcPts val="800"/>
+              </a:spcBef>
+              <a:spcAft>
+                <a:spcPts val="300"/>
+              </a:spcAft>
+              <a:buNone/>
+            </a:pPr>
+            <a:r>
+              <a:rPr lang="en-US" sz="1500" b="1" dirty="0">
+                <a:solidFill>
+                  <a:srgbClr val="1F6B5E"/>
+                </a:solidFill>
+                <a:latin typeface="Calibri" pitchFamily="34" charset="0"/>
+                <a:ea typeface="Calibri" pitchFamily="34" charset="-122"/>
+                <a:cs typeface="Calibri" pitchFamily="34" charset="-120"/>
+              </a:rPr>
+              <a:t>Enjeux sûreté</a:t>
+            </a:r>
+            <a:endParaRPr lang="en-US" sz="1400" dirty="0"/>
+          </a:p>
+          <a:p>
+            <a:pPr indent="0" marL="0">
+              <a:spcAft>
+                <a:spcPts val="300"/>
+              </a:spcAft>
+              <a:buNone/>
+            </a:pPr>
+            <a:r>
+              <a:rPr lang="en-US" sz="1400" dirty="0">
+                <a:solidFill>
+                  <a:srgbClr val="1F2937"/>
+                </a:solidFill>
+                <a:latin typeface="Calibri" pitchFamily="34" charset="0"/>
+                <a:ea typeface="Calibri" pitchFamily="34" charset="-122"/>
+                <a:cs typeface="Calibri" pitchFamily="34" charset="-120"/>
+              </a:rPr>
+              <a:t>Climat politique à suivre : en mesurer l'incidence sur la stabilité locale et les déplacements.</a:t>
+            </a:r>
+            <a:endParaRPr lang="en-US" sz="1400" dirty="0"/>
+          </a:p>
+          <a:p>
+            <a:pPr indent="0" marL="0">
+              <a:spcBef>
+                <a:spcPts val="800"/>
+              </a:spcBef>
+              <a:spcAft>
+                <a:spcPts val="300"/>
+              </a:spcAft>
+              <a:buNone/>
+            </a:pPr>
+            <a:r>
+              <a:rPr lang="en-US" sz="1400" b="1" dirty="0">
+                <a:solidFill>
+                  <a:srgbClr val="1F2937"/>
+                </a:solidFill>
+                <a:latin typeface="Calibri" pitchFamily="34" charset="0"/>
+                <a:ea typeface="Calibri" pitchFamily="34" charset="-122"/>
+                <a:cs typeface="Calibri" pitchFamily="34" charset="-120"/>
+              </a:rPr>
+              <a:t>Source : </a:t>
+            </a:r>
+            <a:pPr indent="0" marL="0">
+              <a:spcAft>
+                <a:spcPts val="300"/>
+              </a:spcAft>
+              <a:buNone/>
+            </a:pPr>
+            <a:r>
+              <a:rPr lang="en-US" sz="1400" u="sng" dirty="0">
                 <a:solidFill>
                   <a:srgbClr val="1F6B5E"/>
                 </a:solidFill>
@@ -24291,284 +24368,81 @@
                   </a:extLst>
                 </a:hlinkClick>
               </a:rPr>
-              <a:t>Pressafrik · APS — Agence Sénégalaise Presse</a:t>
-            </a:r>
-            <a:pPr indent="0" marL="0">
-              <a:spcAft>
-                <a:spcPts val="200"/>
-              </a:spcAft>
-              <a:buNone/>
-            </a:pPr>
-            <a:r>
-              <a:rPr lang="en-US" sz="1300" dirty="0">
-                <a:solidFill>
-                  <a:srgbClr val="1F2937"/>
-                </a:solidFill>
-                <a:latin typeface="Calibri" pitchFamily="34" charset="0"/>
-                <a:ea typeface="Calibri" pitchFamily="34" charset="-122"/>
-                <a:cs typeface="Calibri" pitchFamily="34" charset="-120"/>
-              </a:rPr>
-              <a:t> — 27 octobre 2026, 15 h UTC   ·   </a:t>
-            </a:r>
-            <a:pPr indent="0" marL="0">
-              <a:spcAft>
-                <a:spcPts val="200"/>
-              </a:spcAft>
-              <a:buNone/>
-            </a:pPr>
-            <a:r>
-              <a:rPr lang="en-US" sz="1300" b="1" dirty="0">
-                <a:solidFill>
-                  <a:srgbClr val="1F2937"/>
-                </a:solidFill>
-                <a:latin typeface="Calibri" pitchFamily="34" charset="0"/>
-                <a:ea typeface="Calibri" pitchFamily="34" charset="-122"/>
-                <a:cs typeface="Calibri" pitchFamily="34" charset="-120"/>
-              </a:rPr>
-              <a:t>Cotation : Confirmé</a:t>
-            </a:r>
-            <a:endParaRPr lang="en-US" sz="1300" dirty="0"/>
-          </a:p>
-          <a:p>
-            <a:pPr marL="342900" indent="-342900">
-              <a:spcBef>
-                <a:spcPts val="800"/>
-              </a:spcBef>
-              <a:spcAft>
-                <a:spcPts val="200"/>
-              </a:spcAft>
-              <a:buSzPct val="100000"/>
-              <a:buChar char="❑"/>
-            </a:pPr>
-            <a:r>
-              <a:rPr lang="en-US" sz="1400" b="1" u="sng" dirty="0">
-                <a:solidFill>
-                  <a:srgbClr val="1F6B5E"/>
-                </a:solidFill>
-                <a:latin typeface="Calibri" pitchFamily="34" charset="0"/>
-                <a:ea typeface="Calibri" pitchFamily="34" charset="-122"/>
-                <a:cs typeface="Calibri" pitchFamily="34" charset="-120"/>
-              </a:rPr>
-              <a:t>MALIKA : UN LOCATAIRE INTERPELLÉ POUR AVOIR POIGNARDÉ À MORT SON VOISIN LORS D'UNE ALTERCATION</a:t>
-            </a:r>
-            <a:endParaRPr lang="en-US" sz="1300" dirty="0"/>
-          </a:p>
-          <a:p>
-            <a:pPr lvl="1" marL="685800" indent="-342900">
-              <a:spcAft>
-                <a:spcPts val="200"/>
-              </a:spcAft>
-              <a:buSzPct val="100000"/>
-              <a:buChar char="▪"/>
-            </a:pPr>
-            <a:r>
-              <a:rPr lang="en-US" sz="1300" dirty="0">
-                <a:solidFill>
-                  <a:srgbClr val="1F2937"/>
-                </a:solidFill>
-                <a:latin typeface="Calibri" pitchFamily="34" charset="0"/>
-                <a:ea typeface="Calibri" pitchFamily="34" charset="-122"/>
-                <a:cs typeface="Calibri" pitchFamily="34" charset="-120"/>
-              </a:rPr>
-              <a:t>Source : </a:t>
-            </a:r>
-            <a:pPr indent="0" marL="0">
-              <a:spcAft>
-                <a:spcPts val="200"/>
-              </a:spcAft>
-              <a:buNone/>
-            </a:pPr>
-            <a:r>
-              <a:rPr lang="en-US" sz="1300" u="sng" dirty="0">
-                <a:solidFill>
-                  <a:srgbClr val="1F6B5E"/>
-                </a:solidFill>
-                <a:latin typeface="Calibri" pitchFamily="34" charset="0"/>
-                <a:ea typeface="Calibri" pitchFamily="34" charset="-122"/>
-                <a:cs typeface="Calibri" pitchFamily="34" charset="-120"/>
-                <a:hlinkClick r:id="rId2" invalidUrl="" action="" tgtFrame="" tooltip="" history="1" highlightClick="0" endSnd="0">
-                  <a:extLst>
-                    <a:ext uri="{A12FA001-AC4F-418D-AE19-62706E023703}">
-                      <ahyp:hlinkClr xmlns:ahyp="http://schemas.microsoft.com/office/drawing/2018/hyperlinkcolor" val="tx"/>
-                    </a:ext>
-                  </a:extLst>
-                </a:hlinkClick>
-              </a:rPr>
-              <a:t>Seneweb</a:t>
-            </a:r>
-            <a:pPr indent="0" marL="0">
-              <a:spcAft>
-                <a:spcPts val="200"/>
-              </a:spcAft>
-              <a:buNone/>
-            </a:pPr>
-            <a:r>
-              <a:rPr lang="en-US" sz="1300" dirty="0">
-                <a:solidFill>
-                  <a:srgbClr val="1F2937"/>
-                </a:solidFill>
-                <a:latin typeface="Calibri" pitchFamily="34" charset="0"/>
-                <a:ea typeface="Calibri" pitchFamily="34" charset="-122"/>
-                <a:cs typeface="Calibri" pitchFamily="34" charset="-120"/>
-              </a:rPr>
-              <a:t> — 27 octobre 2026, 13 h UTC</a:t>
-            </a:r>
-            <a:endParaRPr lang="en-US" sz="1300" dirty="0"/>
-          </a:p>
-          <a:p>
-            <a:pPr marL="342900" indent="-342900">
-              <a:spcBef>
-                <a:spcPts val="800"/>
-              </a:spcBef>
-              <a:spcAft>
-                <a:spcPts val="200"/>
-              </a:spcAft>
-              <a:buSzPct val="100000"/>
-              <a:buChar char="❑"/>
-            </a:pPr>
-            <a:r>
-              <a:rPr lang="en-US" sz="1400" b="1" u="sng" dirty="0">
-                <a:solidFill>
-                  <a:srgbClr val="1F6B5E"/>
-                </a:solidFill>
-                <a:latin typeface="Calibri" pitchFamily="34" charset="0"/>
-                <a:ea typeface="Calibri" pitchFamily="34" charset="-122"/>
-                <a:cs typeface="Calibri" pitchFamily="34" charset="-120"/>
-              </a:rPr>
-              <a:t>MEURTRE PRÉSUMÉ D’AMINATA SY À PODOR : LE SUSPECT RETROUVÉ DANS UNE CACHETTE ET ARRÊTÉ À MBACKÉ</a:t>
-            </a:r>
-            <a:endParaRPr lang="en-US" sz="1300" dirty="0"/>
-          </a:p>
-          <a:p>
-            <a:pPr lvl="1" marL="685800" indent="-342900">
-              <a:spcAft>
-                <a:spcPts val="200"/>
-              </a:spcAft>
-              <a:buSzPct val="100000"/>
-              <a:buChar char="▪"/>
-            </a:pPr>
-            <a:r>
-              <a:rPr lang="en-US" sz="1300" dirty="0">
-                <a:solidFill>
-                  <a:srgbClr val="1F2937"/>
-                </a:solidFill>
-                <a:latin typeface="Calibri" pitchFamily="34" charset="0"/>
-                <a:ea typeface="Calibri" pitchFamily="34" charset="-122"/>
-                <a:cs typeface="Calibri" pitchFamily="34" charset="-120"/>
-              </a:rPr>
-              <a:t>Sources : </a:t>
-            </a:r>
-            <a:pPr indent="0" marL="0">
-              <a:spcAft>
-                <a:spcPts val="200"/>
-              </a:spcAft>
-              <a:buNone/>
-            </a:pPr>
-            <a:r>
-              <a:rPr lang="en-US" sz="1300" u="sng" dirty="0">
-                <a:solidFill>
-                  <a:srgbClr val="1F6B5E"/>
-                </a:solidFill>
-                <a:latin typeface="Calibri" pitchFamily="34" charset="0"/>
-                <a:ea typeface="Calibri" pitchFamily="34" charset="-122"/>
-                <a:cs typeface="Calibri" pitchFamily="34" charset="-120"/>
-                <a:hlinkClick r:id="rId3" invalidUrl="" action="" tgtFrame="" tooltip="" history="1" highlightClick="0" endSnd="0">
-                  <a:extLst>
-                    <a:ext uri="{A12FA001-AC4F-418D-AE19-62706E023703}">
-                      <ahyp:hlinkClr xmlns:ahyp="http://schemas.microsoft.com/office/drawing/2018/hyperlinkcolor" val="tx"/>
-                    </a:ext>
-                  </a:extLst>
-                </a:hlinkClick>
-              </a:rPr>
-              <a:t>Dakar Actu · Seneweb</a:t>
-            </a:r>
-            <a:pPr indent="0" marL="0">
-              <a:spcAft>
-                <a:spcPts val="200"/>
-              </a:spcAft>
-              <a:buNone/>
-            </a:pPr>
-            <a:r>
-              <a:rPr lang="en-US" sz="1300" dirty="0">
-                <a:solidFill>
-                  <a:srgbClr val="1F2937"/>
-                </a:solidFill>
-                <a:latin typeface="Calibri" pitchFamily="34" charset="0"/>
-                <a:ea typeface="Calibri" pitchFamily="34" charset="-122"/>
-                <a:cs typeface="Calibri" pitchFamily="34" charset="-120"/>
-              </a:rPr>
-              <a:t> — 27 octobre 2026, 11 h UTC   ·   </a:t>
-            </a:r>
-            <a:pPr indent="0" marL="0">
-              <a:spcAft>
-                <a:spcPts val="200"/>
-              </a:spcAft>
-              <a:buNone/>
-            </a:pPr>
-            <a:r>
-              <a:rPr lang="en-US" sz="1300" b="1" dirty="0">
-                <a:solidFill>
-                  <a:srgbClr val="1F2937"/>
-                </a:solidFill>
-                <a:latin typeface="Calibri" pitchFamily="34" charset="0"/>
-                <a:ea typeface="Calibri" pitchFamily="34" charset="-122"/>
-                <a:cs typeface="Calibri" pitchFamily="34" charset="-120"/>
-              </a:rPr>
-              <a:t>Cotation : Confirmé</a:t>
-            </a:r>
-            <a:endParaRPr lang="en-US" sz="1300" dirty="0"/>
-          </a:p>
-          <a:p>
-            <a:pPr marL="342900" indent="-342900">
-              <a:spcBef>
-                <a:spcPts val="800"/>
-              </a:spcBef>
-              <a:spcAft>
-                <a:spcPts val="200"/>
-              </a:spcAft>
-              <a:buSzPct val="100000"/>
-              <a:buChar char="❑"/>
-            </a:pPr>
-            <a:r>
-              <a:rPr lang="en-US" sz="1400" b="1" u="sng" dirty="0">
-                <a:solidFill>
-                  <a:srgbClr val="1F6B5E"/>
-                </a:solidFill>
-                <a:latin typeface="Calibri" pitchFamily="34" charset="0"/>
-                <a:ea typeface="Calibri" pitchFamily="34" charset="-122"/>
-                <a:cs typeface="Calibri" pitchFamily="34" charset="-120"/>
-              </a:rPr>
-              <a:t>KARAMO CISSÉ NDIAYE ARRÊTÉ POUR LE MEURTRE D’AMINATA SY APRÈS UNE DISPUTE VIOLENTE</a:t>
-            </a:r>
-            <a:endParaRPr lang="en-US" sz="1300" dirty="0"/>
-          </a:p>
-          <a:p>
-            <a:pPr lvl="1" marL="685800" indent="-342900">
-              <a:spcAft>
-                <a:spcPts val="200"/>
-              </a:spcAft>
-              <a:buSzPct val="100000"/>
-              <a:buChar char="▪"/>
-            </a:pPr>
-            <a:r>
-              <a:rPr lang="en-US" sz="1300" dirty="0">
-                <a:solidFill>
-                  <a:srgbClr val="1F2937"/>
-                </a:solidFill>
-                <a:latin typeface="Calibri" pitchFamily="34" charset="0"/>
-                <a:ea typeface="Calibri" pitchFamily="34" charset="-122"/>
-                <a:cs typeface="Calibri" pitchFamily="34" charset="-120"/>
-              </a:rPr>
-              <a:t>Source : </a:t>
-            </a:r>
-            <a:pPr indent="0" marL="0">
-              <a:spcAft>
-                <a:spcPts val="200"/>
-              </a:spcAft>
-              <a:buNone/>
-            </a:pPr>
-            <a:r>
-              <a:rPr lang="en-US" sz="1300" u="sng" dirty="0">
+              <a:t>Dakar Actu</a:t>
+            </a:r>
+            <a:pPr indent="0" marL="0">
+              <a:spcAft>
+                <a:spcPts val="300"/>
+              </a:spcAft>
+              <a:buNone/>
+            </a:pPr>
+            <a:r>
+              <a:rPr lang="en-US" sz="1400" b="1" dirty="0">
+                <a:solidFill>
+                  <a:srgbClr val="1F2937"/>
+                </a:solidFill>
+                <a:latin typeface="Calibri" pitchFamily="34" charset="0"/>
+                <a:ea typeface="Calibri" pitchFamily="34" charset="-122"/>
+                <a:cs typeface="Calibri" pitchFamily="34" charset="-120"/>
+              </a:rPr>
+              <a:t> — 28 octobre 2026, 8 h UTC   ·   Cotation : Probable</a:t>
+            </a:r>
+            <a:endParaRPr lang="en-US" sz="1400" dirty="0"/>
+          </a:p>
+        </p:txBody>
+      </p:sp>
+      <p:pic>
+        <p:nvPicPr>
+          <p:cNvPr id="12" name="Image 0" descr="preencoded.png">
+            <a:hlinkClick r:id="rId3" tooltip=""/>
+          </p:cNvPr>
+          <p:cNvPicPr>
+            <a:picLocks noChangeAspect="1"/>
+          </p:cNvPicPr>
+          <p:nvPr/>
+        </p:nvPicPr>
+        <p:blipFill>
+          <a:blip r:embed="rId2"/>
+          <a:stretch>
+            <a:fillRect/>
+          </a:stretch>
+        </p:blipFill>
+        <p:spPr>
+          <a:xfrm>
+            <a:off x="7635240" y="2075688"/>
+            <a:ext cx="4114800" cy="2314575"/>
+          </a:xfrm>
+          <a:prstGeom prst="rect">
+            <a:avLst/>
+          </a:prstGeom>
+        </p:spPr>
+      </p:pic>
+      <p:sp>
+        <p:nvSpPr>
+          <p:cNvPr id="13" name="Text 10"/>
+          <p:cNvSpPr/>
+          <p:nvPr/>
+        </p:nvSpPr>
+        <p:spPr>
+          <a:xfrm>
+            <a:off x="7635240" y="4426839"/>
+            <a:ext cx="4114800" cy="256032"/>
+          </a:xfrm>
+          <a:prstGeom prst="rect">
+            <a:avLst/>
+          </a:prstGeom>
+          <a:noFill/>
+          <a:ln/>
+        </p:spPr>
+        <p:txBody>
+          <a:bodyPr wrap="square" rtlCol="0" anchor="ctr"/>
+          <a:lstStyle/>
+          <a:p>
+            <a:pPr algn="r" indent="0" marL="0">
+              <a:buNone/>
+            </a:pPr>
+            <a:r>
+              <a:rPr lang="en-US" sz="900" u="sng" dirty="0">
                 <a:solidFill>
                   <a:srgbClr val="1F6B5E"/>
                 </a:solidFill>
@@ -24583,118 +24457,15 @@
                   </a:extLst>
                 </a:hlinkClick>
               </a:rPr>
-              <a:t>SeneNews</a:t>
-            </a:r>
-            <a:pPr indent="0" marL="0">
-              <a:spcAft>
-                <a:spcPts val="200"/>
-              </a:spcAft>
-              <a:buNone/>
-            </a:pPr>
-            <a:r>
-              <a:rPr lang="en-US" sz="1300" dirty="0">
-                <a:solidFill>
-                  <a:srgbClr val="1F2937"/>
-                </a:solidFill>
-                <a:latin typeface="Calibri" pitchFamily="34" charset="0"/>
-                <a:ea typeface="Calibri" pitchFamily="34" charset="-122"/>
-                <a:cs typeface="Calibri" pitchFamily="34" charset="-120"/>
-              </a:rPr>
-              <a:t> — 27 octobre 2026, 8 h UTC</a:t>
-            </a:r>
-            <a:endParaRPr lang="en-US" sz="1300" dirty="0"/>
-          </a:p>
-          <a:p>
-            <a:pPr marL="342900" indent="-342900">
-              <a:spcBef>
-                <a:spcPts val="800"/>
-              </a:spcBef>
-              <a:spcAft>
-                <a:spcPts val="200"/>
-              </a:spcAft>
-              <a:buSzPct val="100000"/>
-              <a:buChar char="❑"/>
-            </a:pPr>
-            <a:r>
-              <a:rPr lang="en-US" sz="1400" b="1" u="sng" dirty="0">
-                <a:solidFill>
-                  <a:srgbClr val="1F6B5E"/>
-                </a:solidFill>
-                <a:latin typeface="Calibri" pitchFamily="34" charset="0"/>
-                <a:ea typeface="Calibri" pitchFamily="34" charset="-122"/>
-                <a:cs typeface="Calibri" pitchFamily="34" charset="-120"/>
-              </a:rPr>
-              <a:t>DRAME À ZIGUINCHOR : UN COMMERÇANT RETROUVÉ MORT PENDU APRÈS LA PERTE DE 800 000 F CFA</a:t>
-            </a:r>
-            <a:endParaRPr lang="en-US" sz="1300" dirty="0"/>
-          </a:p>
-          <a:p>
-            <a:pPr lvl="1" marL="685800" indent="-342900">
-              <a:spcAft>
-                <a:spcPts val="200"/>
-              </a:spcAft>
-              <a:buSzPct val="100000"/>
-              <a:buChar char="▪"/>
-            </a:pPr>
-            <a:r>
-              <a:rPr lang="en-US" sz="1300" dirty="0">
-                <a:solidFill>
-                  <a:srgbClr val="1F2937"/>
-                </a:solidFill>
-                <a:latin typeface="Calibri" pitchFamily="34" charset="0"/>
-                <a:ea typeface="Calibri" pitchFamily="34" charset="-122"/>
-                <a:cs typeface="Calibri" pitchFamily="34" charset="-120"/>
-              </a:rPr>
-              <a:t>Source : </a:t>
-            </a:r>
-            <a:pPr indent="0" marL="0">
-              <a:spcAft>
-                <a:spcPts val="200"/>
-              </a:spcAft>
-              <a:buNone/>
-            </a:pPr>
-            <a:r>
-              <a:rPr lang="en-US" sz="1300" u="sng" dirty="0">
-                <a:solidFill>
-                  <a:srgbClr val="1F6B5E"/>
-                </a:solidFill>
-                <a:latin typeface="Calibri" pitchFamily="34" charset="0"/>
-                <a:ea typeface="Calibri" pitchFamily="34" charset="-122"/>
-                <a:cs typeface="Calibri" pitchFamily="34" charset="-120"/>
-                <a:hlinkClick r:id="rId5" invalidUrl="" action="" tgtFrame="" tooltip="" history="1" highlightClick="0" endSnd="0">
-                  <a:extLst>
-                    <a:ext uri="{A12FA001-AC4F-418D-AE19-62706E023703}">
-                      <ahyp:hlinkClr xmlns:ahyp="http://schemas.microsoft.com/office/drawing/2018/hyperlinkcolor" val="tx"/>
-                    </a:ext>
-                  </a:extLst>
-                </a:hlinkClick>
-              </a:rPr>
-              <a:t>Seneweb</a:t>
-            </a:r>
-            <a:pPr indent="0" marL="0">
-              <a:spcAft>
-                <a:spcPts val="200"/>
-              </a:spcAft>
-              <a:buNone/>
-            </a:pPr>
-            <a:r>
-              <a:rPr lang="en-US" sz="1300" dirty="0">
-                <a:solidFill>
-                  <a:srgbClr val="1F2937"/>
-                </a:solidFill>
-                <a:latin typeface="Calibri" pitchFamily="34" charset="0"/>
-                <a:ea typeface="Calibri" pitchFamily="34" charset="-122"/>
-                <a:cs typeface="Calibri" pitchFamily="34" charset="-120"/>
-              </a:rPr>
-              <a:t> — 26 octobre 2026, 23 h UTC</a:t>
-            </a:r>
-            <a:endParaRPr lang="en-US" sz="1300" dirty="0"/>
-          </a:p>
-        </p:txBody>
-      </p:sp>
-      <p:sp>
-        <p:nvSpPr>
-          <p:cNvPr id="10" name="Text 8"/>
+              <a:t>Photo : © dakaractu.com</a:t>
+            </a:r>
+            <a:endParaRPr lang="en-US" sz="900" dirty="0"/>
+          </a:p>
+        </p:txBody>
+      </p:sp>
+      <p:sp>
+        <p:nvSpPr>
+          <p:cNvPr id="14" name="Text 11"/>
           <p:cNvSpPr/>
           <p:nvPr/>
         </p:nvSpPr>
@@ -24739,7 +24510,7 @@
       </p:sp>
       <p:sp>
         <p:nvSpPr>
-          <p:cNvPr id="11" name="Text 9"/>
+          <p:cNvPr id="15" name="Text 12"/>
           <p:cNvSpPr/>
           <p:nvPr/>
         </p:nvSpPr>
@@ -24770,7 +24541,7 @@
                 <a:ea typeface="Calibri" pitchFamily="34" charset="-122"/>
                 <a:cs typeface="Calibri" pitchFamily="34" charset="-120"/>
               </a:rPr>
-              <a:t>|  27/10/26   |   36</a:t>
+              <a:t>|  28/10/26   |   36</a:t>
             </a:r>
             <a:endParaRPr lang="en-US" sz="1000" dirty="0"/>
           </a:p>
@@ -25043,7 +24814,7 @@
                 <a:ea typeface="Calibri" pitchFamily="34" charset="-122"/>
                 <a:cs typeface="Calibri" pitchFamily="34" charset="-120"/>
               </a:rPr>
-              <a:t>« ILS L’ONT DÉCOUVERT PENDU » : LE GRAND COMMERÇANT ABDOULAYE DIALLO S’EST DONNÉ LA MORT DANS SA BOUTIQUE</a:t>
+              <a:t>MORT D’AMINATA SY : LE SUSPECT INVOQUE UNE CHUTE, LES CONSTATATIONS DÉCRIVENT DES VIOLENCES</a:t>
             </a:r>
             <a:endParaRPr lang="en-US" sz="1300" dirty="0"/>
           </a:p>
@@ -25088,7 +24859,7 @@
                   </a:extLst>
                 </a:hlinkClick>
               </a:rPr>
-              <a:t>SeneNews</a:t>
+              <a:t>Dakar Actu</a:t>
             </a:r>
             <a:pPr indent="0" marL="0">
               <a:spcAft>
@@ -25105,7 +24876,7 @@
                 <a:ea typeface="Calibri" pitchFamily="34" charset="-122"/>
                 <a:cs typeface="Calibri" pitchFamily="34" charset="-120"/>
               </a:rPr>
-              <a:t> — 26 octobre 2026, 21 h UTC   ·   </a:t>
+              <a:t> — 28 octobre 2026, 8 h UTC   ·   </a:t>
             </a:r>
             <a:pPr indent="0" marL="0">
               <a:spcAft>
@@ -25122,7 +24893,7 @@
                 <a:ea typeface="Calibri" pitchFamily="34" charset="-122"/>
                 <a:cs typeface="Calibri" pitchFamily="34" charset="-120"/>
               </a:rPr>
-              <a:t>Cotation : Non confirmé</a:t>
+              <a:t>Cotation : Probable</a:t>
             </a:r>
             <a:endParaRPr lang="en-US" sz="1300" dirty="0"/>
           </a:p>
@@ -25146,7 +24917,7 @@
                 <a:ea typeface="Calibri" pitchFamily="34" charset="-122"/>
                 <a:cs typeface="Calibri" pitchFamily="34" charset="-120"/>
               </a:rPr>
-              <a:t>ZIGUINCHOR : UN JEUNE HOMME RETROUVÉ MORT DANS UNE BOUTIQUE À TILÈNE</a:t>
+              <a:t>TALIBOU DIALLO TUÉ AU COU ET AU THORAX : UNE DISPUTE ENTRE COLOCATAIRES POUR UNE PRISE ÉLECTRIQUE, AU CŒUR DU DRAME</a:t>
             </a:r>
             <a:endParaRPr lang="en-US" sz="1300" dirty="0"/>
           </a:p>
@@ -25208,7 +24979,24 @@
                 <a:ea typeface="Calibri" pitchFamily="34" charset="-122"/>
                 <a:cs typeface="Calibri" pitchFamily="34" charset="-120"/>
               </a:rPr>
-              <a:t> — 26 octobre 2026, 17 h UTC</a:t>
+              <a:t> — 28 octobre 2026, 8 h UTC   ·   </a:t>
+            </a:r>
+            <a:pPr indent="0" marL="0">
+              <a:spcAft>
+                <a:spcPts val="200"/>
+              </a:spcAft>
+              <a:buNone/>
+            </a:pPr>
+            <a:r>
+              <a:rPr lang="en-US" sz="1300" b="1" dirty="0">
+                <a:solidFill>
+                  <a:srgbClr val="1F2937"/>
+                </a:solidFill>
+                <a:latin typeface="Calibri" pitchFamily="34" charset="0"/>
+                <a:ea typeface="Calibri" pitchFamily="34" charset="-122"/>
+                <a:cs typeface="Calibri" pitchFamily="34" charset="-120"/>
+              </a:rPr>
+              <a:t>Cotation : Probable</a:t>
             </a:r>
             <a:endParaRPr lang="en-US" sz="1300" dirty="0"/>
           </a:p>
@@ -25232,7 +25020,7 @@
                 <a:ea typeface="Calibri" pitchFamily="34" charset="-122"/>
                 <a:cs typeface="Calibri" pitchFamily="34" charset="-120"/>
               </a:rPr>
-              <a:t>FÉMINICIDES AU SÉNÉGAL – AMINATA SY ET MAME DIARRA SOW TUÉES LE MÊME JOUR : SEYDI GASSAMA LANCE UN CRI D’ALARME</a:t>
+              <a:t>LYCÉENNE TUÉE À PODOR : DE L'HISTOIRE D'AMOUR AU DRAME</a:t>
             </a:r>
             <a:endParaRPr lang="en-US" sz="1300" dirty="0"/>
           </a:p>
@@ -25277,7 +25065,7 @@
                   </a:extLst>
                 </a:hlinkClick>
               </a:rPr>
-              <a:t>SeneNews</a:t>
+              <a:t>Seneweb</a:t>
             </a:r>
             <a:pPr indent="0" marL="0">
               <a:spcAft>
@@ -25294,7 +25082,24 @@
                 <a:ea typeface="Calibri" pitchFamily="34" charset="-122"/>
                 <a:cs typeface="Calibri" pitchFamily="34" charset="-120"/>
               </a:rPr>
-              <a:t> — 26 octobre 2026, 17 h UTC</a:t>
+              <a:t> — 28 octobre 2026, 7 h UTC   ·   </a:t>
+            </a:r>
+            <a:pPr indent="0" marL="0">
+              <a:spcAft>
+                <a:spcPts val="200"/>
+              </a:spcAft>
+              <a:buNone/>
+            </a:pPr>
+            <a:r>
+              <a:rPr lang="en-US" sz="1300" b="1" dirty="0">
+                <a:solidFill>
+                  <a:srgbClr val="1F2937"/>
+                </a:solidFill>
+                <a:latin typeface="Calibri" pitchFamily="34" charset="0"/>
+                <a:ea typeface="Calibri" pitchFamily="34" charset="-122"/>
+                <a:cs typeface="Calibri" pitchFamily="34" charset="-120"/>
+              </a:rPr>
+              <a:t>Cotation : Probable</a:t>
             </a:r>
             <a:endParaRPr lang="en-US" sz="1300" dirty="0"/>
           </a:p>
@@ -25318,7 +25123,7 @@
                 <a:ea typeface="Calibri" pitchFamily="34" charset="-122"/>
                 <a:cs typeface="Calibri" pitchFamily="34" charset="-120"/>
               </a:rPr>
-              <a:t>TROPHÉE ANPS : LE TROPHÉE DU MEILLEUR LUTTEUR EN LUTTE AVEC FRAPPE PORTE DÉSORMAIS LE NOM DE MANGA II</a:t>
+              <a:t>IMMEUBLE EFFONDRÉ À THIÈS : UN MORT ET DEUX BLESSÉS, SELON LE BILAN PROVISOIRE</a:t>
             </a:r>
             <a:endParaRPr lang="en-US" sz="1300" dirty="0"/>
           </a:p>
@@ -25339,7 +25144,7 @@
                 <a:ea typeface="Calibri" pitchFamily="34" charset="-122"/>
                 <a:cs typeface="Calibri" pitchFamily="34" charset="-120"/>
               </a:rPr>
-              <a:t>Source : </a:t>
+              <a:t>Sources : </a:t>
             </a:r>
             <a:pPr indent="0" marL="0">
               <a:spcAft>
@@ -25363,7 +25168,7 @@
                   </a:extLst>
                 </a:hlinkClick>
               </a:rPr>
-              <a:t>wiwsport</a:t>
+              <a:t>APS — Agence Sénégalaise Presse · Pressafrik</a:t>
             </a:r>
             <a:pPr indent="0" marL="0">
               <a:spcAft>
@@ -25380,7 +25185,127 @@
                 <a:ea typeface="Calibri" pitchFamily="34" charset="-122"/>
                 <a:cs typeface="Calibri" pitchFamily="34" charset="-120"/>
               </a:rPr>
-              <a:t> — 26 octobre 2026, 13 h UTC</a:t>
+              <a:t> — 27 octobre 2026, 19 h UTC   ·   </a:t>
+            </a:r>
+            <a:pPr indent="0" marL="0">
+              <a:spcAft>
+                <a:spcPts val="200"/>
+              </a:spcAft>
+              <a:buNone/>
+            </a:pPr>
+            <a:r>
+              <a:rPr lang="en-US" sz="1300" b="1" dirty="0">
+                <a:solidFill>
+                  <a:srgbClr val="1F2937"/>
+                </a:solidFill>
+                <a:latin typeface="Calibri" pitchFamily="34" charset="0"/>
+                <a:ea typeface="Calibri" pitchFamily="34" charset="-122"/>
+                <a:cs typeface="Calibri" pitchFamily="34" charset="-120"/>
+              </a:rPr>
+              <a:t>Cotation : Confirmé</a:t>
+            </a:r>
+            <a:endParaRPr lang="en-US" sz="1300" dirty="0"/>
+          </a:p>
+          <a:p>
+            <a:pPr marL="342900" indent="-342900">
+              <a:spcBef>
+                <a:spcPts val="800"/>
+              </a:spcBef>
+              <a:spcAft>
+                <a:spcPts val="200"/>
+              </a:spcAft>
+              <a:buSzPct val="100000"/>
+              <a:buChar char="❑"/>
+            </a:pPr>
+            <a:r>
+              <a:rPr lang="en-US" sz="1400" b="1" u="sng" dirty="0">
+                <a:solidFill>
+                  <a:srgbClr val="1F6B5E"/>
+                </a:solidFill>
+                <a:latin typeface="Calibri" pitchFamily="34" charset="0"/>
+                <a:ea typeface="Calibri" pitchFamily="34" charset="-122"/>
+                <a:cs typeface="Calibri" pitchFamily="34" charset="-120"/>
+              </a:rPr>
+              <a:t>PACTE DE STABILITÉ SOCIALE : LE GOUVERNEMENT VISE 71 % D’EXÉCUTION DES ENGAGEMENTS EN DÉCEMBRE</a:t>
+            </a:r>
+            <a:endParaRPr lang="en-US" sz="1300" dirty="0"/>
+          </a:p>
+          <a:p>
+            <a:pPr lvl="1" marL="685800" indent="-342900">
+              <a:spcAft>
+                <a:spcPts val="200"/>
+              </a:spcAft>
+              <a:buSzPct val="100000"/>
+              <a:buChar char="▪"/>
+            </a:pPr>
+            <a:r>
+              <a:rPr lang="en-US" sz="1300" dirty="0">
+                <a:solidFill>
+                  <a:srgbClr val="1F2937"/>
+                </a:solidFill>
+                <a:latin typeface="Calibri" pitchFamily="34" charset="0"/>
+                <a:ea typeface="Calibri" pitchFamily="34" charset="-122"/>
+                <a:cs typeface="Calibri" pitchFamily="34" charset="-120"/>
+              </a:rPr>
+              <a:t>Sources : </a:t>
+            </a:r>
+            <a:pPr indent="0" marL="0">
+              <a:spcAft>
+                <a:spcPts val="200"/>
+              </a:spcAft>
+              <a:buNone/>
+            </a:pPr>
+            <a:r>
+              <a:rPr lang="en-US" sz="1300" u="sng" dirty="0">
+                <a:solidFill>
+                  <a:srgbClr val="1F6B5E"/>
+                </a:solidFill>
+                <a:latin typeface="Calibri" pitchFamily="34" charset="0"/>
+                <a:ea typeface="Calibri" pitchFamily="34" charset="-122"/>
+                <a:cs typeface="Calibri" pitchFamily="34" charset="-120"/>
+                <a:hlinkClick r:id="rId5" invalidUrl="" action="" tgtFrame="" tooltip="" history="1" highlightClick="0" endSnd="0">
+                  <a:extLst>
+                    <a:ext uri="{A12FA001-AC4F-418D-AE19-62706E023703}">
+                      <ahyp:hlinkClr xmlns:ahyp="http://schemas.microsoft.com/office/drawing/2018/hyperlinkcolor" val="tx"/>
+                    </a:ext>
+                  </a:extLst>
+                </a:hlinkClick>
+              </a:rPr>
+              <a:t>Pressafrik · APS — Agence Sénégalaise Presse</a:t>
+            </a:r>
+            <a:pPr indent="0" marL="0">
+              <a:spcAft>
+                <a:spcPts val="200"/>
+              </a:spcAft>
+              <a:buNone/>
+            </a:pPr>
+            <a:r>
+              <a:rPr lang="en-US" sz="1300" dirty="0">
+                <a:solidFill>
+                  <a:srgbClr val="1F2937"/>
+                </a:solidFill>
+                <a:latin typeface="Calibri" pitchFamily="34" charset="0"/>
+                <a:ea typeface="Calibri" pitchFamily="34" charset="-122"/>
+                <a:cs typeface="Calibri" pitchFamily="34" charset="-120"/>
+              </a:rPr>
+              <a:t> — 27 octobre 2026, 15 h UTC   ·   </a:t>
+            </a:r>
+            <a:pPr indent="0" marL="0">
+              <a:spcAft>
+                <a:spcPts val="200"/>
+              </a:spcAft>
+              <a:buNone/>
+            </a:pPr>
+            <a:r>
+              <a:rPr lang="en-US" sz="1300" b="1" dirty="0">
+                <a:solidFill>
+                  <a:srgbClr val="1F2937"/>
+                </a:solidFill>
+                <a:latin typeface="Calibri" pitchFamily="34" charset="0"/>
+                <a:ea typeface="Calibri" pitchFamily="34" charset="-122"/>
+                <a:cs typeface="Calibri" pitchFamily="34" charset="-120"/>
+              </a:rPr>
+              <a:t>Cotation : Confirmé</a:t>
             </a:r>
             <a:endParaRPr lang="en-US" sz="1300" dirty="0"/>
           </a:p>
@@ -25464,7 +25389,7 @@
                 <a:ea typeface="Calibri" pitchFamily="34" charset="-122"/>
                 <a:cs typeface="Calibri" pitchFamily="34" charset="-120"/>
               </a:rPr>
-              <a:t>|  27/10/26   |   37</a:t>
+              <a:t>|  28/10/26   |   37</a:t>
             </a:r>
             <a:endParaRPr lang="en-US" sz="1000" dirty="0"/>
           </a:p>
@@ -25481,6 +25406,700 @@
 <file path=ppt/slides/slide38.xml><?xml version="1.0" encoding="utf-8"?>
 <p:sld xmlns:a="http://schemas.openxmlformats.org/drawingml/2006/main" xmlns:r="http://schemas.openxmlformats.org/officeDocument/2006/relationships" xmlns:p="http://schemas.openxmlformats.org/presentationml/2006/main">
   <p:cSld name="Slide 38">
+    <p:spTree>
+      <p:nvGrpSpPr>
+        <p:cNvPr id="1" name=""/>
+        <p:cNvGrpSpPr/>
+        <p:nvPr/>
+      </p:nvGrpSpPr>
+      <p:grpSpPr>
+        <a:xfrm>
+          <a:off x="0" y="0"/>
+          <a:ext cx="0" cy="0"/>
+          <a:chOff x="0" y="0"/>
+          <a:chExt cx="0" cy="0"/>
+        </a:xfrm>
+      </p:grpSpPr>
+      <p:sp>
+        <p:nvSpPr>
+          <p:cNvPr id="2" name="Text 0"/>
+          <p:cNvSpPr/>
+          <p:nvPr/>
+        </p:nvSpPr>
+        <p:spPr>
+          <a:xfrm>
+            <a:off x="457200" y="274320"/>
+            <a:ext cx="640080" cy="548640"/>
+          </a:xfrm>
+          <a:prstGeom prst="rect">
+            <a:avLst/>
+          </a:prstGeom>
+          <a:solidFill>
+            <a:srgbClr val="1F6B5E"/>
+          </a:solidFill>
+          <a:ln/>
+        </p:spPr>
+        <p:txBody>
+          <a:bodyPr wrap="square" rtlCol="0" anchor="ctr">
+            <a:normAutofit/>
+          </a:bodyPr>
+          <a:lstStyle/>
+          <a:p>
+            <a:pPr algn="ctr" indent="0" marL="0">
+              <a:buNone/>
+            </a:pPr>
+            <a:r>
+              <a:rPr lang="en-US" sz="2400" dirty="0">
+                <a:solidFill>
+                  <a:srgbClr val="FFFFFF"/>
+                </a:solidFill>
+                <a:latin typeface="Arial Narrow" pitchFamily="34" charset="0"/>
+                <a:ea typeface="Arial Narrow" pitchFamily="34" charset="-122"/>
+                <a:cs typeface="Arial Narrow" pitchFamily="34" charset="-120"/>
+              </a:rPr>
+              <a:t>IX</a:t>
+            </a:r>
+            <a:endParaRPr lang="en-US" sz="2400" dirty="0"/>
+          </a:p>
+        </p:txBody>
+      </p:sp>
+      <p:sp>
+        <p:nvSpPr>
+          <p:cNvPr id="3" name="Text 1"/>
+          <p:cNvSpPr/>
+          <p:nvPr/>
+        </p:nvSpPr>
+        <p:spPr>
+          <a:xfrm>
+            <a:off x="1234440" y="274320"/>
+            <a:ext cx="8961120" cy="548640"/>
+          </a:xfrm>
+          <a:prstGeom prst="rect">
+            <a:avLst/>
+          </a:prstGeom>
+          <a:noFill/>
+          <a:ln/>
+        </p:spPr>
+        <p:txBody>
+          <a:bodyPr wrap="square" rtlCol="0" anchor="ctr"/>
+          <a:lstStyle/>
+          <a:p>
+            <a:pPr indent="0" marL="0">
+              <a:buNone/>
+            </a:pPr>
+            <a:r>
+              <a:rPr lang="en-US" sz="2800" dirty="0">
+                <a:solidFill>
+                  <a:srgbClr val="1F6B5E"/>
+                </a:solidFill>
+                <a:latin typeface="Arial Narrow" pitchFamily="34" charset="0"/>
+                <a:ea typeface="Arial Narrow" pitchFamily="34" charset="-122"/>
+                <a:cs typeface="Arial Narrow" pitchFamily="34" charset="-120"/>
+              </a:rPr>
+              <a:t>Sénégal</a:t>
+            </a:r>
+            <a:endParaRPr lang="en-US" sz="2800" dirty="0"/>
+          </a:p>
+        </p:txBody>
+      </p:sp>
+      <p:sp>
+        <p:nvSpPr>
+          <p:cNvPr id="4" name="Shape 2"/>
+          <p:cNvSpPr/>
+          <p:nvPr/>
+        </p:nvSpPr>
+        <p:spPr>
+          <a:xfrm>
+            <a:off x="10881360" y="274320"/>
+            <a:ext cx="301752" cy="566928"/>
+          </a:xfrm>
+          <a:prstGeom prst="rect">
+            <a:avLst/>
+          </a:prstGeom>
+          <a:solidFill>
+            <a:srgbClr val="00853F"/>
+          </a:solidFill>
+          <a:ln w="12700">
+            <a:solidFill>
+              <a:srgbClr val="00853F"/>
+            </a:solidFill>
+            <a:prstDash val="solid"/>
+          </a:ln>
+        </p:spPr>
+      </p:sp>
+      <p:sp>
+        <p:nvSpPr>
+          <p:cNvPr id="5" name="Shape 3"/>
+          <p:cNvSpPr/>
+          <p:nvPr/>
+        </p:nvSpPr>
+        <p:spPr>
+          <a:xfrm>
+            <a:off x="11183112" y="274320"/>
+            <a:ext cx="301752" cy="566928"/>
+          </a:xfrm>
+          <a:prstGeom prst="rect">
+            <a:avLst/>
+          </a:prstGeom>
+          <a:solidFill>
+            <a:srgbClr val="FDEF42"/>
+          </a:solidFill>
+          <a:ln w="12700">
+            <a:solidFill>
+              <a:srgbClr val="FDEF42"/>
+            </a:solidFill>
+            <a:prstDash val="solid"/>
+          </a:ln>
+        </p:spPr>
+      </p:sp>
+      <p:sp>
+        <p:nvSpPr>
+          <p:cNvPr id="6" name="Shape 4"/>
+          <p:cNvSpPr/>
+          <p:nvPr/>
+        </p:nvSpPr>
+        <p:spPr>
+          <a:xfrm>
+            <a:off x="11484864" y="274320"/>
+            <a:ext cx="301752" cy="566928"/>
+          </a:xfrm>
+          <a:prstGeom prst="rect">
+            <a:avLst/>
+          </a:prstGeom>
+          <a:solidFill>
+            <a:srgbClr val="E31B23"/>
+          </a:solidFill>
+          <a:ln w="12700">
+            <a:solidFill>
+              <a:srgbClr val="E31B23"/>
+            </a:solidFill>
+            <a:prstDash val="solid"/>
+          </a:ln>
+        </p:spPr>
+      </p:sp>
+      <p:sp>
+        <p:nvSpPr>
+          <p:cNvPr id="7" name="Shape 5"/>
+          <p:cNvSpPr/>
+          <p:nvPr/>
+        </p:nvSpPr>
+        <p:spPr>
+          <a:xfrm>
+            <a:off x="10881360" y="274320"/>
+            <a:ext cx="905256" cy="566928"/>
+          </a:xfrm>
+          <a:prstGeom prst="rect">
+            <a:avLst/>
+          </a:prstGeom>
+          <a:ln w="6350">
+            <a:solidFill>
+              <a:srgbClr val="1F2937"/>
+            </a:solidFill>
+            <a:prstDash val="solid"/>
+          </a:ln>
+        </p:spPr>
+      </p:sp>
+      <p:sp>
+        <p:nvSpPr>
+          <p:cNvPr id="8" name="Shape 6"/>
+          <p:cNvSpPr/>
+          <p:nvPr/>
+        </p:nvSpPr>
+        <p:spPr>
+          <a:xfrm>
+            <a:off x="457200" y="960120"/>
+            <a:ext cx="11292840" cy="0"/>
+          </a:xfrm>
+          <a:prstGeom prst="line">
+            <a:avLst/>
+          </a:prstGeom>
+          <a:noFill/>
+          <a:ln w="6350">
+            <a:solidFill>
+              <a:srgbClr val="A3A3A3"/>
+            </a:solidFill>
+            <a:prstDash val="solid"/>
+          </a:ln>
+        </p:spPr>
+      </p:sp>
+      <p:sp>
+        <p:nvSpPr>
+          <p:cNvPr id="9" name="Text 7"/>
+          <p:cNvSpPr/>
+          <p:nvPr/>
+        </p:nvSpPr>
+        <p:spPr>
+          <a:xfrm>
+            <a:off x="640080" y="1188720"/>
+            <a:ext cx="10972800" cy="4663440"/>
+          </a:xfrm>
+          <a:prstGeom prst="rect">
+            <a:avLst/>
+          </a:prstGeom>
+          <a:noFill/>
+          <a:ln/>
+        </p:spPr>
+        <p:txBody>
+          <a:bodyPr wrap="square" rtlCol="0" anchor="t"/>
+          <a:lstStyle/>
+          <a:p>
+            <a:pPr marL="342900" indent="-342900">
+              <a:spcBef>
+                <a:spcPts val="800"/>
+              </a:spcBef>
+              <a:spcAft>
+                <a:spcPts val="200"/>
+              </a:spcAft>
+              <a:buSzPct val="100000"/>
+              <a:buChar char="❑"/>
+            </a:pPr>
+            <a:r>
+              <a:rPr lang="en-US" sz="1400" b="1" u="sng" dirty="0">
+                <a:solidFill>
+                  <a:srgbClr val="1F6B5E"/>
+                </a:solidFill>
+                <a:latin typeface="Calibri" pitchFamily="34" charset="0"/>
+                <a:ea typeface="Calibri" pitchFamily="34" charset="-122"/>
+                <a:cs typeface="Calibri" pitchFamily="34" charset="-120"/>
+              </a:rPr>
+              <a:t>MALIKA : UN LOCATAIRE INTERPELLÉ POUR AVOIR POIGNARDÉ À MORT SON VOISIN LORS D'UNE ALTERCATION</a:t>
+            </a:r>
+            <a:endParaRPr lang="en-US" sz="1300" dirty="0"/>
+          </a:p>
+          <a:p>
+            <a:pPr lvl="1" marL="685800" indent="-342900">
+              <a:spcAft>
+                <a:spcPts val="200"/>
+              </a:spcAft>
+              <a:buSzPct val="100000"/>
+              <a:buChar char="▪"/>
+            </a:pPr>
+            <a:r>
+              <a:rPr lang="en-US" sz="1300" dirty="0">
+                <a:solidFill>
+                  <a:srgbClr val="1F2937"/>
+                </a:solidFill>
+                <a:latin typeface="Calibri" pitchFamily="34" charset="0"/>
+                <a:ea typeface="Calibri" pitchFamily="34" charset="-122"/>
+                <a:cs typeface="Calibri" pitchFamily="34" charset="-120"/>
+              </a:rPr>
+              <a:t>Source : </a:t>
+            </a:r>
+            <a:pPr indent="0" marL="0">
+              <a:spcAft>
+                <a:spcPts val="200"/>
+              </a:spcAft>
+              <a:buNone/>
+            </a:pPr>
+            <a:r>
+              <a:rPr lang="en-US" sz="1300" u="sng" dirty="0">
+                <a:solidFill>
+                  <a:srgbClr val="1F6B5E"/>
+                </a:solidFill>
+                <a:latin typeface="Calibri" pitchFamily="34" charset="0"/>
+                <a:ea typeface="Calibri" pitchFamily="34" charset="-122"/>
+                <a:cs typeface="Calibri" pitchFamily="34" charset="-120"/>
+                <a:hlinkClick r:id="rId1" invalidUrl="" action="" tgtFrame="" tooltip="" history="1" highlightClick="0" endSnd="0">
+                  <a:extLst>
+                    <a:ext uri="{A12FA001-AC4F-418D-AE19-62706E023703}">
+                      <ahyp:hlinkClr xmlns:ahyp="http://schemas.microsoft.com/office/drawing/2018/hyperlinkcolor" val="tx"/>
+                    </a:ext>
+                  </a:extLst>
+                </a:hlinkClick>
+              </a:rPr>
+              <a:t>Seneweb</a:t>
+            </a:r>
+            <a:pPr indent="0" marL="0">
+              <a:spcAft>
+                <a:spcPts val="200"/>
+              </a:spcAft>
+              <a:buNone/>
+            </a:pPr>
+            <a:r>
+              <a:rPr lang="en-US" sz="1300" dirty="0">
+                <a:solidFill>
+                  <a:srgbClr val="1F2937"/>
+                </a:solidFill>
+                <a:latin typeface="Calibri" pitchFamily="34" charset="0"/>
+                <a:ea typeface="Calibri" pitchFamily="34" charset="-122"/>
+                <a:cs typeface="Calibri" pitchFamily="34" charset="-120"/>
+              </a:rPr>
+              <a:t> — 27 octobre 2026, 13 h UTC</a:t>
+            </a:r>
+            <a:endParaRPr lang="en-US" sz="1300" dirty="0"/>
+          </a:p>
+          <a:p>
+            <a:pPr marL="342900" indent="-342900">
+              <a:spcBef>
+                <a:spcPts val="800"/>
+              </a:spcBef>
+              <a:spcAft>
+                <a:spcPts val="200"/>
+              </a:spcAft>
+              <a:buSzPct val="100000"/>
+              <a:buChar char="❑"/>
+            </a:pPr>
+            <a:r>
+              <a:rPr lang="en-US" sz="1400" b="1" u="sng" dirty="0">
+                <a:solidFill>
+                  <a:srgbClr val="1F6B5E"/>
+                </a:solidFill>
+                <a:latin typeface="Calibri" pitchFamily="34" charset="0"/>
+                <a:ea typeface="Calibri" pitchFamily="34" charset="-122"/>
+                <a:cs typeface="Calibri" pitchFamily="34" charset="-120"/>
+              </a:rPr>
+              <a:t>MEURTRE PRÉSUMÉ D’AMINATA SY À PODOR : LE SUSPECT RETROUVÉ DANS UNE CACHETTE ET ARRÊTÉ À MBACKÉ</a:t>
+            </a:r>
+            <a:endParaRPr lang="en-US" sz="1300" dirty="0"/>
+          </a:p>
+          <a:p>
+            <a:pPr lvl="1" marL="685800" indent="-342900">
+              <a:spcAft>
+                <a:spcPts val="200"/>
+              </a:spcAft>
+              <a:buSzPct val="100000"/>
+              <a:buChar char="▪"/>
+            </a:pPr>
+            <a:r>
+              <a:rPr lang="en-US" sz="1300" dirty="0">
+                <a:solidFill>
+                  <a:srgbClr val="1F2937"/>
+                </a:solidFill>
+                <a:latin typeface="Calibri" pitchFamily="34" charset="0"/>
+                <a:ea typeface="Calibri" pitchFamily="34" charset="-122"/>
+                <a:cs typeface="Calibri" pitchFamily="34" charset="-120"/>
+              </a:rPr>
+              <a:t>Sources : </a:t>
+            </a:r>
+            <a:pPr indent="0" marL="0">
+              <a:spcAft>
+                <a:spcPts val="200"/>
+              </a:spcAft>
+              <a:buNone/>
+            </a:pPr>
+            <a:r>
+              <a:rPr lang="en-US" sz="1300" u="sng" dirty="0">
+                <a:solidFill>
+                  <a:srgbClr val="1F6B5E"/>
+                </a:solidFill>
+                <a:latin typeface="Calibri" pitchFamily="34" charset="0"/>
+                <a:ea typeface="Calibri" pitchFamily="34" charset="-122"/>
+                <a:cs typeface="Calibri" pitchFamily="34" charset="-120"/>
+                <a:hlinkClick r:id="rId2" invalidUrl="" action="" tgtFrame="" tooltip="" history="1" highlightClick="0" endSnd="0">
+                  <a:extLst>
+                    <a:ext uri="{A12FA001-AC4F-418D-AE19-62706E023703}">
+                      <ahyp:hlinkClr xmlns:ahyp="http://schemas.microsoft.com/office/drawing/2018/hyperlinkcolor" val="tx"/>
+                    </a:ext>
+                  </a:extLst>
+                </a:hlinkClick>
+              </a:rPr>
+              <a:t>Dakar Actu · Seneweb</a:t>
+            </a:r>
+            <a:pPr indent="0" marL="0">
+              <a:spcAft>
+                <a:spcPts val="200"/>
+              </a:spcAft>
+              <a:buNone/>
+            </a:pPr>
+            <a:r>
+              <a:rPr lang="en-US" sz="1300" dirty="0">
+                <a:solidFill>
+                  <a:srgbClr val="1F2937"/>
+                </a:solidFill>
+                <a:latin typeface="Calibri" pitchFamily="34" charset="0"/>
+                <a:ea typeface="Calibri" pitchFamily="34" charset="-122"/>
+                <a:cs typeface="Calibri" pitchFamily="34" charset="-120"/>
+              </a:rPr>
+              <a:t> — 27 octobre 2026, 11 h UTC   ·   </a:t>
+            </a:r>
+            <a:pPr indent="0" marL="0">
+              <a:spcAft>
+                <a:spcPts val="200"/>
+              </a:spcAft>
+              <a:buNone/>
+            </a:pPr>
+            <a:r>
+              <a:rPr lang="en-US" sz="1300" b="1" dirty="0">
+                <a:solidFill>
+                  <a:srgbClr val="1F2937"/>
+                </a:solidFill>
+                <a:latin typeface="Calibri" pitchFamily="34" charset="0"/>
+                <a:ea typeface="Calibri" pitchFamily="34" charset="-122"/>
+                <a:cs typeface="Calibri" pitchFamily="34" charset="-120"/>
+              </a:rPr>
+              <a:t>Cotation : Confirmé</a:t>
+            </a:r>
+            <a:endParaRPr lang="en-US" sz="1300" dirty="0"/>
+          </a:p>
+          <a:p>
+            <a:pPr marL="342900" indent="-342900">
+              <a:spcBef>
+                <a:spcPts val="800"/>
+              </a:spcBef>
+              <a:spcAft>
+                <a:spcPts val="200"/>
+              </a:spcAft>
+              <a:buSzPct val="100000"/>
+              <a:buChar char="❑"/>
+            </a:pPr>
+            <a:r>
+              <a:rPr lang="en-US" sz="1400" b="1" u="sng" dirty="0">
+                <a:solidFill>
+                  <a:srgbClr val="1F6B5E"/>
+                </a:solidFill>
+                <a:latin typeface="Calibri" pitchFamily="34" charset="0"/>
+                <a:ea typeface="Calibri" pitchFamily="34" charset="-122"/>
+                <a:cs typeface="Calibri" pitchFamily="34" charset="-120"/>
+              </a:rPr>
+              <a:t>KARAMO CISSÉ NDIAYE ARRÊTÉ POUR LE MEURTRE D’AMINATA SY APRÈS UNE DISPUTE VIOLENTE</a:t>
+            </a:r>
+            <a:endParaRPr lang="en-US" sz="1300" dirty="0"/>
+          </a:p>
+          <a:p>
+            <a:pPr lvl="1" marL="685800" indent="-342900">
+              <a:spcAft>
+                <a:spcPts val="200"/>
+              </a:spcAft>
+              <a:buSzPct val="100000"/>
+              <a:buChar char="▪"/>
+            </a:pPr>
+            <a:r>
+              <a:rPr lang="en-US" sz="1300" dirty="0">
+                <a:solidFill>
+                  <a:srgbClr val="1F2937"/>
+                </a:solidFill>
+                <a:latin typeface="Calibri" pitchFamily="34" charset="0"/>
+                <a:ea typeface="Calibri" pitchFamily="34" charset="-122"/>
+                <a:cs typeface="Calibri" pitchFamily="34" charset="-120"/>
+              </a:rPr>
+              <a:t>Source : </a:t>
+            </a:r>
+            <a:pPr indent="0" marL="0">
+              <a:spcAft>
+                <a:spcPts val="200"/>
+              </a:spcAft>
+              <a:buNone/>
+            </a:pPr>
+            <a:r>
+              <a:rPr lang="en-US" sz="1300" u="sng" dirty="0">
+                <a:solidFill>
+                  <a:srgbClr val="1F6B5E"/>
+                </a:solidFill>
+                <a:latin typeface="Calibri" pitchFamily="34" charset="0"/>
+                <a:ea typeface="Calibri" pitchFamily="34" charset="-122"/>
+                <a:cs typeface="Calibri" pitchFamily="34" charset="-120"/>
+                <a:hlinkClick r:id="rId3" invalidUrl="" action="" tgtFrame="" tooltip="" history="1" highlightClick="0" endSnd="0">
+                  <a:extLst>
+                    <a:ext uri="{A12FA001-AC4F-418D-AE19-62706E023703}">
+                      <ahyp:hlinkClr xmlns:ahyp="http://schemas.microsoft.com/office/drawing/2018/hyperlinkcolor" val="tx"/>
+                    </a:ext>
+                  </a:extLst>
+                </a:hlinkClick>
+              </a:rPr>
+              <a:t>SeneNews</a:t>
+            </a:r>
+            <a:pPr indent="0" marL="0">
+              <a:spcAft>
+                <a:spcPts val="200"/>
+              </a:spcAft>
+              <a:buNone/>
+            </a:pPr>
+            <a:r>
+              <a:rPr lang="en-US" sz="1300" dirty="0">
+                <a:solidFill>
+                  <a:srgbClr val="1F2937"/>
+                </a:solidFill>
+                <a:latin typeface="Calibri" pitchFamily="34" charset="0"/>
+                <a:ea typeface="Calibri" pitchFamily="34" charset="-122"/>
+                <a:cs typeface="Calibri" pitchFamily="34" charset="-120"/>
+              </a:rPr>
+              <a:t> — 27 octobre 2026, 8 h UTC</a:t>
+            </a:r>
+            <a:endParaRPr lang="en-US" sz="1300" dirty="0"/>
+          </a:p>
+          <a:p>
+            <a:pPr marL="342900" indent="-342900">
+              <a:spcBef>
+                <a:spcPts val="800"/>
+              </a:spcBef>
+              <a:spcAft>
+                <a:spcPts val="200"/>
+              </a:spcAft>
+              <a:buSzPct val="100000"/>
+              <a:buChar char="❑"/>
+            </a:pPr>
+            <a:r>
+              <a:rPr lang="en-US" sz="1400" b="1" u="sng" dirty="0">
+                <a:solidFill>
+                  <a:srgbClr val="1F6B5E"/>
+                </a:solidFill>
+                <a:latin typeface="Calibri" pitchFamily="34" charset="0"/>
+                <a:ea typeface="Calibri" pitchFamily="34" charset="-122"/>
+                <a:cs typeface="Calibri" pitchFamily="34" charset="-120"/>
+              </a:rPr>
+              <a:t>DRAME À ZIGUINCHOR : UN COMMERÇANT RETROUVÉ MORT PENDU APRÈS LA PERTE DE 800 000 F CFA</a:t>
+            </a:r>
+            <a:endParaRPr lang="en-US" sz="1300" dirty="0"/>
+          </a:p>
+          <a:p>
+            <a:pPr lvl="1" marL="685800" indent="-342900">
+              <a:spcAft>
+                <a:spcPts val="200"/>
+              </a:spcAft>
+              <a:buSzPct val="100000"/>
+              <a:buChar char="▪"/>
+            </a:pPr>
+            <a:r>
+              <a:rPr lang="en-US" sz="1300" dirty="0">
+                <a:solidFill>
+                  <a:srgbClr val="1F2937"/>
+                </a:solidFill>
+                <a:latin typeface="Calibri" pitchFamily="34" charset="0"/>
+                <a:ea typeface="Calibri" pitchFamily="34" charset="-122"/>
+                <a:cs typeface="Calibri" pitchFamily="34" charset="-120"/>
+              </a:rPr>
+              <a:t>Source : </a:t>
+            </a:r>
+            <a:pPr indent="0" marL="0">
+              <a:spcAft>
+                <a:spcPts val="200"/>
+              </a:spcAft>
+              <a:buNone/>
+            </a:pPr>
+            <a:r>
+              <a:rPr lang="en-US" sz="1300" u="sng" dirty="0">
+                <a:solidFill>
+                  <a:srgbClr val="1F6B5E"/>
+                </a:solidFill>
+                <a:latin typeface="Calibri" pitchFamily="34" charset="0"/>
+                <a:ea typeface="Calibri" pitchFamily="34" charset="-122"/>
+                <a:cs typeface="Calibri" pitchFamily="34" charset="-120"/>
+                <a:hlinkClick r:id="rId4" invalidUrl="" action="" tgtFrame="" tooltip="" history="1" highlightClick="0" endSnd="0">
+                  <a:extLst>
+                    <a:ext uri="{A12FA001-AC4F-418D-AE19-62706E023703}">
+                      <ahyp:hlinkClr xmlns:ahyp="http://schemas.microsoft.com/office/drawing/2018/hyperlinkcolor" val="tx"/>
+                    </a:ext>
+                  </a:extLst>
+                </a:hlinkClick>
+              </a:rPr>
+              <a:t>Seneweb</a:t>
+            </a:r>
+            <a:pPr indent="0" marL="0">
+              <a:spcAft>
+                <a:spcPts val="200"/>
+              </a:spcAft>
+              <a:buNone/>
+            </a:pPr>
+            <a:r>
+              <a:rPr lang="en-US" sz="1300" dirty="0">
+                <a:solidFill>
+                  <a:srgbClr val="1F2937"/>
+                </a:solidFill>
+                <a:latin typeface="Calibri" pitchFamily="34" charset="0"/>
+                <a:ea typeface="Calibri" pitchFamily="34" charset="-122"/>
+                <a:cs typeface="Calibri" pitchFamily="34" charset="-120"/>
+              </a:rPr>
+              <a:t> — 26 octobre 2026, 23 h UTC</a:t>
+            </a:r>
+            <a:endParaRPr lang="en-US" sz="1300" dirty="0"/>
+          </a:p>
+        </p:txBody>
+      </p:sp>
+      <p:sp>
+        <p:nvSpPr>
+          <p:cNvPr id="10" name="Text 8"/>
+          <p:cNvSpPr/>
+          <p:nvPr/>
+        </p:nvSpPr>
+        <p:spPr>
+          <a:xfrm>
+            <a:off x="3108960" y="6217920"/>
+            <a:ext cx="5486400" cy="329184"/>
+          </a:xfrm>
+          <a:prstGeom prst="rect">
+            <a:avLst/>
+          </a:prstGeom>
+          <a:noFill/>
+          <a:ln w="9525">
+            <a:solidFill>
+              <a:srgbClr val="1F6B5E"/>
+            </a:solidFill>
+          </a:ln>
+        </p:spPr>
+        <p:txBody>
+          <a:bodyPr wrap="square" rtlCol="0" anchor="ctr">
+            <a:normAutofit/>
+          </a:bodyPr>
+          <a:lstStyle/>
+          <a:p>
+            <a:pPr algn="ctr" indent="0" marL="0">
+              <a:buNone/>
+            </a:pPr>
+            <a:r>
+              <a:rPr lang="en-US" sz="1200" dirty="0">
+                <a:solidFill>
+                  <a:srgbClr val="1F2937"/>
+                </a:solidFill>
+                <a:latin typeface="Calibri" pitchFamily="34" charset="0"/>
+                <a:ea typeface="Calibri" pitchFamily="34" charset="-122"/>
+                <a:cs typeface="Calibri" pitchFamily="34" charset="-120"/>
+              </a:rPr>
+              <a:t>SentiqS — veille de sûreté sur l'Afrique</a:t>
+            </a:r>
+            <a:endParaRPr lang="en-US" sz="1200" dirty="0"/>
+          </a:p>
+        </p:txBody>
+      </p:sp>
+      <p:sp>
+        <p:nvSpPr>
+          <p:cNvPr id="11" name="Text 9"/>
+          <p:cNvSpPr/>
+          <p:nvPr/>
+        </p:nvSpPr>
+        <p:spPr>
+          <a:xfrm>
+            <a:off x="9418320" y="6309360"/>
+            <a:ext cx="2468880" cy="274320"/>
+          </a:xfrm>
+          <a:prstGeom prst="rect">
+            <a:avLst/>
+          </a:prstGeom>
+          <a:noFill/>
+          <a:ln/>
+        </p:spPr>
+        <p:txBody>
+          <a:bodyPr wrap="square" rtlCol="0" anchor="ctr"/>
+          <a:lstStyle/>
+          <a:p>
+            <a:pPr algn="r" indent="0" marL="0">
+              <a:buNone/>
+            </a:pPr>
+            <a:r>
+              <a:rPr lang="en-US" sz="1000" dirty="0">
+                <a:solidFill>
+                  <a:srgbClr val="1F2937"/>
+                </a:solidFill>
+                <a:latin typeface="Calibri" pitchFamily="34" charset="0"/>
+                <a:ea typeface="Calibri" pitchFamily="34" charset="-122"/>
+                <a:cs typeface="Calibri" pitchFamily="34" charset="-120"/>
+              </a:rPr>
+              <a:t>|  28/10/26   |   38</a:t>
+            </a:r>
+            <a:endParaRPr lang="en-US" sz="1000" dirty="0"/>
+          </a:p>
+        </p:txBody>
+      </p:sp>
+    </p:spTree>
+  </p:cSld>
+  <p:clrMapOvr>
+    <a:masterClrMapping/>
+  </p:clrMapOvr>
+</p:sld>
+</file>
+
+<file path=ppt/slides/slide39.xml><?xml version="1.0" encoding="utf-8"?>
+<p:sld xmlns:a="http://schemas.openxmlformats.org/drawingml/2006/main" xmlns:r="http://schemas.openxmlformats.org/officeDocument/2006/relationships" xmlns:p="http://schemas.openxmlformats.org/presentationml/2006/main">
+  <p:cSld name="Slide 39">
     <p:bg>
       <p:bgPr>
         <a:solidFill>
@@ -25619,7 +26238,7 @@
                 <a:ea typeface="Calibri" pitchFamily="34" charset="-122"/>
                 <a:cs typeface="Calibri" pitchFamily="34" charset="-120"/>
               </a:rPr>
-              <a:t>|  27/10/26   |   38</a:t>
+              <a:t>|  28/10/26   |   39</a:t>
             </a:r>
             <a:endParaRPr lang="en-US" sz="1000" dirty="0"/>
           </a:p>
@@ -25885,7 +26504,7 @@
                 <a:ea typeface="Calibri" pitchFamily="34" charset="-122"/>
                 <a:cs typeface="Calibri" pitchFamily="34" charset="-120"/>
               </a:rPr>
-              <a:t>Indice de confiance : moyenne (incident vérifié le plus récent : 120 jours ; 2 signaux du jour)</a:t>
+              <a:t>Indice de confiance : faible (incident vérifié le plus récent : 121 jours ; aucun signal du jour)</a:t>
             </a:r>
             <a:endParaRPr lang="en-US" sz="1100" dirty="0"/>
           </a:p>
@@ -26223,7 +26842,7 @@
                 <a:ea typeface="Calibri" pitchFamily="34" charset="-122"/>
                 <a:cs typeface="Calibri" pitchFamily="34" charset="-120"/>
               </a:rPr>
-              <a:t>|  27/10/26   |   4</a:t>
+              <a:t>|  28/10/26   |   4</a:t>
             </a:r>
             <a:endParaRPr lang="en-US" sz="1000" dirty="0"/>
           </a:p>
@@ -26788,7 +27407,7 @@
                 <a:ea typeface="Calibri" pitchFamily="34" charset="-122"/>
                 <a:cs typeface="Calibri" pitchFamily="34" charset="-120"/>
               </a:rPr>
-              <a:t>|  27/10/26   |   5</a:t>
+              <a:t>|  28/10/26   |   5</a:t>
             </a:r>
             <a:endParaRPr lang="en-US" sz="1000" dirty="0"/>
           </a:p>
@@ -27353,7 +27972,7 @@
                 <a:ea typeface="Calibri" pitchFamily="34" charset="-122"/>
                 <a:cs typeface="Calibri" pitchFamily="34" charset="-120"/>
               </a:rPr>
-              <a:t>|  27/10/26   |   6</a:t>
+              <a:t>|  28/10/26   |   6</a:t>
             </a:r>
             <a:endParaRPr lang="en-US" sz="1000" dirty="0"/>
           </a:p>
@@ -27858,7 +28477,7 @@
                 <a:ea typeface="Calibri" pitchFamily="34" charset="-122"/>
                 <a:cs typeface="Calibri" pitchFamily="34" charset="-120"/>
               </a:rPr>
-              <a:t>|  27/10/26   |   7</a:t>
+              <a:t>|  28/10/26   |   7</a:t>
             </a:r>
             <a:endParaRPr lang="en-US" sz="1000" dirty="0"/>
           </a:p>
@@ -28124,7 +28743,7 @@
                 <a:ea typeface="Calibri" pitchFamily="34" charset="-122"/>
                 <a:cs typeface="Calibri" pitchFamily="34" charset="-120"/>
               </a:rPr>
-              <a:t>Indice de confiance : moyenne (incident vérifié le plus récent : 120 jours ; 2 signaux du jour)</a:t>
+              <a:t>Indice de confiance : faible (incident vérifié le plus récent : 121 jours ; aucun signal du jour)</a:t>
             </a:r>
             <a:endParaRPr lang="en-US" sz="1100" dirty="0"/>
           </a:p>
@@ -28402,7 +29021,7 @@
                 <a:ea typeface="Calibri" pitchFamily="34" charset="-122"/>
                 <a:cs typeface="Calibri" pitchFamily="34" charset="-120"/>
               </a:rPr>
-              <a:t>|  27/10/26   |   8</a:t>
+              <a:t>|  28/10/26   |   8</a:t>
             </a:r>
             <a:endParaRPr lang="en-US" sz="1000" dirty="0"/>
           </a:p>
@@ -28668,7 +29287,7 @@
                 <a:ea typeface="Calibri" pitchFamily="34" charset="-122"/>
                 <a:cs typeface="Calibri" pitchFamily="34" charset="-120"/>
               </a:rPr>
-              <a:t>Indice de confiance : moyenne (incident vérifié le plus récent : 120 jours ; 2 signaux du jour)</a:t>
+              <a:t>Indice de confiance : faible (incident vérifié le plus récent : 121 jours ; aucun signal du jour)</a:t>
             </a:r>
             <a:endParaRPr lang="en-US" sz="1100" dirty="0"/>
           </a:p>
@@ -29255,7 +29874,7 @@
                 <a:ea typeface="Calibri" pitchFamily="34" charset="-122"/>
                 <a:cs typeface="Calibri" pitchFamily="34" charset="-120"/>
               </a:rPr>
-              <a:t>|  27/10/26   |   9</a:t>
+              <a:t>|  28/10/26   |   9</a:t>
             </a:r>
             <a:endParaRPr lang="en-US" sz="1000" dirty="0"/>
           </a:p>

--- a/web/rapports/mensuel/2026-10.pptx
+++ b/web/rapports/mensuel/2026-10.pptx
@@ -11152,6 +11152,27 @@
                 <a:ea typeface="Calibri" pitchFamily="34" charset="-122"/>
                 <a:cs typeface="Calibri" pitchFamily="34" charset="-120"/>
               </a:rPr>
+              <a:t>LUTTE CONTRE LE GASPILLAGE ALIMENTAIRE : LE COMITÉ DE CONCERTATION ÉTAT-SECTEUR P…</a:t>
+            </a:r>
+            <a:endParaRPr lang="en-US" sz="900" dirty="0"/>
+          </a:p>
+          <a:p>
+            <a:pPr marL="342900" indent="-342900">
+              <a:spcAft>
+                <a:spcPts val="200"/>
+              </a:spcAft>
+              <a:buSzPct val="100000"/>
+              <a:buChar char="❑"/>
+            </a:pPr>
+            <a:r>
+              <a:rPr lang="en-US" sz="900" dirty="0">
+                <a:solidFill>
+                  <a:srgbClr val="1F2937"/>
+                </a:solidFill>
+                <a:latin typeface="Calibri" pitchFamily="34" charset="0"/>
+                <a:ea typeface="Calibri" pitchFamily="34" charset="-122"/>
+                <a:cs typeface="Calibri" pitchFamily="34" charset="-120"/>
+              </a:rPr>
               <a:t>HAUSSE DES PRIX DU POISSON : ASSALÉ TIÉMOKO RÉVÈLE UNE DÉPENDANCE DE LA CÔTE D’IV…</a:t>
             </a:r>
             <a:endParaRPr lang="en-US" sz="900" dirty="0"/>
@@ -11649,7 +11670,7 @@
                 <a:ea typeface="Calibri" pitchFamily="34" charset="-122"/>
                 <a:cs typeface="Calibri" pitchFamily="34" charset="-120"/>
               </a:rPr>
-              <a:t>WOMAN KILLED BY TEMA-AFIENYA TRAIN AS RESIDENTS DEMAND FOOTBRIDGE</a:t>
+              <a:t>UNE FEMME TUÉE PAR LE TRAIN TEMA-AFIENYA ALORS QUE LES HABITANTS RÉCLAMENT UNE PA…</a:t>
             </a:r>
             <a:endParaRPr lang="en-US" sz="900" dirty="0"/>
           </a:p>
@@ -11737,7 +11758,7 @@
                 <a:ea typeface="Calibri" pitchFamily="34" charset="-122"/>
                 <a:cs typeface="Calibri" pitchFamily="34" charset="-120"/>
               </a:rPr>
-              <a:t>NUEE THREATENS NATIONWIDE SHUTDOWN, DEMANDS WITHDRAWAL OF SOLDIERS FROM BEDC HQTRS</a:t>
+              <a:t>LE NUEE MENACE DE FERMER TOUT LE PAYS ET EXIGE LE RETRAIT DES SOLDATS DU SIÈGE DE…</a:t>
             </a:r>
             <a:endParaRPr lang="en-US" sz="900" dirty="0"/>
           </a:p>
@@ -11869,7 +11890,7 @@
                 <a:ea typeface="Calibri" pitchFamily="34" charset="-122"/>
                 <a:cs typeface="Calibri" pitchFamily="34" charset="-120"/>
               </a:rPr>
-              <a:t>TOUBA : UN DÉBAT SUR LES MOTEURS DE JAKARTA SE TERMINE PAR LA MORT DE BAYE M. DIOP</a:t>
+              <a:t>MEURTRE ATROCE DE LA LYCÉENE AMINATA SY À PODOR : COMMENT LE SUSPECT A-T-IL ARRÊT…</a:t>
             </a:r>
             <a:endParaRPr lang="en-US" sz="900" dirty="0"/>
           </a:p>
@@ -13066,7 +13087,7 @@
                 <a:ea typeface="Calibri" pitchFamily="34" charset="-122"/>
                 <a:cs typeface="Calibri" pitchFamily="34" charset="-120"/>
               </a:rPr>
-              <a:t>Sources : </a:t>
+              <a:t>Source : </a:t>
             </a:r>
             <a:pPr indent="0" marL="0">
               <a:spcAft>
@@ -13090,7 +13111,7 @@
                   </a:extLst>
                 </a:hlinkClick>
               </a:rPr>
-              <a:t>Premium Times · Vanguard</a:t>
+              <a:t>Premium Times</a:t>
             </a:r>
             <a:pPr indent="0" marL="0">
               <a:spcAft>
@@ -13124,7 +13145,7 @@
                 <a:ea typeface="Calibri" pitchFamily="34" charset="-122"/>
                 <a:cs typeface="Calibri" pitchFamily="34" charset="-120"/>
               </a:rPr>
-              <a:t>Cotation : Confirmé</a:t>
+              <a:t>Cotation : Probable</a:t>
             </a:r>
             <a:endParaRPr lang="en-US" sz="1300" dirty="0"/>
           </a:p>
@@ -13876,7 +13897,7 @@
                 <a:ea typeface="Calibri" pitchFamily="34" charset="-122"/>
                 <a:cs typeface="Calibri" pitchFamily="34" charset="-120"/>
               </a:rPr>
-              <a:t>POURQUOI N’DJAMÉNA SORT ENFIN DE SON SILENCE FACE À NIAMEY ?</a:t>
+              <a:t>4 ÉTUDIANTS ET UNE FEMME TUÉS DANS UN ACCIDENT DE LA ROUTE AVEC UN CONVOI DU GOUVERNEUR DU NIGER</a:t>
             </a:r>
             <a:endParaRPr lang="en-US" sz="1300" dirty="0"/>
           </a:p>
@@ -13921,7 +13942,7 @@
                   </a:extLst>
                 </a:hlinkClick>
               </a:rPr>
-              <a:t>Tchadinfos</a:t>
+              <a:t>Vanguard</a:t>
             </a:r>
             <a:pPr indent="0" marL="0">
               <a:spcAft>
@@ -13955,7 +13976,7 @@
                 <a:ea typeface="Calibri" pitchFamily="34" charset="-122"/>
                 <a:cs typeface="Calibri" pitchFamily="34" charset="-120"/>
               </a:rPr>
-              <a:t>Cotation : Non confirmé</a:t>
+              <a:t>Cotation : Probable</a:t>
             </a:r>
             <a:endParaRPr lang="en-US" sz="1300" dirty="0"/>
           </a:p>
@@ -13979,7 +14000,7 @@
                 <a:ea typeface="Calibri" pitchFamily="34" charset="-122"/>
                 <a:cs typeface="Calibri" pitchFamily="34" charset="-120"/>
               </a:rPr>
-              <a:t>AVIS À MANIFESTATION D’INTÉRÊT N°003/CA/TAFOUK TV/2026</a:t>
+              <a:t>POURQUOI N’DJAMÉNA SORT ENFIN DE SON SILENCE FACE À NIAMEY ?</a:t>
             </a:r>
             <a:endParaRPr lang="en-US" sz="1300" dirty="0"/>
           </a:p>
@@ -14024,7 +14045,7 @@
                   </a:extLst>
                 </a:hlinkClick>
               </a:rPr>
-              <a:t>Le Sahel</a:t>
+              <a:t>Tchadinfos</a:t>
             </a:r>
             <a:pPr indent="0" marL="0">
               <a:spcAft>
@@ -14041,7 +14062,7 @@
                 <a:ea typeface="Calibri" pitchFamily="34" charset="-122"/>
                 <a:cs typeface="Calibri" pitchFamily="34" charset="-120"/>
               </a:rPr>
-              <a:t> — 27 octobre 2026, 14 h UTC   ·   </a:t>
+              <a:t> — 27 octobre 2026, 19 h UTC   ·   </a:t>
             </a:r>
             <a:pPr indent="0" marL="0">
               <a:spcAft>
@@ -14082,7 +14103,7 @@
                 <a:ea typeface="Calibri" pitchFamily="34" charset="-122"/>
                 <a:cs typeface="Calibri" pitchFamily="34" charset="-120"/>
               </a:rPr>
-              <a:t>AGADEZ : LE GOUVERNEUR PRÉSIDE UNE RÉUNION ÉLARGIE DU CONSEIL RÉGIONAL DE SÉCURITÉ</a:t>
+              <a:t>AVIS À MANIFESTATION D’INTÉRÊT N°003/CA/TAFOUK TV/2026</a:t>
             </a:r>
             <a:endParaRPr lang="en-US" sz="1300" dirty="0"/>
           </a:p>
@@ -14127,7 +14148,7 @@
                   </a:extLst>
                 </a:hlinkClick>
               </a:rPr>
-              <a:t>ANP — Agence Nigérienne Presse</a:t>
+              <a:t>Le Sahel</a:t>
             </a:r>
             <a:pPr indent="0" marL="0">
               <a:spcAft>
@@ -14144,7 +14165,7 @@
                 <a:ea typeface="Calibri" pitchFamily="34" charset="-122"/>
                 <a:cs typeface="Calibri" pitchFamily="34" charset="-120"/>
               </a:rPr>
-              <a:t> — 27 octobre 2026, 13 h UTC   ·   </a:t>
+              <a:t> — 27 octobre 2026, 14 h UTC   ·   </a:t>
             </a:r>
             <a:pPr indent="0" marL="0">
               <a:spcAft>
@@ -14161,7 +14182,7 @@
                 <a:ea typeface="Calibri" pitchFamily="34" charset="-122"/>
                 <a:cs typeface="Calibri" pitchFamily="34" charset="-120"/>
               </a:rPr>
-              <a:t>Cotation : Probable</a:t>
+              <a:t>Cotation : Non confirmé</a:t>
             </a:r>
             <a:endParaRPr lang="en-US" sz="1300" dirty="0"/>
           </a:p>
@@ -14185,7 +14206,7 @@
                 <a:ea typeface="Calibri" pitchFamily="34" charset="-122"/>
                 <a:cs typeface="Calibri" pitchFamily="34" charset="-120"/>
               </a:rPr>
-              <a:t>ALERTE – LA PRÉSIDENCE ANNONCE L’ENVOI D’UNITÉS DE L’ARMÉE NATIONALE AU NIGER</a:t>
+              <a:t>AGADEZ : LE GOUVERNEUR PRÉSIDE UNE RÉUNION ÉLARGIE DU CONSEIL RÉGIONAL DE SÉCURITÉ</a:t>
             </a:r>
             <a:endParaRPr lang="en-US" sz="1300" dirty="0"/>
           </a:p>
@@ -14230,7 +14251,7 @@
                   </a:extLst>
                 </a:hlinkClick>
               </a:rPr>
-              <a:t>tsa-algerie.com</a:t>
+              <a:t>ANP — Agence Nigérienne Presse</a:t>
             </a:r>
             <a:pPr indent="0" marL="0">
               <a:spcAft>
@@ -14247,7 +14268,24 @@
                 <a:ea typeface="Calibri" pitchFamily="34" charset="-122"/>
                 <a:cs typeface="Calibri" pitchFamily="34" charset="-120"/>
               </a:rPr>
-              <a:t> — 26 octobre 2026, 15 h UTC</a:t>
+              <a:t> — 27 octobre 2026, 13 h UTC   ·   </a:t>
+            </a:r>
+            <a:pPr indent="0" marL="0">
+              <a:spcAft>
+                <a:spcPts val="200"/>
+              </a:spcAft>
+              <a:buNone/>
+            </a:pPr>
+            <a:r>
+              <a:rPr lang="en-US" sz="1300" b="1" dirty="0">
+                <a:solidFill>
+                  <a:srgbClr val="1F2937"/>
+                </a:solidFill>
+                <a:latin typeface="Calibri" pitchFamily="34" charset="0"/>
+                <a:ea typeface="Calibri" pitchFamily="34" charset="-122"/>
+                <a:cs typeface="Calibri" pitchFamily="34" charset="-120"/>
+              </a:rPr>
+              <a:t>Cotation : Probable</a:t>
             </a:r>
             <a:endParaRPr lang="en-US" sz="1300" dirty="0"/>
           </a:p>
@@ -14636,7 +14674,7 @@
                 <a:ea typeface="Arial Narrow" pitchFamily="34" charset="-122"/>
                 <a:cs typeface="Arial Narrow" pitchFamily="34" charset="-120"/>
               </a:rPr>
-              <a:t>Woman killed by Tema-Afienya train as residents demand footbridge</a:t>
+              <a:t>Une femme tuée par le train Tema-Afienya alors que les habitants réclament une passerelle</a:t>
             </a:r>
             <a:endParaRPr lang="en-US" sz="2200" dirty="0"/>
           </a:p>
@@ -15297,7 +15335,7 @@
                 <a:ea typeface="Calibri" pitchFamily="34" charset="-122"/>
                 <a:cs typeface="Calibri" pitchFamily="34" charset="-120"/>
               </a:rPr>
-              <a:t>SEVEN SHOT DEAD BY GUNMEN AT CHURCH FUNERAL IN JORDAN, OFFICIALS SAY</a:t>
+              <a:t>SEPT MORTS PAR BALLE PAR DES HOMMES ARMÉS LORS DE FUNÉRAILLES DANS UNE ÉGLISE EN JORDANIE, SELON DES RESPONSABLES</a:t>
             </a:r>
             <a:endParaRPr lang="en-US" sz="1300" dirty="0"/>
           </a:p>
@@ -15383,7 +15421,7 @@
                 <a:ea typeface="Calibri" pitchFamily="34" charset="-122"/>
                 <a:cs typeface="Calibri" pitchFamily="34" charset="-120"/>
               </a:rPr>
-              <a:t>NPP WALEWALE CONSTITUENCY CONDEMNS PERSONAL ATTACKS AGAINST MP, URGES PARTY DISCIPLINE</a:t>
+              <a:t>LA CIRCONSCRIPTION DU NPP WALEWALE CONDAMNE LES ATTAQUES PERSONNELLES CONTRE UN DÉPUTÉ ET APPELLE À LA DISCIPLINE DE PARTI</a:t>
             </a:r>
             <a:endParaRPr lang="en-US" sz="1300" dirty="0"/>
           </a:p>
@@ -15469,7 +15507,7 @@
                 <a:ea typeface="Calibri" pitchFamily="34" charset="-122"/>
                 <a:cs typeface="Calibri" pitchFamily="34" charset="-120"/>
               </a:rPr>
-              <a:t>GAF TO STAGE LAND COMBAT FIREPOWER DEMONSTRATION AT BUNDASE ON OCTOBER 30</a:t>
+              <a:t>GAF ORGANISERA UNE DÉMONSTRATION DE PUISSANCE DE FEU DE COMBAT TERRESTRE À BUNDASE LE 30 OCTOBRE</a:t>
             </a:r>
             <a:endParaRPr lang="en-US" sz="1300" dirty="0"/>
           </a:p>
@@ -16197,7 +16235,7 @@
                 <a:ea typeface="Calibri" pitchFamily="34" charset="-122"/>
                 <a:cs typeface="Calibri" pitchFamily="34" charset="-120"/>
               </a:rPr>
-              <a:t>THREE ARRESTED IN ATEWA FOREST AS NAIMOS LAUNCHES OPERATION GREEN SHIELD</a:t>
+              <a:t>TROIS PERSONNES ARRÊTÉES DANS LA FORÊT D'ATEWA ALORS QUE NAIMOS LANCE L'OPÉRATION GREEN SHIELD</a:t>
             </a:r>
             <a:endParaRPr lang="en-US" sz="1300" dirty="0"/>
           </a:p>
@@ -17701,7 +17739,7 @@
                 <a:ea typeface="Calibri" pitchFamily="34" charset="-122"/>
                 <a:cs typeface="Calibri" pitchFamily="34" charset="-120"/>
               </a:rPr>
-              <a:t>GÉNIE IMHOTEP SAISON 3 : LE LYCÉE ZÉBÉVI STOPPE LE LYCÉE TOKOIN2 DANS SON ÉLAN</a:t>
+              <a:t>TOGO : UNE TRAQUE SANS TRAQUEUR !</a:t>
             </a:r>
             <a:endParaRPr lang="en-US" sz="1300" dirty="0"/>
           </a:p>
@@ -17746,7 +17784,7 @@
                   </a:extLst>
                 </a:hlinkClick>
               </a:rPr>
-              <a:t>Le Nouveau Reporter</a:t>
+              <a:t>Icilome</a:t>
             </a:r>
             <a:pPr indent="0" marL="0">
               <a:spcAft>
@@ -17763,7 +17801,7 @@
                 <a:ea typeface="Calibri" pitchFamily="34" charset="-122"/>
                 <a:cs typeface="Calibri" pitchFamily="34" charset="-120"/>
               </a:rPr>
-              <a:t> — 28 octobre 2026, 8 h UTC   ·   </a:t>
+              <a:t> — 28 octobre 2026, 9 h UTC   ·   </a:t>
             </a:r>
             <a:pPr indent="0" marL="0">
               <a:spcAft>
@@ -17804,7 +17842,7 @@
                 <a:ea typeface="Calibri" pitchFamily="34" charset="-122"/>
                 <a:cs typeface="Calibri" pitchFamily="34" charset="-120"/>
               </a:rPr>
-              <a:t>TOGO : LA SÉCURITÉ RENFORCÉE SUR LE LITTORAL DE LOMÉ APRÈS LE DÉMANTÈLEMENT DES INSTALLATIONS ILLÉGALES</a:t>
+              <a:t>GÉNIE IMHOTEP SAISON 3 : LE LYCÉE ZÉBÉVI STOPPE LE LYCÉE TOKOIN2 DANS SON ÉLAN</a:t>
             </a:r>
             <a:endParaRPr lang="en-US" sz="1300" dirty="0"/>
           </a:p>
@@ -17825,7 +17863,7 @@
                 <a:ea typeface="Calibri" pitchFamily="34" charset="-122"/>
                 <a:cs typeface="Calibri" pitchFamily="34" charset="-120"/>
               </a:rPr>
-              <a:t>Sources : </a:t>
+              <a:t>Source : </a:t>
             </a:r>
             <a:pPr indent="0" marL="0">
               <a:spcAft>
@@ -17849,7 +17887,7 @@
                   </a:extLst>
                 </a:hlinkClick>
               </a:rPr>
-              <a:t>24heureinfo.com · Togo Actualite · Icilome</a:t>
+              <a:t>Le Nouveau Reporter</a:t>
             </a:r>
             <a:pPr indent="0" marL="0">
               <a:spcAft>
@@ -17866,7 +17904,7 @@
                 <a:ea typeface="Calibri" pitchFamily="34" charset="-122"/>
                 <a:cs typeface="Calibri" pitchFamily="34" charset="-120"/>
               </a:rPr>
-              <a:t> — 28 octobre 2026, 7 h UTC   ·   </a:t>
+              <a:t> — 28 octobre 2026, 8 h UTC   ·   </a:t>
             </a:r>
             <a:pPr indent="0" marL="0">
               <a:spcAft>
@@ -17883,7 +17921,7 @@
                 <a:ea typeface="Calibri" pitchFamily="34" charset="-122"/>
                 <a:cs typeface="Calibri" pitchFamily="34" charset="-120"/>
               </a:rPr>
-              <a:t>Cotation : Confirmé</a:t>
+              <a:t>Cotation : Non confirmé</a:t>
             </a:r>
             <a:endParaRPr lang="en-US" sz="1300" dirty="0"/>
           </a:p>
@@ -17907,7 +17945,7 @@
                 <a:ea typeface="Calibri" pitchFamily="34" charset="-122"/>
                 <a:cs typeface="Calibri" pitchFamily="34" charset="-120"/>
               </a:rPr>
-              <a:t>SOUTENU PAR L’UNION AFRICAINE, LE TOGOLAIS GILBERT HOUNGBO RÉUSSIRA-T-IL À CONSERVER LA TÊTE DE L’OIT ?</a:t>
+              <a:t>TOGO : LA SÉCURITÉ RENFORCÉE SUR LE LITTORAL DE LOMÉ APRÈS LE DÉMANTÈLEMENT DES INSTALLATIONS ILLÉGALES</a:t>
             </a:r>
             <a:endParaRPr lang="en-US" sz="1300" dirty="0"/>
           </a:p>
@@ -17928,7 +17966,7 @@
                 <a:ea typeface="Calibri" pitchFamily="34" charset="-122"/>
                 <a:cs typeface="Calibri" pitchFamily="34" charset="-120"/>
               </a:rPr>
-              <a:t>Source : </a:t>
+              <a:t>Sources : </a:t>
             </a:r>
             <a:pPr indent="0" marL="0">
               <a:spcAft>
@@ -17952,7 +17990,7 @@
                   </a:extLst>
                 </a:hlinkClick>
               </a:rPr>
-              <a:t>Jeune Afrique</a:t>
+              <a:t>24heureinfo.com · Togo Actualite · Icilome</a:t>
             </a:r>
             <a:pPr indent="0" marL="0">
               <a:spcAft>
@@ -17969,7 +18007,7 @@
                 <a:ea typeface="Calibri" pitchFamily="34" charset="-122"/>
                 <a:cs typeface="Calibri" pitchFamily="34" charset="-120"/>
               </a:rPr>
-              <a:t> — 27 octobre 2026, 13 h UTC   ·   </a:t>
+              <a:t> — 28 octobre 2026, 7 h UTC   ·   </a:t>
             </a:r>
             <a:pPr indent="0" marL="0">
               <a:spcAft>
@@ -17986,7 +18024,7 @@
                 <a:ea typeface="Calibri" pitchFamily="34" charset="-122"/>
                 <a:cs typeface="Calibri" pitchFamily="34" charset="-120"/>
               </a:rPr>
-              <a:t>Cotation : Probable</a:t>
+              <a:t>Cotation : Confirmé</a:t>
             </a:r>
             <a:endParaRPr lang="en-US" sz="1300" dirty="0"/>
           </a:p>
@@ -18010,7 +18048,7 @@
                 <a:ea typeface="Calibri" pitchFamily="34" charset="-122"/>
                 <a:cs typeface="Calibri" pitchFamily="34" charset="-120"/>
               </a:rPr>
-              <a:t>VERS UNE PAIX DES CHAMPS ?</a:t>
+              <a:t>SOUTENU PAR L’UNION AFRICAINE, LE TOGOLAIS GILBERT HOUNGBO RÉUSSIRA-T-IL À CONSERVER LA TÊTE DE L’OIT ?</a:t>
             </a:r>
             <a:endParaRPr lang="en-US" sz="1300" dirty="0"/>
           </a:p>
@@ -18055,7 +18093,7 @@
                   </a:extLst>
                 </a:hlinkClick>
               </a:rPr>
-              <a:t>AllAfrica (TG)</a:t>
+              <a:t>Jeune Afrique</a:t>
             </a:r>
             <a:pPr indent="0" marL="0">
               <a:spcAft>
@@ -18072,7 +18110,24 @@
                 <a:ea typeface="Calibri" pitchFamily="34" charset="-122"/>
                 <a:cs typeface="Calibri" pitchFamily="34" charset="-120"/>
               </a:rPr>
-              <a:t> — 26 octobre 2026, 15 h UTC</a:t>
+              <a:t> — 27 octobre 2026, 13 h UTC   ·   </a:t>
+            </a:r>
+            <a:pPr indent="0" marL="0">
+              <a:spcAft>
+                <a:spcPts val="200"/>
+              </a:spcAft>
+              <a:buNone/>
+            </a:pPr>
+            <a:r>
+              <a:rPr lang="en-US" sz="1300" b="1" dirty="0">
+                <a:solidFill>
+                  <a:srgbClr val="1F2937"/>
+                </a:solidFill>
+                <a:latin typeface="Calibri" pitchFamily="34" charset="0"/>
+                <a:ea typeface="Calibri" pitchFamily="34" charset="-122"/>
+                <a:cs typeface="Calibri" pitchFamily="34" charset="-120"/>
+              </a:rPr>
+              <a:t>Cotation : Probable</a:t>
             </a:r>
             <a:endParaRPr lang="en-US" sz="1300" dirty="0"/>
           </a:p>
@@ -18479,7 +18534,7 @@
                 <a:ea typeface="Calibri" pitchFamily="34" charset="-122"/>
                 <a:cs typeface="Calibri" pitchFamily="34" charset="-120"/>
               </a:rPr>
-              <a:t>STOCKS DE SÉCURITÉ - RECORD DE 31 000 TONNES COLLECTÉES EN 2025</a:t>
+              <a:t>VERS UNE PAIX DES CHAMPS ?</a:t>
             </a:r>
             <a:endParaRPr lang="en-US" sz="1300" dirty="0"/>
           </a:p>
@@ -18541,7 +18596,7 @@
                 <a:ea typeface="Calibri" pitchFamily="34" charset="-122"/>
                 <a:cs typeface="Calibri" pitchFamily="34" charset="-120"/>
               </a:rPr>
-              <a:t> — 26 octobre 2026, 11 h UTC</a:t>
+              <a:t> — 26 octobre 2026, 15 h UTC</a:t>
             </a:r>
             <a:endParaRPr lang="en-US" sz="1300" dirty="0"/>
           </a:p>
@@ -18565,7 +18620,7 @@
                 <a:ea typeface="Calibri" pitchFamily="34" charset="-122"/>
                 <a:cs typeface="Calibri" pitchFamily="34" charset="-120"/>
               </a:rPr>
-              <a:t>LA PLAGE DE LOMÉ SOUS SURVEILLANCE</a:t>
+              <a:t>STOCKS DE SÉCURITÉ - RECORD DE 31 000 TONNES COLLECTÉES EN 2025</a:t>
             </a:r>
             <a:endParaRPr lang="en-US" sz="1300" dirty="0"/>
           </a:p>
@@ -18651,7 +18706,7 @@
                 <a:ea typeface="Calibri" pitchFamily="34" charset="-122"/>
                 <a:cs typeface="Calibri" pitchFamily="34" charset="-120"/>
               </a:rPr>
-              <a:t>TSÉVIÉ : LES FORCES DE SÉCURITÉ DÉPLOYÉES SUR LE SITE DU MEETING REPORTÉ DU CNCC</a:t>
+              <a:t>LA PLAGE DE LOMÉ SOUS SURVEILLANCE</a:t>
             </a:r>
             <a:endParaRPr lang="en-US" sz="1300" dirty="0"/>
           </a:p>
@@ -18696,7 +18751,7 @@
                   </a:extLst>
                 </a:hlinkClick>
               </a:rPr>
-              <a:t>24heureinfo.com</a:t>
+              <a:t>AllAfrica (TG)</a:t>
             </a:r>
             <a:pPr indent="0" marL="0">
               <a:spcAft>
@@ -18713,7 +18768,7 @@
                 <a:ea typeface="Calibri" pitchFamily="34" charset="-122"/>
                 <a:cs typeface="Calibri" pitchFamily="34" charset="-120"/>
               </a:rPr>
-              <a:t> — 25 octobre 2026, 20 h UTC</a:t>
+              <a:t> — 26 octobre 2026, 11 h UTC</a:t>
             </a:r>
             <a:endParaRPr lang="en-US" sz="1300" dirty="0"/>
           </a:p>
@@ -18737,7 +18792,7 @@
                 <a:ea typeface="Calibri" pitchFamily="34" charset="-122"/>
                 <a:cs typeface="Calibri" pitchFamily="34" charset="-120"/>
               </a:rPr>
-              <a:t>EBOLA : AFRICA CDC CONVOQUE LES MINISTRES AFRICAINS DE LA SANTÉ EN URGENCE</a:t>
+              <a:t>TSÉVIÉ : LES FORCES DE SÉCURITÉ DÉPLOYÉES SUR LE SITE DU MEETING REPORTÉ DU CNCC</a:t>
             </a:r>
             <a:endParaRPr lang="en-US" sz="1300" dirty="0"/>
           </a:p>
@@ -18799,7 +18854,7 @@
                 <a:ea typeface="Calibri" pitchFamily="34" charset="-122"/>
                 <a:cs typeface="Calibri" pitchFamily="34" charset="-120"/>
               </a:rPr>
-              <a:t> — 25 octobre 2026, 10 h UTC</a:t>
+              <a:t> — 25 octobre 2026, 20 h UTC</a:t>
             </a:r>
             <a:endParaRPr lang="en-US" sz="1300" dirty="0"/>
           </a:p>
@@ -19188,7 +19243,7 @@
                 <a:ea typeface="Arial Narrow" pitchFamily="34" charset="-122"/>
                 <a:cs typeface="Arial Narrow" pitchFamily="34" charset="-120"/>
               </a:rPr>
-              <a:t>NUEE threatens nationwide shutdown, demands withdrawal of soldiers from BEDC hqtrs</a:t>
+              <a:t>Le NUEE menace de fermer tout le pays et exige le retrait des soldats du siège de la BEDC</a:t>
             </a:r>
             <a:endParaRPr lang="en-US" sz="2200" dirty="0"/>
           </a:p>
@@ -21612,7 +21667,7 @@
                 <a:ea typeface="Calibri" pitchFamily="34" charset="-122"/>
                 <a:cs typeface="Calibri" pitchFamily="34" charset="-120"/>
               </a:rPr>
-              <a:t>TPI DE COYAH : LE PROCUREUR ALIOU DIALLO PREND OFFICIELLEMENT LA TÊTE DU PARQUET</a:t>
+              <a:t>TOMINIAN : UN CAS SUSPECT DE VER DE GUINÉE CHEZ UNE CHIENNE SIGNALÉ LE 11 OCTOBRE 2026</a:t>
             </a:r>
             <a:endParaRPr lang="en-US" sz="1300" dirty="0"/>
           </a:p>
@@ -21657,7 +21712,7 @@
                   </a:extLst>
                 </a:hlinkClick>
               </a:rPr>
-              <a:t>Guineematin.com</a:t>
+              <a:t>Maliactu</a:t>
             </a:r>
             <a:pPr indent="0" marL="0">
               <a:spcAft>
@@ -21674,7 +21729,7 @@
                 <a:ea typeface="Calibri" pitchFamily="34" charset="-122"/>
                 <a:cs typeface="Calibri" pitchFamily="34" charset="-120"/>
               </a:rPr>
-              <a:t> — 27 octobre 2026, 19 h UTC   ·   </a:t>
+              <a:t> — 28 octobre 2026, 9 h UTC   ·   </a:t>
             </a:r>
             <a:pPr indent="0" marL="0">
               <a:spcAft>
@@ -21691,7 +21746,7 @@
                 <a:ea typeface="Calibri" pitchFamily="34" charset="-122"/>
                 <a:cs typeface="Calibri" pitchFamily="34" charset="-120"/>
               </a:rPr>
-              <a:t>Cotation : Non confirmé</a:t>
+              <a:t>Cotation : Probable</a:t>
             </a:r>
             <a:endParaRPr lang="en-US" sz="1300" dirty="0"/>
           </a:p>
@@ -21715,7 +21770,7 @@
                 <a:ea typeface="Calibri" pitchFamily="34" charset="-122"/>
                 <a:cs typeface="Calibri" pitchFamily="34" charset="-120"/>
               </a:rPr>
-              <a:t>FORÉCARIAH : FRIKI KEITA REPREND SES FONCTIONS À LA TÊTE DE LA DPE CE MARDI</a:t>
+              <a:t>TPI DE COYAH : LE PROCUREUR ALIOU DIALLO PREND OFFICIELLEMENT LA TÊTE DU PARQUET</a:t>
             </a:r>
             <a:endParaRPr lang="en-US" sz="1300" dirty="0"/>
           </a:p>
@@ -21760,7 +21815,7 @@
                   </a:extLst>
                 </a:hlinkClick>
               </a:rPr>
-              <a:t>Guineelive</a:t>
+              <a:t>Guineematin.com</a:t>
             </a:r>
             <a:pPr indent="0" marL="0">
               <a:spcAft>
@@ -21777,7 +21832,7 @@
                 <a:ea typeface="Calibri" pitchFamily="34" charset="-122"/>
                 <a:cs typeface="Calibri" pitchFamily="34" charset="-120"/>
               </a:rPr>
-              <a:t> — 27 octobre 2026, 13 h UTC   ·   </a:t>
+              <a:t> — 27 octobre 2026, 19 h UTC   ·   </a:t>
             </a:r>
             <a:pPr indent="0" marL="0">
               <a:spcAft>
@@ -22872,7 +22927,7 @@
                 <a:ea typeface="Calibri" pitchFamily="34" charset="-122"/>
                 <a:cs typeface="Calibri" pitchFamily="34" charset="-120"/>
               </a:rPr>
-              <a:t>LIBERIA: JUDGE CITES EVIDENCE IN FINDING NSA STAFF PETER BON JALLAH GUILTY OF STATUTORY RAPE, KIDNAPPING</a:t>
+              <a:t>LIBÉRIA : LE JUGE CITE DES PREUVES POUR DÉCLARER PETER BON JALLAH, MEMBRE DU PERSONNEL DE LA NSA, COUPABLE DE VIOL ET D'ENLÈVEMENT</a:t>
             </a:r>
             <a:endParaRPr lang="en-US" sz="1300" dirty="0"/>
           </a:p>
@@ -22958,7 +23013,7 @@
                 <a:ea typeface="Calibri" pitchFamily="34" charset="-122"/>
                 <a:cs typeface="Calibri" pitchFamily="34" charset="-120"/>
               </a:rPr>
-              <a:t>LIBERIA: WAR VICTIMS, SURVIVORS PROTEST AT COURT OFFICE, CAPITOL AS HOUSE CHAIRMAN PLEDGES TO PUT COURT BILL BEFORE PLENARY TUESDAY</a:t>
+              <a:t>LIBÉRIA : VICTIMES DE GUERRE ET SURVIVANTS MANIFESTENT DEVANT LE TRIBUNAL ET AU CAPITOLE ALORS QUE LE PRÉSIDENT DE LA CHAMBRE S'ENGAGE À SOUMETTRE LE PROJET DE LOI SUR LA COUR DEVANT LA PLÉNIÈRE MARDI</a:t>
             </a:r>
             <a:endParaRPr lang="en-US" sz="1300" dirty="0"/>
           </a:p>
@@ -24153,7 +24208,7 @@
                 <a:ea typeface="Arial Narrow" pitchFamily="34" charset="-122"/>
                 <a:cs typeface="Arial Narrow" pitchFamily="34" charset="-120"/>
               </a:rPr>
-              <a:t>Touba : un débat sur les moteurs de Jakarta se termine par la mort de Baye M. Diop</a:t>
+              <a:t>Meurtre atroce de la lycéene Aminata Sy à Podor : comment le suspect a-t-il arrêté à Mbacké après une cavale</a:t>
             </a:r>
             <a:endParaRPr lang="en-US" sz="2200" dirty="0"/>
           </a:p>
@@ -24218,7 +24273,7 @@
                 <a:ea typeface="Calibri" pitchFamily="34" charset="-122"/>
                 <a:cs typeface="Calibri" pitchFamily="34" charset="-120"/>
               </a:rPr>
-              <a:t>Fait rapporté le mercredi 28 octobre 2026. Lieu : Sénégal. Actualité politique. Une seule source à ce stade (Dakar Actu) : à confirmer par un second média.</a:t>
+              <a:t>Fait rapporté le mercredi 28 octobre 2026. Lieu : Sénégal. Actualité politique. Repris par 3 médias distincts (Pressafrik, Dakar Actu, Seneweb) : le fait est recoupé.</a:t>
             </a:r>
             <a:endParaRPr lang="en-US" sz="1400" dirty="0"/>
           </a:p>
@@ -24261,7 +24316,7 @@
                 <a:ea typeface="Calibri" pitchFamily="34" charset="-122"/>
                 <a:cs typeface="Calibri" pitchFamily="34" charset="-120"/>
               </a:rPr>
-              <a:t>Dakar Actu : </a:t>
+              <a:t>Pressafrik : </a:t>
             </a:r>
             <a:pPr indent="0" marL="0">
               <a:spcAft>
@@ -24278,7 +24333,7 @@
                 <a:ea typeface="Calibri" pitchFamily="34" charset="-122"/>
                 <a:cs typeface="Calibri" pitchFamily="34" charset="-120"/>
               </a:rPr>
-              <a:t>« Une discussion entre deux amis a dégénéré dans la nuit du 26 au 27 octobre à Darou Khoudoss. Selon L’Observateur, Baye M. Diop a été mortellement poignardé par un conducteur de Jakarta qui a pris la fuite. Le différend portait sur la puissance et les caractéristiques des moteurs de motos Jakarta. Il s’est achevé par la mort de Baye M. »</a:t>
+              <a:t>« Karamo Cissé Ndiaye, commerçant de 35 ans, connu comme un vendeur de matériels électroniques a... www.pressafrik.com »</a:t>
             </a:r>
             <a:endParaRPr lang="en-US" sz="1400" dirty="0"/>
           </a:p>
@@ -24344,7 +24399,7 @@
                 <a:ea typeface="Calibri" pitchFamily="34" charset="-122"/>
                 <a:cs typeface="Calibri" pitchFamily="34" charset="-120"/>
               </a:rPr>
-              <a:t>Source : </a:t>
+              <a:t>Sources : </a:t>
             </a:r>
             <a:pPr indent="0" marL="0">
               <a:spcAft>
@@ -24368,7 +24423,7 @@
                   </a:extLst>
                 </a:hlinkClick>
               </a:rPr>
-              <a:t>Dakar Actu</a:t>
+              <a:t>Pressafrik</a:t>
             </a:r>
             <a:pPr indent="0" marL="0">
               <a:spcAft>
@@ -24377,79 +24432,14 @@
               <a:buNone/>
             </a:pPr>
             <a:r>
-              <a:rPr lang="en-US" sz="1400" b="1" dirty="0">
-                <a:solidFill>
-                  <a:srgbClr val="1F2937"/>
-                </a:solidFill>
-                <a:latin typeface="Calibri" pitchFamily="34" charset="0"/>
-                <a:ea typeface="Calibri" pitchFamily="34" charset="-122"/>
-                <a:cs typeface="Calibri" pitchFamily="34" charset="-120"/>
-              </a:rPr>
-              <a:t> — 28 octobre 2026, 8 h UTC   ·   Cotation : Probable</a:t>
-            </a:r>
-            <a:endParaRPr lang="en-US" sz="1400" dirty="0"/>
-          </a:p>
-        </p:txBody>
-      </p:sp>
-      <p:pic>
-        <p:nvPicPr>
-          <p:cNvPr id="12" name="Image 0" descr="preencoded.png">
-            <a:hlinkClick r:id="rId3" tooltip=""/>
-          </p:cNvPr>
-          <p:cNvPicPr>
-            <a:picLocks noChangeAspect="1"/>
-          </p:cNvPicPr>
-          <p:nvPr/>
-        </p:nvPicPr>
-        <p:blipFill>
-          <a:blip r:embed="rId2"/>
-          <a:stretch>
-            <a:fillRect/>
-          </a:stretch>
-        </p:blipFill>
-        <p:spPr>
-          <a:xfrm>
-            <a:off x="7635240" y="2075688"/>
-            <a:ext cx="4114800" cy="2314575"/>
-          </a:xfrm>
-          <a:prstGeom prst="rect">
-            <a:avLst/>
-          </a:prstGeom>
-        </p:spPr>
-      </p:pic>
-      <p:sp>
-        <p:nvSpPr>
-          <p:cNvPr id="13" name="Text 10"/>
-          <p:cNvSpPr/>
-          <p:nvPr/>
-        </p:nvSpPr>
-        <p:spPr>
-          <a:xfrm>
-            <a:off x="7635240" y="4426839"/>
-            <a:ext cx="4114800" cy="256032"/>
-          </a:xfrm>
-          <a:prstGeom prst="rect">
-            <a:avLst/>
-          </a:prstGeom>
-          <a:noFill/>
-          <a:ln/>
-        </p:spPr>
-        <p:txBody>
-          <a:bodyPr wrap="square" rtlCol="0" anchor="ctr"/>
-          <a:lstStyle/>
-          <a:p>
-            <a:pPr algn="r" indent="0" marL="0">
-              <a:buNone/>
-            </a:pPr>
-            <a:r>
-              <a:rPr lang="en-US" sz="900" u="sng" dirty="0">
+              <a:rPr lang="en-US" sz="1400" u="sng" dirty="0">
                 <a:solidFill>
                   <a:srgbClr val="1F6B5E"/>
                 </a:solidFill>
                 <a:latin typeface="Calibri" pitchFamily="34" charset="0"/>
                 <a:ea typeface="Calibri" pitchFamily="34" charset="-122"/>
                 <a:cs typeface="Calibri" pitchFamily="34" charset="-120"/>
-                <a:hlinkClick r:id="rId4" invalidUrl="" action="" tgtFrame="" tooltip="" history="1" highlightClick="0" endSnd="0">
+                <a:hlinkClick r:id="rId2" invalidUrl="" action="" tgtFrame="" tooltip="" history="1" highlightClick="0" endSnd="0">
                   <a:extLst>
                     <a:ext uri="{A12FA001-AC4F-418D-AE19-62706E023703}">
                       <ahyp:hlinkClr xmlns:ahyp="http://schemas.microsoft.com/office/drawing/2018/hyperlinkcolor" val="tx"/>
@@ -24457,7 +24447,120 @@
                   </a:extLst>
                 </a:hlinkClick>
               </a:rPr>
-              <a:t>Photo : © dakaractu.com</a:t>
+              <a:t> · Dakar Actu</a:t>
+            </a:r>
+            <a:pPr indent="0" marL="0">
+              <a:spcAft>
+                <a:spcPts val="300"/>
+              </a:spcAft>
+              <a:buNone/>
+            </a:pPr>
+            <a:r>
+              <a:rPr lang="en-US" sz="1400" u="sng" dirty="0">
+                <a:solidFill>
+                  <a:srgbClr val="1F6B5E"/>
+                </a:solidFill>
+                <a:latin typeface="Calibri" pitchFamily="34" charset="0"/>
+                <a:ea typeface="Calibri" pitchFamily="34" charset="-122"/>
+                <a:cs typeface="Calibri" pitchFamily="34" charset="-120"/>
+                <a:hlinkClick r:id="rId3" invalidUrl="" action="" tgtFrame="" tooltip="" history="1" highlightClick="0" endSnd="0">
+                  <a:extLst>
+                    <a:ext uri="{A12FA001-AC4F-418D-AE19-62706E023703}">
+                      <ahyp:hlinkClr xmlns:ahyp="http://schemas.microsoft.com/office/drawing/2018/hyperlinkcolor" val="tx"/>
+                    </a:ext>
+                  </a:extLst>
+                </a:hlinkClick>
+              </a:rPr>
+              <a:t> · Seneweb</a:t>
+            </a:r>
+            <a:pPr indent="0" marL="0">
+              <a:spcAft>
+                <a:spcPts val="300"/>
+              </a:spcAft>
+              <a:buNone/>
+            </a:pPr>
+            <a:r>
+              <a:rPr lang="en-US" sz="1400" b="1" dirty="0">
+                <a:solidFill>
+                  <a:srgbClr val="1F2937"/>
+                </a:solidFill>
+                <a:latin typeface="Calibri" pitchFamily="34" charset="0"/>
+                <a:ea typeface="Calibri" pitchFamily="34" charset="-122"/>
+                <a:cs typeface="Calibri" pitchFamily="34" charset="-120"/>
+              </a:rPr>
+              <a:t> — 28 octobre 2026, 9 h UTC   ·   Cotation : Confirmé</a:t>
+            </a:r>
+            <a:endParaRPr lang="en-US" sz="1400" dirty="0"/>
+          </a:p>
+        </p:txBody>
+      </p:sp>
+      <p:pic>
+        <p:nvPicPr>
+          <p:cNvPr id="12" name="Image 0" descr="preencoded.png">
+            <a:hlinkClick r:id="rId5" tooltip=""/>
+          </p:cNvPr>
+          <p:cNvPicPr>
+            <a:picLocks noChangeAspect="1"/>
+          </p:cNvPicPr>
+          <p:nvPr/>
+        </p:nvPicPr>
+        <p:blipFill>
+          <a:blip r:embed="rId4"/>
+          <a:stretch>
+            <a:fillRect/>
+          </a:stretch>
+        </p:blipFill>
+        <p:spPr>
+          <a:xfrm>
+            <a:off x="7635240" y="2075688"/>
+            <a:ext cx="4114800" cy="2610974"/>
+          </a:xfrm>
+          <a:prstGeom prst="rect">
+            <a:avLst/>
+          </a:prstGeom>
+        </p:spPr>
+      </p:pic>
+      <p:sp>
+        <p:nvSpPr>
+          <p:cNvPr id="13" name="Text 10"/>
+          <p:cNvSpPr/>
+          <p:nvPr/>
+        </p:nvSpPr>
+        <p:spPr>
+          <a:xfrm>
+            <a:off x="7635240" y="4723238"/>
+            <a:ext cx="4114800" cy="256032"/>
+          </a:xfrm>
+          <a:prstGeom prst="rect">
+            <a:avLst/>
+          </a:prstGeom>
+          <a:noFill/>
+          <a:ln/>
+        </p:spPr>
+        <p:txBody>
+          <a:bodyPr wrap="square" rtlCol="0" anchor="ctr"/>
+          <a:lstStyle/>
+          <a:p>
+            <a:pPr algn="r" indent="0" marL="0">
+              <a:buNone/>
+            </a:pPr>
+            <a:r>
+              <a:rPr lang="en-US" sz="900" u="sng" dirty="0">
+                <a:solidFill>
+                  <a:srgbClr val="1F6B5E"/>
+                </a:solidFill>
+                <a:latin typeface="Calibri" pitchFamily="34" charset="0"/>
+                <a:ea typeface="Calibri" pitchFamily="34" charset="-122"/>
+                <a:cs typeface="Calibri" pitchFamily="34" charset="-120"/>
+                <a:hlinkClick r:id="rId6" invalidUrl="" action="" tgtFrame="" tooltip="" history="1" highlightClick="0" endSnd="0">
+                  <a:extLst>
+                    <a:ext uri="{A12FA001-AC4F-418D-AE19-62706E023703}">
+                      <ahyp:hlinkClr xmlns:ahyp="http://schemas.microsoft.com/office/drawing/2018/hyperlinkcolor" val="tx"/>
+                    </a:ext>
+                  </a:extLst>
+                </a:hlinkClick>
+              </a:rPr>
+              <a:t>Photo : © pressafrik.com</a:t>
             </a:r>
             <a:endParaRPr lang="en-US" sz="900" dirty="0"/>
           </a:p>
@@ -24814,7 +24917,7 @@
                 <a:ea typeface="Calibri" pitchFamily="34" charset="-122"/>
                 <a:cs typeface="Calibri" pitchFamily="34" charset="-120"/>
               </a:rPr>
-              <a:t>MORT D’AMINATA SY : LE SUSPECT INVOQUE UNE CHUTE, LES CONSTATATIONS DÉCRIVENT DES VIOLENCES</a:t>
+              <a:t>TOUBA : UN DÉBAT SUR LES MOTEURS DE JAKARTA SE TERMINE PAR LA MORT DE BAYE M. DIOP</a:t>
             </a:r>
             <a:endParaRPr lang="en-US" sz="1300" dirty="0"/>
           </a:p>
@@ -24917,7 +25020,7 @@
                 <a:ea typeface="Calibri" pitchFamily="34" charset="-122"/>
                 <a:cs typeface="Calibri" pitchFamily="34" charset="-120"/>
               </a:rPr>
-              <a:t>TALIBOU DIALLO TUÉ AU COU ET AU THORAX : UNE DISPUTE ENTRE COLOCATAIRES POUR UNE PRISE ÉLECTRIQUE, AU CŒUR DU DRAME</a:t>
+              <a:t>MORT D’AMINATA SY : LE SUSPECT INVOQUE UNE CHUTE, LES CONSTATATIONS DÉCRIVENT DES VIOLENCES</a:t>
             </a:r>
             <a:endParaRPr lang="en-US" sz="1300" dirty="0"/>
           </a:p>
@@ -25020,7 +25123,7 @@
                 <a:ea typeface="Calibri" pitchFamily="34" charset="-122"/>
                 <a:cs typeface="Calibri" pitchFamily="34" charset="-120"/>
               </a:rPr>
-              <a:t>LYCÉENNE TUÉE À PODOR : DE L'HISTOIRE D'AMOUR AU DRAME</a:t>
+              <a:t>TALIBOU DIALLO TUÉ AU COU ET AU THORAX : UNE DISPUTE ENTRE COLOCATAIRES POUR UNE PRISE ÉLECTRIQUE, AU CŒUR DU DRAME</a:t>
             </a:r>
             <a:endParaRPr lang="en-US" sz="1300" dirty="0"/>
           </a:p>
@@ -25065,7 +25168,7 @@
                   </a:extLst>
                 </a:hlinkClick>
               </a:rPr>
-              <a:t>Seneweb</a:t>
+              <a:t>Dakar Actu</a:t>
             </a:r>
             <a:pPr indent="0" marL="0">
               <a:spcAft>
@@ -25082,7 +25185,7 @@
                 <a:ea typeface="Calibri" pitchFamily="34" charset="-122"/>
                 <a:cs typeface="Calibri" pitchFamily="34" charset="-120"/>
               </a:rPr>
-              <a:t> — 28 octobre 2026, 7 h UTC   ·   </a:t>
+              <a:t> — 28 octobre 2026, 8 h UTC   ·   </a:t>
             </a:r>
             <a:pPr indent="0" marL="0">
               <a:spcAft>
@@ -25123,7 +25226,7 @@
                 <a:ea typeface="Calibri" pitchFamily="34" charset="-122"/>
                 <a:cs typeface="Calibri" pitchFamily="34" charset="-120"/>
               </a:rPr>
-              <a:t>IMMEUBLE EFFONDRÉ À THIÈS : UN MORT ET DEUX BLESSÉS, SELON LE BILAN PROVISOIRE</a:t>
+              <a:t>LYCÉENNE TUÉE À PODOR : DE L'HISTOIRE D'AMOUR AU DRAME</a:t>
             </a:r>
             <a:endParaRPr lang="en-US" sz="1300" dirty="0"/>
           </a:p>
@@ -25144,7 +25247,7 @@
                 <a:ea typeface="Calibri" pitchFamily="34" charset="-122"/>
                 <a:cs typeface="Calibri" pitchFamily="34" charset="-120"/>
               </a:rPr>
-              <a:t>Sources : </a:t>
+              <a:t>Source : </a:t>
             </a:r>
             <a:pPr indent="0" marL="0">
               <a:spcAft>
@@ -25168,7 +25271,7 @@
                   </a:extLst>
                 </a:hlinkClick>
               </a:rPr>
-              <a:t>APS — Agence Sénégalaise Presse · Pressafrik</a:t>
+              <a:t>Seneweb</a:t>
             </a:r>
             <a:pPr indent="0" marL="0">
               <a:spcAft>
@@ -25185,7 +25288,7 @@
                 <a:ea typeface="Calibri" pitchFamily="34" charset="-122"/>
                 <a:cs typeface="Calibri" pitchFamily="34" charset="-120"/>
               </a:rPr>
-              <a:t> — 27 octobre 2026, 19 h UTC   ·   </a:t>
+              <a:t> — 28 octobre 2026, 7 h UTC   ·   </a:t>
             </a:r>
             <a:pPr indent="0" marL="0">
               <a:spcAft>
@@ -25202,7 +25305,7 @@
                 <a:ea typeface="Calibri" pitchFamily="34" charset="-122"/>
                 <a:cs typeface="Calibri" pitchFamily="34" charset="-120"/>
               </a:rPr>
-              <a:t>Cotation : Confirmé</a:t>
+              <a:t>Cotation : Probable</a:t>
             </a:r>
             <a:endParaRPr lang="en-US" sz="1300" dirty="0"/>
           </a:p>
@@ -25226,7 +25329,7 @@
                 <a:ea typeface="Calibri" pitchFamily="34" charset="-122"/>
                 <a:cs typeface="Calibri" pitchFamily="34" charset="-120"/>
               </a:rPr>
-              <a:t>PACTE DE STABILITÉ SOCIALE : LE GOUVERNEMENT VISE 71 % D’EXÉCUTION DES ENGAGEMENTS EN DÉCEMBRE</a:t>
+              <a:t>IMMEUBLE EFFONDRÉ À THIÈS : UN MORT ET DEUX BLESSÉS, SELON LE BILAN PROVISOIRE</a:t>
             </a:r>
             <a:endParaRPr lang="en-US" sz="1300" dirty="0"/>
           </a:p>
@@ -25271,7 +25374,7 @@
                   </a:extLst>
                 </a:hlinkClick>
               </a:rPr>
-              <a:t>Pressafrik · APS — Agence Sénégalaise Presse</a:t>
+              <a:t>APS — Agence Sénégalaise Presse · Pressafrik</a:t>
             </a:r>
             <a:pPr indent="0" marL="0">
               <a:spcAft>
@@ -25288,7 +25391,7 @@
                 <a:ea typeface="Calibri" pitchFamily="34" charset="-122"/>
                 <a:cs typeface="Calibri" pitchFamily="34" charset="-120"/>
               </a:rPr>
-              <a:t> — 27 octobre 2026, 15 h UTC   ·   </a:t>
+              <a:t> — 27 octobre 2026, 19 h UTC   ·   </a:t>
             </a:r>
             <a:pPr indent="0" marL="0">
               <a:spcAft>
@@ -25662,7 +25765,7 @@
                 <a:ea typeface="Calibri" pitchFamily="34" charset="-122"/>
                 <a:cs typeface="Calibri" pitchFamily="34" charset="-120"/>
               </a:rPr>
-              <a:t>MALIKA : UN LOCATAIRE INTERPELLÉ POUR AVOIR POIGNARDÉ À MORT SON VOISIN LORS D'UNE ALTERCATION</a:t>
+              <a:t>PACTE DE STABILITÉ SOCIALE : LE GOUVERNEMENT VISE 71 % D’EXÉCUTION DES ENGAGEMENTS EN DÉCEMBRE</a:t>
             </a:r>
             <a:endParaRPr lang="en-US" sz="1300" dirty="0"/>
           </a:p>
@@ -25683,7 +25786,7 @@
                 <a:ea typeface="Calibri" pitchFamily="34" charset="-122"/>
                 <a:cs typeface="Calibri" pitchFamily="34" charset="-120"/>
               </a:rPr>
-              <a:t>Source : </a:t>
+              <a:t>Sources : </a:t>
             </a:r>
             <a:pPr indent="0" marL="0">
               <a:spcAft>
@@ -25707,7 +25810,7 @@
                   </a:extLst>
                 </a:hlinkClick>
               </a:rPr>
-              <a:t>Seneweb</a:t>
+              <a:t>Pressafrik · APS — Agence Sénégalaise Presse</a:t>
             </a:r>
             <a:pPr indent="0" marL="0">
               <a:spcAft>
@@ -25724,7 +25827,24 @@
                 <a:ea typeface="Calibri" pitchFamily="34" charset="-122"/>
                 <a:cs typeface="Calibri" pitchFamily="34" charset="-120"/>
               </a:rPr>
-              <a:t> — 27 octobre 2026, 13 h UTC</a:t>
+              <a:t> — 27 octobre 2026, 15 h UTC   ·   </a:t>
+            </a:r>
+            <a:pPr indent="0" marL="0">
+              <a:spcAft>
+                <a:spcPts val="200"/>
+              </a:spcAft>
+              <a:buNone/>
+            </a:pPr>
+            <a:r>
+              <a:rPr lang="en-US" sz="1300" b="1" dirty="0">
+                <a:solidFill>
+                  <a:srgbClr val="1F2937"/>
+                </a:solidFill>
+                <a:latin typeface="Calibri" pitchFamily="34" charset="0"/>
+                <a:ea typeface="Calibri" pitchFamily="34" charset="-122"/>
+                <a:cs typeface="Calibri" pitchFamily="34" charset="-120"/>
+              </a:rPr>
+              <a:t>Cotation : Confirmé</a:t>
             </a:r>
             <a:endParaRPr lang="en-US" sz="1300" dirty="0"/>
           </a:p>
@@ -25748,7 +25868,7 @@
                 <a:ea typeface="Calibri" pitchFamily="34" charset="-122"/>
                 <a:cs typeface="Calibri" pitchFamily="34" charset="-120"/>
               </a:rPr>
-              <a:t>MEURTRE PRÉSUMÉ D’AMINATA SY À PODOR : LE SUSPECT RETROUVÉ DANS UNE CACHETTE ET ARRÊTÉ À MBACKÉ</a:t>
+              <a:t>MALIKA : UN LOCATAIRE INTERPELLÉ POUR AVOIR POIGNARDÉ À MORT SON VOISIN LORS D'UNE ALTERCATION</a:t>
             </a:r>
             <a:endParaRPr lang="en-US" sz="1300" dirty="0"/>
           </a:p>
@@ -25769,7 +25889,7 @@
                 <a:ea typeface="Calibri" pitchFamily="34" charset="-122"/>
                 <a:cs typeface="Calibri" pitchFamily="34" charset="-120"/>
               </a:rPr>
-              <a:t>Sources : </a:t>
+              <a:t>Source : </a:t>
             </a:r>
             <a:pPr indent="0" marL="0">
               <a:spcAft>
@@ -25793,7 +25913,7 @@
                   </a:extLst>
                 </a:hlinkClick>
               </a:rPr>
-              <a:t>Dakar Actu · Seneweb</a:t>
+              <a:t>Seneweb</a:t>
             </a:r>
             <a:pPr indent="0" marL="0">
               <a:spcAft>
@@ -25810,24 +25930,7 @@
                 <a:ea typeface="Calibri" pitchFamily="34" charset="-122"/>
                 <a:cs typeface="Calibri" pitchFamily="34" charset="-120"/>
               </a:rPr>
-              <a:t> — 27 octobre 2026, 11 h UTC   ·   </a:t>
-            </a:r>
-            <a:pPr indent="0" marL="0">
-              <a:spcAft>
-                <a:spcPts val="200"/>
-              </a:spcAft>
-              <a:buNone/>
-            </a:pPr>
-            <a:r>
-              <a:rPr lang="en-US" sz="1300" b="1" dirty="0">
-                <a:solidFill>
-                  <a:srgbClr val="1F2937"/>
-                </a:solidFill>
-                <a:latin typeface="Calibri" pitchFamily="34" charset="0"/>
-                <a:ea typeface="Calibri" pitchFamily="34" charset="-122"/>
-                <a:cs typeface="Calibri" pitchFamily="34" charset="-120"/>
-              </a:rPr>
-              <a:t>Cotation : Confirmé</a:t>
+              <a:t> — 27 octobre 2026, 13 h UTC</a:t>
             </a:r>
             <a:endParaRPr lang="en-US" sz="1300" dirty="0"/>
           </a:p>
@@ -28789,7 +28892,7 @@
                 <a:ea typeface="Calibri" pitchFamily="34" charset="-122"/>
                 <a:cs typeface="Calibri" pitchFamily="34" charset="-120"/>
               </a:rPr>
-              <a:t>HAUSSE DES PRIX DU POISSON : ASSALÉ TIÉMOKO RÉVÈLE UNE DÉPENDANCE DE LA CÔTE D’IVOIRE À 88,8 % AUX IMPORTATIONS</a:t>
+              <a:t>LUTTE CONTRE LE GASPILLAGE ALIMENTAIRE : LE COMITÉ DE CONCERTATION ÉTAT-SECTEUR PRIVÉ PRÉCONISE UN CADRE NATIONAL</a:t>
             </a:r>
             <a:endParaRPr lang="en-US" sz="1300" dirty="0"/>
           </a:p>
@@ -28851,7 +28954,24 @@
                 <a:ea typeface="Calibri" pitchFamily="34" charset="-122"/>
                 <a:cs typeface="Calibri" pitchFamily="34" charset="-120"/>
               </a:rPr>
-              <a:t> — 27 octobre 2026, 9 h UTC</a:t>
+              <a:t> — 28 octobre 2026, 7 h UTC   ·   </a:t>
+            </a:r>
+            <a:pPr indent="0" marL="0">
+              <a:spcAft>
+                <a:spcPts val="200"/>
+              </a:spcAft>
+              <a:buNone/>
+            </a:pPr>
+            <a:r>
+              <a:rPr lang="en-US" sz="1300" b="1" dirty="0">
+                <a:solidFill>
+                  <a:srgbClr val="1F2937"/>
+                </a:solidFill>
+                <a:latin typeface="Calibri" pitchFamily="34" charset="0"/>
+                <a:ea typeface="Calibri" pitchFamily="34" charset="-122"/>
+                <a:cs typeface="Calibri" pitchFamily="34" charset="-120"/>
+              </a:rPr>
+              <a:t>Cotation : Probable</a:t>
             </a:r>
             <a:endParaRPr lang="en-US" sz="1300" dirty="0"/>
           </a:p>
@@ -28875,7 +28995,7 @@
                 <a:ea typeface="Calibri" pitchFamily="34" charset="-122"/>
                 <a:cs typeface="Calibri" pitchFamily="34" charset="-120"/>
               </a:rPr>
-              <a:t>DANANÉ/CHIRURGIE HUMANITAIRE - 134 PATIENTS OPÉRÉS GRATUITEMENT, DONT 114 POUR UNE HERNIE</a:t>
+              <a:t>HAUSSE DES PRIX DU POISSON : ASSALÉ TIÉMOKO RÉVÈLE UNE DÉPENDANCE DE LA CÔTE D’IVOIRE À 88,8 % AUX IMPORTATIONS</a:t>
             </a:r>
             <a:endParaRPr lang="en-US" sz="1300" dirty="0"/>
           </a:p>
@@ -28913,6 +29033,92 @@
                 <a:ea typeface="Calibri" pitchFamily="34" charset="-122"/>
                 <a:cs typeface="Calibri" pitchFamily="34" charset="-120"/>
                 <a:hlinkClick r:id="rId2" invalidUrl="" action="" tgtFrame="" tooltip="" history="1" highlightClick="0" endSnd="0">
+                  <a:extLst>
+                    <a:ext uri="{A12FA001-AC4F-418D-AE19-62706E023703}">
+                      <ahyp:hlinkClr xmlns:ahyp="http://schemas.microsoft.com/office/drawing/2018/hyperlinkcolor" val="tx"/>
+                    </a:ext>
+                  </a:extLst>
+                </a:hlinkClick>
+              </a:rPr>
+              <a:t>Linfodrome</a:t>
+            </a:r>
+            <a:pPr indent="0" marL="0">
+              <a:spcAft>
+                <a:spcPts val="200"/>
+              </a:spcAft>
+              <a:buNone/>
+            </a:pPr>
+            <a:r>
+              <a:rPr lang="en-US" sz="1300" dirty="0">
+                <a:solidFill>
+                  <a:srgbClr val="1F2937"/>
+                </a:solidFill>
+                <a:latin typeface="Calibri" pitchFamily="34" charset="0"/>
+                <a:ea typeface="Calibri" pitchFamily="34" charset="-122"/>
+                <a:cs typeface="Calibri" pitchFamily="34" charset="-120"/>
+              </a:rPr>
+              <a:t> — 27 octobre 2026, 9 h UTC</a:t>
+            </a:r>
+            <a:endParaRPr lang="en-US" sz="1300" dirty="0"/>
+          </a:p>
+          <a:p>
+            <a:pPr marL="342900" indent="-342900">
+              <a:spcBef>
+                <a:spcPts val="800"/>
+              </a:spcBef>
+              <a:spcAft>
+                <a:spcPts val="200"/>
+              </a:spcAft>
+              <a:buSzPct val="100000"/>
+              <a:buChar char="❑"/>
+            </a:pPr>
+            <a:r>
+              <a:rPr lang="en-US" sz="1400" b="1" u="sng" dirty="0">
+                <a:solidFill>
+                  <a:srgbClr val="1F6B5E"/>
+                </a:solidFill>
+                <a:latin typeface="Calibri" pitchFamily="34" charset="0"/>
+                <a:ea typeface="Calibri" pitchFamily="34" charset="-122"/>
+                <a:cs typeface="Calibri" pitchFamily="34" charset="-120"/>
+              </a:rPr>
+              <a:t>DANANÉ/CHIRURGIE HUMANITAIRE - 134 PATIENTS OPÉRÉS GRATUITEMENT, DONT 114 POUR UNE HERNIE</a:t>
+            </a:r>
+            <a:endParaRPr lang="en-US" sz="1300" dirty="0"/>
+          </a:p>
+          <a:p>
+            <a:pPr lvl="1" marL="685800" indent="-342900">
+              <a:spcAft>
+                <a:spcPts val="200"/>
+              </a:spcAft>
+              <a:buSzPct val="100000"/>
+              <a:buChar char="▪"/>
+            </a:pPr>
+            <a:r>
+              <a:rPr lang="en-US" sz="1300" dirty="0">
+                <a:solidFill>
+                  <a:srgbClr val="1F2937"/>
+                </a:solidFill>
+                <a:latin typeface="Calibri" pitchFamily="34" charset="0"/>
+                <a:ea typeface="Calibri" pitchFamily="34" charset="-122"/>
+                <a:cs typeface="Calibri" pitchFamily="34" charset="-120"/>
+              </a:rPr>
+              <a:t>Source : </a:t>
+            </a:r>
+            <a:pPr indent="0" marL="0">
+              <a:spcAft>
+                <a:spcPts val="200"/>
+              </a:spcAft>
+              <a:buNone/>
+            </a:pPr>
+            <a:r>
+              <a:rPr lang="en-US" sz="1300" u="sng" dirty="0">
+                <a:solidFill>
+                  <a:srgbClr val="1F6B5E"/>
+                </a:solidFill>
+                <a:latin typeface="Calibri" pitchFamily="34" charset="0"/>
+                <a:ea typeface="Calibri" pitchFamily="34" charset="-122"/>
+                <a:cs typeface="Calibri" pitchFamily="34" charset="-120"/>
+                <a:hlinkClick r:id="rId3" invalidUrl="" action="" tgtFrame="" tooltip="" history="1" highlightClick="0" endSnd="0">
                   <a:extLst>
                     <a:ext uri="{A12FA001-AC4F-418D-AE19-62706E023703}">
                       <ahyp:hlinkClr xmlns:ahyp="http://schemas.microsoft.com/office/drawing/2018/hyperlinkcolor" val="tx"/>

--- a/web/rapports/mensuel/2026-10.pptx
+++ b/web/rapports/mensuel/2026-10.pptx
@@ -4706,7 +4706,7 @@
                 <a:ea typeface="Calibri" pitchFamily="34" charset="-122"/>
                 <a:cs typeface="Calibri" pitchFamily="34" charset="-120"/>
               </a:rPr>
-              <a:t>30 OCTOBRE 2026</a:t>
+              <a:t>31 OCTOBRE 2026</a:t>
             </a:r>
             <a:endParaRPr lang="en-US" sz="2000" dirty="0"/>
           </a:p>
@@ -4752,7 +4752,7 @@
                 <a:ea typeface="Calibri" pitchFamily="34" charset="-122"/>
                 <a:cs typeface="Calibri" pitchFamily="34" charset="-120"/>
               </a:rPr>
-              <a:t>Période du 1er au 30 octobre 2026</a:t>
+              <a:t>Période du 1er au 31 octobre 2026</a:t>
             </a:r>
             <a:endParaRPr lang="en-US" sz="1400" dirty="0"/>
           </a:p>
@@ -4860,7 +4860,7 @@
                 <a:ea typeface="Calibri" pitchFamily="34" charset="-122"/>
                 <a:cs typeface="Calibri" pitchFamily="34" charset="-120"/>
               </a:rPr>
-              <a:t>|  30/10/26   |   1</a:t>
+              <a:t>|  31/10/26   |   1</a:t>
             </a:r>
             <a:endParaRPr lang="en-US" sz="1000" dirty="0"/>
           </a:p>
@@ -5133,7 +5133,7 @@
                 <a:ea typeface="Calibri" pitchFamily="34" charset="-122"/>
                 <a:cs typeface="Calibri" pitchFamily="34" charset="-120"/>
               </a:rPr>
-              <a:t>LUTTE CONTRE LE GASPILLAGE ALIMENTAIRE : LE COMITÉ DE CONCERTATION ÉTAT-SECTEUR PRIVÉ PRÉCONISE UN CADRE NATIONAL</a:t>
+              <a:t>CÔTE D'IVOIRE : LE GOUVERNEMENT MISE SUR LA PONADEPA II POUR ATTEINDRE LA SOUVERAINETÉ ALIMENTAIRE D'ICI 2030</a:t>
             </a:r>
             <a:endParaRPr lang="en-US" sz="1300" dirty="0"/>
           </a:p>
@@ -5178,7 +5178,7 @@
                   </a:extLst>
                 </a:hlinkClick>
               </a:rPr>
-              <a:t>Linfodrome</a:t>
+              <a:t>Alwihda Info (Tchad)</a:t>
             </a:r>
             <a:pPr indent="0" marL="0">
               <a:spcAft>
@@ -5195,7 +5195,7 @@
                 <a:ea typeface="Calibri" pitchFamily="34" charset="-122"/>
                 <a:cs typeface="Calibri" pitchFamily="34" charset="-120"/>
               </a:rPr>
-              <a:t> — 28 octobre 2026, 7 h UTC   ·   </a:t>
+              <a:t> — 28 octobre 2026, 11 h UTC   ·   </a:t>
             </a:r>
             <a:pPr indent="0" marL="0">
               <a:spcAft>
@@ -5236,7 +5236,7 @@
                 <a:ea typeface="Calibri" pitchFamily="34" charset="-122"/>
                 <a:cs typeface="Calibri" pitchFamily="34" charset="-120"/>
               </a:rPr>
-              <a:t>HAUSSE DES PRIX DU POISSON : ASSALÉ TIÉMOKO RÉVÈLE UNE DÉPENDANCE DE LA CÔTE D’IVOIRE À 88,8 % AUX IMPORTATIONS</a:t>
+              <a:t>LUTTE CONTRE LE GASPILLAGE ALIMENTAIRE : LE COMITÉ DE CONCERTATION ÉTAT-SECTEUR PRIVÉ PRÉCONISE UN CADRE NATIONAL</a:t>
             </a:r>
             <a:endParaRPr lang="en-US" sz="1300" dirty="0"/>
           </a:p>
@@ -5298,7 +5298,24 @@
                 <a:ea typeface="Calibri" pitchFamily="34" charset="-122"/>
                 <a:cs typeface="Calibri" pitchFamily="34" charset="-120"/>
               </a:rPr>
-              <a:t> — 27 octobre 2026, 9 h UTC</a:t>
+              <a:t> — 28 octobre 2026, 7 h UTC   ·   </a:t>
+            </a:r>
+            <a:pPr indent="0" marL="0">
+              <a:spcAft>
+                <a:spcPts val="200"/>
+              </a:spcAft>
+              <a:buNone/>
+            </a:pPr>
+            <a:r>
+              <a:rPr lang="en-US" sz="1300" b="1" dirty="0">
+                <a:solidFill>
+                  <a:srgbClr val="1F2937"/>
+                </a:solidFill>
+                <a:latin typeface="Calibri" pitchFamily="34" charset="0"/>
+                <a:ea typeface="Calibri" pitchFamily="34" charset="-122"/>
+                <a:cs typeface="Calibri" pitchFamily="34" charset="-120"/>
+              </a:rPr>
+              <a:t>Cotation : Probable</a:t>
             </a:r>
             <a:endParaRPr lang="en-US" sz="1300" dirty="0"/>
           </a:p>
@@ -5322,7 +5339,7 @@
                 <a:ea typeface="Calibri" pitchFamily="34" charset="-122"/>
                 <a:cs typeface="Calibri" pitchFamily="34" charset="-120"/>
               </a:rPr>
-              <a:t>DANANÉ/CHIRURGIE HUMANITAIRE - 134 PATIENTS OPÉRÉS GRATUITEMENT, DONT 114 POUR UNE HERNIE</a:t>
+              <a:t>HAUSSE DES PRIX DU POISSON : ASSALÉ TIÉMOKO RÉVÈLE UNE DÉPENDANCE DE LA CÔTE D’IVOIRE À 88,8 % AUX IMPORTATIONS</a:t>
             </a:r>
             <a:endParaRPr lang="en-US" sz="1300" dirty="0"/>
           </a:p>
@@ -5367,6 +5384,92 @@
                   </a:extLst>
                 </a:hlinkClick>
               </a:rPr>
+              <a:t>Linfodrome</a:t>
+            </a:r>
+            <a:pPr indent="0" marL="0">
+              <a:spcAft>
+                <a:spcPts val="200"/>
+              </a:spcAft>
+              <a:buNone/>
+            </a:pPr>
+            <a:r>
+              <a:rPr lang="en-US" sz="1300" dirty="0">
+                <a:solidFill>
+                  <a:srgbClr val="1F2937"/>
+                </a:solidFill>
+                <a:latin typeface="Calibri" pitchFamily="34" charset="0"/>
+                <a:ea typeface="Calibri" pitchFamily="34" charset="-122"/>
+                <a:cs typeface="Calibri" pitchFamily="34" charset="-120"/>
+              </a:rPr>
+              <a:t> — 27 octobre 2026, 9 h UTC</a:t>
+            </a:r>
+            <a:endParaRPr lang="en-US" sz="1300" dirty="0"/>
+          </a:p>
+          <a:p>
+            <a:pPr marL="342900" indent="-342900">
+              <a:spcBef>
+                <a:spcPts val="800"/>
+              </a:spcBef>
+              <a:spcAft>
+                <a:spcPts val="200"/>
+              </a:spcAft>
+              <a:buSzPct val="100000"/>
+              <a:buChar char="❑"/>
+            </a:pPr>
+            <a:r>
+              <a:rPr lang="en-US" sz="1400" b="1" u="sng" dirty="0">
+                <a:solidFill>
+                  <a:srgbClr val="1F6B5E"/>
+                </a:solidFill>
+                <a:latin typeface="Calibri" pitchFamily="34" charset="0"/>
+                <a:ea typeface="Calibri" pitchFamily="34" charset="-122"/>
+                <a:cs typeface="Calibri" pitchFamily="34" charset="-120"/>
+              </a:rPr>
+              <a:t>DANANÉ/CHIRURGIE HUMANITAIRE - 134 PATIENTS OPÉRÉS GRATUITEMENT, DONT 114 POUR UNE HERNIE</a:t>
+            </a:r>
+            <a:endParaRPr lang="en-US" sz="1300" dirty="0"/>
+          </a:p>
+          <a:p>
+            <a:pPr lvl="1" marL="685800" indent="-342900">
+              <a:spcAft>
+                <a:spcPts val="200"/>
+              </a:spcAft>
+              <a:buSzPct val="100000"/>
+              <a:buChar char="▪"/>
+            </a:pPr>
+            <a:r>
+              <a:rPr lang="en-US" sz="1300" dirty="0">
+                <a:solidFill>
+                  <a:srgbClr val="1F2937"/>
+                </a:solidFill>
+                <a:latin typeface="Calibri" pitchFamily="34" charset="0"/>
+                <a:ea typeface="Calibri" pitchFamily="34" charset="-122"/>
+                <a:cs typeface="Calibri" pitchFamily="34" charset="-120"/>
+              </a:rPr>
+              <a:t>Source : </a:t>
+            </a:r>
+            <a:pPr indent="0" marL="0">
+              <a:spcAft>
+                <a:spcPts val="200"/>
+              </a:spcAft>
+              <a:buNone/>
+            </a:pPr>
+            <a:r>
+              <a:rPr lang="en-US" sz="1300" u="sng" dirty="0">
+                <a:solidFill>
+                  <a:srgbClr val="1F6B5E"/>
+                </a:solidFill>
+                <a:latin typeface="Calibri" pitchFamily="34" charset="0"/>
+                <a:ea typeface="Calibri" pitchFamily="34" charset="-122"/>
+                <a:cs typeface="Calibri" pitchFamily="34" charset="-120"/>
+                <a:hlinkClick r:id="rId4" invalidUrl="" action="" tgtFrame="" tooltip="" history="1" highlightClick="0" endSnd="0">
+                  <a:extLst>
+                    <a:ext uri="{A12FA001-AC4F-418D-AE19-62706E023703}">
+                      <ahyp:hlinkClr xmlns:ahyp="http://schemas.microsoft.com/office/drawing/2018/hyperlinkcolor" val="tx"/>
+                    </a:ext>
+                  </a:extLst>
+                </a:hlinkClick>
+              </a:rPr>
               <a:t>AllAfrica (CI)</a:t>
             </a:r>
             <a:pPr indent="0" marL="0">
@@ -5468,7 +5571,7 @@
                 <a:ea typeface="Calibri" pitchFamily="34" charset="-122"/>
                 <a:cs typeface="Calibri" pitchFamily="34" charset="-120"/>
               </a:rPr>
-              <a:t>|  30/10/26   |   10</a:t>
+              <a:t>|  31/10/26   |   10</a:t>
             </a:r>
             <a:endParaRPr lang="en-US" sz="1000" dirty="0"/>
           </a:p>
@@ -5734,7 +5837,7 @@
                 <a:ea typeface="Calibri" pitchFamily="34" charset="-122"/>
                 <a:cs typeface="Calibri" pitchFamily="34" charset="-120"/>
               </a:rPr>
-              <a:t>Indice de confiance : moyenne (incident vérifié le plus récent : 122 jours ; 2 signaux du jour)</a:t>
+              <a:t>Indice de confiance : faible (incident vérifié le plus récent : 123 jours ; aucun signal du jour)</a:t>
             </a:r>
             <a:endParaRPr lang="en-US" sz="1100" dirty="0"/>
           </a:p>
@@ -5780,7 +5883,7 @@
                 <a:ea typeface="Calibri" pitchFamily="34" charset="-122"/>
                 <a:cs typeface="Calibri" pitchFamily="34" charset="-120"/>
               </a:rPr>
-              <a:t>BOUAKÉ : LE DGPN LANCE L'OPÉRATION EPERVIER 12 POUR DÉMANTELER LES RÉSEAUX CRIMINELS</a:t>
+              <a:t>ALASSANE OUATTARA À L’OMC : LA CÔTE D’IVOIRE EST « ENTOURÉE DE PAYS QUI ONT DES DIFFICULTÉS… »</a:t>
             </a:r>
             <a:endParaRPr lang="en-US" sz="1300" dirty="0"/>
           </a:p>
@@ -5825,7 +5928,7 @@
                   </a:extLst>
                 </a:hlinkClick>
               </a:rPr>
-              <a:t>Linfodrome</a:t>
+              <a:t>Seneweb</a:t>
             </a:r>
             <a:pPr indent="0" marL="0">
               <a:spcAft>
@@ -5842,7 +5945,7 @@
                 <a:ea typeface="Calibri" pitchFamily="34" charset="-122"/>
                 <a:cs typeface="Calibri" pitchFamily="34" charset="-120"/>
               </a:rPr>
-              <a:t> — 29 octobre 2026, 21 h UTC   ·   </a:t>
+              <a:t> — 30 octobre 2026, 16 h UTC   ·   </a:t>
             </a:r>
             <a:pPr indent="0" marL="0">
               <a:spcAft>
@@ -5883,7 +5986,7 @@
                 <a:ea typeface="Calibri" pitchFamily="34" charset="-122"/>
                 <a:cs typeface="Calibri" pitchFamily="34" charset="-120"/>
               </a:rPr>
-              <a:t>LA CÔTE D’IVOIRE EXPOSÉE À UN NOUVEAU CORRIDOR DJIHADISTE / LES VENDEUSES DE POISSON « ROULÉES DANS LA FARINE »</a:t>
+              <a:t>GESTION DES CARRIÈRES PUBLIQUES : OUATTARA PREND UNE DÉCISION - UN HOMME SE JETTE DU 4E ÉTAGE ET MEURT</a:t>
             </a:r>
             <a:endParaRPr lang="en-US" sz="1300" dirty="0"/>
           </a:p>
@@ -5945,7 +6048,7 @@
                 <a:ea typeface="Calibri" pitchFamily="34" charset="-122"/>
                 <a:cs typeface="Calibri" pitchFamily="34" charset="-120"/>
               </a:rPr>
-              <a:t> — 29 octobre 2026, 7 h UTC   ·   </a:t>
+              <a:t> — 30 octobre 2026, 7 h UTC   ·   </a:t>
             </a:r>
             <a:pPr indent="0" marL="0">
               <a:spcAft>
@@ -5986,7 +6089,7 @@
                 <a:ea typeface="Calibri" pitchFamily="34" charset="-122"/>
                 <a:cs typeface="Calibri" pitchFamily="34" charset="-120"/>
               </a:rPr>
-              <a:t>CÔTE D’IVOIRE : DES GRANDES INSTITUTIONS À L’ARMÉE, ALASSANE OUATTARA SONNE L’HEURE DE LA RETRAITE</a:t>
+              <a:t>BOUAKÉ : LE DGPN LANCE L'OPÉRATION EPERVIER 12 POUR DÉMANTELER LES RÉSEAUX CRIMINELS</a:t>
             </a:r>
             <a:endParaRPr lang="en-US" sz="1300" dirty="0"/>
           </a:p>
@@ -6031,7 +6134,7 @@
                   </a:extLst>
                 </a:hlinkClick>
               </a:rPr>
-              <a:t>Jeune Afrique</a:t>
+              <a:t>Linfodrome</a:t>
             </a:r>
             <a:pPr indent="0" marL="0">
               <a:spcAft>
@@ -6048,7 +6151,7 @@
                 <a:ea typeface="Calibri" pitchFamily="34" charset="-122"/>
                 <a:cs typeface="Calibri" pitchFamily="34" charset="-120"/>
               </a:rPr>
-              <a:t> — 29 octobre 2026, 7 h UTC   ·   </a:t>
+              <a:t> — 29 octobre 2026, 21 h UTC   ·   </a:t>
             </a:r>
             <a:pPr indent="0" marL="0">
               <a:spcAft>
@@ -6089,7 +6192,7 @@
                 <a:ea typeface="Calibri" pitchFamily="34" charset="-122"/>
                 <a:cs typeface="Calibri" pitchFamily="34" charset="-120"/>
               </a:rPr>
-              <a:t>ABIDJAN - CAP VERS UNE COOPÉRATION MILITAIRE BILATÉRALE</a:t>
+              <a:t>LA CÔTE D’IVOIRE EXPOSÉE À UN NOUVEAU CORRIDOR DJIHADISTE / LES VENDEUSES DE POISSON « ROULÉES DANS LA FARINE »</a:t>
             </a:r>
             <a:endParaRPr lang="en-US" sz="1300" dirty="0"/>
           </a:p>
@@ -6134,7 +6237,7 @@
                   </a:extLst>
                 </a:hlinkClick>
               </a:rPr>
-              <a:t>AllAfrica (CI)</a:t>
+              <a:t>Linfodrome</a:t>
             </a:r>
             <a:pPr indent="0" marL="0">
               <a:spcAft>
@@ -6151,7 +6254,7 @@
                 <a:ea typeface="Calibri" pitchFamily="34" charset="-122"/>
                 <a:cs typeface="Calibri" pitchFamily="34" charset="-120"/>
               </a:rPr>
-              <a:t> — 28 octobre 2026, 15 h UTC   ·   </a:t>
+              <a:t> — 29 octobre 2026, 7 h UTC   ·   </a:t>
             </a:r>
             <a:pPr indent="0" marL="0">
               <a:spcAft>
@@ -6192,7 +6295,7 @@
                 <a:ea typeface="Calibri" pitchFamily="34" charset="-122"/>
                 <a:cs typeface="Calibri" pitchFamily="34" charset="-120"/>
               </a:rPr>
-              <a:t>3ÈME FORUM FRONTIÈRES D'ABIDJAN : LA REPRÉSENTATION PERMANENTE DE LA CEDEAO AUPRÈS DE L'UNION AFRICAINE S'ENGAGE POUR UNE GOUVERNANCE DES FRONTIÈRES CENTRÉE SUR LES POPULATIONS</a:t>
+              <a:t>CÔTE D’IVOIRE : DES GRANDES INSTITUTIONS À L’ARMÉE, ALASSANE OUATTARA SONNE L’HEURE DE LA RETRAITE</a:t>
             </a:r>
             <a:endParaRPr lang="en-US" sz="1300" dirty="0"/>
           </a:p>
@@ -6237,7 +6340,7 @@
                   </a:extLst>
                 </a:hlinkClick>
               </a:rPr>
-              <a:t>CEDEAO — Communiques officiels</a:t>
+              <a:t>Jeune Afrique</a:t>
             </a:r>
             <a:pPr indent="0" marL="0">
               <a:spcAft>
@@ -6254,7 +6357,7 @@
                 <a:ea typeface="Calibri" pitchFamily="34" charset="-122"/>
                 <a:cs typeface="Calibri" pitchFamily="34" charset="-120"/>
               </a:rPr>
-              <a:t> — 28 octobre 2026, 10 h UTC   ·   </a:t>
+              <a:t> — 29 octobre 2026, 7 h UTC   ·   </a:t>
             </a:r>
             <a:pPr indent="0" marL="0">
               <a:spcAft>
@@ -6355,7 +6458,7 @@
                 <a:ea typeface="Calibri" pitchFamily="34" charset="-122"/>
                 <a:cs typeface="Calibri" pitchFamily="34" charset="-120"/>
               </a:rPr>
-              <a:t>|  30/10/26   |   11</a:t>
+              <a:t>|  31/10/26   |   11</a:t>
             </a:r>
             <a:endParaRPr lang="en-US" sz="1000" dirty="0"/>
           </a:p>
@@ -6628,7 +6731,7 @@
                 <a:ea typeface="Calibri" pitchFamily="34" charset="-122"/>
                 <a:cs typeface="Calibri" pitchFamily="34" charset="-120"/>
               </a:rPr>
-              <a:t>CHARNIER DE YOPOUGON : 26 ANS APRÈS, AMADOU COULIBALY OPPOSE LES VIOLENCES DU PASSÉ À L’ÈRE OUATTARA</a:t>
+              <a:t>ABIDJAN - CAP VERS UNE COOPÉRATION MILITAIRE BILATÉRALE</a:t>
             </a:r>
             <a:endParaRPr lang="en-US" sz="1300" dirty="0"/>
           </a:p>
@@ -6673,7 +6776,7 @@
                   </a:extLst>
                 </a:hlinkClick>
               </a:rPr>
-              <a:t>Linfodrome</a:t>
+              <a:t>AllAfrica (CI)</a:t>
             </a:r>
             <a:pPr indent="0" marL="0">
               <a:spcAft>
@@ -6690,7 +6793,7 @@
                 <a:ea typeface="Calibri" pitchFamily="34" charset="-122"/>
                 <a:cs typeface="Calibri" pitchFamily="34" charset="-120"/>
               </a:rPr>
-              <a:t> — 27 octobre 2026, 18 h UTC   ·   </a:t>
+              <a:t> — 28 octobre 2026, 15 h UTC   ·   </a:t>
             </a:r>
             <a:pPr indent="0" marL="0">
               <a:spcAft>
@@ -6731,7 +6834,7 @@
                 <a:ea typeface="Calibri" pitchFamily="34" charset="-122"/>
                 <a:cs typeface="Calibri" pitchFamily="34" charset="-120"/>
               </a:rPr>
-              <a:t>PRIX NATIONAL D'EXCELLENCE 2026 - RAPHAËL DIAMALA KOUASSI HISSE M'BAHIAKRO SUR LE PODIUM DES MEILLEURS MAIRES DU PAYS</a:t>
+              <a:t>3ÈME FORUM FRONTIÈRES D'ABIDJAN : LA REPRÉSENTATION PERMANENTE DE LA CEDEAO AUPRÈS DE L'UNION AFRICAINE S'ENGAGE POUR UNE GOUVERNANCE DES FRONTIÈRES CENTRÉE SUR LES POPULATIONS</a:t>
             </a:r>
             <a:endParaRPr lang="en-US" sz="1300" dirty="0"/>
           </a:p>
@@ -6776,7 +6879,7 @@
                   </a:extLst>
                 </a:hlinkClick>
               </a:rPr>
-              <a:t>AllAfrica (CI)</a:t>
+              <a:t>CEDEAO — Communiques officiels</a:t>
             </a:r>
             <a:pPr indent="0" marL="0">
               <a:spcAft>
@@ -6793,7 +6896,7 @@
                 <a:ea typeface="Calibri" pitchFamily="34" charset="-122"/>
                 <a:cs typeface="Calibri" pitchFamily="34" charset="-120"/>
               </a:rPr>
-              <a:t> — 27 octobre 2026, 16 h UTC   ·   </a:t>
+              <a:t> — 28 octobre 2026, 10 h UTC   ·   </a:t>
             </a:r>
             <a:pPr indent="0" marL="0">
               <a:spcAft>
@@ -6834,7 +6937,7 @@
                 <a:ea typeface="Calibri" pitchFamily="34" charset="-122"/>
                 <a:cs typeface="Calibri" pitchFamily="34" charset="-120"/>
               </a:rPr>
-              <a:t>INTERPOL RENFORCE LES CAPACITÉS DES ENQUÊTEURS IVOIRIENS POUR TRAQUER LES AVOIRS DES CRIMINELS</a:t>
+              <a:t>CHARNIER DE YOPOUGON : 26 ANS APRÈS, AMADOU COULIBALY OPPOSE LES VIOLENCES DU PASSÉ À L’ÈRE OUATTARA</a:t>
             </a:r>
             <a:endParaRPr lang="en-US" sz="1300" dirty="0"/>
           </a:p>
@@ -6896,7 +6999,24 @@
                 <a:ea typeface="Calibri" pitchFamily="34" charset="-122"/>
                 <a:cs typeface="Calibri" pitchFamily="34" charset="-120"/>
               </a:rPr>
-              <a:t> — 27 octobre 2026, 13 h UTC</a:t>
+              <a:t> — 27 octobre 2026, 18 h UTC   ·   </a:t>
+            </a:r>
+            <a:pPr indent="0" marL="0">
+              <a:spcAft>
+                <a:spcPts val="200"/>
+              </a:spcAft>
+              <a:buNone/>
+            </a:pPr>
+            <a:r>
+              <a:rPr lang="en-US" sz="1300" b="1" dirty="0">
+                <a:solidFill>
+                  <a:srgbClr val="1F2937"/>
+                </a:solidFill>
+                <a:latin typeface="Calibri" pitchFamily="34" charset="0"/>
+                <a:ea typeface="Calibri" pitchFamily="34" charset="-122"/>
+                <a:cs typeface="Calibri" pitchFamily="34" charset="-120"/>
+              </a:rPr>
+              <a:t>Cotation : Probable</a:t>
             </a:r>
             <a:endParaRPr lang="en-US" sz="1300" dirty="0"/>
           </a:p>
@@ -6920,7 +7040,7 @@
                 <a:ea typeface="Calibri" pitchFamily="34" charset="-122"/>
                 <a:cs typeface="Calibri" pitchFamily="34" charset="-120"/>
               </a:rPr>
-              <a:t>QUERELLES DE SUCCESSION OU PROFANATION D'UN HÉRITAGE ?</a:t>
+              <a:t>PRIX NATIONAL D'EXCELLENCE 2026 - RAPHAËL DIAMALA KOUASSI HISSE M'BAHIAKRO SUR LE PODIUM DES MEILLEURS MAIRES DU PAYS</a:t>
             </a:r>
             <a:endParaRPr lang="en-US" sz="1300" dirty="0"/>
           </a:p>
@@ -6982,7 +7102,7 @@
                 <a:ea typeface="Calibri" pitchFamily="34" charset="-122"/>
                 <a:cs typeface="Calibri" pitchFamily="34" charset="-120"/>
               </a:rPr>
-              <a:t> — 26 octobre 2026, 13 h UTC   ·   </a:t>
+              <a:t> — 27 octobre 2026, 16 h UTC   ·   </a:t>
             </a:r>
             <a:pPr indent="0" marL="0">
               <a:spcAft>
@@ -7023,7 +7143,7 @@
                 <a:ea typeface="Calibri" pitchFamily="34" charset="-122"/>
                 <a:cs typeface="Calibri" pitchFamily="34" charset="-120"/>
               </a:rPr>
-              <a:t>CÔTE D'IVOIRE : SÉCURITÉ ALIMENTAIRE ET SÉCURISATION FONCIÈRE, LE GOUVERNEMENT SOUTIENT LES FEMMES PRODUCTRICES</a:t>
+              <a:t>INTERPOL RENFORCE LES CAPACITÉS DES ENQUÊTEURS IVOIRIENS POUR TRAQUER LES AVOIRS DES CRIMINELS</a:t>
             </a:r>
             <a:endParaRPr lang="en-US" sz="1300" dirty="0"/>
           </a:p>
@@ -7068,7 +7188,7 @@
                   </a:extLst>
                 </a:hlinkClick>
               </a:rPr>
-              <a:t>Alwihda Info (Tchad)</a:t>
+              <a:t>Linfodrome</a:t>
             </a:r>
             <a:pPr indent="0" marL="0">
               <a:spcAft>
@@ -7085,7 +7205,7 @@
                 <a:ea typeface="Calibri" pitchFamily="34" charset="-122"/>
                 <a:cs typeface="Calibri" pitchFamily="34" charset="-120"/>
               </a:rPr>
-              <a:t> — 26 octobre 2026, 9 h UTC</a:t>
+              <a:t> — 27 octobre 2026, 13 h UTC</a:t>
             </a:r>
             <a:endParaRPr lang="en-US" sz="1300" dirty="0"/>
           </a:p>
@@ -7169,7 +7289,7 @@
                 <a:ea typeface="Calibri" pitchFamily="34" charset="-122"/>
                 <a:cs typeface="Calibri" pitchFamily="34" charset="-120"/>
               </a:rPr>
-              <a:t>|  30/10/26   |   12</a:t>
+              <a:t>|  31/10/26   |   12</a:t>
             </a:r>
             <a:endParaRPr lang="en-US" sz="1000" dirty="0"/>
           </a:p>
@@ -7435,7 +7555,7 @@
                 <a:ea typeface="Calibri" pitchFamily="34" charset="-122"/>
                 <a:cs typeface="Calibri" pitchFamily="34" charset="-120"/>
               </a:rPr>
-              <a:t>Indice de confiance : moyenne (incident vérifié le plus récent : 122 jours ; 2 signaux du jour)</a:t>
+              <a:t>Indice de confiance : faible (incident vérifié le plus récent : 123 jours ; aucun signal du jour)</a:t>
             </a:r>
             <a:endParaRPr lang="en-US" sz="1100" dirty="0"/>
           </a:p>
@@ -7474,7 +7594,7 @@
                 <a:ea typeface="Arial Narrow" pitchFamily="34" charset="-122"/>
                 <a:cs typeface="Arial Narrow" pitchFamily="34" charset="-120"/>
               </a:rPr>
-              <a:t>Gonzagueville : Elle lui refuse le sexe, il la tue et jette son corps dans une décharge d'ordures</a:t>
+              <a:t>Côte d’Ivoire : une histoire de « red flag » vire au meurtre, le suspect passe aux aveux</a:t>
             </a:r>
             <a:endParaRPr lang="en-US" sz="2200" dirty="0"/>
           </a:p>
@@ -7489,7 +7609,7 @@
         <p:spPr>
           <a:xfrm>
             <a:off x="640080" y="2029968"/>
-            <a:ext cx="10972800" cy="3867912"/>
+            <a:ext cx="6812280" cy="3867912"/>
           </a:xfrm>
           <a:prstGeom prst="rect">
             <a:avLst/>
@@ -7539,7 +7659,7 @@
                 <a:ea typeface="Calibri" pitchFamily="34" charset="-122"/>
                 <a:cs typeface="Calibri" pitchFamily="34" charset="-120"/>
               </a:rPr>
-              <a:t>Fait rapporté le mercredi 28 octobre 2026. Lieu : Côte d'Ivoire. Actualité économique. Une seule source à ce stade (Linfodrome) : à confirmer par un second média.</a:t>
+              <a:t>Fait rapporté le vendredi 30 octobre 2026. Lieu : Côte d'Ivoire. Actualité économique. Une seule source à ce stade (togoscoop.tg) : à confirmer par un second média.</a:t>
             </a:r>
             <a:endParaRPr lang="en-US" sz="1400" dirty="0"/>
           </a:p>
@@ -7582,7 +7702,7 @@
                 <a:ea typeface="Calibri" pitchFamily="34" charset="-122"/>
                 <a:cs typeface="Calibri" pitchFamily="34" charset="-120"/>
               </a:rPr>
-              <a:t>Linfodrome : </a:t>
+              <a:t>togoscoop.tg : </a:t>
             </a:r>
             <a:pPr indent="0" marL="0">
               <a:spcAft>
@@ -7599,7 +7719,7 @@
                 <a:ea typeface="Calibri" pitchFamily="34" charset="-122"/>
                 <a:cs typeface="Calibri" pitchFamily="34" charset="-120"/>
               </a:rPr>
-              <a:t>« Un jeune homme de 20 ans a été interpellé par la Brigade de recherche et d’intervention (BRI) après la découverte du corps sans vie d’une jeune fille de 18 ans dans une décharge à Gonzagueville, dans la commune de Port-Bouët. Selon les déclarations du suspect rapportées par la police, le drame serait survenu après que la victime lui ait refusé des rapports sexuels. »</a:t>
+              <a:t>« Retrouvée morte dans une décharge d’ordures ménagères à Gonzagueville, dans la commune de Port-Bouët, le 4 septembre 2026, une jeune fille de 18 ans a été victime d’un meurtre présumé dont les circonstances suscitent une vive indignation. »</a:t>
             </a:r>
             <a:endParaRPr lang="en-US" sz="1400" dirty="0"/>
           </a:p>
@@ -7689,7 +7809,7 @@
                   </a:extLst>
                 </a:hlinkClick>
               </a:rPr>
-              <a:t>Linfodrome</a:t>
+              <a:t>togoscoop.tg</a:t>
             </a:r>
             <a:pPr indent="0" marL="0">
               <a:spcAft>
@@ -7706,15 +7826,87 @@
                 <a:ea typeface="Calibri" pitchFamily="34" charset="-122"/>
                 <a:cs typeface="Calibri" pitchFamily="34" charset="-120"/>
               </a:rPr>
-              <a:t> — 28 octobre 2026, 12 h UTC   ·   Cotation : Probable</a:t>
+              <a:t> — 30 octobre 2026, 12 h UTC   ·   Cotation : Non confirmé</a:t>
             </a:r>
             <a:endParaRPr lang="en-US" sz="1400" dirty="0"/>
           </a:p>
         </p:txBody>
       </p:sp>
-      <p:sp>
-        <p:nvSpPr>
-          <p:cNvPr id="12" name="Text 10"/>
+      <p:pic>
+        <p:nvPicPr>
+          <p:cNvPr id="12" name="Image 0" descr="preencoded.png">
+            <a:hlinkClick r:id="rId3" tooltip=""/>
+          </p:cNvPr>
+          <p:cNvPicPr>
+            <a:picLocks noChangeAspect="1"/>
+          </p:cNvPicPr>
+          <p:nvPr/>
+        </p:nvPicPr>
+        <p:blipFill>
+          <a:blip r:embed="rId2"/>
+          <a:stretch>
+            <a:fillRect/>
+          </a:stretch>
+        </p:blipFill>
+        <p:spPr>
+          <a:xfrm>
+            <a:off x="8143926" y="2075688"/>
+            <a:ext cx="3097427" cy="3657600"/>
+          </a:xfrm>
+          <a:prstGeom prst="rect">
+            <a:avLst/>
+          </a:prstGeom>
+        </p:spPr>
+      </p:pic>
+      <p:sp>
+        <p:nvSpPr>
+          <p:cNvPr id="13" name="Text 10"/>
+          <p:cNvSpPr/>
+          <p:nvPr/>
+        </p:nvSpPr>
+        <p:spPr>
+          <a:xfrm>
+            <a:off x="7635240" y="5769864"/>
+            <a:ext cx="4114800" cy="256032"/>
+          </a:xfrm>
+          <a:prstGeom prst="rect">
+            <a:avLst/>
+          </a:prstGeom>
+          <a:noFill/>
+          <a:ln/>
+        </p:spPr>
+        <p:txBody>
+          <a:bodyPr wrap="square" rtlCol="0" anchor="ctr"/>
+          <a:lstStyle/>
+          <a:p>
+            <a:pPr algn="r" indent="0" marL="0">
+              <a:buNone/>
+            </a:pPr>
+            <a:r>
+              <a:rPr lang="en-US" sz="900" u="sng" dirty="0">
+                <a:solidFill>
+                  <a:srgbClr val="1F6B5E"/>
+                </a:solidFill>
+                <a:latin typeface="Calibri" pitchFamily="34" charset="0"/>
+                <a:ea typeface="Calibri" pitchFamily="34" charset="-122"/>
+                <a:cs typeface="Calibri" pitchFamily="34" charset="-120"/>
+                <a:hlinkClick r:id="rId4" invalidUrl="" action="" tgtFrame="" tooltip="" history="1" highlightClick="0" endSnd="0">
+                  <a:extLst>
+                    <a:ext uri="{A12FA001-AC4F-418D-AE19-62706E023703}">
+                      <ahyp:hlinkClr xmlns:ahyp="http://schemas.microsoft.com/office/drawing/2018/hyperlinkcolor" val="tx"/>
+                    </a:ext>
+                  </a:extLst>
+                </a:hlinkClick>
+              </a:rPr>
+              <a:t>Photo : © togoscoop.tg</a:t>
+            </a:r>
+            <a:endParaRPr lang="en-US" sz="900" dirty="0"/>
+          </a:p>
+        </p:txBody>
+      </p:sp>
+      <p:sp>
+        <p:nvSpPr>
+          <p:cNvPr id="14" name="Text 11"/>
           <p:cNvSpPr/>
           <p:nvPr/>
         </p:nvSpPr>
@@ -7759,7 +7951,7 @@
       </p:sp>
       <p:sp>
         <p:nvSpPr>
-          <p:cNvPr id="13" name="Text 11"/>
+          <p:cNvPr id="15" name="Text 12"/>
           <p:cNvSpPr/>
           <p:nvPr/>
         </p:nvSpPr>
@@ -7790,7 +7982,7 @@
                 <a:ea typeface="Calibri" pitchFamily="34" charset="-122"/>
                 <a:cs typeface="Calibri" pitchFamily="34" charset="-120"/>
               </a:rPr>
-              <a:t>|  30/10/26   |   13</a:t>
+              <a:t>|  31/10/26   |   13</a:t>
             </a:r>
             <a:endParaRPr lang="en-US" sz="1000" dirty="0"/>
           </a:p>
@@ -8063,7 +8255,7 @@
                 <a:ea typeface="Calibri" pitchFamily="34" charset="-122"/>
                 <a:cs typeface="Calibri" pitchFamily="34" charset="-120"/>
               </a:rPr>
-              <a:t>AVANT LA GRANDE MARCHE DU 24 COCTOBRE ; EMMANUEL MACRON FACE UN ATTENTAT</a:t>
+              <a:t>GONZAGUEVILLE : ELLE LUI REFUSE LE SEXE, IL LA TUE ET JETTE SON CORPS DANS UNE DÉCHARGE D'ORDURES</a:t>
             </a:r>
             <a:endParaRPr lang="en-US" sz="1300" dirty="0"/>
           </a:p>
@@ -8125,7 +8317,24 @@
                 <a:ea typeface="Calibri" pitchFamily="34" charset="-122"/>
                 <a:cs typeface="Calibri" pitchFamily="34" charset="-120"/>
               </a:rPr>
-              <a:t> — 23 octobre 2026, 22 h UTC</a:t>
+              <a:t> — 28 octobre 2026, 12 h UTC   ·   </a:t>
+            </a:r>
+            <a:pPr indent="0" marL="0">
+              <a:spcAft>
+                <a:spcPts val="200"/>
+              </a:spcAft>
+              <a:buNone/>
+            </a:pPr>
+            <a:r>
+              <a:rPr lang="en-US" sz="1300" b="1" dirty="0">
+                <a:solidFill>
+                  <a:srgbClr val="1F2937"/>
+                </a:solidFill>
+                <a:latin typeface="Calibri" pitchFamily="34" charset="0"/>
+                <a:ea typeface="Calibri" pitchFamily="34" charset="-122"/>
+                <a:cs typeface="Calibri" pitchFamily="34" charset="-120"/>
+              </a:rPr>
+              <a:t>Cotation : Probable</a:t>
             </a:r>
             <a:endParaRPr lang="en-US" sz="1300" dirty="0"/>
           </a:p>
@@ -8149,7 +8358,7 @@
                 <a:ea typeface="Calibri" pitchFamily="34" charset="-122"/>
                 <a:cs typeface="Calibri" pitchFamily="34" charset="-120"/>
               </a:rPr>
-              <a:t>PRIX DU POISSON EN CÔTE D'IVOIRE - L'INTERPROFESSION PÊCHE SALUE LES MESURES GOUVERNEMENTALES ET PROMET DE NOUVELLES BAISSES</a:t>
+              <a:t>AVANT LA GRANDE MARCHE DU 24 COCTOBRE ; EMMANUEL MACRON FACE UN ATTENTAT</a:t>
             </a:r>
             <a:endParaRPr lang="en-US" sz="1300" dirty="0"/>
           </a:p>
@@ -8194,6 +8403,195 @@
                   </a:extLst>
                 </a:hlinkClick>
               </a:rPr>
+              <a:t>Linfodrome</a:t>
+            </a:r>
+            <a:pPr indent="0" marL="0">
+              <a:spcAft>
+                <a:spcPts val="200"/>
+              </a:spcAft>
+              <a:buNone/>
+            </a:pPr>
+            <a:r>
+              <a:rPr lang="en-US" sz="1300" dirty="0">
+                <a:solidFill>
+                  <a:srgbClr val="1F2937"/>
+                </a:solidFill>
+                <a:latin typeface="Calibri" pitchFamily="34" charset="0"/>
+                <a:ea typeface="Calibri" pitchFamily="34" charset="-122"/>
+                <a:cs typeface="Calibri" pitchFamily="34" charset="-120"/>
+              </a:rPr>
+              <a:t> — 23 octobre 2026, 22 h UTC</a:t>
+            </a:r>
+            <a:endParaRPr lang="en-US" sz="1300" dirty="0"/>
+          </a:p>
+          <a:p>
+            <a:pPr marL="342900" indent="-342900">
+              <a:spcBef>
+                <a:spcPts val="800"/>
+              </a:spcBef>
+              <a:spcAft>
+                <a:spcPts val="200"/>
+              </a:spcAft>
+              <a:buSzPct val="100000"/>
+              <a:buChar char="❑"/>
+            </a:pPr>
+            <a:r>
+              <a:rPr lang="en-US" sz="1400" b="1" u="sng" dirty="0">
+                <a:solidFill>
+                  <a:srgbClr val="1F6B5E"/>
+                </a:solidFill>
+                <a:latin typeface="Calibri" pitchFamily="34" charset="0"/>
+                <a:ea typeface="Calibri" pitchFamily="34" charset="-122"/>
+                <a:cs typeface="Calibri" pitchFamily="34" charset="-120"/>
+              </a:rPr>
+              <a:t>« LES JEUNES DES PAYS VOISINS SONT ENCORE TRÈS NOMBREUX EN CÔTE D'IVOIRE » (ALASSANE OUATTARA)</a:t>
+            </a:r>
+            <a:endParaRPr lang="en-US" sz="1300" dirty="0"/>
+          </a:p>
+          <a:p>
+            <a:pPr lvl="1" marL="685800" indent="-342900">
+              <a:spcAft>
+                <a:spcPts val="200"/>
+              </a:spcAft>
+              <a:buSzPct val="100000"/>
+              <a:buChar char="▪"/>
+            </a:pPr>
+            <a:r>
+              <a:rPr lang="en-US" sz="1300" dirty="0">
+                <a:solidFill>
+                  <a:srgbClr val="1F2937"/>
+                </a:solidFill>
+                <a:latin typeface="Calibri" pitchFamily="34" charset="0"/>
+                <a:ea typeface="Calibri" pitchFamily="34" charset="-122"/>
+                <a:cs typeface="Calibri" pitchFamily="34" charset="-120"/>
+              </a:rPr>
+              <a:t>Source : </a:t>
+            </a:r>
+            <a:pPr indent="0" marL="0">
+              <a:spcAft>
+                <a:spcPts val="200"/>
+              </a:spcAft>
+              <a:buNone/>
+            </a:pPr>
+            <a:r>
+              <a:rPr lang="en-US" sz="1300" u="sng" dirty="0">
+                <a:solidFill>
+                  <a:srgbClr val="1F6B5E"/>
+                </a:solidFill>
+                <a:latin typeface="Calibri" pitchFamily="34" charset="0"/>
+                <a:ea typeface="Calibri" pitchFamily="34" charset="-122"/>
+                <a:cs typeface="Calibri" pitchFamily="34" charset="-120"/>
+                <a:hlinkClick r:id="rId3" invalidUrl="" action="" tgtFrame="" tooltip="" history="1" highlightClick="0" endSnd="0">
+                  <a:extLst>
+                    <a:ext uri="{A12FA001-AC4F-418D-AE19-62706E023703}">
+                      <ahyp:hlinkClr xmlns:ahyp="http://schemas.microsoft.com/office/drawing/2018/hyperlinkcolor" val="tx"/>
+                    </a:ext>
+                  </a:extLst>
+                </a:hlinkClick>
+              </a:rPr>
+              <a:t>Linfodrome</a:t>
+            </a:r>
+            <a:pPr indent="0" marL="0">
+              <a:spcAft>
+                <a:spcPts val="200"/>
+              </a:spcAft>
+              <a:buNone/>
+            </a:pPr>
+            <a:r>
+              <a:rPr lang="en-US" sz="1300" dirty="0">
+                <a:solidFill>
+                  <a:srgbClr val="1F2937"/>
+                </a:solidFill>
+                <a:latin typeface="Calibri" pitchFamily="34" charset="0"/>
+                <a:ea typeface="Calibri" pitchFamily="34" charset="-122"/>
+                <a:cs typeface="Calibri" pitchFamily="34" charset="-120"/>
+              </a:rPr>
+              <a:t> — 30 octobre 2026, 18 h UTC   ·   </a:t>
+            </a:r>
+            <a:pPr indent="0" marL="0">
+              <a:spcAft>
+                <a:spcPts val="200"/>
+              </a:spcAft>
+              <a:buNone/>
+            </a:pPr>
+            <a:r>
+              <a:rPr lang="en-US" sz="1300" b="1" dirty="0">
+                <a:solidFill>
+                  <a:srgbClr val="1F2937"/>
+                </a:solidFill>
+                <a:latin typeface="Calibri" pitchFamily="34" charset="0"/>
+                <a:ea typeface="Calibri" pitchFamily="34" charset="-122"/>
+                <a:cs typeface="Calibri" pitchFamily="34" charset="-120"/>
+              </a:rPr>
+              <a:t>Cotation : Probable</a:t>
+            </a:r>
+            <a:endParaRPr lang="en-US" sz="1300" dirty="0"/>
+          </a:p>
+          <a:p>
+            <a:pPr marL="342900" indent="-342900">
+              <a:spcBef>
+                <a:spcPts val="800"/>
+              </a:spcBef>
+              <a:spcAft>
+                <a:spcPts val="200"/>
+              </a:spcAft>
+              <a:buSzPct val="100000"/>
+              <a:buChar char="❑"/>
+            </a:pPr>
+            <a:r>
+              <a:rPr lang="en-US" sz="1400" b="1" u="sng" dirty="0">
+                <a:solidFill>
+                  <a:srgbClr val="1F6B5E"/>
+                </a:solidFill>
+                <a:latin typeface="Calibri" pitchFamily="34" charset="0"/>
+                <a:ea typeface="Calibri" pitchFamily="34" charset="-122"/>
+                <a:cs typeface="Calibri" pitchFamily="34" charset="-120"/>
+              </a:rPr>
+              <a:t>PRIX DU POISSON EN CÔTE D'IVOIRE - L'INTERPROFESSION PÊCHE SALUE LES MESURES GOUVERNEMENTALES ET PROMET DE NOUVELLES BAISSES</a:t>
+            </a:r>
+            <a:endParaRPr lang="en-US" sz="1300" dirty="0"/>
+          </a:p>
+          <a:p>
+            <a:pPr lvl="1" marL="685800" indent="-342900">
+              <a:spcAft>
+                <a:spcPts val="200"/>
+              </a:spcAft>
+              <a:buSzPct val="100000"/>
+              <a:buChar char="▪"/>
+            </a:pPr>
+            <a:r>
+              <a:rPr lang="en-US" sz="1300" dirty="0">
+                <a:solidFill>
+                  <a:srgbClr val="1F2937"/>
+                </a:solidFill>
+                <a:latin typeface="Calibri" pitchFamily="34" charset="0"/>
+                <a:ea typeface="Calibri" pitchFamily="34" charset="-122"/>
+                <a:cs typeface="Calibri" pitchFamily="34" charset="-120"/>
+              </a:rPr>
+              <a:t>Source : </a:t>
+            </a:r>
+            <a:pPr indent="0" marL="0">
+              <a:spcAft>
+                <a:spcPts val="200"/>
+              </a:spcAft>
+              <a:buNone/>
+            </a:pPr>
+            <a:r>
+              <a:rPr lang="en-US" sz="1300" u="sng" dirty="0">
+                <a:solidFill>
+                  <a:srgbClr val="1F6B5E"/>
+                </a:solidFill>
+                <a:latin typeface="Calibri" pitchFamily="34" charset="0"/>
+                <a:ea typeface="Calibri" pitchFamily="34" charset="-122"/>
+                <a:cs typeface="Calibri" pitchFamily="34" charset="-120"/>
+                <a:hlinkClick r:id="rId4" invalidUrl="" action="" tgtFrame="" tooltip="" history="1" highlightClick="0" endSnd="0">
+                  <a:extLst>
+                    <a:ext uri="{A12FA001-AC4F-418D-AE19-62706E023703}">
+                      <ahyp:hlinkClr xmlns:ahyp="http://schemas.microsoft.com/office/drawing/2018/hyperlinkcolor" val="tx"/>
+                    </a:ext>
+                  </a:extLst>
+                </a:hlinkClick>
+              </a:rPr>
               <a:t>AllAfrica (CI)</a:t>
             </a:r>
             <a:pPr indent="0" marL="0">
@@ -8295,7 +8693,7 @@
                 <a:ea typeface="Calibri" pitchFamily="34" charset="-122"/>
                 <a:cs typeface="Calibri" pitchFamily="34" charset="-120"/>
               </a:rPr>
-              <a:t>|  30/10/26   |   14</a:t>
+              <a:t>|  31/10/26   |   14</a:t>
             </a:r>
             <a:endParaRPr lang="en-US" sz="1000" dirty="0"/>
           </a:p>
@@ -8497,7 +8895,7 @@
                 <a:ea typeface="Calibri" pitchFamily="34" charset="-122"/>
                 <a:cs typeface="Calibri" pitchFamily="34" charset="-120"/>
               </a:rPr>
-              <a:t>|  30/10/26   |   15</a:t>
+              <a:t>|  31/10/26   |   15</a:t>
             </a:r>
             <a:endParaRPr lang="en-US" sz="1000" dirty="0"/>
           </a:p>
@@ -8738,7 +9136,7 @@
                 <a:ea typeface="Calibri" pitchFamily="34" charset="-122"/>
                 <a:cs typeface="Calibri" pitchFamily="34" charset="-120"/>
               </a:rPr>
-              <a:t>Indice de confiance : moyenne (incident vérifié le plus récent : 122 jours ; 1 signal du jour)</a:t>
+              <a:t>Indice de confiance : faible (incident vérifié le plus récent : 123 jours ; aucun signal du jour)</a:t>
             </a:r>
             <a:endParaRPr lang="en-US" sz="1100" dirty="0"/>
           </a:p>
@@ -8777,7 +9175,7 @@
                 <a:ea typeface="Arial Narrow" pitchFamily="34" charset="-122"/>
                 <a:cs typeface="Arial Narrow" pitchFamily="34" charset="-120"/>
               </a:rPr>
-              <a:t>Rétablissement de la peine de mort pour crimes économiques au Burkina : Et si c’était au Togo</a:t>
+              <a:t>Kangaba : six (6) morts dans l’éboulement d’un puit minier à Nouga</a:t>
             </a:r>
             <a:endParaRPr lang="en-US" sz="2200" dirty="0"/>
           </a:p>
@@ -8814,7 +9212,7 @@
               <a:buNone/>
             </a:pPr>
             <a:r>
-              <a:rPr lang="en-US" sz="1500" b="1" dirty="0">
+              <a:rPr lang="en-US" sz="1400" b="1" dirty="0">
                 <a:solidFill>
                   <a:srgbClr val="1F6B5E"/>
                 </a:solidFill>
@@ -8824,7 +9222,7 @@
               </a:rPr>
               <a:t>Contexte</a:t>
             </a:r>
-            <a:endParaRPr lang="en-US" sz="1400" dirty="0"/>
+            <a:endParaRPr lang="en-US" sz="1300" dirty="0"/>
           </a:p>
           <a:p>
             <a:pPr indent="0" marL="0">
@@ -8834,17 +9232,17 @@
               <a:buNone/>
             </a:pPr>
             <a:r>
-              <a:rPr lang="en-US" sz="1400" dirty="0">
-                <a:solidFill>
-                  <a:srgbClr val="1F2937"/>
-                </a:solidFill>
-                <a:latin typeface="Calibri" pitchFamily="34" charset="0"/>
-                <a:ea typeface="Calibri" pitchFamily="34" charset="-122"/>
-                <a:cs typeface="Calibri" pitchFamily="34" charset="-120"/>
-              </a:rPr>
-              <a:t>Fait rapporté le jeudi 29 octobre 2026. Lieu : Burkina Faso. Actualité politique. Repris par 2 médias distincts (Icilome, Togo Actualite) : le fait est recoupé.</a:t>
-            </a:r>
-            <a:endParaRPr lang="en-US" sz="1400" dirty="0"/>
+              <a:rPr lang="en-US" sz="1300" dirty="0">
+                <a:solidFill>
+                  <a:srgbClr val="1F2937"/>
+                </a:solidFill>
+                <a:latin typeface="Calibri" pitchFamily="34" charset="0"/>
+                <a:ea typeface="Calibri" pitchFamily="34" charset="-122"/>
+                <a:cs typeface="Calibri" pitchFamily="34" charset="-120"/>
+              </a:rPr>
+              <a:t>Fait rapporté le vendredi 30 octobre 2026. Lieu : Burkina Faso. Actualité sécuritaire. Une seule source à ce stade (AMAP — Agence Malienne Presse) : à confirmer par un second média.</a:t>
+            </a:r>
+            <a:endParaRPr lang="en-US" sz="1300" dirty="0"/>
           </a:p>
           <a:p>
             <a:pPr indent="0" marL="0">
@@ -8857,7 +9255,7 @@
               <a:buNone/>
             </a:pPr>
             <a:r>
-              <a:rPr lang="en-US" sz="1500" b="1" dirty="0">
+              <a:rPr lang="en-US" sz="1400" b="1" dirty="0">
                 <a:solidFill>
                   <a:srgbClr val="1F6B5E"/>
                 </a:solidFill>
@@ -8867,7 +9265,7 @@
               </a:rPr>
               <a:t>Ce que rapportent les sources</a:t>
             </a:r>
-            <a:endParaRPr lang="en-US" sz="1400" dirty="0"/>
+            <a:endParaRPr lang="en-US" sz="1300" dirty="0"/>
           </a:p>
           <a:p>
             <a:pPr indent="0" marL="0">
@@ -8877,15 +9275,15 @@
               <a:buNone/>
             </a:pPr>
             <a:r>
-              <a:rPr lang="en-US" sz="1400" b="1" dirty="0">
-                <a:solidFill>
-                  <a:srgbClr val="1F2937"/>
-                </a:solidFill>
-                <a:latin typeface="Calibri" pitchFamily="34" charset="0"/>
-                <a:ea typeface="Calibri" pitchFamily="34" charset="-122"/>
-                <a:cs typeface="Calibri" pitchFamily="34" charset="-120"/>
-              </a:rPr>
-              <a:t>Icilome : </a:t>
+              <a:rPr lang="en-US" sz="1300" b="1" dirty="0">
+                <a:solidFill>
+                  <a:srgbClr val="1F2937"/>
+                </a:solidFill>
+                <a:latin typeface="Calibri" pitchFamily="34" charset="0"/>
+                <a:ea typeface="Calibri" pitchFamily="34" charset="-122"/>
+                <a:cs typeface="Calibri" pitchFamily="34" charset="-120"/>
+              </a:rPr>
+              <a:t>AMAP — Agence Malienne Presse : </a:t>
             </a:r>
             <a:pPr indent="0" marL="0">
               <a:spcAft>
@@ -8894,17 +9292,17 @@
               <a:buNone/>
             </a:pPr>
             <a:r>
-              <a:rPr lang="en-US" sz="1400" i="1" dirty="0">
-                <a:solidFill>
-                  <a:srgbClr val="1F2937"/>
-                </a:solidFill>
-                <a:latin typeface="Calibri" pitchFamily="34" charset="0"/>
-                <a:ea typeface="Calibri" pitchFamily="34" charset="-122"/>
-                <a:cs typeface="Calibri" pitchFamily="34" charset="-120"/>
-              </a:rPr>
-              <a:t>« Le Burkina Faso a officiellement rétabli la peine de mort le 20 octobre 2026, lors de l’adoption à l’unanimité d’un nouveau Code pénal par l’Assemblée législative de la transition. »</a:t>
-            </a:r>
-            <a:endParaRPr lang="en-US" sz="1400" dirty="0"/>
+              <a:rPr lang="en-US" sz="1300" i="1" dirty="0">
+                <a:solidFill>
+                  <a:srgbClr val="1F2937"/>
+                </a:solidFill>
+                <a:latin typeface="Calibri" pitchFamily="34" charset="0"/>
+                <a:ea typeface="Calibri" pitchFamily="34" charset="-122"/>
+                <a:cs typeface="Calibri" pitchFamily="34" charset="-120"/>
+              </a:rPr>
+              <a:t>« Kangaba, 30 octobre (AMAP) Six (6) personnes ont trouvé la mort vendredi, dans l’éboulement d’un puit minier, transformé en galerie, dans la commune rurale de Nouga précisément dans un site d’orpaillage très isolé du village de Dioulafoundou, a appris l’AMAP de source locale. La même source précise que les personnes qui ont trouvé la mort sont tous des ressortissants du Burkina Faso. »</a:t>
+            </a:r>
+            <a:endParaRPr lang="en-US" sz="1300" dirty="0"/>
           </a:p>
           <a:p>
             <a:pPr indent="0" marL="0">
@@ -8917,7 +9315,7 @@
               <a:buNone/>
             </a:pPr>
             <a:r>
-              <a:rPr lang="en-US" sz="1500" b="1" dirty="0">
+              <a:rPr lang="en-US" sz="1400" b="1" dirty="0">
                 <a:solidFill>
                   <a:srgbClr val="1F6B5E"/>
                 </a:solidFill>
@@ -8927,7 +9325,7 @@
               </a:rPr>
               <a:t>Enjeux sûreté</a:t>
             </a:r>
-            <a:endParaRPr lang="en-US" sz="1400" dirty="0"/>
+            <a:endParaRPr lang="en-US" sz="1300" dirty="0"/>
           </a:p>
           <a:p>
             <a:pPr indent="0" marL="0">
@@ -8937,17 +9335,17 @@
               <a:buNone/>
             </a:pPr>
             <a:r>
-              <a:rPr lang="en-US" sz="1400" dirty="0">
-                <a:solidFill>
-                  <a:srgbClr val="1F2937"/>
-                </a:solidFill>
-                <a:latin typeface="Calibri" pitchFamily="34" charset="0"/>
-                <a:ea typeface="Calibri" pitchFamily="34" charset="-122"/>
-                <a:cs typeface="Calibri" pitchFamily="34" charset="-120"/>
-              </a:rPr>
-              <a:t>Évolution du cadre juridique et sécuritaire : à intégrer à l'analyse pays et à la sensibilisation des personnels expatriés et locaux.</a:t>
-            </a:r>
-            <a:endParaRPr lang="en-US" sz="1400" dirty="0"/>
+              <a:rPr lang="en-US" sz="1300" dirty="0">
+                <a:solidFill>
+                  <a:srgbClr val="1F2937"/>
+                </a:solidFill>
+                <a:latin typeface="Calibri" pitchFamily="34" charset="0"/>
+                <a:ea typeface="Calibri" pitchFamily="34" charset="-122"/>
+                <a:cs typeface="Calibri" pitchFamily="34" charset="-120"/>
+              </a:rPr>
+              <a:t>Fait sécuritaire à suivre : vérifier son incidence sur les sites, les itinéraires et les personnels présents dans la zone.</a:t>
+            </a:r>
+            <a:endParaRPr lang="en-US" sz="1300" dirty="0"/>
           </a:p>
           <a:p>
             <a:pPr indent="0" marL="0">
@@ -8960,15 +9358,15 @@
               <a:buNone/>
             </a:pPr>
             <a:r>
-              <a:rPr lang="en-US" sz="1400" b="1" dirty="0">
-                <a:solidFill>
-                  <a:srgbClr val="1F2937"/>
-                </a:solidFill>
-                <a:latin typeface="Calibri" pitchFamily="34" charset="0"/>
-                <a:ea typeface="Calibri" pitchFamily="34" charset="-122"/>
-                <a:cs typeface="Calibri" pitchFamily="34" charset="-120"/>
-              </a:rPr>
-              <a:t>Sources : </a:t>
+              <a:rPr lang="en-US" sz="1300" b="1" dirty="0">
+                <a:solidFill>
+                  <a:srgbClr val="1F2937"/>
+                </a:solidFill>
+                <a:latin typeface="Calibri" pitchFamily="34" charset="0"/>
+                <a:ea typeface="Calibri" pitchFamily="34" charset="-122"/>
+                <a:cs typeface="Calibri" pitchFamily="34" charset="-120"/>
+              </a:rPr>
+              <a:t>Source : </a:t>
             </a:r>
             <a:pPr indent="0" marL="0">
               <a:spcAft>
@@ -8977,7 +9375,7 @@
               <a:buNone/>
             </a:pPr>
             <a:r>
-              <a:rPr lang="en-US" sz="1400" u="sng" dirty="0">
+              <a:rPr lang="en-US" sz="1300" u="sng" dirty="0">
                 <a:solidFill>
                   <a:srgbClr val="1F6B5E"/>
                 </a:solidFill>
@@ -8992,7 +9390,7 @@
                   </a:extLst>
                 </a:hlinkClick>
               </a:rPr>
-              <a:t>Icilome</a:t>
+              <a:t>AMAP — Agence Malienne Presse</a:t>
             </a:r>
             <a:pPr indent="0" marL="0">
               <a:spcAft>
@@ -9001,14 +9399,79 @@
               <a:buNone/>
             </a:pPr>
             <a:r>
-              <a:rPr lang="en-US" sz="1400" u="sng" dirty="0">
+              <a:rPr lang="en-US" sz="1300" b="1" dirty="0">
+                <a:solidFill>
+                  <a:srgbClr val="1F2937"/>
+                </a:solidFill>
+                <a:latin typeface="Calibri" pitchFamily="34" charset="0"/>
+                <a:ea typeface="Calibri" pitchFamily="34" charset="-122"/>
+                <a:cs typeface="Calibri" pitchFamily="34" charset="-120"/>
+              </a:rPr>
+              <a:t> — 30 octobre 2026, 22 h UTC   ·   Cotation : Probable</a:t>
+            </a:r>
+            <a:endParaRPr lang="en-US" sz="1300" dirty="0"/>
+          </a:p>
+        </p:txBody>
+      </p:sp>
+      <p:pic>
+        <p:nvPicPr>
+          <p:cNvPr id="11" name="Image 0" descr="preencoded.png">
+            <a:hlinkClick r:id="rId3" tooltip=""/>
+          </p:cNvPr>
+          <p:cNvPicPr>
+            <a:picLocks noChangeAspect="1"/>
+          </p:cNvPicPr>
+          <p:nvPr/>
+        </p:nvPicPr>
+        <p:blipFill>
+          <a:blip r:embed="rId2"/>
+          <a:stretch>
+            <a:fillRect/>
+          </a:stretch>
+        </p:blipFill>
+        <p:spPr>
+          <a:xfrm>
+            <a:off x="7635240" y="2075688"/>
+            <a:ext cx="4114800" cy="3086100"/>
+          </a:xfrm>
+          <a:prstGeom prst="rect">
+            <a:avLst/>
+          </a:prstGeom>
+        </p:spPr>
+      </p:pic>
+      <p:sp>
+        <p:nvSpPr>
+          <p:cNvPr id="12" name="Text 9"/>
+          <p:cNvSpPr/>
+          <p:nvPr/>
+        </p:nvSpPr>
+        <p:spPr>
+          <a:xfrm>
+            <a:off x="7635240" y="5198364"/>
+            <a:ext cx="4114800" cy="256032"/>
+          </a:xfrm>
+          <a:prstGeom prst="rect">
+            <a:avLst/>
+          </a:prstGeom>
+          <a:noFill/>
+          <a:ln/>
+        </p:spPr>
+        <p:txBody>
+          <a:bodyPr wrap="square" rtlCol="0" anchor="ctr"/>
+          <a:lstStyle/>
+          <a:p>
+            <a:pPr algn="r" indent="0" marL="0">
+              <a:buNone/>
+            </a:pPr>
+            <a:r>
+              <a:rPr lang="en-US" sz="900" u="sng" dirty="0">
                 <a:solidFill>
                   <a:srgbClr val="1F6B5E"/>
                 </a:solidFill>
                 <a:latin typeface="Calibri" pitchFamily="34" charset="0"/>
                 <a:ea typeface="Calibri" pitchFamily="34" charset="-122"/>
                 <a:cs typeface="Calibri" pitchFamily="34" charset="-120"/>
-                <a:hlinkClick r:id="rId2" invalidUrl="" action="" tgtFrame="" tooltip="" history="1" highlightClick="0" endSnd="0">
+                <a:hlinkClick r:id="rId4" invalidUrl="" action="" tgtFrame="" tooltip="" history="1" highlightClick="0" endSnd="0">
                   <a:extLst>
                     <a:ext uri="{A12FA001-AC4F-418D-AE19-62706E023703}">
                       <ahyp:hlinkClr xmlns:ahyp="http://schemas.microsoft.com/office/drawing/2018/hyperlinkcolor" val="tx"/>
@@ -9016,96 +9479,7 @@
                   </a:extLst>
                 </a:hlinkClick>
               </a:rPr>
-              <a:t> · Togo Actualite</a:t>
-            </a:r>
-            <a:pPr indent="0" marL="0">
-              <a:spcAft>
-                <a:spcPts val="300"/>
-              </a:spcAft>
-              <a:buNone/>
-            </a:pPr>
-            <a:r>
-              <a:rPr lang="en-US" sz="1400" b="1" dirty="0">
-                <a:solidFill>
-                  <a:srgbClr val="1F2937"/>
-                </a:solidFill>
-                <a:latin typeface="Calibri" pitchFamily="34" charset="0"/>
-                <a:ea typeface="Calibri" pitchFamily="34" charset="-122"/>
-                <a:cs typeface="Calibri" pitchFamily="34" charset="-120"/>
-              </a:rPr>
-              <a:t> — 29 octobre 2026, 12 h UTC   ·   Cotation : Confirmé</a:t>
-            </a:r>
-            <a:endParaRPr lang="en-US" sz="1400" dirty="0"/>
-          </a:p>
-        </p:txBody>
-      </p:sp>
-      <p:pic>
-        <p:nvPicPr>
-          <p:cNvPr id="11" name="Image 0" descr="preencoded.png">
-            <a:hlinkClick r:id="rId4" tooltip=""/>
-          </p:cNvPr>
-          <p:cNvPicPr>
-            <a:picLocks noChangeAspect="1"/>
-          </p:cNvPicPr>
-          <p:nvPr/>
-        </p:nvPicPr>
-        <p:blipFill>
-          <a:blip r:embed="rId3"/>
-          <a:stretch>
-            <a:fillRect/>
-          </a:stretch>
-        </p:blipFill>
-        <p:spPr>
-          <a:xfrm>
-            <a:off x="7635240" y="2075688"/>
-            <a:ext cx="4114800" cy="2571750"/>
-          </a:xfrm>
-          <a:prstGeom prst="rect">
-            <a:avLst/>
-          </a:prstGeom>
-        </p:spPr>
-      </p:pic>
-      <p:sp>
-        <p:nvSpPr>
-          <p:cNvPr id="12" name="Text 9"/>
-          <p:cNvSpPr/>
-          <p:nvPr/>
-        </p:nvSpPr>
-        <p:spPr>
-          <a:xfrm>
-            <a:off x="7635240" y="4684014"/>
-            <a:ext cx="4114800" cy="256032"/>
-          </a:xfrm>
-          <a:prstGeom prst="rect">
-            <a:avLst/>
-          </a:prstGeom>
-          <a:noFill/>
-          <a:ln/>
-        </p:spPr>
-        <p:txBody>
-          <a:bodyPr wrap="square" rtlCol="0" anchor="ctr"/>
-          <a:lstStyle/>
-          <a:p>
-            <a:pPr algn="r" indent="0" marL="0">
-              <a:buNone/>
-            </a:pPr>
-            <a:r>
-              <a:rPr lang="en-US" sz="900" u="sng" dirty="0">
-                <a:solidFill>
-                  <a:srgbClr val="1F6B5E"/>
-                </a:solidFill>
-                <a:latin typeface="Calibri" pitchFamily="34" charset="0"/>
-                <a:ea typeface="Calibri" pitchFamily="34" charset="-122"/>
-                <a:cs typeface="Calibri" pitchFamily="34" charset="-120"/>
-                <a:hlinkClick r:id="rId5" invalidUrl="" action="" tgtFrame="" tooltip="" history="1" highlightClick="0" endSnd="0">
-                  <a:extLst>
-                    <a:ext uri="{A12FA001-AC4F-418D-AE19-62706E023703}">
-                      <ahyp:hlinkClr xmlns:ahyp="http://schemas.microsoft.com/office/drawing/2018/hyperlinkcolor" val="tx"/>
-                    </a:ext>
-                  </a:extLst>
-                </a:hlinkClick>
-              </a:rPr>
-              <a:t>Photo : © icilome.com</a:t>
+              <a:t>Photo : © amap.ml</a:t>
             </a:r>
             <a:endParaRPr lang="en-US" sz="900" dirty="0"/>
           </a:p>
@@ -9189,7 +9563,7 @@
                 <a:ea typeface="Calibri" pitchFamily="34" charset="-122"/>
                 <a:cs typeface="Calibri" pitchFamily="34" charset="-120"/>
               </a:rPr>
-              <a:t>|  30/10/26   |   16</a:t>
+              <a:t>|  31/10/26   |   16</a:t>
             </a:r>
             <a:endParaRPr lang="en-US" sz="1000" dirty="0"/>
           </a:p>
@@ -9437,7 +9811,7 @@
                 <a:ea typeface="Calibri" pitchFamily="34" charset="-122"/>
                 <a:cs typeface="Calibri" pitchFamily="34" charset="-120"/>
               </a:rPr>
-              <a:t>UNE PROMESSE D’ÉCHANGE D’IPHONE VIRE AU MEURTRE PRÉSUMÉ D’UNE JEUNE FILLE</a:t>
+              <a:t>BURKINA FASO : ANTITERRORISME OU RÉPRESSION, POURQUOI IBRAHIM TRAORÉ A RÉTABLI LA PEINE DE MORT</a:t>
             </a:r>
             <a:endParaRPr lang="en-US" sz="1300" dirty="0"/>
           </a:p>
@@ -9482,7 +9856,7 @@
                   </a:extLst>
                 </a:hlinkClick>
               </a:rPr>
-              <a:t>Wakat Sera</a:t>
+              <a:t>Jeune Afrique</a:t>
             </a:r>
             <a:pPr indent="0" marL="0">
               <a:spcAft>
@@ -9499,7 +9873,7 @@
                 <a:ea typeface="Calibri" pitchFamily="34" charset="-122"/>
                 <a:cs typeface="Calibri" pitchFamily="34" charset="-120"/>
               </a:rPr>
-              <a:t> — 28 octobre 2026, 16 h UTC   ·   </a:t>
+              <a:t> — 30 octobre 2026, 18 h UTC   ·   </a:t>
             </a:r>
             <a:pPr indent="0" marL="0">
               <a:spcAft>
@@ -9540,7 +9914,7 @@
                 <a:ea typeface="Calibri" pitchFamily="34" charset="-122"/>
                 <a:cs typeface="Calibri" pitchFamily="34" charset="-120"/>
               </a:rPr>
-              <a:t>LA PEINE DE MORT RÉINTRODUITE POUR CERTAINS CRIMES DANS LE NOUVEAU CODE PÉNAL</a:t>
+              <a:t>37E TOUR DU FASO 2026: TOM WIJFJE FRAPPE FORT D’ENTRÉE, SOULEYMANE KONÉ DÉCROCHE LA DEUXIÈME PLACE</a:t>
             </a:r>
             <a:endParaRPr lang="en-US" sz="1300" dirty="0"/>
           </a:p>
@@ -9585,7 +9959,7 @@
                   </a:extLst>
                 </a:hlinkClick>
               </a:rPr>
-              <a:t>AllAfrica (BF)</a:t>
+              <a:t>Wakat Sera</a:t>
             </a:r>
             <a:pPr indent="0" marL="0">
               <a:spcAft>
@@ -9602,7 +9976,7 @@
                 <a:ea typeface="Calibri" pitchFamily="34" charset="-122"/>
                 <a:cs typeface="Calibri" pitchFamily="34" charset="-120"/>
               </a:rPr>
-              <a:t> — 23 octobre 2026, 10 h UTC   ·   </a:t>
+              <a:t> — 30 octobre 2026, 13 h UTC   ·   </a:t>
             </a:r>
             <a:pPr indent="0" marL="0">
               <a:spcAft>
@@ -9643,7 +10017,7 @@
                 <a:ea typeface="Calibri" pitchFamily="34" charset="-122"/>
                 <a:cs typeface="Calibri" pitchFamily="34" charset="-120"/>
               </a:rPr>
-              <a:t>LE PAYS RÉTABLIT LA PEINE DE MORT</a:t>
+              <a:t>RÉTABLISSEMENT DE LA PEINE DE MORT POUR CRIMES ÉCONOMIQUES AU BURKINA : ET SI C’ÉTAIT AU TOGO?</a:t>
             </a:r>
             <a:endParaRPr lang="en-US" sz="1300" dirty="0"/>
           </a:p>
@@ -9688,7 +10062,7 @@
                   </a:extLst>
                 </a:hlinkClick>
               </a:rPr>
-              <a:t>AllAfrica (BF) · HRW_fr sur X/Twitter</a:t>
+              <a:t>Icilome · Togo Actualite</a:t>
             </a:r>
             <a:pPr indent="0" marL="0">
               <a:spcAft>
@@ -9705,7 +10079,7 @@
                 <a:ea typeface="Calibri" pitchFamily="34" charset="-122"/>
                 <a:cs typeface="Calibri" pitchFamily="34" charset="-120"/>
               </a:rPr>
-              <a:t> — 22 octobre 2026, 15 h UTC   ·   </a:t>
+              <a:t> — 29 octobre 2026, 12 h UTC   ·   </a:t>
             </a:r>
             <a:pPr indent="0" marL="0">
               <a:spcAft>
@@ -9746,7 +10120,7 @@
                 <a:ea typeface="Calibri" pitchFamily="34" charset="-122"/>
                 <a:cs typeface="Calibri" pitchFamily="34" charset="-120"/>
               </a:rPr>
-              <a:t>COOPÉRATION MILITAIRE: OUVERTURE DE LA DEUXIÈME SESSION DE COMITÉ MIXTE DE SUIVI BURKINA FASO-EGYPTE</a:t>
+              <a:t>UNE PROMESSE D’ÉCHANGE D’IPHONE VIRE AU MEURTRE PRÉSUMÉ D’UNE JEUNE FILLE</a:t>
             </a:r>
             <a:endParaRPr lang="en-US" sz="1300" dirty="0"/>
           </a:p>
@@ -9767,7 +10141,7 @@
                 <a:ea typeface="Calibri" pitchFamily="34" charset="-122"/>
                 <a:cs typeface="Calibri" pitchFamily="34" charset="-120"/>
               </a:rPr>
-              <a:t>Sources : </a:t>
+              <a:t>Source : </a:t>
             </a:r>
             <a:pPr indent="0" marL="0">
               <a:spcAft>
@@ -9791,7 +10165,7 @@
                   </a:extLst>
                 </a:hlinkClick>
               </a:rPr>
-              <a:t>Wakat Sera · Burkina24</a:t>
+              <a:t>Wakat Sera</a:t>
             </a:r>
             <a:pPr indent="0" marL="0">
               <a:spcAft>
@@ -9808,7 +10182,7 @@
                 <a:ea typeface="Calibri" pitchFamily="34" charset="-122"/>
                 <a:cs typeface="Calibri" pitchFamily="34" charset="-120"/>
               </a:rPr>
-              <a:t> — 29 octobre 2026, 12 h UTC   ·   </a:t>
+              <a:t> — 28 octobre 2026, 16 h UTC   ·   </a:t>
             </a:r>
             <a:pPr indent="0" marL="0">
               <a:spcAft>
@@ -9825,7 +10199,7 @@
                 <a:ea typeface="Calibri" pitchFamily="34" charset="-122"/>
                 <a:cs typeface="Calibri" pitchFamily="34" charset="-120"/>
               </a:rPr>
-              <a:t>Cotation : Confirmé</a:t>
+              <a:t>Cotation : Probable</a:t>
             </a:r>
             <a:endParaRPr lang="en-US" sz="1300" dirty="0"/>
           </a:p>
@@ -9849,7 +10223,7 @@
                 <a:ea typeface="Calibri" pitchFamily="34" charset="-122"/>
                 <a:cs typeface="Calibri" pitchFamily="34" charset="-120"/>
               </a:rPr>
-              <a:t>RÉSULTATS PROVISOIRES : AVIS D’APPEL À MANIFESTATION D’INTÉRÊT N02026-025/A2N-CAM/10 POUR LA CONSTITUTION D’UNE LISTE RESTREINTE DE CABINETS QUALIFIÉS EN SERVICES DE CONSULTANCE POUR LA CONDUITE DU DIAGNOSTIC, LA MISE EN CONFORMITÉ ET LA MODERNISATION DES PRATIQUES EN RESSOURCES HUMAINES DE L’ ASSOCIATION NODDE NOOTO (A2N)</a:t>
+              <a:t>LA PEINE DE MORT RÉINTRODUITE POUR CERTAINS CRIMES DANS LE NOUVEAU CODE PÉNAL</a:t>
             </a:r>
             <a:endParaRPr lang="en-US" sz="1300" dirty="0"/>
           </a:p>
@@ -9894,7 +10268,7 @@
                   </a:extLst>
                 </a:hlinkClick>
               </a:rPr>
-              <a:t>Faso7</a:t>
+              <a:t>AllAfrica (BF)</a:t>
             </a:r>
             <a:pPr indent="0" marL="0">
               <a:spcAft>
@@ -9911,7 +10285,7 @@
                 <a:ea typeface="Calibri" pitchFamily="34" charset="-122"/>
                 <a:cs typeface="Calibri" pitchFamily="34" charset="-120"/>
               </a:rPr>
-              <a:t> — 29 octobre 2026, 12 h UTC   ·   </a:t>
+              <a:t> — 23 octobre 2026, 10 h UTC   ·   </a:t>
             </a:r>
             <a:pPr indent="0" marL="0">
               <a:spcAft>
@@ -9928,7 +10302,7 @@
                 <a:ea typeface="Calibri" pitchFamily="34" charset="-122"/>
                 <a:cs typeface="Calibri" pitchFamily="34" charset="-120"/>
               </a:rPr>
-              <a:t>Cotation : Non confirmé</a:t>
+              <a:t>Cotation : Probable</a:t>
             </a:r>
             <a:endParaRPr lang="en-US" sz="1300" dirty="0"/>
           </a:p>
@@ -10012,7 +10386,7 @@
                 <a:ea typeface="Calibri" pitchFamily="34" charset="-122"/>
                 <a:cs typeface="Calibri" pitchFamily="34" charset="-120"/>
               </a:rPr>
-              <a:t>|  30/10/26   |   17</a:t>
+              <a:t>|  31/10/26   |   17</a:t>
             </a:r>
             <a:endParaRPr lang="en-US" sz="1000" dirty="0"/>
           </a:p>
@@ -10260,7 +10634,7 @@
                 <a:ea typeface="Calibri" pitchFamily="34" charset="-122"/>
                 <a:cs typeface="Calibri" pitchFamily="34" charset="-120"/>
               </a:rPr>
-              <a:t>CLIMAT ET SÉCURITÉ AU SAHEL : LE BURKINA FASO PASSE À L’ACTION POUR SA STRATÉGIE NATIONALE</a:t>
+              <a:t>LE PAYS RÉTABLIT LA PEINE DE MORT</a:t>
             </a:r>
             <a:endParaRPr lang="en-US" sz="1300" dirty="0"/>
           </a:p>
@@ -10281,7 +10655,7 @@
                 <a:ea typeface="Calibri" pitchFamily="34" charset="-122"/>
                 <a:cs typeface="Calibri" pitchFamily="34" charset="-120"/>
               </a:rPr>
-              <a:t>Source : </a:t>
+              <a:t>Sources : </a:t>
             </a:r>
             <a:pPr indent="0" marL="0">
               <a:spcAft>
@@ -10305,7 +10679,7 @@
                   </a:extLst>
                 </a:hlinkClick>
               </a:rPr>
-              <a:t>Faso7</a:t>
+              <a:t>AllAfrica (BF) · HRW_fr sur X/Twitter</a:t>
             </a:r>
             <a:pPr indent="0" marL="0">
               <a:spcAft>
@@ -10322,7 +10696,7 @@
                 <a:ea typeface="Calibri" pitchFamily="34" charset="-122"/>
                 <a:cs typeface="Calibri" pitchFamily="34" charset="-120"/>
               </a:rPr>
-              <a:t> — 28 octobre 2026, 16 h UTC   ·   </a:t>
+              <a:t> — 22 octobre 2026, 15 h UTC   ·   </a:t>
             </a:r>
             <a:pPr indent="0" marL="0">
               <a:spcAft>
@@ -10339,7 +10713,7 @@
                 <a:ea typeface="Calibri" pitchFamily="34" charset="-122"/>
                 <a:cs typeface="Calibri" pitchFamily="34" charset="-120"/>
               </a:rPr>
-              <a:t>Cotation : Non confirmé</a:t>
+              <a:t>Cotation : Confirmé</a:t>
             </a:r>
             <a:endParaRPr lang="en-US" sz="1300" dirty="0"/>
           </a:p>
@@ -10363,7 +10737,7 @@
                 <a:ea typeface="Calibri" pitchFamily="34" charset="-122"/>
                 <a:cs typeface="Calibri" pitchFamily="34" charset="-120"/>
               </a:rPr>
-              <a:t>CLIMAT-PAIX-SÉCURITÉ : LE BURKINA FASO MISE SUR UNE MEILLEURE COORDINATION DES ACTEURS</a:t>
+              <a:t>COOPÉRATION MILITAIRE: OUVERTURE DE LA DEUXIÈME SESSION DE COMITÉ MIXTE DE SUIVI BURKINA FASO-EGYPTE</a:t>
             </a:r>
             <a:endParaRPr lang="en-US" sz="1300" dirty="0"/>
           </a:p>
@@ -10384,7 +10758,7 @@
                 <a:ea typeface="Calibri" pitchFamily="34" charset="-122"/>
                 <a:cs typeface="Calibri" pitchFamily="34" charset="-120"/>
               </a:rPr>
-              <a:t>Source : </a:t>
+              <a:t>Sources : </a:t>
             </a:r>
             <a:pPr indent="0" marL="0">
               <a:spcAft>
@@ -10408,7 +10782,7 @@
                   </a:extLst>
                 </a:hlinkClick>
               </a:rPr>
-              <a:t>Burkina24</a:t>
+              <a:t>Wakat Sera · Burkina24</a:t>
             </a:r>
             <a:pPr indent="0" marL="0">
               <a:spcAft>
@@ -10425,7 +10799,7 @@
                 <a:ea typeface="Calibri" pitchFamily="34" charset="-122"/>
                 <a:cs typeface="Calibri" pitchFamily="34" charset="-120"/>
               </a:rPr>
-              <a:t> — 28 octobre 2026, 12 h UTC   ·   </a:t>
+              <a:t> — 29 octobre 2026, 12 h UTC   ·   </a:t>
             </a:r>
             <a:pPr indent="0" marL="0">
               <a:spcAft>
@@ -10442,7 +10816,7 @@
                 <a:ea typeface="Calibri" pitchFamily="34" charset="-122"/>
                 <a:cs typeface="Calibri" pitchFamily="34" charset="-120"/>
               </a:rPr>
-              <a:t>Cotation : Probable</a:t>
+              <a:t>Cotation : Confirmé</a:t>
             </a:r>
             <a:endParaRPr lang="en-US" sz="1300" dirty="0"/>
           </a:p>
@@ -10466,7 +10840,7 @@
                 <a:ea typeface="Calibri" pitchFamily="34" charset="-122"/>
                 <a:cs typeface="Calibri" pitchFamily="34" charset="-120"/>
               </a:rPr>
-              <a:t>ENTREPRENEURIAT FÉMININ À KORSIMORO : LE COMBAT INSPIRANT DES FEMMES POUR L’AUTONOMIE FINANCIÈRE</a:t>
+              <a:t>RÉSULTATS PROVISOIRES : AVIS D’APPEL À MANIFESTATION D’INTÉRÊT N02026-025/A2N-CAM/10 POUR LA CONSTITUTION D’UNE LISTE RESTREINTE DE CABINETS QUALIFIÉS EN SERVICES DE CONSULTANCE POUR LA CONDUITE DU DIAGNOSTIC, LA MISE EN CONFORMITÉ ET LA MODERNISATION DES PRATIQUES EN RESSOURCES HUMAINES DE L’ ASSOCIATION NODDE NOOTO (A2N)</a:t>
             </a:r>
             <a:endParaRPr lang="en-US" sz="1300" dirty="0"/>
           </a:p>
@@ -10511,7 +10885,7 @@
                   </a:extLst>
                 </a:hlinkClick>
               </a:rPr>
-              <a:t>Burkina24</a:t>
+              <a:t>Faso7</a:t>
             </a:r>
             <a:pPr indent="0" marL="0">
               <a:spcAft>
@@ -10528,7 +10902,7 @@
                 <a:ea typeface="Calibri" pitchFamily="34" charset="-122"/>
                 <a:cs typeface="Calibri" pitchFamily="34" charset="-120"/>
               </a:rPr>
-              <a:t> — 28 octobre 2026, 8 h UTC   ·   </a:t>
+              <a:t> — 29 octobre 2026, 12 h UTC   ·   </a:t>
             </a:r>
             <a:pPr indent="0" marL="0">
               <a:spcAft>
@@ -10545,7 +10919,7 @@
                 <a:ea typeface="Calibri" pitchFamily="34" charset="-122"/>
                 <a:cs typeface="Calibri" pitchFamily="34" charset="-120"/>
               </a:rPr>
-              <a:t>Cotation : Probable</a:t>
+              <a:t>Cotation : Non confirmé</a:t>
             </a:r>
             <a:endParaRPr lang="en-US" sz="1300" dirty="0"/>
           </a:p>
@@ -10569,7 +10943,7 @@
                 <a:ea typeface="Calibri" pitchFamily="34" charset="-122"/>
                 <a:cs typeface="Calibri" pitchFamily="34" charset="-120"/>
               </a:rPr>
-              <a:t>SÉCURITÉ NUMÉRIQUE AU BURKINA : LA BCLCC LANCE LA 2ᵉ SEMAINE NATIONALE DE LUTTE CONTRE LA CYBERCRIMINALITÉ</a:t>
+              <a:t>CLIMAT ET SÉCURITÉ AU SAHEL : LE BURKINA FASO PASSE À L’ACTION POUR SA STRATÉGIE NATIONALE</a:t>
             </a:r>
             <a:endParaRPr lang="en-US" sz="1300" dirty="0"/>
           </a:p>
@@ -10631,7 +11005,24 @@
                 <a:ea typeface="Calibri" pitchFamily="34" charset="-122"/>
                 <a:cs typeface="Calibri" pitchFamily="34" charset="-120"/>
               </a:rPr>
-              <a:t> — 24 octobre 2026, 13 h UTC</a:t>
+              <a:t> — 28 octobre 2026, 16 h UTC   ·   </a:t>
+            </a:r>
+            <a:pPr indent="0" marL="0">
+              <a:spcAft>
+                <a:spcPts val="200"/>
+              </a:spcAft>
+              <a:buNone/>
+            </a:pPr>
+            <a:r>
+              <a:rPr lang="en-US" sz="1300" b="1" dirty="0">
+                <a:solidFill>
+                  <a:srgbClr val="1F2937"/>
+                </a:solidFill>
+                <a:latin typeface="Calibri" pitchFamily="34" charset="0"/>
+                <a:ea typeface="Calibri" pitchFamily="34" charset="-122"/>
+                <a:cs typeface="Calibri" pitchFamily="34" charset="-120"/>
+              </a:rPr>
+              <a:t>Cotation : Non confirmé</a:t>
             </a:r>
             <a:endParaRPr lang="en-US" sz="1300" dirty="0"/>
           </a:p>
@@ -10715,7 +11106,7 @@
                 <a:ea typeface="Calibri" pitchFamily="34" charset="-122"/>
                 <a:cs typeface="Calibri" pitchFamily="34" charset="-120"/>
               </a:rPr>
-              <a:t>|  30/10/26   |   18</a:t>
+              <a:t>|  31/10/26   |   18</a:t>
             </a:r>
             <a:endParaRPr lang="en-US" sz="1000" dirty="0"/>
           </a:p>
@@ -10981,7 +11372,7 @@
                 <a:ea typeface="Calibri" pitchFamily="34" charset="-122"/>
                 <a:cs typeface="Calibri" pitchFamily="34" charset="-120"/>
               </a:rPr>
-              <a:t>Indice de confiance : moyenne (incident vérifié le plus récent : 123 jours ; 5 signaux du jour)</a:t>
+              <a:t>Indice de confiance : moyenne (incident vérifié le plus récent : 124 jours ; 5 signaux du jour)</a:t>
             </a:r>
             <a:endParaRPr lang="en-US" sz="1100" dirty="0"/>
           </a:p>
@@ -11020,7 +11411,7 @@
                 <a:ea typeface="Arial Narrow" pitchFamily="34" charset="-122"/>
                 <a:cs typeface="Arial Narrow" pitchFamily="34" charset="-120"/>
               </a:rPr>
-              <a:t>Mali : près de Djenné, Sounga, dernier village de Mougna à résister au JNIM, attaqué par les jihadistes</a:t>
+              <a:t>Gao : Tamy Moudary Touré, acteur du développement local, toujours porté disparu</a:t>
             </a:r>
             <a:endParaRPr lang="en-US" sz="2200" dirty="0"/>
           </a:p>
@@ -11057,7 +11448,7 @@
               <a:buNone/>
             </a:pPr>
             <a:r>
-              <a:rPr lang="en-US" sz="1400" b="1" dirty="0">
+              <a:rPr lang="en-US" sz="1500" b="1" dirty="0">
                 <a:solidFill>
                   <a:srgbClr val="1F6B5E"/>
                 </a:solidFill>
@@ -11067,7 +11458,7 @@
               </a:rPr>
               <a:t>Contexte</a:t>
             </a:r>
-            <a:endParaRPr lang="en-US" sz="1300" dirty="0"/>
+            <a:endParaRPr lang="en-US" sz="1400" dirty="0"/>
           </a:p>
           <a:p>
             <a:pPr indent="0" marL="0">
@@ -11077,17 +11468,17 @@
               <a:buNone/>
             </a:pPr>
             <a:r>
-              <a:rPr lang="en-US" sz="1300" dirty="0">
-                <a:solidFill>
-                  <a:srgbClr val="1F2937"/>
-                </a:solidFill>
-                <a:latin typeface="Calibri" pitchFamily="34" charset="0"/>
-                <a:ea typeface="Calibri" pitchFamily="34" charset="-122"/>
-                <a:cs typeface="Calibri" pitchFamily="34" charset="-120"/>
-              </a:rPr>
-              <a:t>Fait rapporté le jeudi 29 octobre 2026. Lieu : Mopti, Mali. Actualité sécuritaire. Repris par 3 médias distincts (Points Chauds Online, AllAfrica (ML), RFI Afrique) : le fait est recoupé.</a:t>
-            </a:r>
-            <a:endParaRPr lang="en-US" sz="1300" dirty="0"/>
+              <a:rPr lang="en-US" sz="1400" dirty="0">
+                <a:solidFill>
+                  <a:srgbClr val="1F2937"/>
+                </a:solidFill>
+                <a:latin typeface="Calibri" pitchFamily="34" charset="0"/>
+                <a:ea typeface="Calibri" pitchFamily="34" charset="-122"/>
+                <a:cs typeface="Calibri" pitchFamily="34" charset="-120"/>
+              </a:rPr>
+              <a:t>Fait rapporté le vendredi 30 octobre 2026. Lieu : Gao, Mali. Actualité sécuritaire. Une seule source à ce stade (Malijet) : à confirmer par un second média.</a:t>
+            </a:r>
+            <a:endParaRPr lang="en-US" sz="1400" dirty="0"/>
           </a:p>
           <a:p>
             <a:pPr indent="0" marL="0">
@@ -11100,19 +11491,36 @@
               <a:buNone/>
             </a:pPr>
             <a:r>
+              <a:rPr lang="en-US" sz="1500" b="1" dirty="0">
+                <a:solidFill>
+                  <a:srgbClr val="1F6B5E"/>
+                </a:solidFill>
+                <a:latin typeface="Calibri" pitchFamily="34" charset="0"/>
+                <a:ea typeface="Calibri" pitchFamily="34" charset="-122"/>
+                <a:cs typeface="Calibri" pitchFamily="34" charset="-120"/>
+              </a:rPr>
+              <a:t>Ce que rapportent les sources</a:t>
+            </a:r>
+            <a:endParaRPr lang="en-US" sz="1400" dirty="0"/>
+          </a:p>
+          <a:p>
+            <a:pPr indent="0" marL="0">
+              <a:spcAft>
+                <a:spcPts val="300"/>
+              </a:spcAft>
+              <a:buNone/>
+            </a:pPr>
+            <a:r>
               <a:rPr lang="en-US" sz="1400" b="1" dirty="0">
                 <a:solidFill>
-                  <a:srgbClr val="1F6B5E"/>
-                </a:solidFill>
-                <a:latin typeface="Calibri" pitchFamily="34" charset="0"/>
-                <a:ea typeface="Calibri" pitchFamily="34" charset="-122"/>
-                <a:cs typeface="Calibri" pitchFamily="34" charset="-120"/>
-              </a:rPr>
-              <a:t>Ce que rapportent les sources</a:t>
-            </a:r>
-            <a:endParaRPr lang="en-US" sz="1300" dirty="0"/>
-          </a:p>
-          <a:p>
+                  <a:srgbClr val="1F2937"/>
+                </a:solidFill>
+                <a:latin typeface="Calibri" pitchFamily="34" charset="0"/>
+                <a:ea typeface="Calibri" pitchFamily="34" charset="-122"/>
+                <a:cs typeface="Calibri" pitchFamily="34" charset="-120"/>
+              </a:rPr>
+              <a:t>Malijet : </a:t>
+            </a:r>
             <a:pPr indent="0" marL="0">
               <a:spcAft>
                 <a:spcPts val="300"/>
@@ -11120,71 +11528,17 @@
               <a:buNone/>
             </a:pPr>
             <a:r>
-              <a:rPr lang="en-US" sz="1300" b="1" dirty="0">
-                <a:solidFill>
-                  <a:srgbClr val="1F2937"/>
-                </a:solidFill>
-                <a:latin typeface="Calibri" pitchFamily="34" charset="0"/>
-                <a:ea typeface="Calibri" pitchFamily="34" charset="-122"/>
-                <a:cs typeface="Calibri" pitchFamily="34" charset="-120"/>
-              </a:rPr>
-              <a:t>Points Chauds Online : </a:t>
-            </a:r>
-            <a:pPr indent="0" marL="0">
-              <a:spcAft>
-                <a:spcPts val="300"/>
-              </a:spcAft>
-              <a:buNone/>
-            </a:pPr>
-            <a:r>
-              <a:rPr lang="en-US" sz="1300" i="1" dirty="0">
-                <a:solidFill>
-                  <a:srgbClr val="1F2937"/>
-                </a:solidFill>
-                <a:latin typeface="Calibri" pitchFamily="34" charset="0"/>
-                <a:ea typeface="Calibri" pitchFamily="34" charset="-122"/>
-                <a:cs typeface="Calibri" pitchFamily="34" charset="-120"/>
-              </a:rPr>
-              <a:t>« Sous blocus jihadiste depuis mai, le village de Sounga, défendu par des chasseurs dozos, a repoussé un assaut du JNIM puis subi des tirs et des frappes de drone, selon RFI. »</a:t>
-            </a:r>
-            <a:endParaRPr lang="en-US" sz="1300" dirty="0"/>
-          </a:p>
-          <a:p>
-            <a:pPr indent="0" marL="0">
-              <a:spcAft>
-                <a:spcPts val="300"/>
-              </a:spcAft>
-              <a:buNone/>
-            </a:pPr>
-            <a:r>
-              <a:rPr lang="en-US" sz="1300" b="1" dirty="0">
-                <a:solidFill>
-                  <a:srgbClr val="1F2937"/>
-                </a:solidFill>
-                <a:latin typeface="Calibri" pitchFamily="34" charset="0"/>
-                <a:ea typeface="Calibri" pitchFamily="34" charset="-122"/>
-                <a:cs typeface="Calibri" pitchFamily="34" charset="-120"/>
-              </a:rPr>
-              <a:t>AllAfrica (ML) : </a:t>
-            </a:r>
-            <a:pPr indent="0" marL="0">
-              <a:spcAft>
-                <a:spcPts val="300"/>
-              </a:spcAft>
-              <a:buNone/>
-            </a:pPr>
-            <a:r>
-              <a:rPr lang="en-US" sz="1300" i="1" dirty="0">
-                <a:solidFill>
-                  <a:srgbClr val="1F2937"/>
-                </a:solidFill>
-                <a:latin typeface="Calibri" pitchFamily="34" charset="0"/>
-                <a:ea typeface="Calibri" pitchFamily="34" charset="-122"/>
-                <a:cs typeface="Calibri" pitchFamily="34" charset="-120"/>
-              </a:rPr>
-              <a:t>« [RFI] Au Mali, le village de Sounga, qui appartient à la commune de Mougna, près de Djenné dans la région de Mopti, continue de résister aux jihadistes du Jnim, liés à al-Qaïda. »</a:t>
-            </a:r>
-            <a:endParaRPr lang="en-US" sz="1300" dirty="0"/>
+              <a:rPr lang="en-US" sz="1400" i="1" dirty="0">
+                <a:solidFill>
+                  <a:srgbClr val="1F2937"/>
+                </a:solidFill>
+                <a:latin typeface="Calibri" pitchFamily="34" charset="0"/>
+                <a:ea typeface="Calibri" pitchFamily="34" charset="-122"/>
+                <a:cs typeface="Calibri" pitchFamily="34" charset="-120"/>
+              </a:rPr>
+              <a:t>« Enlevé le 7 avril 2024 à Gounzoureye, dans la région de Gao, Tamy Moudary Touré reste introuvable. Selon des autorités locales, ses ravisseurs le soupçonnaient de collaborer avec l’armée malienne. Son enlèvement, marqué par la mort de son fils et des violences sexuelles que sa fille aurait subies, s... »</a:t>
+            </a:r>
+            <a:endParaRPr lang="en-US" sz="1400" dirty="0"/>
           </a:p>
           <a:p>
             <a:pPr indent="0" marL="0">
@@ -11197,7 +11551,7 @@
               <a:buNone/>
             </a:pPr>
             <a:r>
-              <a:rPr lang="en-US" sz="1400" b="1" dirty="0">
+              <a:rPr lang="en-US" sz="1500" b="1" dirty="0">
                 <a:solidFill>
                   <a:srgbClr val="1F6B5E"/>
                 </a:solidFill>
@@ -11207,7 +11561,7 @@
               </a:rPr>
               <a:t>Enjeux sûreté</a:t>
             </a:r>
-            <a:endParaRPr lang="en-US" sz="1300" dirty="0"/>
+            <a:endParaRPr lang="en-US" sz="1400" dirty="0"/>
           </a:p>
           <a:p>
             <a:pPr indent="0" marL="0">
@@ -11217,17 +11571,17 @@
               <a:buNone/>
             </a:pPr>
             <a:r>
-              <a:rPr lang="en-US" sz="1300" dirty="0">
-                <a:solidFill>
-                  <a:srgbClr val="1F2937"/>
-                </a:solidFill>
-                <a:latin typeface="Calibri" pitchFamily="34" charset="0"/>
-                <a:ea typeface="Calibri" pitchFamily="34" charset="-122"/>
-                <a:cs typeface="Calibri" pitchFamily="34" charset="-120"/>
-              </a:rPr>
-              <a:t>Menace armée sur les axes et localités de la zone : réévaluer les déplacements terrestres (horaires, convois, itinéraires de repli) et les consignes des sites et des personnels présents à proximité.</a:t>
-            </a:r>
-            <a:endParaRPr lang="en-US" sz="1300" dirty="0"/>
+              <a:rPr lang="en-US" sz="1400" dirty="0">
+                <a:solidFill>
+                  <a:srgbClr val="1F2937"/>
+                </a:solidFill>
+                <a:latin typeface="Calibri" pitchFamily="34" charset="0"/>
+                <a:ea typeface="Calibri" pitchFamily="34" charset="-122"/>
+                <a:cs typeface="Calibri" pitchFamily="34" charset="-120"/>
+              </a:rPr>
+              <a:t>Risque d'enlèvement : discrétion des déplacements, suivi des personnels en mission et des visiteurs, vérification des procédures de crise et des contacts d'urgence.</a:t>
+            </a:r>
+            <a:endParaRPr lang="en-US" sz="1400" dirty="0"/>
           </a:p>
           <a:p>
             <a:pPr indent="0" marL="0">
@@ -11240,15 +11594,15 @@
               <a:buNone/>
             </a:pPr>
             <a:r>
-              <a:rPr lang="en-US" sz="1300" b="1" dirty="0">
-                <a:solidFill>
-                  <a:srgbClr val="1F2937"/>
-                </a:solidFill>
-                <a:latin typeface="Calibri" pitchFamily="34" charset="0"/>
-                <a:ea typeface="Calibri" pitchFamily="34" charset="-122"/>
-                <a:cs typeface="Calibri" pitchFamily="34" charset="-120"/>
-              </a:rPr>
-              <a:t>Sources : </a:t>
+              <a:rPr lang="en-US" sz="1400" b="1" dirty="0">
+                <a:solidFill>
+                  <a:srgbClr val="1F2937"/>
+                </a:solidFill>
+                <a:latin typeface="Calibri" pitchFamily="34" charset="0"/>
+                <a:ea typeface="Calibri" pitchFamily="34" charset="-122"/>
+                <a:cs typeface="Calibri" pitchFamily="34" charset="-120"/>
+              </a:rPr>
+              <a:t>Source : </a:t>
             </a:r>
             <a:pPr indent="0" marL="0">
               <a:spcAft>
@@ -11257,7 +11611,7 @@
               <a:buNone/>
             </a:pPr>
             <a:r>
-              <a:rPr lang="en-US" sz="1300" u="sng" dirty="0">
+              <a:rPr lang="en-US" sz="1400" u="sng" dirty="0">
                 <a:solidFill>
                   <a:srgbClr val="1F6B5E"/>
                 </a:solidFill>
@@ -11272,7 +11626,7 @@
                   </a:extLst>
                 </a:hlinkClick>
               </a:rPr>
-              <a:t>Points Chauds Online</a:t>
+              <a:t>Malijet</a:t>
             </a:r>
             <a:pPr indent="0" marL="0">
               <a:spcAft>
@@ -11281,14 +11635,79 @@
               <a:buNone/>
             </a:pPr>
             <a:r>
-              <a:rPr lang="en-US" sz="1300" u="sng" dirty="0">
+              <a:rPr lang="en-US" sz="1400" b="1" dirty="0">
+                <a:solidFill>
+                  <a:srgbClr val="1F2937"/>
+                </a:solidFill>
+                <a:latin typeface="Calibri" pitchFamily="34" charset="0"/>
+                <a:ea typeface="Calibri" pitchFamily="34" charset="-122"/>
+                <a:cs typeface="Calibri" pitchFamily="34" charset="-120"/>
+              </a:rPr>
+              <a:t> — 30 octobre 2026, 18 h UTC   ·   Cotation : Probable</a:t>
+            </a:r>
+            <a:endParaRPr lang="en-US" sz="1400" dirty="0"/>
+          </a:p>
+        </p:txBody>
+      </p:sp>
+      <p:pic>
+        <p:nvPicPr>
+          <p:cNvPr id="12" name="Image 0" descr="preencoded.png">
+            <a:hlinkClick r:id="rId3" tooltip=""/>
+          </p:cNvPr>
+          <p:cNvPicPr>
+            <a:picLocks noChangeAspect="1"/>
+          </p:cNvPicPr>
+          <p:nvPr/>
+        </p:nvPicPr>
+        <p:blipFill>
+          <a:blip r:embed="rId2"/>
+          <a:stretch>
+            <a:fillRect/>
+          </a:stretch>
+        </p:blipFill>
+        <p:spPr>
+          <a:xfrm>
+            <a:off x="7635240" y="2075688"/>
+            <a:ext cx="4114800" cy="2313214"/>
+          </a:xfrm>
+          <a:prstGeom prst="rect">
+            <a:avLst/>
+          </a:prstGeom>
+        </p:spPr>
+      </p:pic>
+      <p:sp>
+        <p:nvSpPr>
+          <p:cNvPr id="13" name="Text 10"/>
+          <p:cNvSpPr/>
+          <p:nvPr/>
+        </p:nvSpPr>
+        <p:spPr>
+          <a:xfrm>
+            <a:off x="7635240" y="4425478"/>
+            <a:ext cx="4114800" cy="256032"/>
+          </a:xfrm>
+          <a:prstGeom prst="rect">
+            <a:avLst/>
+          </a:prstGeom>
+          <a:noFill/>
+          <a:ln/>
+        </p:spPr>
+        <p:txBody>
+          <a:bodyPr wrap="square" rtlCol="0" anchor="ctr"/>
+          <a:lstStyle/>
+          <a:p>
+            <a:pPr algn="r" indent="0" marL="0">
+              <a:buNone/>
+            </a:pPr>
+            <a:r>
+              <a:rPr lang="en-US" sz="900" u="sng" dirty="0">
                 <a:solidFill>
                   <a:srgbClr val="1F6B5E"/>
                 </a:solidFill>
                 <a:latin typeface="Calibri" pitchFamily="34" charset="0"/>
                 <a:ea typeface="Calibri" pitchFamily="34" charset="-122"/>
                 <a:cs typeface="Calibri" pitchFamily="34" charset="-120"/>
-                <a:hlinkClick r:id="rId2" invalidUrl="" action="" tgtFrame="" tooltip="" history="1" highlightClick="0" endSnd="0">
+                <a:hlinkClick r:id="rId4" invalidUrl="" action="" tgtFrame="" tooltip="" history="1" highlightClick="0" endSnd="0">
                   <a:extLst>
                     <a:ext uri="{A12FA001-AC4F-418D-AE19-62706E023703}">
                       <ahyp:hlinkClr xmlns:ahyp="http://schemas.microsoft.com/office/drawing/2018/hyperlinkcolor" val="tx"/>
@@ -11296,120 +11715,7 @@
                   </a:extLst>
                 </a:hlinkClick>
               </a:rPr>
-              <a:t> · AllAfrica (ML)</a:t>
-            </a:r>
-            <a:pPr indent="0" marL="0">
-              <a:spcAft>
-                <a:spcPts val="300"/>
-              </a:spcAft>
-              <a:buNone/>
-            </a:pPr>
-            <a:r>
-              <a:rPr lang="en-US" sz="1300" u="sng" dirty="0">
-                <a:solidFill>
-                  <a:srgbClr val="1F6B5E"/>
-                </a:solidFill>
-                <a:latin typeface="Calibri" pitchFamily="34" charset="0"/>
-                <a:ea typeface="Calibri" pitchFamily="34" charset="-122"/>
-                <a:cs typeface="Calibri" pitchFamily="34" charset="-120"/>
-                <a:hlinkClick r:id="rId3" invalidUrl="" action="" tgtFrame="" tooltip="" history="1" highlightClick="0" endSnd="0">
-                  <a:extLst>
-                    <a:ext uri="{A12FA001-AC4F-418D-AE19-62706E023703}">
-                      <ahyp:hlinkClr xmlns:ahyp="http://schemas.microsoft.com/office/drawing/2018/hyperlinkcolor" val="tx"/>
-                    </a:ext>
-                  </a:extLst>
-                </a:hlinkClick>
-              </a:rPr>
-              <a:t> · RFI Afrique</a:t>
-            </a:r>
-            <a:pPr indent="0" marL="0">
-              <a:spcAft>
-                <a:spcPts val="300"/>
-              </a:spcAft>
-              <a:buNone/>
-            </a:pPr>
-            <a:r>
-              <a:rPr lang="en-US" sz="1300" b="1" dirty="0">
-                <a:solidFill>
-                  <a:srgbClr val="1F2937"/>
-                </a:solidFill>
-                <a:latin typeface="Calibri" pitchFamily="34" charset="0"/>
-                <a:ea typeface="Calibri" pitchFamily="34" charset="-122"/>
-                <a:cs typeface="Calibri" pitchFamily="34" charset="-120"/>
-              </a:rPr>
-              <a:t> — 29 octobre 2026, 18 h UTC   ·   Cotation : Confirmé</a:t>
-            </a:r>
-            <a:endParaRPr lang="en-US" sz="1300" dirty="0"/>
-          </a:p>
-        </p:txBody>
-      </p:sp>
-      <p:pic>
-        <p:nvPicPr>
-          <p:cNvPr id="12" name="Image 0" descr="preencoded.png">
-            <a:hlinkClick r:id="rId5" tooltip=""/>
-          </p:cNvPr>
-          <p:cNvPicPr>
-            <a:picLocks noChangeAspect="1"/>
-          </p:cNvPicPr>
-          <p:nvPr/>
-        </p:nvPicPr>
-        <p:blipFill>
-          <a:blip r:embed="rId4"/>
-          <a:stretch>
-            <a:fillRect/>
-          </a:stretch>
-        </p:blipFill>
-        <p:spPr>
-          <a:xfrm>
-            <a:off x="7635240" y="2075688"/>
-            <a:ext cx="4114800" cy="2314575"/>
-          </a:xfrm>
-          <a:prstGeom prst="rect">
-            <a:avLst/>
-          </a:prstGeom>
-        </p:spPr>
-      </p:pic>
-      <p:sp>
-        <p:nvSpPr>
-          <p:cNvPr id="13" name="Text 10"/>
-          <p:cNvSpPr/>
-          <p:nvPr/>
-        </p:nvSpPr>
-        <p:spPr>
-          <a:xfrm>
-            <a:off x="7635240" y="4426839"/>
-            <a:ext cx="4114800" cy="256032"/>
-          </a:xfrm>
-          <a:prstGeom prst="rect">
-            <a:avLst/>
-          </a:prstGeom>
-          <a:noFill/>
-          <a:ln/>
-        </p:spPr>
-        <p:txBody>
-          <a:bodyPr wrap="square" rtlCol="0" anchor="ctr"/>
-          <a:lstStyle/>
-          <a:p>
-            <a:pPr algn="r" indent="0" marL="0">
-              <a:buNone/>
-            </a:pPr>
-            <a:r>
-              <a:rPr lang="en-US" sz="900" u="sng" dirty="0">
-                <a:solidFill>
-                  <a:srgbClr val="1F6B5E"/>
-                </a:solidFill>
-                <a:latin typeface="Calibri" pitchFamily="34" charset="0"/>
-                <a:ea typeface="Calibri" pitchFamily="34" charset="-122"/>
-                <a:cs typeface="Calibri" pitchFamily="34" charset="-120"/>
-                <a:hlinkClick r:id="rId6" invalidUrl="" action="" tgtFrame="" tooltip="" history="1" highlightClick="0" endSnd="0">
-                  <a:extLst>
-                    <a:ext uri="{A12FA001-AC4F-418D-AE19-62706E023703}">
-                      <ahyp:hlinkClr xmlns:ahyp="http://schemas.microsoft.com/office/drawing/2018/hyperlinkcolor" val="tx"/>
-                    </a:ext>
-                  </a:extLst>
-                </a:hlinkClick>
-              </a:rPr>
-              <a:t>Photo : © pointschauds.info</a:t>
+              <a:t>Photo : © malijet.com</a:t>
             </a:r>
             <a:endParaRPr lang="en-US" sz="900" dirty="0"/>
           </a:p>
@@ -11493,7 +11799,7 @@
                 <a:ea typeface="Calibri" pitchFamily="34" charset="-122"/>
                 <a:cs typeface="Calibri" pitchFamily="34" charset="-120"/>
               </a:rPr>
-              <a:t>|  30/10/26   |   19</a:t>
+              <a:t>|  31/10/26   |   19</a:t>
             </a:r>
             <a:endParaRPr lang="en-US" sz="1000" dirty="0"/>
           </a:p>
@@ -11923,7 +12229,7 @@
                 <a:ea typeface="Calibri" pitchFamily="34" charset="-122"/>
                 <a:cs typeface="Calibri" pitchFamily="34" charset="-120"/>
               </a:rPr>
-              <a:t>LUTTE CONTRE L'ORPAILLAGE ILLÉGAL À KORHOGO - ASSAHORÉ KONAN VEUT SANCTIONNER TOU…</a:t>
+              <a:t>CÔTE D’IVOIRE: UN ENSEMBLE D'ÉQUIPEMENTS DE 6 MILLIARDS FCFA POUR LUTTER CONTRE L…</a:t>
             </a:r>
             <a:endParaRPr lang="en-US" sz="900" dirty="0"/>
           </a:p>
@@ -11944,7 +12250,7 @@
                 <a:ea typeface="Calibri" pitchFamily="34" charset="-122"/>
                 <a:cs typeface="Calibri" pitchFamily="34" charset="-120"/>
               </a:rPr>
-              <a:t>POMMES, BANANES, KIWIS : CETTE ERREUR DE RANGEMENT FAIT MÛRIR VOS FRUITS BEAUCOUP…</a:t>
+              <a:t>LUTTE CONTRE L'ORPAILLAGE ILLÉGAL À KORHOGO - ASSAHORÉ KONAN VEUT SANCTIONNER TOU…</a:t>
             </a:r>
             <a:endParaRPr lang="en-US" sz="900" dirty="0"/>
           </a:p>
@@ -11965,7 +12271,7 @@
                 <a:ea typeface="Calibri" pitchFamily="34" charset="-122"/>
                 <a:cs typeface="Calibri" pitchFamily="34" charset="-120"/>
               </a:rPr>
-              <a:t>GASPILLAGE ALIMENTAIRE - LE CCESP PLAIDE POUR UN PACTE NATIONAL</a:t>
+              <a:t>POMMES, BANANES, KIWIS : CETTE ERREUR DE RANGEMENT FAIT MÛRIR VOS FRUITS BEAUCOUP…</a:t>
             </a:r>
             <a:endParaRPr lang="en-US" sz="900" dirty="0"/>
           </a:p>
@@ -11986,7 +12292,7 @@
                 <a:ea typeface="Calibri" pitchFamily="34" charset="-122"/>
                 <a:cs typeface="Calibri" pitchFamily="34" charset="-120"/>
               </a:rPr>
-              <a:t>BOUNA : LES VICTIMES D’ACCIDENTS DE LA ROUTE POURRONT DÉSORMAIS PRISES EN CHARGE …</a:t>
+              <a:t>GASPILLAGE ALIMENTAIRE - LE CCESP PLAIDE POUR UN PACTE NATIONAL</a:t>
             </a:r>
             <a:endParaRPr lang="en-US" sz="900" dirty="0"/>
           </a:p>
@@ -12007,7 +12313,7 @@
                 <a:ea typeface="Calibri" pitchFamily="34" charset="-122"/>
                 <a:cs typeface="Calibri" pitchFamily="34" charset="-120"/>
               </a:rPr>
-              <a:t>CÔTE D'IVOIRE : LE GOUVERNEMENT MISE SUR LA PONADEPA II POUR ATTEINDRE LA SOUVERA…</a:t>
+              <a:t>BOUNA : LES VICTIMES D’ACCIDENTS DE LA ROUTE POURRONT DÉSORMAIS PRISES EN CHARGE …</a:t>
             </a:r>
             <a:endParaRPr lang="en-US" sz="900" dirty="0"/>
           </a:p>
@@ -12051,7 +12357,7 @@
                 <a:ea typeface="Calibri" pitchFamily="34" charset="-122"/>
                 <a:cs typeface="Calibri" pitchFamily="34" charset="-120"/>
               </a:rPr>
-              <a:t>BOUAKÉ : LE DGPN LANCE L'OPÉRATION EPERVIER 12 POUR DÉMANTELER LES RÉSEAUX CRIMINELS</a:t>
+              <a:t>ALASSANE OUATTARA À L’OMC : LA CÔTE D’IVOIRE EST « ENTOURÉE DE PAYS QUI ONT DES D…</a:t>
             </a:r>
             <a:endParaRPr lang="en-US" sz="900" dirty="0"/>
           </a:p>
@@ -12072,7 +12378,7 @@
                 <a:ea typeface="Calibri" pitchFamily="34" charset="-122"/>
                 <a:cs typeface="Calibri" pitchFamily="34" charset="-120"/>
               </a:rPr>
-              <a:t>LA CÔTE D’IVOIRE EXPOSÉE À UN NOUVEAU CORRIDOR DJIHADISTE / LES VENDEUSES DE POIS…</a:t>
+              <a:t>GESTION DES CARRIÈRES PUBLIQUES : OUATTARA PREND UNE DÉCISION - UN HOMME SE JETTE…</a:t>
             </a:r>
             <a:endParaRPr lang="en-US" sz="900" dirty="0"/>
           </a:p>
@@ -12093,7 +12399,7 @@
                 <a:ea typeface="Calibri" pitchFamily="34" charset="-122"/>
                 <a:cs typeface="Calibri" pitchFamily="34" charset="-120"/>
               </a:rPr>
-              <a:t>CÔTE D’IVOIRE : DES GRANDES INSTITUTIONS À L’ARMÉE, ALASSANE OUATTARA SONNE L’HEU…</a:t>
+              <a:t>BOUAKÉ : LE DGPN LANCE L'OPÉRATION EPERVIER 12 POUR DÉMANTELER LES RÉSEAUX CRIMINELS</a:t>
             </a:r>
             <a:endParaRPr lang="en-US" sz="900" dirty="0"/>
           </a:p>
@@ -12114,7 +12420,7 @@
                 <a:ea typeface="Calibri" pitchFamily="34" charset="-122"/>
                 <a:cs typeface="Calibri" pitchFamily="34" charset="-120"/>
               </a:rPr>
-              <a:t>ABIDJAN - CAP VERS UNE COOPÉRATION MILITAIRE BILATÉRALE</a:t>
+              <a:t>LA CÔTE D’IVOIRE EXPOSÉE À UN NOUVEAU CORRIDOR DJIHADISTE / LES VENDEUSES DE POIS…</a:t>
             </a:r>
             <a:endParaRPr lang="en-US" sz="900" dirty="0"/>
           </a:p>
@@ -12135,7 +12441,7 @@
                 <a:ea typeface="Calibri" pitchFamily="34" charset="-122"/>
                 <a:cs typeface="Calibri" pitchFamily="34" charset="-120"/>
               </a:rPr>
-              <a:t>3ÈME FORUM FRONTIÈRES D'ABIDJAN : LA REPRÉSENTATION PERMANENTE DE LA CEDEAO AUPRÈ…</a:t>
+              <a:t>CÔTE D’IVOIRE : DES GRANDES INSTITUTIONS À L’ARMÉE, ALASSANE OUATTARA SONNE L’HEU…</a:t>
             </a:r>
             <a:endParaRPr lang="en-US" sz="900" dirty="0"/>
           </a:p>
@@ -12156,7 +12462,7 @@
                 <a:ea typeface="Calibri" pitchFamily="34" charset="-122"/>
                 <a:cs typeface="Calibri" pitchFamily="34" charset="-120"/>
               </a:rPr>
-              <a:t>CHARNIER DE YOPOUGON : 26 ANS APRÈS, AMADOU COULIBALY OPPOSE LES VIOLENCES DU PAS…</a:t>
+              <a:t>ABIDJAN - CAP VERS UNE COOPÉRATION MILITAIRE BILATÉRALE</a:t>
             </a:r>
             <a:endParaRPr lang="en-US" sz="900" dirty="0"/>
           </a:p>
@@ -12200,7 +12506,7 @@
                 <a:ea typeface="Calibri" pitchFamily="34" charset="-122"/>
                 <a:cs typeface="Calibri" pitchFamily="34" charset="-120"/>
               </a:rPr>
-              <a:t>GONZAGUEVILLE : ELLE LUI REFUSE LE SEXE, IL LA TUE ET JETTE SON CORPS DANS UNE DÉ…</a:t>
+              <a:t>CÔTE D’IVOIRE : UNE HISTOIRE DE « RED FLAG » VIRE AU MEURTRE, LE SUSPECT PASSE AU…</a:t>
             </a:r>
             <a:endParaRPr lang="en-US" sz="900" dirty="0"/>
           </a:p>
@@ -12221,7 +12527,49 @@
                 <a:ea typeface="Calibri" pitchFamily="34" charset="-122"/>
                 <a:cs typeface="Calibri" pitchFamily="34" charset="-120"/>
               </a:rPr>
+              <a:t>GONZAGUEVILLE : ELLE LUI REFUSE LE SEXE, IL LA TUE ET JETTE SON CORPS DANS UNE DÉ…</a:t>
+            </a:r>
+            <a:endParaRPr lang="en-US" sz="900" dirty="0"/>
+          </a:p>
+          <a:p>
+            <a:pPr marL="342900" indent="-342900">
+              <a:spcAft>
+                <a:spcPts val="200"/>
+              </a:spcAft>
+              <a:buSzPct val="100000"/>
+              <a:buChar char="❑"/>
+            </a:pPr>
+            <a:r>
+              <a:rPr lang="en-US" sz="900" dirty="0">
+                <a:solidFill>
+                  <a:srgbClr val="1F2937"/>
+                </a:solidFill>
+                <a:latin typeface="Calibri" pitchFamily="34" charset="0"/>
+                <a:ea typeface="Calibri" pitchFamily="34" charset="-122"/>
+                <a:cs typeface="Calibri" pitchFamily="34" charset="-120"/>
+              </a:rPr>
               <a:t>AVANT LA GRANDE MARCHE DU 24 COCTOBRE ; EMMANUEL MACRON FACE UN ATTENTAT</a:t>
+            </a:r>
+            <a:endParaRPr lang="en-US" sz="900" dirty="0"/>
+          </a:p>
+          <a:p>
+            <a:pPr marL="342900" indent="-342900">
+              <a:spcAft>
+                <a:spcPts val="200"/>
+              </a:spcAft>
+              <a:buSzPct val="100000"/>
+              <a:buChar char="❑"/>
+            </a:pPr>
+            <a:r>
+              <a:rPr lang="en-US" sz="900" dirty="0">
+                <a:solidFill>
+                  <a:srgbClr val="1F2937"/>
+                </a:solidFill>
+                <a:latin typeface="Calibri" pitchFamily="34" charset="0"/>
+                <a:ea typeface="Calibri" pitchFamily="34" charset="-122"/>
+                <a:cs typeface="Calibri" pitchFamily="34" charset="-120"/>
+              </a:rPr>
+              <a:t>« LES JEUNES DES PAYS VOISINS SONT ENCORE TRÈS NOMBREUX EN CÔTE D'IVOIRE » (ALASS…</a:t>
             </a:r>
             <a:endParaRPr lang="en-US" sz="900" dirty="0"/>
           </a:p>
@@ -12372,7 +12720,7 @@
                 <a:ea typeface="Calibri" pitchFamily="34" charset="-122"/>
                 <a:cs typeface="Calibri" pitchFamily="34" charset="-120"/>
               </a:rPr>
-              <a:t>RÉTABLISSEMENT DE LA PEINE DE MORT POUR CRIMES ÉCONOMIQUES AU BURKINA : ET SI C’É…</a:t>
+              <a:t>KANGABA : SIX (6) MORTS DANS L’ÉBOULEMENT D’UN PUIT MINIER À NOUGA</a:t>
             </a:r>
             <a:endParaRPr lang="en-US" sz="900" dirty="0"/>
           </a:p>
@@ -12416,7 +12764,7 @@
                 <a:ea typeface="Calibri" pitchFamily="34" charset="-122"/>
                 <a:cs typeface="Calibri" pitchFamily="34" charset="-120"/>
               </a:rPr>
-              <a:t>MALI : PRÈS DE DJENNÉ, SOUNGA, DERNIER VILLAGE DE MOUGNA À RÉSISTER AU JNIM, ATTA…</a:t>
+              <a:t>GAO : TAMY MOUDARY TOURÉ, ACTEUR DU DÉVELOPPEMENT LOCAL, TOUJOURS PORTÉ DISPARU</a:t>
             </a:r>
             <a:endParaRPr lang="en-US" sz="900" dirty="0"/>
           </a:p>
@@ -12460,7 +12808,7 @@
                 <a:ea typeface="Calibri" pitchFamily="34" charset="-122"/>
                 <a:cs typeface="Calibri" pitchFamily="34" charset="-120"/>
               </a:rPr>
-              <a:t>TCHAD : LE PAYS DÉMENT LES ACCUSATIONS DU NIGER CONCERNANT UNE FRAPPE DE DRONE</a:t>
+              <a:t>NIGER-TCHAD, LE JEU DANGEREUX DE DÉBY KAKA…</a:t>
             </a:r>
             <a:endParaRPr lang="en-US" sz="900" dirty="0"/>
           </a:p>
@@ -12504,7 +12852,7 @@
                 <a:ea typeface="Calibri" pitchFamily="34" charset="-122"/>
                 <a:cs typeface="Calibri" pitchFamily="34" charset="-120"/>
               </a:rPr>
-              <a:t>GHANA : UNE JEUNE FEMME MEURT APRÈS L’EXPLOSION D’UN SEX-TOY</a:t>
+              <a:t>UN APPEL AU SOUTIEN ET À LA SOLIDARITÉ AVEC LES MINISTRES DE LA RÉGION DE LA VOLT…</a:t>
             </a:r>
             <a:endParaRPr lang="en-US" sz="900" dirty="0"/>
           </a:p>
@@ -12548,7 +12896,7 @@
                 <a:ea typeface="Calibri" pitchFamily="34" charset="-122"/>
                 <a:cs typeface="Calibri" pitchFamily="34" charset="-120"/>
               </a:rPr>
-              <a:t>63 ANS APRÈS SA MORT, LE PREMIER PRÉSIDENT DU TOGO N’A TOUJOURS PAS DE TOMBE DANS…</a:t>
+              <a:t>TOGO: LA COUR DE JUSTICE DE LA CEDEAO EXIGE L’ÉXÉCUTION DE SON ARRÊT DU 29 JANVIER</a:t>
             </a:r>
             <a:endParaRPr lang="en-US" sz="900" dirty="0"/>
           </a:p>
@@ -12680,7 +13028,7 @@
                 <a:ea typeface="Calibri" pitchFamily="34" charset="-122"/>
                 <a:cs typeface="Calibri" pitchFamily="34" charset="-120"/>
               </a:rPr>
-              <a:t>LIBÉRIA : UN DAUPHIN TUÉ ET MASSACRÉ AVANT L'ARRIVÉE DE L'ÉQUIPE DE SECOURS DE LA…</a:t>
+              <a:t>LIBÉRIA : UN ANCIEN RESPONSABLE DE LA NSA, JALLAH, CHERCHE UNE NOUVELLE PISTE APR…</a:t>
             </a:r>
             <a:endParaRPr lang="en-US" sz="900" dirty="0"/>
           </a:p>
@@ -12724,7 +13072,7 @@
                 <a:ea typeface="Calibri" pitchFamily="34" charset="-122"/>
                 <a:cs typeface="Calibri" pitchFamily="34" charset="-120"/>
               </a:rPr>
-              <a:t>KAOLACK : UN RETRAITÉ RETROUVÉ MORT À SON DOMICILE, LE CORPS EN ÉTAT DE DÉCOMPOSI…</a:t>
+              <a:t>DRAME EN ITALIE : UN COUPLE SÉNÉGALAIS RETROUVÉ MORT, LEUR BÉBÉ DE 7 MOIS ENTRE L…</a:t>
             </a:r>
             <a:endParaRPr lang="en-US" sz="900" dirty="0"/>
           </a:p>
@@ -12808,7 +13156,7 @@
                 <a:ea typeface="Calibri" pitchFamily="34" charset="-122"/>
                 <a:cs typeface="Calibri" pitchFamily="34" charset="-120"/>
               </a:rPr>
-              <a:t>|  30/10/26   |   2</a:t>
+              <a:t>|  31/10/26   |   2</a:t>
             </a:r>
             <a:endParaRPr lang="en-US" sz="1000" dirty="0"/>
           </a:p>
@@ -13081,7 +13429,7 @@
                 <a:ea typeface="Calibri" pitchFamily="34" charset="-122"/>
                 <a:cs typeface="Calibri" pitchFamily="34" charset="-120"/>
               </a:rPr>
-              <a:t>MALI : 13 CIVILS TUÉS PAR UNE FRAPPE DE DRONE PRÈS DE LA FRONTIÈRE MAURITANIENNE, L’ARMÉE AFFIRME AVOIR VISÉ DES « TERRORISTES »</a:t>
+              <a:t>MALI : SIX MOIS APRÈS SON ENLÈVEMENT À BAMAKO, L’OPPOSANT MOUNTAGA TALL ET SON FILS TOUJOURS INTROUVABLES</a:t>
             </a:r>
             <a:endParaRPr lang="en-US" sz="1300" dirty="0"/>
           </a:p>
@@ -13102,7 +13450,7 @@
                 <a:ea typeface="Calibri" pitchFamily="34" charset="-122"/>
                 <a:cs typeface="Calibri" pitchFamily="34" charset="-120"/>
               </a:rPr>
-              <a:t>Sources : </a:t>
+              <a:t>Source : </a:t>
             </a:r>
             <a:pPr indent="0" marL="0">
               <a:spcAft>
@@ -13126,7 +13474,7 @@
                   </a:extLst>
                 </a:hlinkClick>
               </a:rPr>
-              <a:t>Points Chauds Online · AllAfrica (ML) · RFI Afrique</a:t>
+              <a:t>Points Chauds Online</a:t>
             </a:r>
             <a:pPr indent="0" marL="0">
               <a:spcAft>
@@ -13143,7 +13491,7 @@
                 <a:ea typeface="Calibri" pitchFamily="34" charset="-122"/>
                 <a:cs typeface="Calibri" pitchFamily="34" charset="-120"/>
               </a:rPr>
-              <a:t> — 28 octobre 2026, 18 h UTC   ·   </a:t>
+              <a:t> — 30 octobre 2026, 18 h UTC   ·   </a:t>
             </a:r>
             <a:pPr indent="0" marL="0">
               <a:spcAft>
@@ -13160,7 +13508,7 @@
                 <a:ea typeface="Calibri" pitchFamily="34" charset="-122"/>
                 <a:cs typeface="Calibri" pitchFamily="34" charset="-120"/>
               </a:rPr>
-              <a:t>Cotation : Confirmé</a:t>
+              <a:t>Cotation : Non confirmé</a:t>
             </a:r>
             <a:endParaRPr lang="en-US" sz="1300" dirty="0"/>
           </a:p>
@@ -13184,7 +13532,7 @@
                 <a:ea typeface="Calibri" pitchFamily="34" charset="-122"/>
                 <a:cs typeface="Calibri" pitchFamily="34" charset="-120"/>
               </a:rPr>
-              <a:t>MALI : CE QUE L’ON SAIT DE LA MORT MYSTÉRIEUSE DU JEUNE COMMERÇANT BOCAR LY</a:t>
+              <a:t>DRAME SUR LA RN3 : UN CAR SE RENVERSE ENTRE BAMAKO ET KATI, LE BILAN S’ALOURDIT À 1 MORT ET 37 BLESSÉS</a:t>
             </a:r>
             <a:endParaRPr lang="en-US" sz="1300" dirty="0"/>
           </a:p>
@@ -13205,7 +13553,7 @@
                 <a:ea typeface="Calibri" pitchFamily="34" charset="-122"/>
                 <a:cs typeface="Calibri" pitchFamily="34" charset="-120"/>
               </a:rPr>
-              <a:t>Source : </a:t>
+              <a:t>Sources : </a:t>
             </a:r>
             <a:pPr indent="0" marL="0">
               <a:spcAft>
@@ -13229,7 +13577,7 @@
                   </a:extLst>
                 </a:hlinkClick>
               </a:rPr>
-              <a:t>Mali 24</a:t>
+              <a:t>Mali 24 · Malijet · AMAP — Agence Malienne Presse</a:t>
             </a:r>
             <a:pPr indent="0" marL="0">
               <a:spcAft>
@@ -13246,7 +13594,7 @@
                 <a:ea typeface="Calibri" pitchFamily="34" charset="-122"/>
                 <a:cs typeface="Calibri" pitchFamily="34" charset="-120"/>
               </a:rPr>
-              <a:t> — 27 octobre 2026, 14 h UTC   ·   </a:t>
+              <a:t> — 30 octobre 2026, 12 h UTC   ·   </a:t>
             </a:r>
             <a:pPr indent="0" marL="0">
               <a:spcAft>
@@ -13263,7 +13611,7 @@
                 <a:ea typeface="Calibri" pitchFamily="34" charset="-122"/>
                 <a:cs typeface="Calibri" pitchFamily="34" charset="-120"/>
               </a:rPr>
-              <a:t>Cotation : Non confirmé</a:t>
+              <a:t>Cotation : Confirmé</a:t>
             </a:r>
             <a:endParaRPr lang="en-US" sz="1300" dirty="0"/>
           </a:p>
@@ -13287,7 +13635,7 @@
                 <a:ea typeface="Calibri" pitchFamily="34" charset="-122"/>
                 <a:cs typeface="Calibri" pitchFamily="34" charset="-120"/>
               </a:rPr>
-              <a:t>TOURNÉE DES LAURÉATS DE LA BIENNALE DE TOMBOUCTOU 2025 : LE COUP D’ENVOI DONNÉ À BOUGOUNI</a:t>
+              <a:t>MALI : PRÈS DE DJENNÉ, SOUNGA, DERNIER VILLAGE DE MOUGNA À RÉSISTER AU JNIM, ATTAQUÉ PAR LES JIHADISTES</a:t>
             </a:r>
             <a:endParaRPr lang="en-US" sz="1300" dirty="0"/>
           </a:p>
@@ -13308,7 +13656,7 @@
                 <a:ea typeface="Calibri" pitchFamily="34" charset="-122"/>
                 <a:cs typeface="Calibri" pitchFamily="34" charset="-120"/>
               </a:rPr>
-              <a:t>Source : </a:t>
+              <a:t>Sources : </a:t>
             </a:r>
             <a:pPr indent="0" marL="0">
               <a:spcAft>
@@ -13332,7 +13680,7 @@
                   </a:extLst>
                 </a:hlinkClick>
               </a:rPr>
-              <a:t>Mali 24</a:t>
+              <a:t>Points Chauds Online · AllAfrica (ML) · RFI Afrique</a:t>
             </a:r>
             <a:pPr indent="0" marL="0">
               <a:spcAft>
@@ -13349,7 +13697,7 @@
                 <a:ea typeface="Calibri" pitchFamily="34" charset="-122"/>
                 <a:cs typeface="Calibri" pitchFamily="34" charset="-120"/>
               </a:rPr>
-              <a:t> — 27 octobre 2026, 12 h UTC   ·   </a:t>
+              <a:t> — 29 octobre 2026, 18 h UTC   ·   </a:t>
             </a:r>
             <a:pPr indent="0" marL="0">
               <a:spcAft>
@@ -13366,7 +13714,7 @@
                 <a:ea typeface="Calibri" pitchFamily="34" charset="-122"/>
                 <a:cs typeface="Calibri" pitchFamily="34" charset="-120"/>
               </a:rPr>
-              <a:t>Cotation : Non confirmé</a:t>
+              <a:t>Cotation : Confirmé</a:t>
             </a:r>
             <a:endParaRPr lang="en-US" sz="1300" dirty="0"/>
           </a:p>
@@ -13390,7 +13738,7 @@
                 <a:ea typeface="Calibri" pitchFamily="34" charset="-122"/>
                 <a:cs typeface="Calibri" pitchFamily="34" charset="-120"/>
               </a:rPr>
-              <a:t>ENLÈVEMENT DE QUATRE ENSEIGNANTS À SAN : LA SYNERGIE DES SYNDICATS DE L’ÉDUCATION DE LA RÉGION EXIGE LEUR LIBÉRATION</a:t>
+              <a:t>MALI : 13 CIVILS TUÉS PAR UNE FRAPPE DE DRONE PRÈS DE LA FRONTIÈRE MAURITANIENNE, L’ARMÉE AFFIRME AVOIR VISÉ DES « TERRORISTES »</a:t>
             </a:r>
             <a:endParaRPr lang="en-US" sz="1300" dirty="0"/>
           </a:p>
@@ -13411,7 +13759,7 @@
                 <a:ea typeface="Calibri" pitchFamily="34" charset="-122"/>
                 <a:cs typeface="Calibri" pitchFamily="34" charset="-120"/>
               </a:rPr>
-              <a:t>Source : </a:t>
+              <a:t>Sources : </a:t>
             </a:r>
             <a:pPr indent="0" marL="0">
               <a:spcAft>
@@ -13435,7 +13783,7 @@
                   </a:extLst>
                 </a:hlinkClick>
               </a:rPr>
-              <a:t>Mali 24</a:t>
+              <a:t>Points Chauds Online · AllAfrica (ML) · RFI Afrique</a:t>
             </a:r>
             <a:pPr indent="0" marL="0">
               <a:spcAft>
@@ -13452,7 +13800,7 @@
                 <a:ea typeface="Calibri" pitchFamily="34" charset="-122"/>
                 <a:cs typeface="Calibri" pitchFamily="34" charset="-120"/>
               </a:rPr>
-              <a:t> — 26 octobre 2026, 16 h UTC   ·   </a:t>
+              <a:t> — 28 octobre 2026, 18 h UTC   ·   </a:t>
             </a:r>
             <a:pPr indent="0" marL="0">
               <a:spcAft>
@@ -13469,7 +13817,7 @@
                 <a:ea typeface="Calibri" pitchFamily="34" charset="-122"/>
                 <a:cs typeface="Calibri" pitchFamily="34" charset="-120"/>
               </a:rPr>
-              <a:t>Cotation : Non confirmé</a:t>
+              <a:t>Cotation : Confirmé</a:t>
             </a:r>
             <a:endParaRPr lang="en-US" sz="1300" dirty="0"/>
           </a:p>
@@ -13493,7 +13841,7 @@
                 <a:ea typeface="Calibri" pitchFamily="34" charset="-122"/>
                 <a:cs typeface="Calibri" pitchFamily="34" charset="-120"/>
               </a:rPr>
-              <a:t>MALI : DISPARITIONS INQUIÉTANTES, MORTS SUSPECTES… QUE SE PASSE-T-IL AVEC LA JEUNESSE MALIENNE ?</a:t>
+              <a:t>MALI : CE QUE L’ON SAIT DE LA MORT MYSTÉRIEUSE DU JEUNE COMMERÇANT BOCAR LY</a:t>
             </a:r>
             <a:endParaRPr lang="en-US" sz="1300" dirty="0"/>
           </a:p>
@@ -13538,7 +13886,7 @@
                   </a:extLst>
                 </a:hlinkClick>
               </a:rPr>
-              <a:t>Maliactu</a:t>
+              <a:t>Mali 24</a:t>
             </a:r>
             <a:pPr indent="0" marL="0">
               <a:spcAft>
@@ -13555,7 +13903,24 @@
                 <a:ea typeface="Calibri" pitchFamily="34" charset="-122"/>
                 <a:cs typeface="Calibri" pitchFamily="34" charset="-120"/>
               </a:rPr>
-              <a:t> — 26 octobre 2026, 13 h UTC</a:t>
+              <a:t> — 27 octobre 2026, 14 h UTC   ·   </a:t>
+            </a:r>
+            <a:pPr indent="0" marL="0">
+              <a:spcAft>
+                <a:spcPts val="200"/>
+              </a:spcAft>
+              <a:buNone/>
+            </a:pPr>
+            <a:r>
+              <a:rPr lang="en-US" sz="1300" b="1" dirty="0">
+                <a:solidFill>
+                  <a:srgbClr val="1F2937"/>
+                </a:solidFill>
+                <a:latin typeface="Calibri" pitchFamily="34" charset="0"/>
+                <a:ea typeface="Calibri" pitchFamily="34" charset="-122"/>
+                <a:cs typeface="Calibri" pitchFamily="34" charset="-120"/>
+              </a:rPr>
+              <a:t>Cotation : Non confirmé</a:t>
             </a:r>
             <a:endParaRPr lang="en-US" sz="1300" dirty="0"/>
           </a:p>
@@ -13639,7 +14004,7 @@
                 <a:ea typeface="Calibri" pitchFamily="34" charset="-122"/>
                 <a:cs typeface="Calibri" pitchFamily="34" charset="-120"/>
               </a:rPr>
-              <a:t>|  30/10/26   |   20</a:t>
+              <a:t>|  31/10/26   |   20</a:t>
             </a:r>
             <a:endParaRPr lang="en-US" sz="1000" dirty="0"/>
           </a:p>
@@ -13912,7 +14277,7 @@
                 <a:ea typeface="Calibri" pitchFamily="34" charset="-122"/>
                 <a:cs typeface="Calibri" pitchFamily="34" charset="-120"/>
               </a:rPr>
-              <a:t>ATTAQUE DE TRAPPES ET LA VERRIÈRE : LA QUALIFICATION DU MOBILE RACISTE AU CŒUR DU DÉBAT SÉCURITAIRE ET SOCIÉTAL</a:t>
+              <a:t>TOURNÉE DES LAURÉATS DE LA BIENNALE DE TOMBOUCTOU 2025 : LE COUP D’ENVOI DONNÉ À BOUGOUNI</a:t>
             </a:r>
             <a:endParaRPr lang="en-US" sz="1300" dirty="0"/>
           </a:p>
@@ -13957,7 +14322,7 @@
                   </a:extLst>
                 </a:hlinkClick>
               </a:rPr>
-              <a:t>Maliactu</a:t>
+              <a:t>Mali 24</a:t>
             </a:r>
             <a:pPr indent="0" marL="0">
               <a:spcAft>
@@ -13974,7 +14339,24 @@
                 <a:ea typeface="Calibri" pitchFamily="34" charset="-122"/>
                 <a:cs typeface="Calibri" pitchFamily="34" charset="-120"/>
               </a:rPr>
-              <a:t> — 26 octobre 2026, 10 h UTC</a:t>
+              <a:t> — 27 octobre 2026, 12 h UTC   ·   </a:t>
+            </a:r>
+            <a:pPr indent="0" marL="0">
+              <a:spcAft>
+                <a:spcPts val="200"/>
+              </a:spcAft>
+              <a:buNone/>
+            </a:pPr>
+            <a:r>
+              <a:rPr lang="en-US" sz="1300" b="1" dirty="0">
+                <a:solidFill>
+                  <a:srgbClr val="1F2937"/>
+                </a:solidFill>
+                <a:latin typeface="Calibri" pitchFamily="34" charset="0"/>
+                <a:ea typeface="Calibri" pitchFamily="34" charset="-122"/>
+                <a:cs typeface="Calibri" pitchFamily="34" charset="-120"/>
+              </a:rPr>
+              <a:t>Cotation : Non confirmé</a:t>
             </a:r>
             <a:endParaRPr lang="en-US" sz="1300" dirty="0"/>
           </a:p>
@@ -13998,7 +14380,7 @@
                 <a:ea typeface="Calibri" pitchFamily="34" charset="-122"/>
                 <a:cs typeface="Calibri" pitchFamily="34" charset="-120"/>
               </a:rPr>
-              <a:t>MALI : LE BILAN DE L'ATTAQUE MEURTRIÈRE DU WEEKEND DERNIER MONTE À 54 MORTS (ARMÉE)</a:t>
+              <a:t>ENLÈVEMENT DE QUATRE ENSEIGNANTS À SAN : LA SYNERGIE DES SYNDICATS DE L’ÉDUCATION DE LA RÉGION EXIGE LEUR LIBÉRATION</a:t>
             </a:r>
             <a:endParaRPr lang="en-US" sz="1300" dirty="0"/>
           </a:p>
@@ -14043,7 +14425,7 @@
                   </a:extLst>
                 </a:hlinkClick>
               </a:rPr>
-              <a:t>Dakar Actu</a:t>
+              <a:t>Mali 24</a:t>
             </a:r>
             <a:pPr indent="0" marL="0">
               <a:spcAft>
@@ -14060,7 +14442,24 @@
                 <a:ea typeface="Calibri" pitchFamily="34" charset="-122"/>
                 <a:cs typeface="Calibri" pitchFamily="34" charset="-120"/>
               </a:rPr>
-              <a:t> — 25 octobre 2026, 4 h UTC</a:t>
+              <a:t> — 26 octobre 2026, 16 h UTC   ·   </a:t>
+            </a:r>
+            <a:pPr indent="0" marL="0">
+              <a:spcAft>
+                <a:spcPts val="200"/>
+              </a:spcAft>
+              <a:buNone/>
+            </a:pPr>
+            <a:r>
+              <a:rPr lang="en-US" sz="1300" b="1" dirty="0">
+                <a:solidFill>
+                  <a:srgbClr val="1F2937"/>
+                </a:solidFill>
+                <a:latin typeface="Calibri" pitchFamily="34" charset="0"/>
+                <a:ea typeface="Calibri" pitchFamily="34" charset="-122"/>
+                <a:cs typeface="Calibri" pitchFamily="34" charset="-120"/>
+              </a:rPr>
+              <a:t>Cotation : Non confirmé</a:t>
             </a:r>
             <a:endParaRPr lang="en-US" sz="1300" dirty="0"/>
           </a:p>
@@ -14084,7 +14483,7 @@
                 <a:ea typeface="Calibri" pitchFamily="34" charset="-122"/>
                 <a:cs typeface="Calibri" pitchFamily="34" charset="-120"/>
               </a:rPr>
-              <a:t>BENSON DIAKITÉ, ANCIENNE GRANDE VOIX DE RFI, EST MORT</a:t>
+              <a:t>MALI : DISPARITIONS INQUIÉTANTES, MORTS SUSPECTES… QUE SE PASSE-T-IL AVEC LA JEUNESSE MALIENNE ?</a:t>
             </a:r>
             <a:endParaRPr lang="en-US" sz="1300" dirty="0"/>
           </a:p>
@@ -14105,7 +14504,7 @@
                 <a:ea typeface="Calibri" pitchFamily="34" charset="-122"/>
                 <a:cs typeface="Calibri" pitchFamily="34" charset="-120"/>
               </a:rPr>
-              <a:t>Sources : </a:t>
+              <a:t>Source : </a:t>
             </a:r>
             <a:pPr indent="0" marL="0">
               <a:spcAft>
@@ -14129,7 +14528,7 @@
                   </a:extLst>
                 </a:hlinkClick>
               </a:rPr>
-              <a:t>AllAfrica (ML) · RFI Afrique</a:t>
+              <a:t>Maliactu</a:t>
             </a:r>
             <a:pPr indent="0" marL="0">
               <a:spcAft>
@@ -14146,24 +14545,7 @@
                 <a:ea typeface="Calibri" pitchFamily="34" charset="-122"/>
                 <a:cs typeface="Calibri" pitchFamily="34" charset="-120"/>
               </a:rPr>
-              <a:t> — 23 octobre 2026, 23 h UTC   ·   </a:t>
-            </a:r>
-            <a:pPr indent="0" marL="0">
-              <a:spcAft>
-                <a:spcPts val="200"/>
-              </a:spcAft>
-              <a:buNone/>
-            </a:pPr>
-            <a:r>
-              <a:rPr lang="en-US" sz="1300" b="1" dirty="0">
-                <a:solidFill>
-                  <a:srgbClr val="1F2937"/>
-                </a:solidFill>
-                <a:latin typeface="Calibri" pitchFamily="34" charset="0"/>
-                <a:ea typeface="Calibri" pitchFamily="34" charset="-122"/>
-                <a:cs typeface="Calibri" pitchFamily="34" charset="-120"/>
-              </a:rPr>
-              <a:t>Cotation : Confirmé</a:t>
+              <a:t> — 26 octobre 2026, 13 h UTC</a:t>
             </a:r>
             <a:endParaRPr lang="en-US" sz="1300" dirty="0"/>
           </a:p>
@@ -14187,7 +14569,7 @@
                 <a:ea typeface="Calibri" pitchFamily="34" charset="-122"/>
                 <a:cs typeface="Calibri" pitchFamily="34" charset="-120"/>
               </a:rPr>
-              <a:t>LUTTE CONTRE LE TERRORISME À KAYES : LA POLICE FRAPPE AU CŒUR DES RÉSEAUX DE SOUTIEN LOGISTIQUE DES GAT</a:t>
+              <a:t>ATTAQUE DE TRAPPES ET LA VERRIÈRE : LA QUALIFICATION DU MOBILE RACISTE AU CŒUR DU DÉBAT SÉCURITAIRE ET SOCIÉTAL</a:t>
             </a:r>
             <a:endParaRPr lang="en-US" sz="1300" dirty="0"/>
           </a:p>
@@ -14249,7 +14631,7 @@
                 <a:ea typeface="Calibri" pitchFamily="34" charset="-122"/>
                 <a:cs typeface="Calibri" pitchFamily="34" charset="-120"/>
               </a:rPr>
-              <a:t> — 23 octobre 2026, 14 h UTC</a:t>
+              <a:t> — 26 octobre 2026, 10 h UTC</a:t>
             </a:r>
             <a:endParaRPr lang="en-US" sz="1300" dirty="0"/>
           </a:p>
@@ -14333,7 +14715,7 @@
                 <a:ea typeface="Calibri" pitchFamily="34" charset="-122"/>
                 <a:cs typeface="Calibri" pitchFamily="34" charset="-120"/>
               </a:rPr>
-              <a:t>|  30/10/26   |   21</a:t>
+              <a:t>|  31/10/26   |   21</a:t>
             </a:r>
             <a:endParaRPr lang="en-US" sz="1000" dirty="0"/>
           </a:p>
@@ -14599,7 +14981,7 @@
                 <a:ea typeface="Calibri" pitchFamily="34" charset="-122"/>
                 <a:cs typeface="Calibri" pitchFamily="34" charset="-120"/>
               </a:rPr>
-              <a:t>Indice de confiance : moyenne (incident vérifié le plus récent : 121 jours ; 2 signaux du jour)</a:t>
+              <a:t>Indice de confiance : moyenne (incident vérifié le plus récent : 122 jours ; 2 signaux du jour)</a:t>
             </a:r>
             <a:endParaRPr lang="en-US" sz="1100" dirty="0"/>
           </a:p>
@@ -14638,7 +15020,7 @@
                 <a:ea typeface="Arial Narrow" pitchFamily="34" charset="-122"/>
                 <a:cs typeface="Arial Narrow" pitchFamily="34" charset="-120"/>
               </a:rPr>
-              <a:t>Tchad : le pays dément les accusations du Niger concernant une frappe de drone</a:t>
+              <a:t>Niger-Tchad, le jeu dangereux de Déby Kaka</a:t>
             </a:r>
             <a:endParaRPr lang="en-US" sz="2200" dirty="0"/>
           </a:p>
@@ -14675,7 +15057,7 @@
               <a:buNone/>
             </a:pPr>
             <a:r>
-              <a:rPr lang="en-US" sz="1150" b="1" dirty="0">
+              <a:rPr lang="en-US" sz="1500" b="1" dirty="0">
                 <a:solidFill>
                   <a:srgbClr val="1F6B5E"/>
                 </a:solidFill>
@@ -14685,7 +15067,7 @@
               </a:rPr>
               <a:t>Contexte</a:t>
             </a:r>
-            <a:endParaRPr lang="en-US" sz="1050" dirty="0"/>
+            <a:endParaRPr lang="en-US" sz="1400" dirty="0"/>
           </a:p>
           <a:p>
             <a:pPr indent="0" marL="0">
@@ -14695,17 +15077,17 @@
               <a:buNone/>
             </a:pPr>
             <a:r>
-              <a:rPr lang="en-US" sz="1050" dirty="0">
-                <a:solidFill>
-                  <a:srgbClr val="1F2937"/>
-                </a:solidFill>
-                <a:latin typeface="Calibri" pitchFamily="34" charset="0"/>
-                <a:ea typeface="Calibri" pitchFamily="34" charset="-122"/>
-                <a:cs typeface="Calibri" pitchFamily="34" charset="-120"/>
-              </a:rPr>
-              <a:t>Fait rapporté le jeudi 29 octobre 2026. Lieu : Niamey, Niger. Actualité politique. Repris par 11 médias distincts (France 24, 24heureinfo.com, AllAfrica (NE), Maliactu, RFI Afrique, Malijet, ANP — Agence Nigérienne Presse, Journal du Tchad, Tchadinfos, Africanews — Chaine panafricaine, Africanews) : le fait est recoupé.</a:t>
-            </a:r>
-            <a:endParaRPr lang="en-US" sz="1050" dirty="0"/>
+              <a:rPr lang="en-US" sz="1400" dirty="0">
+                <a:solidFill>
+                  <a:srgbClr val="1F2937"/>
+                </a:solidFill>
+                <a:latin typeface="Calibri" pitchFamily="34" charset="0"/>
+                <a:ea typeface="Calibri" pitchFamily="34" charset="-122"/>
+                <a:cs typeface="Calibri" pitchFamily="34" charset="-120"/>
+              </a:rPr>
+              <a:t>Fait rapporté le vendredi 30 octobre 2026. Lieu : Niger. Actualité sécuritaire. Une seule source à ce stade (Tamtaminfo) : à confirmer par un second média.</a:t>
+            </a:r>
+            <a:endParaRPr lang="en-US" sz="1400" dirty="0"/>
           </a:p>
           <a:p>
             <a:pPr indent="0" marL="0">
@@ -14718,7 +15100,7 @@
               <a:buNone/>
             </a:pPr>
             <a:r>
-              <a:rPr lang="en-US" sz="1150" b="1" dirty="0">
+              <a:rPr lang="en-US" sz="1500" b="1" dirty="0">
                 <a:solidFill>
                   <a:srgbClr val="1F6B5E"/>
                 </a:solidFill>
@@ -14728,7 +15110,7 @@
               </a:rPr>
               <a:t>Ce que rapportent les sources</a:t>
             </a:r>
-            <a:endParaRPr lang="en-US" sz="1050" dirty="0"/>
+            <a:endParaRPr lang="en-US" sz="1400" dirty="0"/>
           </a:p>
           <a:p>
             <a:pPr indent="0" marL="0">
@@ -14738,15 +15120,15 @@
               <a:buNone/>
             </a:pPr>
             <a:r>
-              <a:rPr lang="en-US" sz="1050" b="1" dirty="0">
-                <a:solidFill>
-                  <a:srgbClr val="1F2937"/>
-                </a:solidFill>
-                <a:latin typeface="Calibri" pitchFamily="34" charset="0"/>
-                <a:ea typeface="Calibri" pitchFamily="34" charset="-122"/>
-                <a:cs typeface="Calibri" pitchFamily="34" charset="-120"/>
-              </a:rPr>
-              <a:t>France 24 : </a:t>
+              <a:rPr lang="en-US" sz="1400" b="1" dirty="0">
+                <a:solidFill>
+                  <a:srgbClr val="1F2937"/>
+                </a:solidFill>
+                <a:latin typeface="Calibri" pitchFamily="34" charset="0"/>
+                <a:ea typeface="Calibri" pitchFamily="34" charset="-122"/>
+                <a:cs typeface="Calibri" pitchFamily="34" charset="-120"/>
+              </a:rPr>
+              <a:t>Tamtaminfo : </a:t>
             </a:r>
             <a:pPr indent="0" marL="0">
               <a:spcAft>
@@ -14755,54 +15137,17 @@
               <a:buNone/>
             </a:pPr>
             <a:r>
-              <a:rPr lang="en-US" sz="1050" i="1" dirty="0">
-                <a:solidFill>
-                  <a:srgbClr val="1F2937"/>
-                </a:solidFill>
-                <a:latin typeface="Calibri" pitchFamily="34" charset="0"/>
-                <a:ea typeface="Calibri" pitchFamily="34" charset="-122"/>
-                <a:cs typeface="Calibri" pitchFamily="34" charset="-120"/>
-              </a:rPr>
-              <a:t>« Le Niger estime que son voisin, le Tchad, est responsable de la mort de deux civils sur son territoire, suite à une frappe de drone survenue le 24 octobre dernier. Le Tchad dément lui tout implication. La junte accuse également la France d'être impliquée. Les précisions de Harold Girard, correspondant France 24 à Njdaména. »</a:t>
-            </a:r>
-            <a:endParaRPr lang="en-US" sz="1050" dirty="0"/>
-          </a:p>
-          <a:p>
-            <a:pPr indent="0" marL="0">
-              <a:spcAft>
-                <a:spcPts val="300"/>
-              </a:spcAft>
-              <a:buNone/>
-            </a:pPr>
-            <a:r>
-              <a:rPr lang="en-US" sz="1050" b="1" dirty="0">
-                <a:solidFill>
-                  <a:srgbClr val="1F2937"/>
-                </a:solidFill>
-                <a:latin typeface="Calibri" pitchFamily="34" charset="0"/>
-                <a:ea typeface="Calibri" pitchFamily="34" charset="-122"/>
-                <a:cs typeface="Calibri" pitchFamily="34" charset="-120"/>
-              </a:rPr>
-              <a:t>24heureinfo.com : </a:t>
-            </a:r>
-            <a:pPr indent="0" marL="0">
-              <a:spcAft>
-                <a:spcPts val="300"/>
-              </a:spcAft>
-              <a:buNone/>
-            </a:pPr>
-            <a:r>
-              <a:rPr lang="en-US" sz="1050" i="1" dirty="0">
-                <a:solidFill>
-                  <a:srgbClr val="1F2937"/>
-                </a:solidFill>
-                <a:latin typeface="Calibri" pitchFamily="34" charset="0"/>
-                <a:ea typeface="Calibri" pitchFamily="34" charset="-122"/>
-                <a:cs typeface="Calibri" pitchFamily="34" charset="-120"/>
-              </a:rPr>
-              <a:t>« Le Niger accuse le Tchad et la France après une frappe de drone meurtrière ayant tué des civils. Découvrez les détails. L’article Niger : Niamey accuse le Tchad et la France après une frappe de drone meurtrière est apparu en premier sur 24 Heure Info | Actualité au Togo et dans le monde. »</a:t>
-            </a:r>
-            <a:endParaRPr lang="en-US" sz="1050" dirty="0"/>
+              <a:rPr lang="en-US" sz="1400" i="1" dirty="0">
+                <a:solidFill>
+                  <a:srgbClr val="1F2937"/>
+                </a:solidFill>
+                <a:latin typeface="Calibri" pitchFamily="34" charset="0"/>
+                <a:ea typeface="Calibri" pitchFamily="34" charset="-122"/>
+                <a:cs typeface="Calibri" pitchFamily="34" charset="-120"/>
+              </a:rPr>
+              <a:t>« Les tensions entre le Niger et le Tchad viennent de franchir un seuil préoccupant. L’accusation d’une frappe de drone sur le territoire nigérien, le démenti catégorique de N’Djamena et les soupçons antérieurs de déstabilisation politique menacent les relations entre deux pays dont la coopération demeure essentielle à la sécurité du Sahel. Une question s’impose. »</a:t>
+            </a:r>
+            <a:endParaRPr lang="en-US" sz="1400" dirty="0"/>
           </a:p>
           <a:p>
             <a:pPr indent="0" marL="0">
@@ -14815,7 +15160,7 @@
               <a:buNone/>
             </a:pPr>
             <a:r>
-              <a:rPr lang="en-US" sz="1150" b="1" dirty="0">
+              <a:rPr lang="en-US" sz="1500" b="1" dirty="0">
                 <a:solidFill>
                   <a:srgbClr val="1F6B5E"/>
                 </a:solidFill>
@@ -14825,7 +15170,7 @@
               </a:rPr>
               <a:t>Enjeux sûreté</a:t>
             </a:r>
-            <a:endParaRPr lang="en-US" sz="1050" dirty="0"/>
+            <a:endParaRPr lang="en-US" sz="1400" dirty="0"/>
           </a:p>
           <a:p>
             <a:pPr indent="0" marL="0">
@@ -14835,7 +15180,7 @@
               <a:buNone/>
             </a:pPr>
             <a:r>
-              <a:rPr lang="en-US" sz="1050" dirty="0">
+              <a:rPr lang="en-US" sz="1400" dirty="0">
                 <a:solidFill>
                   <a:srgbClr val="1F2937"/>
                 </a:solidFill>
@@ -14845,7 +15190,7 @@
               </a:rPr>
               <a:t>Menace armée sur les axes et localités de la zone : réévaluer les déplacements terrestres (horaires, convois, itinéraires de repli) et les consignes des sites et des personnels présents à proximité.</a:t>
             </a:r>
-            <a:endParaRPr lang="en-US" sz="1050" dirty="0"/>
+            <a:endParaRPr lang="en-US" sz="1400" dirty="0"/>
           </a:p>
           <a:p>
             <a:pPr indent="0" marL="0">
@@ -14858,15 +15203,15 @@
               <a:buNone/>
             </a:pPr>
             <a:r>
-              <a:rPr lang="en-US" sz="1050" b="1" dirty="0">
-                <a:solidFill>
-                  <a:srgbClr val="1F2937"/>
-                </a:solidFill>
-                <a:latin typeface="Calibri" pitchFamily="34" charset="0"/>
-                <a:ea typeface="Calibri" pitchFamily="34" charset="-122"/>
-                <a:cs typeface="Calibri" pitchFamily="34" charset="-120"/>
-              </a:rPr>
-              <a:t>Sources : </a:t>
+              <a:rPr lang="en-US" sz="1400" b="1" dirty="0">
+                <a:solidFill>
+                  <a:srgbClr val="1F2937"/>
+                </a:solidFill>
+                <a:latin typeface="Calibri" pitchFamily="34" charset="0"/>
+                <a:ea typeface="Calibri" pitchFamily="34" charset="-122"/>
+                <a:cs typeface="Calibri" pitchFamily="34" charset="-120"/>
+              </a:rPr>
+              <a:t>Source : </a:t>
             </a:r>
             <a:pPr indent="0" marL="0">
               <a:spcAft>
@@ -14875,7 +15220,7 @@
               <a:buNone/>
             </a:pPr>
             <a:r>
-              <a:rPr lang="en-US" sz="1050" u="sng" dirty="0">
+              <a:rPr lang="en-US" sz="1400" u="sng" dirty="0">
                 <a:solidFill>
                   <a:srgbClr val="1F6B5E"/>
                 </a:solidFill>
@@ -14890,7 +15235,7 @@
                   </a:extLst>
                 </a:hlinkClick>
               </a:rPr>
-              <a:t>France 24</a:t>
+              <a:t>Tamtaminfo</a:t>
             </a:r>
             <a:pPr indent="0" marL="0">
               <a:spcAft>
@@ -14899,55 +15244,72 @@
               <a:buNone/>
             </a:pPr>
             <a:r>
-              <a:rPr lang="en-US" sz="1050" u="sng" dirty="0">
-                <a:solidFill>
-                  <a:srgbClr val="1F6B5E"/>
-                </a:solidFill>
-                <a:latin typeface="Calibri" pitchFamily="34" charset="0"/>
-                <a:ea typeface="Calibri" pitchFamily="34" charset="-122"/>
-                <a:cs typeface="Calibri" pitchFamily="34" charset="-120"/>
-                <a:hlinkClick r:id="rId2" invalidUrl="" action="" tgtFrame="" tooltip="" history="1" highlightClick="0" endSnd="0">
-                  <a:extLst>
-                    <a:ext uri="{A12FA001-AC4F-418D-AE19-62706E023703}">
-                      <ahyp:hlinkClr xmlns:ahyp="http://schemas.microsoft.com/office/drawing/2018/hyperlinkcolor" val="tx"/>
-                    </a:ext>
-                  </a:extLst>
-                </a:hlinkClick>
-              </a:rPr>
-              <a:t> · 24heureinfo.com</a:t>
-            </a:r>
-            <a:pPr indent="0" marL="0">
-              <a:spcAft>
-                <a:spcPts val="300"/>
-              </a:spcAft>
-              <a:buNone/>
-            </a:pPr>
-            <a:r>
-              <a:rPr lang="en-US" sz="1050" u="sng" dirty="0">
-                <a:solidFill>
-                  <a:srgbClr val="1F6B5E"/>
-                </a:solidFill>
-                <a:latin typeface="Calibri" pitchFamily="34" charset="0"/>
-                <a:ea typeface="Calibri" pitchFamily="34" charset="-122"/>
-                <a:cs typeface="Calibri" pitchFamily="34" charset="-120"/>
-                <a:hlinkClick r:id="rId3" invalidUrl="" action="" tgtFrame="" tooltip="" history="1" highlightClick="0" endSnd="0">
-                  <a:extLst>
-                    <a:ext uri="{A12FA001-AC4F-418D-AE19-62706E023703}">
-                      <ahyp:hlinkClr xmlns:ahyp="http://schemas.microsoft.com/office/drawing/2018/hyperlinkcolor" val="tx"/>
-                    </a:ext>
-                  </a:extLst>
-                </a:hlinkClick>
-              </a:rPr>
-              <a:t> · AllAfrica (NE)</a:t>
-            </a:r>
-            <a:pPr indent="0" marL="0">
-              <a:spcAft>
-                <a:spcPts val="300"/>
-              </a:spcAft>
-              <a:buNone/>
-            </a:pPr>
-            <a:r>
-              <a:rPr lang="en-US" sz="1050" u="sng" dirty="0">
+              <a:rPr lang="en-US" sz="1400" b="1" dirty="0">
+                <a:solidFill>
+                  <a:srgbClr val="1F2937"/>
+                </a:solidFill>
+                <a:latin typeface="Calibri" pitchFamily="34" charset="0"/>
+                <a:ea typeface="Calibri" pitchFamily="34" charset="-122"/>
+                <a:cs typeface="Calibri" pitchFamily="34" charset="-120"/>
+              </a:rPr>
+              <a:t> — 30 octobre 2026, 5 h UTC   ·   Cotation : Non confirmé</a:t>
+            </a:r>
+            <a:endParaRPr lang="en-US" sz="1400" dirty="0"/>
+          </a:p>
+        </p:txBody>
+      </p:sp>
+      <p:pic>
+        <p:nvPicPr>
+          <p:cNvPr id="12" name="Image 0" descr="preencoded.png">
+            <a:hlinkClick r:id="rId3" tooltip=""/>
+          </p:cNvPr>
+          <p:cNvPicPr>
+            <a:picLocks noChangeAspect="1"/>
+          </p:cNvPicPr>
+          <p:nvPr/>
+        </p:nvPicPr>
+        <p:blipFill>
+          <a:blip r:embed="rId2"/>
+          <a:stretch>
+            <a:fillRect/>
+          </a:stretch>
+        </p:blipFill>
+        <p:spPr>
+          <a:xfrm>
+            <a:off x="7635240" y="2075688"/>
+            <a:ext cx="4114800" cy="3430141"/>
+          </a:xfrm>
+          <a:prstGeom prst="rect">
+            <a:avLst/>
+          </a:prstGeom>
+        </p:spPr>
+      </p:pic>
+      <p:sp>
+        <p:nvSpPr>
+          <p:cNvPr id="13" name="Text 10"/>
+          <p:cNvSpPr/>
+          <p:nvPr/>
+        </p:nvSpPr>
+        <p:spPr>
+          <a:xfrm>
+            <a:off x="7635240" y="5542405"/>
+            <a:ext cx="4114800" cy="256032"/>
+          </a:xfrm>
+          <a:prstGeom prst="rect">
+            <a:avLst/>
+          </a:prstGeom>
+          <a:noFill/>
+          <a:ln/>
+        </p:spPr>
+        <p:txBody>
+          <a:bodyPr wrap="square" rtlCol="0" anchor="ctr"/>
+          <a:lstStyle/>
+          <a:p>
+            <a:pPr algn="r" indent="0" marL="0">
+              <a:buNone/>
+            </a:pPr>
+            <a:r>
+              <a:rPr lang="en-US" sz="900" u="sng" dirty="0">
                 <a:solidFill>
                   <a:srgbClr val="1F6B5E"/>
                 </a:solidFill>
@@ -14962,113 +15324,7 @@
                   </a:extLst>
                 </a:hlinkClick>
               </a:rPr>
-              <a:t> · Maliactu</a:t>
-            </a:r>
-            <a:pPr indent="0" marL="0">
-              <a:spcAft>
-                <a:spcPts val="300"/>
-              </a:spcAft>
-              <a:buNone/>
-            </a:pPr>
-            <a:r>
-              <a:rPr lang="en-US" sz="1050" dirty="0">
-                <a:solidFill>
-                  <a:srgbClr val="1F2937"/>
-                </a:solidFill>
-                <a:latin typeface="Calibri" pitchFamily="34" charset="0"/>
-                <a:ea typeface="Calibri" pitchFamily="34" charset="-122"/>
-                <a:cs typeface="Calibri" pitchFamily="34" charset="-120"/>
-              </a:rPr>
-              <a:t> · RFI Afrique · Malijet · ANP — Agence Nigérienne Presse · Journal du Tchad · Tchadinfos · Africanews — Chaine panafricaine · Africanews</a:t>
-            </a:r>
-            <a:pPr indent="0" marL="0">
-              <a:spcAft>
-                <a:spcPts val="300"/>
-              </a:spcAft>
-              <a:buNone/>
-            </a:pPr>
-            <a:r>
-              <a:rPr lang="en-US" sz="1050" b="1" dirty="0">
-                <a:solidFill>
-                  <a:srgbClr val="1F2937"/>
-                </a:solidFill>
-                <a:latin typeface="Calibri" pitchFamily="34" charset="0"/>
-                <a:ea typeface="Calibri" pitchFamily="34" charset="-122"/>
-                <a:cs typeface="Calibri" pitchFamily="34" charset="-120"/>
-              </a:rPr>
-              <a:t> — 29 octobre 2026, 16 h UTC   ·   Cotation : Confirmé</a:t>
-            </a:r>
-            <a:endParaRPr lang="en-US" sz="1050" dirty="0"/>
-          </a:p>
-        </p:txBody>
-      </p:sp>
-      <p:pic>
-        <p:nvPicPr>
-          <p:cNvPr id="12" name="Image 0" descr="preencoded.png">
-            <a:hlinkClick r:id="rId6" tooltip=""/>
-          </p:cNvPr>
-          <p:cNvPicPr>
-            <a:picLocks noChangeAspect="1"/>
-          </p:cNvPicPr>
-          <p:nvPr/>
-        </p:nvPicPr>
-        <p:blipFill>
-          <a:blip r:embed="rId5"/>
-          <a:stretch>
-            <a:fillRect/>
-          </a:stretch>
-        </p:blipFill>
-        <p:spPr>
-          <a:xfrm>
-            <a:off x="7635240" y="2075688"/>
-            <a:ext cx="4114800" cy="2314575"/>
-          </a:xfrm>
-          <a:prstGeom prst="rect">
-            <a:avLst/>
-          </a:prstGeom>
-        </p:spPr>
-      </p:pic>
-      <p:sp>
-        <p:nvSpPr>
-          <p:cNvPr id="13" name="Text 10"/>
-          <p:cNvSpPr/>
-          <p:nvPr/>
-        </p:nvSpPr>
-        <p:spPr>
-          <a:xfrm>
-            <a:off x="7635240" y="4426839"/>
-            <a:ext cx="4114800" cy="256032"/>
-          </a:xfrm>
-          <a:prstGeom prst="rect">
-            <a:avLst/>
-          </a:prstGeom>
-          <a:noFill/>
-          <a:ln/>
-        </p:spPr>
-        <p:txBody>
-          <a:bodyPr wrap="square" rtlCol="0" anchor="ctr"/>
-          <a:lstStyle/>
-          <a:p>
-            <a:pPr algn="r" indent="0" marL="0">
-              <a:buNone/>
-            </a:pPr>
-            <a:r>
-              <a:rPr lang="en-US" sz="900" u="sng" dirty="0">
-                <a:solidFill>
-                  <a:srgbClr val="1F6B5E"/>
-                </a:solidFill>
-                <a:latin typeface="Calibri" pitchFamily="34" charset="0"/>
-                <a:ea typeface="Calibri" pitchFamily="34" charset="-122"/>
-                <a:cs typeface="Calibri" pitchFamily="34" charset="-120"/>
-                <a:hlinkClick r:id="rId7" invalidUrl="" action="" tgtFrame="" tooltip="" history="1" highlightClick="0" endSnd="0">
-                  <a:extLst>
-                    <a:ext uri="{A12FA001-AC4F-418D-AE19-62706E023703}">
-                      <ahyp:hlinkClr xmlns:ahyp="http://schemas.microsoft.com/office/drawing/2018/hyperlinkcolor" val="tx"/>
-                    </a:ext>
-                  </a:extLst>
-                </a:hlinkClick>
-              </a:rPr>
-              <a:t>Photo : © france24.com</a:t>
+              <a:t>Photo : © tamtaminfo.com</a:t>
             </a:r>
             <a:endParaRPr lang="en-US" sz="900" dirty="0"/>
           </a:p>
@@ -15152,7 +15408,7 @@
                 <a:ea typeface="Calibri" pitchFamily="34" charset="-122"/>
                 <a:cs typeface="Calibri" pitchFamily="34" charset="-120"/>
               </a:rPr>
-              <a:t>|  30/10/26   |   22</a:t>
+              <a:t>|  31/10/26   |   22</a:t>
             </a:r>
             <a:endParaRPr lang="en-US" sz="1000" dirty="0"/>
           </a:p>
@@ -15425,7 +15681,7 @@
                 <a:ea typeface="Calibri" pitchFamily="34" charset="-122"/>
                 <a:cs typeface="Calibri" pitchFamily="34" charset="-120"/>
               </a:rPr>
-              <a:t>TENSIONS AU SAHEL : N’DJAMENA DÉMENT CATÉGORIQUEMENT TOUTE IMPLICATION DANS UNE FRAPPE AU NIGER</a:t>
+              <a:t>TCHAD : LE PAYS DÉMENT LES ACCUSATIONS DU NIGER CONCERNANT UNE FRAPPE DE DRONE</a:t>
             </a:r>
             <a:endParaRPr lang="en-US" sz="1300" dirty="0"/>
           </a:p>
@@ -15470,7 +15726,7 @@
                   </a:extLst>
                 </a:hlinkClick>
               </a:rPr>
-              <a:t>Mali 24 · Points Chauds Online</a:t>
+              <a:t>France 24 · 24heureinfo.com · AllAfrica (NE) · Maliactu · RFI Afrique · Malijet · ANP — Agence Nigérienne Presse · Journal du Tchad · Tchadinfos · Africanews — Chaine panafricaine · Africanews</a:t>
             </a:r>
             <a:pPr indent="0" marL="0">
               <a:spcAft>
@@ -15487,7 +15743,7 @@
                 <a:ea typeface="Calibri" pitchFamily="34" charset="-122"/>
                 <a:cs typeface="Calibri" pitchFamily="34" charset="-120"/>
               </a:rPr>
-              <a:t> — 29 octobre 2026, 7 h UTC   ·   </a:t>
+              <a:t> — 29 octobre 2026, 16 h UTC   ·   </a:t>
             </a:r>
             <a:pPr indent="0" marL="0">
               <a:spcAft>
@@ -15528,7 +15784,7 @@
                 <a:ea typeface="Calibri" pitchFamily="34" charset="-122"/>
                 <a:cs typeface="Calibri" pitchFamily="34" charset="-120"/>
               </a:rPr>
-              <a:t>ATTAQUE D’UN DRONE TCHADIEN AU NIGER : L’ADRODEV SALUE LES EFFORTS DES AUTORITÉS À MAINTENIR LA PAIX AU SAHEL</a:t>
+              <a:t>TENSIONS AU SAHEL : N’DJAMENA DÉMENT CATÉGORIQUEMENT TOUTE IMPLICATION DANS UNE FRAPPE AU NIGER</a:t>
             </a:r>
             <a:endParaRPr lang="en-US" sz="1300" dirty="0"/>
           </a:p>
@@ -15549,7 +15805,7 @@
                 <a:ea typeface="Calibri" pitchFamily="34" charset="-122"/>
                 <a:cs typeface="Calibri" pitchFamily="34" charset="-120"/>
               </a:rPr>
-              <a:t>Source : </a:t>
+              <a:t>Sources : </a:t>
             </a:r>
             <a:pPr indent="0" marL="0">
               <a:spcAft>
@@ -15573,7 +15829,7 @@
                   </a:extLst>
                 </a:hlinkClick>
               </a:rPr>
-              <a:t>ANP — Agence Nigérienne Presse</a:t>
+              <a:t>Mali 24 · Points Chauds Online</a:t>
             </a:r>
             <a:pPr indent="0" marL="0">
               <a:spcAft>
@@ -15590,7 +15846,7 @@
                 <a:ea typeface="Calibri" pitchFamily="34" charset="-122"/>
                 <a:cs typeface="Calibri" pitchFamily="34" charset="-120"/>
               </a:rPr>
-              <a:t> — 28 octobre 2026, 11 h UTC   ·   </a:t>
+              <a:t> — 29 octobre 2026, 7 h UTC   ·   </a:t>
             </a:r>
             <a:pPr indent="0" marL="0">
               <a:spcAft>
@@ -15607,7 +15863,7 @@
                 <a:ea typeface="Calibri" pitchFamily="34" charset="-122"/>
                 <a:cs typeface="Calibri" pitchFamily="34" charset="-120"/>
               </a:rPr>
-              <a:t>Cotation : Probable</a:t>
+              <a:t>Cotation : Confirmé</a:t>
             </a:r>
             <a:endParaRPr lang="en-US" sz="1300" dirty="0"/>
           </a:p>
@@ -15631,7 +15887,7 @@
                 <a:ea typeface="Calibri" pitchFamily="34" charset="-122"/>
                 <a:cs typeface="Calibri" pitchFamily="34" charset="-120"/>
               </a:rPr>
-              <a:t>NIGER GOVERNOR’S CONVOY CRASH KILLS FOUR STUDENTS, DRIVER</a:t>
+              <a:t>ATTAQUE D’UN DRONE TCHADIEN AU NIGER : L’ADRODEV SALUE LES EFFORTS DES AUTORITÉS À MAINTENIR LA PAIX AU SAHEL</a:t>
             </a:r>
             <a:endParaRPr lang="en-US" sz="1300" dirty="0"/>
           </a:p>
@@ -15676,7 +15932,7 @@
                   </a:extLst>
                 </a:hlinkClick>
               </a:rPr>
-              <a:t>Premium Times</a:t>
+              <a:t>ANP — Agence Nigérienne Presse</a:t>
             </a:r>
             <a:pPr indent="0" marL="0">
               <a:spcAft>
@@ -15693,7 +15949,7 @@
                 <a:ea typeface="Calibri" pitchFamily="34" charset="-122"/>
                 <a:cs typeface="Calibri" pitchFamily="34" charset="-120"/>
               </a:rPr>
-              <a:t> — 28 octobre 2026, 6 h UTC   ·   </a:t>
+              <a:t> — 28 octobre 2026, 11 h UTC   ·   </a:t>
             </a:r>
             <a:pPr indent="0" marL="0">
               <a:spcAft>
@@ -15734,7 +15990,7 @@
                 <a:ea typeface="Calibri" pitchFamily="34" charset="-122"/>
                 <a:cs typeface="Calibri" pitchFamily="34" charset="-120"/>
               </a:rPr>
-              <a:t>TCHAD-NIGER : UNE NOUVELLE ESCALADE ENTRE MAHAMAT IDRISS DÉBY ET ABDOURAHAMANE TIANI</a:t>
+              <a:t>NIGER GOVERNOR’S CONVOY CRASH KILLS FOUR STUDENTS, DRIVER</a:t>
             </a:r>
             <a:endParaRPr lang="en-US" sz="1300" dirty="0"/>
           </a:p>
@@ -15779,7 +16035,7 @@
                   </a:extLst>
                 </a:hlinkClick>
               </a:rPr>
-              <a:t>Jeune Afrique</a:t>
+              <a:t>Premium Times</a:t>
             </a:r>
             <a:pPr indent="0" marL="0">
               <a:spcAft>
@@ -15796,7 +16052,7 @@
                 <a:ea typeface="Calibri" pitchFamily="34" charset="-122"/>
                 <a:cs typeface="Calibri" pitchFamily="34" charset="-120"/>
               </a:rPr>
-              <a:t> — 27 octobre 2026, 16 h UTC   ·   </a:t>
+              <a:t> — 28 octobre 2026, 6 h UTC   ·   </a:t>
             </a:r>
             <a:pPr indent="0" marL="0">
               <a:spcAft>
@@ -15837,7 +16093,7 @@
                 <a:ea typeface="Calibri" pitchFamily="34" charset="-122"/>
                 <a:cs typeface="Calibri" pitchFamily="34" charset="-120"/>
               </a:rPr>
-              <a:t>LE PAYS DÉNONCE UNE ATTAQUE DE DRONE DU TCHAD AVEC «L'APPUI DE LA FRANCE»</a:t>
+              <a:t>TCHAD-NIGER : UNE NOUVELLE ESCALADE ENTRE MAHAMAT IDRISS DÉBY ET ABDOURAHAMANE TIANI</a:t>
             </a:r>
             <a:endParaRPr lang="en-US" sz="1300" dirty="0"/>
           </a:p>
@@ -15858,7 +16114,7 @@
                 <a:ea typeface="Calibri" pitchFamily="34" charset="-122"/>
                 <a:cs typeface="Calibri" pitchFamily="34" charset="-120"/>
               </a:rPr>
-              <a:t>Sources : </a:t>
+              <a:t>Source : </a:t>
             </a:r>
             <a:pPr indent="0" marL="0">
               <a:spcAft>
@@ -15882,7 +16138,7 @@
                   </a:extLst>
                 </a:hlinkClick>
               </a:rPr>
-              <a:t>AllAfrica (NE) · RFI Afrique</a:t>
+              <a:t>Jeune Afrique</a:t>
             </a:r>
             <a:pPr indent="0" marL="0">
               <a:spcAft>
@@ -15899,7 +16155,7 @@
                 <a:ea typeface="Calibri" pitchFamily="34" charset="-122"/>
                 <a:cs typeface="Calibri" pitchFamily="34" charset="-120"/>
               </a:rPr>
-              <a:t> — 27 octobre 2026, 9 h UTC   ·   </a:t>
+              <a:t> — 27 octobre 2026, 16 h UTC   ·   </a:t>
             </a:r>
             <a:pPr indent="0" marL="0">
               <a:spcAft>
@@ -15916,7 +16172,7 @@
                 <a:ea typeface="Calibri" pitchFamily="34" charset="-122"/>
                 <a:cs typeface="Calibri" pitchFamily="34" charset="-120"/>
               </a:rPr>
-              <a:t>Cotation : Confirmé</a:t>
+              <a:t>Cotation : Probable</a:t>
             </a:r>
             <a:endParaRPr lang="en-US" sz="1300" dirty="0"/>
           </a:p>
@@ -16000,7 +16256,7 @@
                 <a:ea typeface="Calibri" pitchFamily="34" charset="-122"/>
                 <a:cs typeface="Calibri" pitchFamily="34" charset="-120"/>
               </a:rPr>
-              <a:t>|  30/10/26   |   23</a:t>
+              <a:t>|  31/10/26   |   23</a:t>
             </a:r>
             <a:endParaRPr lang="en-US" sz="1000" dirty="0"/>
           </a:p>
@@ -16273,7 +16529,7 @@
                 <a:ea typeface="Calibri" pitchFamily="34" charset="-122"/>
                 <a:cs typeface="Calibri" pitchFamily="34" charset="-120"/>
               </a:rPr>
-              <a:t>LANCEMENT OFFICIEL DE LA CARAVANE DE SENSIBILISATION ET DE FORMATION SUR LES BONNES PRATIQUES DE GREFFES ET PARQUETS ET L’ÉTABLISSEMENT DES PIÈCES D’EXÉCUTION</a:t>
+              <a:t>LE PAYS DÉNONCE UNE ATTAQUE DE DRONE DU TCHAD AVEC «L'APPUI DE LA FRANCE»</a:t>
             </a:r>
             <a:endParaRPr lang="en-US" sz="1300" dirty="0"/>
           </a:p>
@@ -16294,7 +16550,7 @@
                 <a:ea typeface="Calibri" pitchFamily="34" charset="-122"/>
                 <a:cs typeface="Calibri" pitchFamily="34" charset="-120"/>
               </a:rPr>
-              <a:t>Source : </a:t>
+              <a:t>Sources : </a:t>
             </a:r>
             <a:pPr indent="0" marL="0">
               <a:spcAft>
@@ -16318,7 +16574,7 @@
                   </a:extLst>
                 </a:hlinkClick>
               </a:rPr>
-              <a:t>ANP — Agence Nigérienne Presse</a:t>
+              <a:t>AllAfrica (NE) · RFI Afrique</a:t>
             </a:r>
             <a:pPr indent="0" marL="0">
               <a:spcAft>
@@ -16335,7 +16591,24 @@
                 <a:ea typeface="Calibri" pitchFamily="34" charset="-122"/>
                 <a:cs typeface="Calibri" pitchFamily="34" charset="-120"/>
               </a:rPr>
-              <a:t> — 23 octobre 2026, 20 h UTC</a:t>
+              <a:t> — 27 octobre 2026, 9 h UTC   ·   </a:t>
+            </a:r>
+            <a:pPr indent="0" marL="0">
+              <a:spcAft>
+                <a:spcPts val="200"/>
+              </a:spcAft>
+              <a:buNone/>
+            </a:pPr>
+            <a:r>
+              <a:rPr lang="en-US" sz="1300" b="1" dirty="0">
+                <a:solidFill>
+                  <a:srgbClr val="1F2937"/>
+                </a:solidFill>
+                <a:latin typeface="Calibri" pitchFamily="34" charset="0"/>
+                <a:ea typeface="Calibri" pitchFamily="34" charset="-122"/>
+                <a:cs typeface="Calibri" pitchFamily="34" charset="-120"/>
+              </a:rPr>
+              <a:t>Cotation : Confirmé</a:t>
             </a:r>
             <a:endParaRPr lang="en-US" sz="1300" dirty="0"/>
           </a:p>
@@ -16359,7 +16632,7 @@
                 <a:ea typeface="Calibri" pitchFamily="34" charset="-122"/>
                 <a:cs typeface="Calibri" pitchFamily="34" charset="-120"/>
               </a:rPr>
-              <a:t>EN BREF: ATTAQUE, AGRICULTURE, SPORT …LES INFORMATIONS DE LA SEMAINE</a:t>
+              <a:t>LANCEMENT OFFICIEL DE LA CARAVANE DE SENSIBILISATION ET DE FORMATION SUR LES BONNES PRATIQUES DE GREFFES ET PARQUETS ET L’ÉTABLISSEMENT DES PIÈCES D’EXÉCUTION</a:t>
             </a:r>
             <a:endParaRPr lang="en-US" sz="1300" dirty="0"/>
           </a:p>
@@ -16404,7 +16677,7 @@
                   </a:extLst>
                 </a:hlinkClick>
               </a:rPr>
-              <a:t>Studio Kalangou</a:t>
+              <a:t>ANP — Agence Nigérienne Presse</a:t>
             </a:r>
             <a:pPr indent="0" marL="0">
               <a:spcAft>
@@ -16421,24 +16694,7 @@
                 <a:ea typeface="Calibri" pitchFamily="34" charset="-122"/>
                 <a:cs typeface="Calibri" pitchFamily="34" charset="-120"/>
               </a:rPr>
-              <a:t> — 23 octobre 2026, 14 h UTC   ·   </a:t>
-            </a:r>
-            <a:pPr indent="0" marL="0">
-              <a:spcAft>
-                <a:spcPts val="200"/>
-              </a:spcAft>
-              <a:buNone/>
-            </a:pPr>
-            <a:r>
-              <a:rPr lang="en-US" sz="1300" b="1" dirty="0">
-                <a:solidFill>
-                  <a:srgbClr val="1F2937"/>
-                </a:solidFill>
-                <a:latin typeface="Calibri" pitchFamily="34" charset="0"/>
-                <a:ea typeface="Calibri" pitchFamily="34" charset="-122"/>
-                <a:cs typeface="Calibri" pitchFamily="34" charset="-120"/>
-              </a:rPr>
-              <a:t>Cotation : Non confirmé</a:t>
+              <a:t> — 23 octobre 2026, 20 h UTC</a:t>
             </a:r>
             <a:endParaRPr lang="en-US" sz="1300" dirty="0"/>
           </a:p>
@@ -16462,7 +16718,7 @@
                 <a:ea typeface="Calibri" pitchFamily="34" charset="-122"/>
                 <a:cs typeface="Calibri" pitchFamily="34" charset="-120"/>
               </a:rPr>
-              <a:t>SOUVERAINETÉ ALIMENTAIRE : DES HOMMES ET DES FEMMES RURALES, PRINCIPAUX ACTEURS DE LA RÉSILIENCE AU NIGER</a:t>
+              <a:t>EN BREF: ATTAQUE, AGRICULTURE, SPORT …LES INFORMATIONS DE LA SEMAINE</a:t>
             </a:r>
             <a:endParaRPr lang="en-US" sz="1300" dirty="0"/>
           </a:p>
@@ -16507,7 +16763,7 @@
                   </a:extLst>
                 </a:hlinkClick>
               </a:rPr>
-              <a:t>ANP — Agence Nigérienne Presse</a:t>
+              <a:t>Studio Kalangou</a:t>
             </a:r>
             <a:pPr indent="0" marL="0">
               <a:spcAft>
@@ -16524,7 +16780,7 @@
                 <a:ea typeface="Calibri" pitchFamily="34" charset="-122"/>
                 <a:cs typeface="Calibri" pitchFamily="34" charset="-120"/>
               </a:rPr>
-              <a:t> — 29 octobre 2026, 9 h UTC   ·   </a:t>
+              <a:t> — 23 octobre 2026, 14 h UTC   ·   </a:t>
             </a:r>
             <a:pPr indent="0" marL="0">
               <a:spcAft>
@@ -16541,7 +16797,7 @@
                 <a:ea typeface="Calibri" pitchFamily="34" charset="-122"/>
                 <a:cs typeface="Calibri" pitchFamily="34" charset="-120"/>
               </a:rPr>
-              <a:t>Cotation : Probable</a:t>
+              <a:t>Cotation : Non confirmé</a:t>
             </a:r>
             <a:endParaRPr lang="en-US" sz="1300" dirty="0"/>
           </a:p>
@@ -16565,7 +16821,7 @@
                 <a:ea typeface="Calibri" pitchFamily="34" charset="-122"/>
                 <a:cs typeface="Calibri" pitchFamily="34" charset="-120"/>
               </a:rPr>
-              <a:t>L’HONORABLE MAHAMANE BACHIR HAROUNA HAMBALI, CHEF DE CANTON DE DIOUNDIOU : « LA SOUVERAINETÉ ALIMENTAIRE DOIT DEVENIR UNE AMBITION PARTAGÉE PAR TOUS LES NIGÉRIENS »</a:t>
+              <a:t>SOUVERAINETÉ ALIMENTAIRE : DES HOMMES ET DES FEMMES RURALES, PRINCIPAUX ACTEURS DE LA RÉSILIENCE AU NIGER</a:t>
             </a:r>
             <a:endParaRPr lang="en-US" sz="1300" dirty="0"/>
           </a:p>
@@ -16610,7 +16866,7 @@
                   </a:extLst>
                 </a:hlinkClick>
               </a:rPr>
-              <a:t>Le Sahel</a:t>
+              <a:t>ANP — Agence Nigérienne Presse</a:t>
             </a:r>
             <a:pPr indent="0" marL="0">
               <a:spcAft>
@@ -16627,7 +16883,7 @@
                 <a:ea typeface="Calibri" pitchFamily="34" charset="-122"/>
                 <a:cs typeface="Calibri" pitchFamily="34" charset="-120"/>
               </a:rPr>
-              <a:t> — 29 octobre 2026, 8 h UTC   ·   </a:t>
+              <a:t> — 29 octobre 2026, 9 h UTC   ·   </a:t>
             </a:r>
             <a:pPr indent="0" marL="0">
               <a:spcAft>
@@ -16644,7 +16900,7 @@
                 <a:ea typeface="Calibri" pitchFamily="34" charset="-122"/>
                 <a:cs typeface="Calibri" pitchFamily="34" charset="-120"/>
               </a:rPr>
-              <a:t>Cotation : Non confirmé</a:t>
+              <a:t>Cotation : Probable</a:t>
             </a:r>
             <a:endParaRPr lang="en-US" sz="1300" dirty="0"/>
           </a:p>
@@ -16728,7 +16984,7 @@
                 <a:ea typeface="Calibri" pitchFamily="34" charset="-122"/>
                 <a:cs typeface="Calibri" pitchFamily="34" charset="-120"/>
               </a:rPr>
-              <a:t>|  30/10/26   |   24</a:t>
+              <a:t>|  31/10/26   |   24</a:t>
             </a:r>
             <a:endParaRPr lang="en-US" sz="1000" dirty="0"/>
           </a:p>
@@ -16994,7 +17250,7 @@
                 <a:ea typeface="Calibri" pitchFamily="34" charset="-122"/>
                 <a:cs typeface="Calibri" pitchFamily="34" charset="-120"/>
               </a:rPr>
-              <a:t>Indice de confiance : faible (incident vérifié le plus récent : 123 jours ; aucun signal du jour)</a:t>
+              <a:t>Indice de confiance : faible (incident vérifié le plus récent : 124 jours ; aucun signal du jour)</a:t>
             </a:r>
             <a:endParaRPr lang="en-US" sz="1100" dirty="0"/>
           </a:p>
@@ -17033,7 +17289,7 @@
                 <a:ea typeface="Arial Narrow" pitchFamily="34" charset="-122"/>
                 <a:cs typeface="Arial Narrow" pitchFamily="34" charset="-120"/>
               </a:rPr>
-              <a:t>Ghana : une jeune femme meurt après l’explosion d’un sex-toy</a:t>
+              <a:t>Un appel au soutien et à la solidarité avec les ministres de la région de la Volta au milieu des attaques incessantes de la centrale nucléaire</a:t>
             </a:r>
             <a:endParaRPr lang="en-US" sz="2200" dirty="0"/>
           </a:p>
@@ -17098,7 +17354,7 @@
                 <a:ea typeface="Calibri" pitchFamily="34" charset="-122"/>
                 <a:cs typeface="Calibri" pitchFamily="34" charset="-120"/>
               </a:rPr>
-              <a:t>Fait rapporté le mercredi 28 octobre 2026. Lieu : Accra, Ghana. Actualité politique. Une seule source à ce stade (Icilome) : à confirmer par un second média.</a:t>
+              <a:t>Fait rapporté le vendredi 30 octobre 2026. Lieu : Ghana. Actualité sécuritaire. Une seule source à ce stade (JoyOnline) : à confirmer par un second média.</a:t>
             </a:r>
             <a:endParaRPr lang="en-US" sz="1400" dirty="0"/>
           </a:p>
@@ -17141,7 +17397,7 @@
                 <a:ea typeface="Calibri" pitchFamily="34" charset="-122"/>
                 <a:cs typeface="Calibri" pitchFamily="34" charset="-120"/>
               </a:rPr>
-              <a:t>Icilome : </a:t>
+              <a:t>JoyOnline : </a:t>
             </a:r>
             <a:pPr indent="0" marL="0">
               <a:spcAft>
@@ -17158,7 +17414,7 @@
                 <a:ea typeface="Calibri" pitchFamily="34" charset="-122"/>
                 <a:cs typeface="Calibri" pitchFamily="34" charset="-120"/>
               </a:rPr>
-              <a:t>« À Accra, au Ghana, une jeune femme de 23 ans serait décédée deux jours après l’explosion présumée d’un sex-toy électrique qu’elle utilisait. The post Ghana : une jeune femme meurt après l’explosion d’un sex-toy appeared first on Icilome. »</a:t>
+              <a:t>« The incessant attacks on Ministers from the Volta Region by the New Patriotic Party (NPP) and sections of the media perceived as sympathetic to it are increasingly worrying. »</a:t>
             </a:r>
             <a:endParaRPr lang="en-US" sz="1400" dirty="0"/>
           </a:p>
@@ -17201,7 +17457,7 @@
                 <a:ea typeface="Calibri" pitchFamily="34" charset="-122"/>
                 <a:cs typeface="Calibri" pitchFamily="34" charset="-120"/>
               </a:rPr>
-              <a:t>Risque accidentel ou technique : rappeler les consignes de sécurité routière et incendie, vérifier l'exposition des sites et des prestataires.</a:t>
+              <a:t>Menace armée sur les axes et localités de la zone : réévaluer les déplacements terrestres (horaires, convois, itinéraires de repli) et les consignes des sites et des personnels présents à proximité.</a:t>
             </a:r>
             <a:endParaRPr lang="en-US" sz="1400" dirty="0"/>
           </a:p>
@@ -17248,7 +17504,7 @@
                   </a:extLst>
                 </a:hlinkClick>
               </a:rPr>
-              <a:t>Icilome</a:t>
+              <a:t>JoyOnline</a:t>
             </a:r>
             <a:pPr indent="0" marL="0">
               <a:spcAft>
@@ -17265,7 +17521,7 @@
                 <a:ea typeface="Calibri" pitchFamily="34" charset="-122"/>
                 <a:cs typeface="Calibri" pitchFamily="34" charset="-120"/>
               </a:rPr>
-              <a:t> — 28 octobre 2026, 10 h UTC   ·   Cotation : Non confirmé</a:t>
+              <a:t> — 30 octobre 2026, 11 h UTC   ·   Cotation : Probable</a:t>
             </a:r>
             <a:endParaRPr lang="en-US" sz="1400" dirty="0"/>
           </a:p>
@@ -17290,7 +17546,7 @@
         <p:spPr>
           <a:xfrm>
             <a:off x="7635240" y="2075688"/>
-            <a:ext cx="4114800" cy="2366010"/>
+            <a:ext cx="4114800" cy="2920181"/>
           </a:xfrm>
           <a:prstGeom prst="rect">
             <a:avLst/>
@@ -17305,7 +17561,7 @@
         </p:nvSpPr>
         <p:spPr>
           <a:xfrm>
-            <a:off x="7635240" y="4478274"/>
+            <a:off x="7635240" y="5032445"/>
             <a:ext cx="4114800" cy="256032"/>
           </a:xfrm>
           <a:prstGeom prst="rect">
@@ -17337,7 +17593,7 @@
                   </a:extLst>
                 </a:hlinkClick>
               </a:rPr>
-              <a:t>Photo : © icilome.com</a:t>
+              <a:t>Photo : © myjoyonline.com</a:t>
             </a:r>
             <a:endParaRPr lang="en-US" sz="900" dirty="0"/>
           </a:p>
@@ -17421,7 +17677,7 @@
                 <a:ea typeface="Calibri" pitchFamily="34" charset="-122"/>
                 <a:cs typeface="Calibri" pitchFamily="34" charset="-120"/>
               </a:rPr>
-              <a:t>|  30/10/26   |   25</a:t>
+              <a:t>|  31/10/26   |   25</a:t>
             </a:r>
             <a:endParaRPr lang="en-US" sz="1000" dirty="0"/>
           </a:p>
@@ -17694,7 +17950,7 @@
                 <a:ea typeface="Calibri" pitchFamily="34" charset="-122"/>
                 <a:cs typeface="Calibri" pitchFamily="34" charset="-120"/>
               </a:rPr>
-              <a:t>UNE FEMME TUÉE PAR LE TRAIN TEMA-AFIENYA ALORS QUE LES HABITANTS RÉCLAMENT UNE PASSERELLE</a:t>
+              <a:t>GHANA : UNE JEUNE FEMME MEURT APRÈS L’EXPLOSION D’UN SEX-TOY</a:t>
             </a:r>
             <a:endParaRPr lang="en-US" sz="1300" dirty="0"/>
           </a:p>
@@ -17739,7 +17995,7 @@
                   </a:extLst>
                 </a:hlinkClick>
               </a:rPr>
-              <a:t>JoyOnline</a:t>
+              <a:t>Icilome</a:t>
             </a:r>
             <a:pPr indent="0" marL="0">
               <a:spcAft>
@@ -17756,7 +18012,7 @@
                 <a:ea typeface="Calibri" pitchFamily="34" charset="-122"/>
                 <a:cs typeface="Calibri" pitchFamily="34" charset="-120"/>
               </a:rPr>
-              <a:t> — 28 octobre 2026, 7 h UTC   ·   </a:t>
+              <a:t> — 28 octobre 2026, 10 h UTC   ·   </a:t>
             </a:r>
             <a:pPr indent="0" marL="0">
               <a:spcAft>
@@ -17773,7 +18029,7 @@
                 <a:ea typeface="Calibri" pitchFamily="34" charset="-122"/>
                 <a:cs typeface="Calibri" pitchFamily="34" charset="-120"/>
               </a:rPr>
-              <a:t>Cotation : Probable</a:t>
+              <a:t>Cotation : Non confirmé</a:t>
             </a:r>
             <a:endParaRPr lang="en-US" sz="1300" dirty="0"/>
           </a:p>
@@ -17797,7 +18053,7 @@
                 <a:ea typeface="Calibri" pitchFamily="34" charset="-122"/>
                 <a:cs typeface="Calibri" pitchFamily="34" charset="-120"/>
               </a:rPr>
-              <a:t>SEPT MORTS PAR BALLE PAR DES HOMMES ARMÉS LORS DE FUNÉRAILLES DANS UNE ÉGLISE EN JORDANIE, SELON DES RESPONSABLES</a:t>
+              <a:t>UNE FEMME TUÉE PAR LE TRAIN TEMA-AFIENYA ALORS QUE LES HABITANTS RÉCLAMENT UNE PASSERELLE</a:t>
             </a:r>
             <a:endParaRPr lang="en-US" sz="1300" dirty="0"/>
           </a:p>
@@ -17859,7 +18115,24 @@
                 <a:ea typeface="Calibri" pitchFamily="34" charset="-122"/>
                 <a:cs typeface="Calibri" pitchFamily="34" charset="-120"/>
               </a:rPr>
-              <a:t> — 23 octobre 2026, 18 h UTC</a:t>
+              <a:t> — 28 octobre 2026, 7 h UTC   ·   </a:t>
+            </a:r>
+            <a:pPr indent="0" marL="0">
+              <a:spcAft>
+                <a:spcPts val="200"/>
+              </a:spcAft>
+              <a:buNone/>
+            </a:pPr>
+            <a:r>
+              <a:rPr lang="en-US" sz="1300" b="1" dirty="0">
+                <a:solidFill>
+                  <a:srgbClr val="1F2937"/>
+                </a:solidFill>
+                <a:latin typeface="Calibri" pitchFamily="34" charset="0"/>
+                <a:ea typeface="Calibri" pitchFamily="34" charset="-122"/>
+                <a:cs typeface="Calibri" pitchFamily="34" charset="-120"/>
+              </a:rPr>
+              <a:t>Cotation : Probable</a:t>
             </a:r>
             <a:endParaRPr lang="en-US" sz="1300" dirty="0"/>
           </a:p>
@@ -17883,7 +18156,7 @@
                 <a:ea typeface="Calibri" pitchFamily="34" charset="-122"/>
                 <a:cs typeface="Calibri" pitchFamily="34" charset="-120"/>
               </a:rPr>
-              <a:t>LA CIRCONSCRIPTION DU NPP WALEWALE CONDAMNE LES ATTAQUES PERSONNELLES CONTRE UN DÉPUTÉ ET APPELLE À LA DISCIPLINE DE PARTI</a:t>
+              <a:t>SEPT MORTS PAR BALLE PAR DES HOMMES ARMÉS LORS DE FUNÉRAILLES DANS UNE ÉGLISE EN JORDANIE, SELON DES RESPONSABLES</a:t>
             </a:r>
             <a:endParaRPr lang="en-US" sz="1300" dirty="0"/>
           </a:p>
@@ -17945,7 +18218,7 @@
                 <a:ea typeface="Calibri" pitchFamily="34" charset="-122"/>
                 <a:cs typeface="Calibri" pitchFamily="34" charset="-120"/>
               </a:rPr>
-              <a:t> — 23 octobre 2026, 15 h UTC</a:t>
+              <a:t> — 23 octobre 2026, 18 h UTC</a:t>
             </a:r>
             <a:endParaRPr lang="en-US" sz="1300" dirty="0"/>
           </a:p>
@@ -17969,7 +18242,7 @@
                 <a:ea typeface="Calibri" pitchFamily="34" charset="-122"/>
                 <a:cs typeface="Calibri" pitchFamily="34" charset="-120"/>
               </a:rPr>
-              <a:t>GAF ORGANISERA UNE DÉMONSTRATION DE PUISSANCE DE FEU DE COMBAT TERRESTRE À BUNDASE LE 30 OCTOBRE</a:t>
+              <a:t>LA CIRCONSCRIPTION DU NPP WALEWALE CONDAMNE LES ATTAQUES PERSONNELLES CONTRE UN DÉPUTÉ ET APPELLE À LA DISCIPLINE DE PARTI</a:t>
             </a:r>
             <a:endParaRPr lang="en-US" sz="1300" dirty="0"/>
           </a:p>
@@ -18031,7 +18304,7 @@
                 <a:ea typeface="Calibri" pitchFamily="34" charset="-122"/>
                 <a:cs typeface="Calibri" pitchFamily="34" charset="-120"/>
               </a:rPr>
-              <a:t> — 23 octobre 2026, 16 h UTC</a:t>
+              <a:t> — 23 octobre 2026, 15 h UTC</a:t>
             </a:r>
             <a:endParaRPr lang="en-US" sz="1300" dirty="0"/>
           </a:p>
@@ -18055,7 +18328,7 @@
                 <a:ea typeface="Calibri" pitchFamily="34" charset="-122"/>
                 <a:cs typeface="Calibri" pitchFamily="34" charset="-120"/>
               </a:rPr>
-              <a:t>LES FORTES PLUIES, PRINCIPALE MENACE POUR LA CULTURE DU CACAO</a:t>
+              <a:t>GAF ORGANISERA UNE DÉMONSTRATION DE PUISSANCE DE FEU DE COMBAT TERRESTRE À BUNDASE LE 30 OCTOBRE</a:t>
             </a:r>
             <a:endParaRPr lang="en-US" sz="1300" dirty="0"/>
           </a:p>
@@ -18100,7 +18373,7 @@
                   </a:extLst>
                 </a:hlinkClick>
               </a:rPr>
-              <a:t>AllAfrica (GH)</a:t>
+              <a:t>JoyOnline</a:t>
             </a:r>
             <a:pPr indent="0" marL="0">
               <a:spcAft>
@@ -18117,24 +18390,7 @@
                 <a:ea typeface="Calibri" pitchFamily="34" charset="-122"/>
                 <a:cs typeface="Calibri" pitchFamily="34" charset="-120"/>
               </a:rPr>
-              <a:t> — 16 octobre 2026, 7 h UTC   ·   </a:t>
-            </a:r>
-            <a:pPr indent="0" marL="0">
-              <a:spcAft>
-                <a:spcPts val="200"/>
-              </a:spcAft>
-              <a:buNone/>
-            </a:pPr>
-            <a:r>
-              <a:rPr lang="en-US" sz="1300" b="1" dirty="0">
-                <a:solidFill>
-                  <a:srgbClr val="1F2937"/>
-                </a:solidFill>
-                <a:latin typeface="Calibri" pitchFamily="34" charset="0"/>
-                <a:ea typeface="Calibri" pitchFamily="34" charset="-122"/>
-                <a:cs typeface="Calibri" pitchFamily="34" charset="-120"/>
-              </a:rPr>
-              <a:t>Cotation : Probable</a:t>
+              <a:t> — 23 octobre 2026, 16 h UTC</a:t>
             </a:r>
             <a:endParaRPr lang="en-US" sz="1300" dirty="0"/>
           </a:p>
@@ -18218,7 +18474,7 @@
                 <a:ea typeface="Calibri" pitchFamily="34" charset="-122"/>
                 <a:cs typeface="Calibri" pitchFamily="34" charset="-120"/>
               </a:rPr>
-              <a:t>|  30/10/26   |   26</a:t>
+              <a:t>|  31/10/26   |   26</a:t>
             </a:r>
             <a:endParaRPr lang="en-US" sz="1000" dirty="0"/>
           </a:p>
@@ -18491,7 +18747,7 @@
                 <a:ea typeface="Calibri" pitchFamily="34" charset="-122"/>
                 <a:cs typeface="Calibri" pitchFamily="34" charset="-120"/>
               </a:rPr>
-              <a:t>LE GHANA ET LA POLOGNE EXPLORENT LES OPPORTUNITÉS D'INVESTISSEMENT ET LA COOPÉRATION EN MATIÈRE DE</a:t>
+              <a:t>LES FORTES PLUIES, PRINCIPALE MENACE POUR LA CULTURE DU CACAO</a:t>
             </a:r>
             <a:endParaRPr lang="en-US" sz="1300" dirty="0"/>
           </a:p>
@@ -18536,7 +18792,7 @@
                   </a:extLst>
                 </a:hlinkClick>
               </a:rPr>
-              <a:t>JoyOnline</a:t>
+              <a:t>AllAfrica (GH)</a:t>
             </a:r>
             <a:pPr indent="0" marL="0">
               <a:spcAft>
@@ -18553,7 +18809,7 @@
                 <a:ea typeface="Calibri" pitchFamily="34" charset="-122"/>
                 <a:cs typeface="Calibri" pitchFamily="34" charset="-120"/>
               </a:rPr>
-              <a:t> — 29 octobre 2026, 18 h UTC   ·   </a:t>
+              <a:t> — 16 octobre 2026, 7 h UTC   ·   </a:t>
             </a:r>
             <a:pPr indent="0" marL="0">
               <a:spcAft>
@@ -18594,7 +18850,7 @@
                 <a:ea typeface="Calibri" pitchFamily="34" charset="-122"/>
                 <a:cs typeface="Calibri" pitchFamily="34" charset="-120"/>
               </a:rPr>
-              <a:t>LES PARTIES PRENANTES APPELLENT À UNE COLLABORATION PLUS FORTE ENTRE LA COMMUNAUTÉ ET LA SÉCURITÉ POUR PRÉVENIR L'EXTRÉMISME</a:t>
+              <a:t>NEW YORK : UN ADOLESCENT GHANÉEN DE 15 ANS ABATTU PAR BALLE SUR LE CHEMIN DE L'ÉCOLE</a:t>
             </a:r>
             <a:endParaRPr lang="en-US" sz="1300" dirty="0"/>
           </a:p>
@@ -18639,7 +18895,7 @@
                   </a:extLst>
                 </a:hlinkClick>
               </a:rPr>
-              <a:t>JoyOnline</a:t>
+              <a:t>Seneweb</a:t>
             </a:r>
             <a:pPr indent="0" marL="0">
               <a:spcAft>
@@ -18656,7 +18912,7 @@
                 <a:ea typeface="Calibri" pitchFamily="34" charset="-122"/>
                 <a:cs typeface="Calibri" pitchFamily="34" charset="-120"/>
               </a:rPr>
-              <a:t> — 29 octobre 2026, 18 h UTC   ·   </a:t>
+              <a:t> — 30 octobre 2026, 22 h UTC   ·   </a:t>
             </a:r>
             <a:pPr indent="0" marL="0">
               <a:spcAft>
@@ -18697,7 +18953,7 @@
                 <a:ea typeface="Calibri" pitchFamily="34" charset="-122"/>
                 <a:cs typeface="Calibri" pitchFamily="34" charset="-120"/>
               </a:rPr>
-              <a:t>LE DIRECTEUR RÉGIONAL DE LA SANTÉ DU CENTRE APPELLE À UNE SURVEILLANCE ACCRUE D'EBOLA ALORS QUE LES VISITES DE SOUTIEN SE POURSUIVENT</a:t>
+              <a:t>LA POLICE TRAQUE UN SUSPECT APRÈS LA MORT DE DEUX PERSONNES À SAKUMONO</a:t>
             </a:r>
             <a:endParaRPr lang="en-US" sz="1300" dirty="0"/>
           </a:p>
@@ -18742,7 +18998,7 @@
                   </a:extLst>
                 </a:hlinkClick>
               </a:rPr>
-              <a:t>Ghanaian Times</a:t>
+              <a:t>JoyOnline</a:t>
             </a:r>
             <a:pPr indent="0" marL="0">
               <a:spcAft>
@@ -18759,7 +19015,7 @@
                 <a:ea typeface="Calibri" pitchFamily="34" charset="-122"/>
                 <a:cs typeface="Calibri" pitchFamily="34" charset="-120"/>
               </a:rPr>
-              <a:t> — 29 octobre 2026, 18 h UTC   ·   </a:t>
+              <a:t> — 30 octobre 2026, 20 h UTC   ·   </a:t>
             </a:r>
             <a:pPr indent="0" marL="0">
               <a:spcAft>
@@ -18776,7 +19032,7 @@
                 <a:ea typeface="Calibri" pitchFamily="34" charset="-122"/>
                 <a:cs typeface="Calibri" pitchFamily="34" charset="-120"/>
               </a:rPr>
-              <a:t>Cotation : Non confirmé</a:t>
+              <a:t>Cotation : Probable</a:t>
             </a:r>
             <a:endParaRPr lang="en-US" sz="1300" dirty="0"/>
           </a:p>
@@ -18800,7 +19056,7 @@
                 <a:ea typeface="Calibri" pitchFamily="34" charset="-122"/>
                 <a:cs typeface="Calibri" pitchFamily="34" charset="-120"/>
               </a:rPr>
-              <a:t>UN CONDUCTEUR SUBIT DE GRAVES BRÛLURES CHIMIQUES APRÈS L'INCENDIE D'UN CAMION DE PEROXYDE D'HYDROGÈNE À GORIYIRI</a:t>
+              <a:t>NSCS CONSULTE LES PARTIES PRENANTES SUR LA NOUVELLE STRATÉGIE DE SÉCURITÉ</a:t>
             </a:r>
             <a:endParaRPr lang="en-US" sz="1300" dirty="0"/>
           </a:p>
@@ -18845,7 +19101,7 @@
                   </a:extLst>
                 </a:hlinkClick>
               </a:rPr>
-              <a:t>JoyOnline</a:t>
+              <a:t>Ghanaian Times</a:t>
             </a:r>
             <a:pPr indent="0" marL="0">
               <a:spcAft>
@@ -18862,7 +19118,7 @@
                 <a:ea typeface="Calibri" pitchFamily="34" charset="-122"/>
                 <a:cs typeface="Calibri" pitchFamily="34" charset="-120"/>
               </a:rPr>
-              <a:t> — 29 octobre 2026, 14 h UTC   ·   </a:t>
+              <a:t> — 30 octobre 2026, 8 h UTC   ·   </a:t>
             </a:r>
             <a:pPr indent="0" marL="0">
               <a:spcAft>
@@ -18879,7 +19135,7 @@
                 <a:ea typeface="Calibri" pitchFamily="34" charset="-122"/>
                 <a:cs typeface="Calibri" pitchFamily="34" charset="-120"/>
               </a:rPr>
-              <a:t>Cotation : Probable</a:t>
+              <a:t>Cotation : Non confirmé</a:t>
             </a:r>
             <a:endParaRPr lang="en-US" sz="1300" dirty="0"/>
           </a:p>
@@ -18963,7 +19219,7 @@
                 <a:ea typeface="Calibri" pitchFamily="34" charset="-122"/>
                 <a:cs typeface="Calibri" pitchFamily="34" charset="-120"/>
               </a:rPr>
-              <a:t>|  30/10/26   |   27</a:t>
+              <a:t>|  31/10/26   |   27</a:t>
             </a:r>
             <a:endParaRPr lang="en-US" sz="1000" dirty="0"/>
           </a:p>
@@ -19279,7 +19535,7 @@
                 <a:ea typeface="Calibri" pitchFamily="34" charset="-122"/>
                 <a:cs typeface="Calibri" pitchFamily="34" charset="-120"/>
               </a:rPr>
-              <a:t>Indice de confiance : moyenne (incident vérifié le plus récent : 124 jours ; 3 signaux du jour)</a:t>
+              <a:t>Indice de confiance : faible (incident vérifié le plus récent : 125 jours ; aucun signal du jour)</a:t>
             </a:r>
             <a:endParaRPr lang="en-US" sz="1100" dirty="0"/>
           </a:p>
@@ -19318,7 +19574,7 @@
                 <a:ea typeface="Arial Narrow" pitchFamily="34" charset="-122"/>
                 <a:cs typeface="Arial Narrow" pitchFamily="34" charset="-120"/>
               </a:rPr>
-              <a:t>63 ans après sa mort, le premier président du Togo n’a toujours pas de tombe dans son pays</a:t>
+              <a:t>Togo: La Cour de justice de la CEDEAO exige l’éxécution de son arrêt du 29 janvier</a:t>
             </a:r>
             <a:endParaRPr lang="en-US" sz="2200" dirty="0"/>
           </a:p>
@@ -19355,7 +19611,7 @@
               <a:buNone/>
             </a:pPr>
             <a:r>
-              <a:rPr lang="en-US" sz="1500" b="1" dirty="0">
+              <a:rPr lang="en-US" sz="1400" b="1" dirty="0">
                 <a:solidFill>
                   <a:srgbClr val="1F6B5E"/>
                 </a:solidFill>
@@ -19365,7 +19621,7 @@
               </a:rPr>
               <a:t>Contexte</a:t>
             </a:r>
-            <a:endParaRPr lang="en-US" sz="1400" dirty="0"/>
+            <a:endParaRPr lang="en-US" sz="1300" dirty="0"/>
           </a:p>
           <a:p>
             <a:pPr indent="0" marL="0">
@@ -19375,17 +19631,17 @@
               <a:buNone/>
             </a:pPr>
             <a:r>
-              <a:rPr lang="en-US" sz="1400" dirty="0">
-                <a:solidFill>
-                  <a:srgbClr val="1F2937"/>
-                </a:solidFill>
-                <a:latin typeface="Calibri" pitchFamily="34" charset="0"/>
-                <a:ea typeface="Calibri" pitchFamily="34" charset="-122"/>
-                <a:cs typeface="Calibri" pitchFamily="34" charset="-120"/>
-              </a:rPr>
-              <a:t>Fait rapporté le jeudi 1er octobre 2026. Lieu : Togo. Actualité politique. Une seule source à ce stade (Togoweb) : à confirmer par un second média.</a:t>
-            </a:r>
-            <a:endParaRPr lang="en-US" sz="1400" dirty="0"/>
+              <a:rPr lang="en-US" sz="1300" dirty="0">
+                <a:solidFill>
+                  <a:srgbClr val="1F2937"/>
+                </a:solidFill>
+                <a:latin typeface="Calibri" pitchFamily="34" charset="0"/>
+                <a:ea typeface="Calibri" pitchFamily="34" charset="-122"/>
+                <a:cs typeface="Calibri" pitchFamily="34" charset="-120"/>
+              </a:rPr>
+              <a:t>Fait rapporté le vendredi 30 octobre 2026. Lieu : Lomé, Togo. Actualité sécuritaire. Une seule source à ce stade (Togo Actualite) : à confirmer par un second média.</a:t>
+            </a:r>
+            <a:endParaRPr lang="en-US" sz="1300" dirty="0"/>
           </a:p>
           <a:p>
             <a:pPr indent="0" marL="0">
@@ -19398,7 +19654,7 @@
               <a:buNone/>
             </a:pPr>
             <a:r>
-              <a:rPr lang="en-US" sz="1500" b="1" dirty="0">
+              <a:rPr lang="en-US" sz="1400" b="1" dirty="0">
                 <a:solidFill>
                   <a:srgbClr val="1F6B5E"/>
                 </a:solidFill>
@@ -19408,7 +19664,7 @@
               </a:rPr>
               <a:t>Ce que rapportent les sources</a:t>
             </a:r>
-            <a:endParaRPr lang="en-US" sz="1400" dirty="0"/>
+            <a:endParaRPr lang="en-US" sz="1300" dirty="0"/>
           </a:p>
           <a:p>
             <a:pPr indent="0" marL="0">
@@ -19418,15 +19674,15 @@
               <a:buNone/>
             </a:pPr>
             <a:r>
-              <a:rPr lang="en-US" sz="1400" b="1" dirty="0">
-                <a:solidFill>
-                  <a:srgbClr val="1F2937"/>
-                </a:solidFill>
-                <a:latin typeface="Calibri" pitchFamily="34" charset="0"/>
-                <a:ea typeface="Calibri" pitchFamily="34" charset="-122"/>
-                <a:cs typeface="Calibri" pitchFamily="34" charset="-120"/>
-              </a:rPr>
-              <a:t>Togoweb : </a:t>
+              <a:rPr lang="en-US" sz="1300" b="1" dirty="0">
+                <a:solidFill>
+                  <a:srgbClr val="1F2937"/>
+                </a:solidFill>
+                <a:latin typeface="Calibri" pitchFamily="34" charset="0"/>
+                <a:ea typeface="Calibri" pitchFamily="34" charset="-122"/>
+                <a:cs typeface="Calibri" pitchFamily="34" charset="-120"/>
+              </a:rPr>
+              <a:t>Togo Actualite : </a:t>
             </a:r>
             <a:pPr indent="0" marL="0">
               <a:spcAft>
@@ -19435,17 +19691,17 @@
               <a:buNone/>
             </a:pPr>
             <a:r>
-              <a:rPr lang="en-US" sz="1400" i="1" dirty="0">
-                <a:solidFill>
-                  <a:srgbClr val="1F2937"/>
-                </a:solidFill>
-                <a:latin typeface="Calibri" pitchFamily="34" charset="0"/>
-                <a:ea typeface="Calibri" pitchFamily="34" charset="-122"/>
-                <a:cs typeface="Calibri" pitchFamily="34" charset="-120"/>
-              </a:rPr>
-              <a:t>« Il n’existe, à ce jour, ni statue, ni mausolée, ni musée officiel dédié à Sylvanus Olympio dans le pays qu’il a mené à l’indépendance. Le premier président togolais repose toujours à Agoué, au Bénin, faute d’avoir été rapatrié malgré une promesse présidentielle vieille de quinze ans. »</a:t>
-            </a:r>
-            <a:endParaRPr lang="en-US" sz="1400" dirty="0"/>
+              <a:rPr lang="en-US" sz="1300" i="1" dirty="0">
+                <a:solidFill>
+                  <a:srgbClr val="1F2937"/>
+                </a:solidFill>
+                <a:latin typeface="Calibri" pitchFamily="34" charset="0"/>
+                <a:ea typeface="Calibri" pitchFamily="34" charset="-122"/>
+                <a:cs typeface="Calibri" pitchFamily="34" charset="-120"/>
+              </a:rPr>
+              <a:t>« Le régime de Faure Gnassingbé et ses soutiens ont dû l’apprendre à leurs dépens. Alors que s’ouvre ce jeudi 29 octobre à l’Université de Lomé un colloque international sur les juridictions régionales, les changements constitutionnels et la souveraineté des États, la Cour de justice de la CEDEAO revient à la charge. »</a:t>
+            </a:r>
+            <a:endParaRPr lang="en-US" sz="1300" dirty="0"/>
           </a:p>
           <a:p>
             <a:pPr indent="0" marL="0">
@@ -19458,7 +19714,7 @@
               <a:buNone/>
             </a:pPr>
             <a:r>
-              <a:rPr lang="en-US" sz="1500" b="1" dirty="0">
+              <a:rPr lang="en-US" sz="1400" b="1" dirty="0">
                 <a:solidFill>
                   <a:srgbClr val="1F6B5E"/>
                 </a:solidFill>
@@ -19468,7 +19724,7 @@
               </a:rPr>
               <a:t>Enjeux sûreté</a:t>
             </a:r>
-            <a:endParaRPr lang="en-US" sz="1400" dirty="0"/>
+            <a:endParaRPr lang="en-US" sz="1300" dirty="0"/>
           </a:p>
           <a:p>
             <a:pPr indent="0" marL="0">
@@ -19478,7 +19734,7 @@
               <a:buNone/>
             </a:pPr>
             <a:r>
-              <a:rPr lang="en-US" sz="1400" dirty="0">
+              <a:rPr lang="en-US" sz="1300" dirty="0">
                 <a:solidFill>
                   <a:srgbClr val="1F2937"/>
                 </a:solidFill>
@@ -19488,7 +19744,7 @@
               </a:rPr>
               <a:t>Climat politique à suivre : tensions possibles autour des échéances et des décisions institutionnelles. Adapter la veille et les déplacements aux dates sensibles.</a:t>
             </a:r>
-            <a:endParaRPr lang="en-US" sz="1400" dirty="0"/>
+            <a:endParaRPr lang="en-US" sz="1300" dirty="0"/>
           </a:p>
           <a:p>
             <a:pPr indent="0" marL="0">
@@ -19501,7 +19757,7 @@
               <a:buNone/>
             </a:pPr>
             <a:r>
-              <a:rPr lang="en-US" sz="1400" b="1" dirty="0">
+              <a:rPr lang="en-US" sz="1300" b="1" dirty="0">
                 <a:solidFill>
                   <a:srgbClr val="1F2937"/>
                 </a:solidFill>
@@ -19518,7 +19774,7 @@
               <a:buNone/>
             </a:pPr>
             <a:r>
-              <a:rPr lang="en-US" sz="1400" u="sng" dirty="0">
+              <a:rPr lang="en-US" sz="1300" u="sng" dirty="0">
                 <a:solidFill>
                   <a:srgbClr val="1F6B5E"/>
                 </a:solidFill>
@@ -19533,7 +19789,7 @@
                   </a:extLst>
                 </a:hlinkClick>
               </a:rPr>
-              <a:t>Togoweb</a:t>
+              <a:t>Togo Actualite</a:t>
             </a:r>
             <a:pPr indent="0" marL="0">
               <a:spcAft>
@@ -19542,17 +19798,17 @@
               <a:buNone/>
             </a:pPr>
             <a:r>
-              <a:rPr lang="en-US" sz="1400" b="1" dirty="0">
-                <a:solidFill>
-                  <a:srgbClr val="1F2937"/>
-                </a:solidFill>
-                <a:latin typeface="Calibri" pitchFamily="34" charset="0"/>
-                <a:ea typeface="Calibri" pitchFamily="34" charset="-122"/>
-                <a:cs typeface="Calibri" pitchFamily="34" charset="-120"/>
-              </a:rPr>
-              <a:t> — 1 octobre 2026, 9 h UTC   ·   Cotation : Non confirmé</a:t>
-            </a:r>
-            <a:endParaRPr lang="en-US" sz="1400" dirty="0"/>
+              <a:rPr lang="en-US" sz="1300" b="1" dirty="0">
+                <a:solidFill>
+                  <a:srgbClr val="1F2937"/>
+                </a:solidFill>
+                <a:latin typeface="Calibri" pitchFamily="34" charset="0"/>
+                <a:ea typeface="Calibri" pitchFamily="34" charset="-122"/>
+                <a:cs typeface="Calibri" pitchFamily="34" charset="-120"/>
+              </a:rPr>
+              <a:t> — 30 octobre 2026, 11 h UTC   ·   Cotation : Non confirmé</a:t>
+            </a:r>
+            <a:endParaRPr lang="en-US" sz="1300" dirty="0"/>
           </a:p>
         </p:txBody>
       </p:sp>
@@ -19575,7 +19831,7 @@
         <p:spPr>
           <a:xfrm>
             <a:off x="7635240" y="2075688"/>
-            <a:ext cx="4114800" cy="2525358"/>
+            <a:ext cx="4114800" cy="2230993"/>
           </a:xfrm>
           <a:prstGeom prst="rect">
             <a:avLst/>
@@ -19590,7 +19846,7 @@
         </p:nvSpPr>
         <p:spPr>
           <a:xfrm>
-            <a:off x="7635240" y="4637622"/>
+            <a:off x="7635240" y="4343257"/>
             <a:ext cx="4114800" cy="256032"/>
           </a:xfrm>
           <a:prstGeom prst="rect">
@@ -19622,7 +19878,7 @@
                   </a:extLst>
                 </a:hlinkClick>
               </a:rPr>
-              <a:t>Photo : © togoweb.net</a:t>
+              <a:t>Photo : © togoactualite.com</a:t>
             </a:r>
             <a:endParaRPr lang="en-US" sz="900" dirty="0"/>
           </a:p>
@@ -19706,7 +19962,7 @@
                 <a:ea typeface="Calibri" pitchFamily="34" charset="-122"/>
                 <a:cs typeface="Calibri" pitchFamily="34" charset="-120"/>
               </a:rPr>
-              <a:t>|  30/10/26   |   28</a:t>
+              <a:t>|  31/10/26   |   28</a:t>
             </a:r>
             <a:endParaRPr lang="en-US" sz="1000" dirty="0"/>
           </a:p>
@@ -20029,7 +20285,7 @@
                 <a:ea typeface="Calibri" pitchFamily="34" charset="-122"/>
                 <a:cs typeface="Calibri" pitchFamily="34" charset="-120"/>
               </a:rPr>
-              <a:t>(PT) CRISE DE VOCATION ET CRISE FINANCIÈRE</a:t>
+              <a:t>63 ANS APRÈS SA MORT, LE PREMIER PRÉSIDENT DU TOGO N’A TOUJOURS PAS DE TOMBE DANS SON PAYS</a:t>
             </a:r>
             <a:endParaRPr lang="en-US" sz="1300" dirty="0"/>
           </a:p>
@@ -20074,7 +20330,7 @@
                   </a:extLst>
                 </a:hlinkClick>
               </a:rPr>
-              <a:t>AllAfrica (TG)</a:t>
+              <a:t>Togoweb</a:t>
             </a:r>
             <a:pPr indent="0" marL="0">
               <a:spcAft>
@@ -20091,7 +20347,7 @@
                 <a:ea typeface="Calibri" pitchFamily="34" charset="-122"/>
                 <a:cs typeface="Calibri" pitchFamily="34" charset="-120"/>
               </a:rPr>
-              <a:t> — 29 octobre 2026, 16 h UTC   ·   </a:t>
+              <a:t> — 1 octobre 2026, 9 h UTC   ·   </a:t>
             </a:r>
             <a:pPr indent="0" marL="0">
               <a:spcAft>
@@ -20108,7 +20364,7 @@
                 <a:ea typeface="Calibri" pitchFamily="34" charset="-122"/>
                 <a:cs typeface="Calibri" pitchFamily="34" charset="-120"/>
               </a:rPr>
-              <a:t>Cotation : Probable</a:t>
+              <a:t>Cotation : Non confirmé</a:t>
             </a:r>
             <a:endParaRPr lang="en-US" sz="1300" dirty="0"/>
           </a:p>
@@ -20132,7 +20388,7 @@
                 <a:ea typeface="Calibri" pitchFamily="34" charset="-122"/>
                 <a:cs typeface="Calibri" pitchFamily="34" charset="-120"/>
               </a:rPr>
-              <a:t>LE TOGO RENFORCE LA VIGILANCE FACE À LA MENACE DE LA MALADIE À VIRUS EBOLA</a:t>
+              <a:t>TOGO/CRISE POLITIQUE : L’UDS-TOGO RÉCLAME UNE GRANDE CONCERTATION NATIONALE INCLUSIVE</a:t>
             </a:r>
             <a:endParaRPr lang="en-US" sz="1300" dirty="0"/>
           </a:p>
@@ -20177,7 +20433,7 @@
                   </a:extLst>
                 </a:hlinkClick>
               </a:rPr>
-              <a:t>ATOP — Agence Togolaise Presse</a:t>
+              <a:t>Togo Actualite</a:t>
             </a:r>
             <a:pPr indent="0" marL="0">
               <a:spcAft>
@@ -20194,7 +20450,7 @@
                 <a:ea typeface="Calibri" pitchFamily="34" charset="-122"/>
                 <a:cs typeface="Calibri" pitchFamily="34" charset="-120"/>
               </a:rPr>
-              <a:t> — 29 octobre 2026, 9 h UTC   ·   </a:t>
+              <a:t> — 30 octobre 2026, 14 h UTC   ·   </a:t>
             </a:r>
             <a:pPr indent="0" marL="0">
               <a:spcAft>
@@ -20211,7 +20467,7 @@
                 <a:ea typeface="Calibri" pitchFamily="34" charset="-122"/>
                 <a:cs typeface="Calibri" pitchFamily="34" charset="-120"/>
               </a:rPr>
-              <a:t>Cotation : Probable</a:t>
+              <a:t>Cotation : Non confirmé</a:t>
             </a:r>
             <a:endParaRPr lang="en-US" sz="1300" dirty="0"/>
           </a:p>
@@ -20235,7 +20491,7 @@
                 <a:ea typeface="Calibri" pitchFamily="34" charset="-122"/>
                 <a:cs typeface="Calibri" pitchFamily="34" charset="-120"/>
               </a:rPr>
-              <a:t>WHATSAPP : LA FAUSSE ALERTE AU VOTE POUR PIRATER VOTRE COMPTE FAIT SON RETOUR</a:t>
+              <a:t>TOGO : LA CRISE DE L’ÉLECTRICITÉ, SYMPTÔME D’UNE GOUVERNANCE DÉFAILLANTE SELON QUATRE REGROUPEMENTS</a:t>
             </a:r>
             <a:endParaRPr lang="en-US" sz="1300" dirty="0"/>
           </a:p>
@@ -20280,7 +20536,7 @@
                   </a:extLst>
                 </a:hlinkClick>
               </a:rPr>
-              <a:t>Le Nouveau Reporter</a:t>
+              <a:t>Togo Actualite</a:t>
             </a:r>
             <a:pPr indent="0" marL="0">
               <a:spcAft>
@@ -20297,7 +20553,24 @@
                 <a:ea typeface="Calibri" pitchFamily="34" charset="-122"/>
                 <a:cs typeface="Calibri" pitchFamily="34" charset="-120"/>
               </a:rPr>
-              <a:t> — 24 octobre 2026, 10 h UTC</a:t>
+              <a:t> — 30 octobre 2026, 10 h UTC   ·   </a:t>
+            </a:r>
+            <a:pPr indent="0" marL="0">
+              <a:spcAft>
+                <a:spcPts val="200"/>
+              </a:spcAft>
+              <a:buNone/>
+            </a:pPr>
+            <a:r>
+              <a:rPr lang="en-US" sz="1300" b="1" dirty="0">
+                <a:solidFill>
+                  <a:srgbClr val="1F2937"/>
+                </a:solidFill>
+                <a:latin typeface="Calibri" pitchFamily="34" charset="0"/>
+                <a:ea typeface="Calibri" pitchFamily="34" charset="-122"/>
+                <a:cs typeface="Calibri" pitchFamily="34" charset="-120"/>
+              </a:rPr>
+              <a:t>Cotation : Non confirmé</a:t>
             </a:r>
             <a:endParaRPr lang="en-US" sz="1300" dirty="0"/>
           </a:p>
@@ -20321,7 +20594,7 @@
                 <a:ea typeface="Calibri" pitchFamily="34" charset="-122"/>
                 <a:cs typeface="Calibri" pitchFamily="34" charset="-120"/>
               </a:rPr>
-              <a:t>3E FORUM RUSSIE-AFRIQUE : LE TOGO FIXE SES PRIORITÉS</a:t>
+              <a:t>CRISE DES VOCATIONS ET CRISE FINANCIÈRE</a:t>
             </a:r>
             <a:endParaRPr lang="en-US" sz="1300" dirty="0"/>
           </a:p>
@@ -20366,7 +20639,7 @@
                   </a:extLst>
                 </a:hlinkClick>
               </a:rPr>
-              <a:t>Togo-Presse</a:t>
+              <a:t>AllAfrica (TG)</a:t>
             </a:r>
             <a:pPr indent="0" marL="0">
               <a:spcAft>
@@ -20383,7 +20656,7 @@
                 <a:ea typeface="Calibri" pitchFamily="34" charset="-122"/>
                 <a:cs typeface="Calibri" pitchFamily="34" charset="-120"/>
               </a:rPr>
-              <a:t> — 29 octobre 2026, 19 h UTC   ·   </a:t>
+              <a:t> — 29 octobre 2026, 16 h UTC   ·   </a:t>
             </a:r>
             <a:pPr indent="0" marL="0">
               <a:spcAft>
@@ -20400,7 +20673,7 @@
                 <a:ea typeface="Calibri" pitchFamily="34" charset="-122"/>
                 <a:cs typeface="Calibri" pitchFamily="34" charset="-120"/>
               </a:rPr>
-              <a:t>Cotation : Non confirmé</a:t>
+              <a:t>Cotation : Probable</a:t>
             </a:r>
             <a:endParaRPr lang="en-US" sz="1300" dirty="0"/>
           </a:p>
@@ -20424,7 +20697,7 @@
                 <a:ea typeface="Calibri" pitchFamily="34" charset="-122"/>
                 <a:cs typeface="Calibri" pitchFamily="34" charset="-120"/>
               </a:rPr>
-              <a:t>SÉCURITÉ SANITAIRE DES ALIMENTS : LE LANSA SE FAIT CONNAÎTRE DES ACTEURS RÉGIONAUX À SOKODÉ</a:t>
+              <a:t>LE TOGO RENFORCE LA VIGILANCE FACE À LA MENACE DE LA MALADIE À VIRUS EBOLA</a:t>
             </a:r>
             <a:endParaRPr lang="en-US" sz="1300" dirty="0"/>
           </a:p>
@@ -20486,7 +20759,7 @@
                 <a:ea typeface="Calibri" pitchFamily="34" charset="-122"/>
                 <a:cs typeface="Calibri" pitchFamily="34" charset="-120"/>
               </a:rPr>
-              <a:t> — 29 octobre 2026, 15 h UTC   ·   </a:t>
+              <a:t> — 29 octobre 2026, 9 h UTC   ·   </a:t>
             </a:r>
             <a:pPr indent="0" marL="0">
               <a:spcAft>
@@ -20587,7 +20860,7 @@
                 <a:ea typeface="Calibri" pitchFamily="34" charset="-122"/>
                 <a:cs typeface="Calibri" pitchFamily="34" charset="-120"/>
               </a:rPr>
-              <a:t>|  30/10/26   |   29</a:t>
+              <a:t>|  31/10/26   |   29</a:t>
             </a:r>
             <a:endParaRPr lang="en-US" sz="1000" dirty="0"/>
           </a:p>
@@ -20828,7 +21101,7 @@
                 <a:ea typeface="Calibri" pitchFamily="34" charset="-122"/>
                 <a:cs typeface="Calibri" pitchFamily="34" charset="-120"/>
               </a:rPr>
-              <a:t>|  30/10/26   |   3</a:t>
+              <a:t>|  31/10/26   |   3</a:t>
             </a:r>
             <a:endParaRPr lang="en-US" sz="1000" dirty="0"/>
           </a:p>
@@ -21151,7 +21424,7 @@
                 <a:ea typeface="Calibri" pitchFamily="34" charset="-122"/>
                 <a:cs typeface="Calibri" pitchFamily="34" charset="-120"/>
               </a:rPr>
-              <a:t>TOGO : NATHANIEL OLYMPIO DÉNONCE LA DÉPENDANCE À L’AIDE ÉTRANGÈRE POUR NOURRIR ET HABILLER LES ÉLÈVES</a:t>
+              <a:t>WHATSAPP : LA FAUSSE ALERTE AU VOTE POUR PIRATER VOTRE COMPTE FAIT SON RETOUR</a:t>
             </a:r>
             <a:endParaRPr lang="en-US" sz="1300" dirty="0"/>
           </a:p>
@@ -21196,7 +21469,7 @@
                   </a:extLst>
                 </a:hlinkClick>
               </a:rPr>
-              <a:t>Togo Actualite</a:t>
+              <a:t>Le Nouveau Reporter</a:t>
             </a:r>
             <a:pPr indent="0" marL="0">
               <a:spcAft>
@@ -21213,24 +21486,7 @@
                 <a:ea typeface="Calibri" pitchFamily="34" charset="-122"/>
                 <a:cs typeface="Calibri" pitchFamily="34" charset="-120"/>
               </a:rPr>
-              <a:t> — 29 octobre 2026, 15 h UTC   ·   </a:t>
-            </a:r>
-            <a:pPr indent="0" marL="0">
-              <a:spcAft>
-                <a:spcPts val="200"/>
-              </a:spcAft>
-              <a:buNone/>
-            </a:pPr>
-            <a:r>
-              <a:rPr lang="en-US" sz="1300" b="1" dirty="0">
-                <a:solidFill>
-                  <a:srgbClr val="1F2937"/>
-                </a:solidFill>
-                <a:latin typeface="Calibri" pitchFamily="34" charset="0"/>
-                <a:ea typeface="Calibri" pitchFamily="34" charset="-122"/>
-                <a:cs typeface="Calibri" pitchFamily="34" charset="-120"/>
-              </a:rPr>
-              <a:t>Cotation : Confirmé</a:t>
+              <a:t> — 24 octobre 2026, 10 h UTC</a:t>
             </a:r>
             <a:endParaRPr lang="en-US" sz="1300" dirty="0"/>
           </a:p>
@@ -21254,7 +21510,7 @@
                 <a:ea typeface="Calibri" pitchFamily="34" charset="-122"/>
                 <a:cs typeface="Calibri" pitchFamily="34" charset="-120"/>
               </a:rPr>
-              <a:t>INTERVIEW : « UNE MAUVAISE CONSERVATION DES ALIMENTS OU UNE MANIPULATION INAPPROPRIÉE PEUVENT PROVOQUER DES INTOXICATIONS ALIMENTAIRES » (ANSELME BRUNO SANDAH)</a:t>
+              <a:t>SAVANES : LE LANSA SENSIBILISE LES ACTEURS AGROALIMENTAIRES À LA SÉCURITÉ SANITAIRE</a:t>
             </a:r>
             <a:endParaRPr lang="en-US" sz="1300" dirty="0"/>
           </a:p>
@@ -21275,7 +21531,7 @@
                 <a:ea typeface="Calibri" pitchFamily="34" charset="-122"/>
                 <a:cs typeface="Calibri" pitchFamily="34" charset="-120"/>
               </a:rPr>
-              <a:t>Source : </a:t>
+              <a:t>Sources : </a:t>
             </a:r>
             <a:pPr indent="0" marL="0">
               <a:spcAft>
@@ -21299,7 +21555,7 @@
                   </a:extLst>
                 </a:hlinkClick>
               </a:rPr>
-              <a:t>ATOP — Agence Togolaise Presse</a:t>
+              <a:t>24heureinfo.com · ATOP — Agence Togolaise Presse</a:t>
             </a:r>
             <a:pPr indent="0" marL="0">
               <a:spcAft>
@@ -21316,7 +21572,7 @@
                 <a:ea typeface="Calibri" pitchFamily="34" charset="-122"/>
                 <a:cs typeface="Calibri" pitchFamily="34" charset="-120"/>
               </a:rPr>
-              <a:t> — 29 octobre 2026, 13 h UTC   ·   </a:t>
+              <a:t> — 30 octobre 2026, 18 h UTC   ·   </a:t>
             </a:r>
             <a:pPr indent="0" marL="0">
               <a:spcAft>
@@ -21333,7 +21589,7 @@
                 <a:ea typeface="Calibri" pitchFamily="34" charset="-122"/>
                 <a:cs typeface="Calibri" pitchFamily="34" charset="-120"/>
               </a:rPr>
-              <a:t>Cotation : Probable</a:t>
+              <a:t>Cotation : Confirmé</a:t>
             </a:r>
             <a:endParaRPr lang="en-US" sz="1300" dirty="0"/>
           </a:p>
@@ -21357,7 +21613,7 @@
                 <a:ea typeface="Calibri" pitchFamily="34" charset="-122"/>
                 <a:cs typeface="Calibri" pitchFamily="34" charset="-120"/>
               </a:rPr>
-              <a:t>UN BUDGET EN BAISSE MAIS DES PRIORITÉS AFFIRMÉES</a:t>
+              <a:t>« POURQUOI OBÉIR ENCORE ? »</a:t>
             </a:r>
             <a:endParaRPr lang="en-US" sz="1300" dirty="0"/>
           </a:p>
@@ -21402,7 +21658,7 @@
                   </a:extLst>
                 </a:hlinkClick>
               </a:rPr>
-              <a:t>AllAfrica (TG)</a:t>
+              <a:t>Icilome</a:t>
             </a:r>
             <a:pPr indent="0" marL="0">
               <a:spcAft>
@@ -21419,7 +21675,7 @@
                 <a:ea typeface="Calibri" pitchFamily="34" charset="-122"/>
                 <a:cs typeface="Calibri" pitchFamily="34" charset="-120"/>
               </a:rPr>
-              <a:t> — 29 octobre 2026, 13 h UTC   ·   </a:t>
+              <a:t> — 30 octobre 2026, 14 h UTC   ·   </a:t>
             </a:r>
             <a:pPr indent="0" marL="0">
               <a:spcAft>
@@ -21436,7 +21692,7 @@
                 <a:ea typeface="Calibri" pitchFamily="34" charset="-122"/>
                 <a:cs typeface="Calibri" pitchFamily="34" charset="-120"/>
               </a:rPr>
-              <a:t>Cotation : Probable</a:t>
+              <a:t>Cotation : Non confirmé</a:t>
             </a:r>
             <a:endParaRPr lang="en-US" sz="1300" dirty="0"/>
           </a:p>
@@ -21460,7 +21716,7 @@
                 <a:ea typeface="Calibri" pitchFamily="34" charset="-122"/>
                 <a:cs typeface="Calibri" pitchFamily="34" charset="-120"/>
               </a:rPr>
-              <a:t>EBOLA : LE TOGO RENFORCE LES CONTRÔLES SANITAIRES AUX FRONTIÈRES</a:t>
+              <a:t>AVC AU TOGO : LES CONSEILS DU PR MOFOU BELO</a:t>
             </a:r>
             <a:endParaRPr lang="en-US" sz="1300" dirty="0"/>
           </a:p>
@@ -21505,7 +21761,7 @@
                   </a:extLst>
                 </a:hlinkClick>
               </a:rPr>
-              <a:t>24heureinfo.com · Le Nouveau Reporter</a:t>
+              <a:t>24heureinfo.com · ATOP — Agence Togolaise Presse</a:t>
             </a:r>
             <a:pPr indent="0" marL="0">
               <a:spcAft>
@@ -21522,7 +21778,7 @@
                 <a:ea typeface="Calibri" pitchFamily="34" charset="-122"/>
                 <a:cs typeface="Calibri" pitchFamily="34" charset="-120"/>
               </a:rPr>
-              <a:t> — 29 octobre 2026, 11 h UTC   ·   </a:t>
+              <a:t> — 30 octobre 2026, 14 h UTC   ·   </a:t>
             </a:r>
             <a:pPr indent="0" marL="0">
               <a:spcAft>
@@ -21623,7 +21879,7 @@
                 <a:ea typeface="Calibri" pitchFamily="34" charset="-122"/>
                 <a:cs typeface="Calibri" pitchFamily="34" charset="-120"/>
               </a:rPr>
-              <a:t>|  30/10/26   |   30</a:t>
+              <a:t>|  31/10/26   |   30</a:t>
             </a:r>
             <a:endParaRPr lang="en-US" sz="1000" dirty="0"/>
           </a:p>
@@ -21889,7 +22145,7 @@
                 <a:ea typeface="Calibri" pitchFamily="34" charset="-122"/>
                 <a:cs typeface="Calibri" pitchFamily="34" charset="-120"/>
               </a:rPr>
-              <a:t>Indice de confiance : faible (incident vérifié le plus récent : 123 jours ; aucun signal du jour)</a:t>
+              <a:t>Indice de confiance : faible (incident vérifié le plus récent : 124 jours ; aucun signal du jour)</a:t>
             </a:r>
             <a:endParaRPr lang="en-US" sz="1100" dirty="0"/>
           </a:p>
@@ -22316,7 +22572,7 @@
                 <a:ea typeface="Calibri" pitchFamily="34" charset="-122"/>
                 <a:cs typeface="Calibri" pitchFamily="34" charset="-120"/>
               </a:rPr>
-              <a:t>|  30/10/26   |   31</a:t>
+              <a:t>|  31/10/26   |   31</a:t>
             </a:r>
             <a:endParaRPr lang="en-US" sz="1000" dirty="0"/>
           </a:p>
@@ -22735,7 +22991,7 @@
                 <a:ea typeface="Calibri" pitchFamily="34" charset="-122"/>
                 <a:cs typeface="Calibri" pitchFamily="34" charset="-120"/>
               </a:rPr>
-              <a:t>|  30/10/26   |   32</a:t>
+              <a:t>|  31/10/26   |   32</a:t>
             </a:r>
             <a:endParaRPr lang="en-US" sz="1000" dirty="0"/>
           </a:p>
@@ -23001,7 +23257,7 @@
                 <a:ea typeface="Calibri" pitchFamily="34" charset="-122"/>
                 <a:cs typeface="Calibri" pitchFamily="34" charset="-120"/>
               </a:rPr>
-              <a:t>Indice de confiance : faible (incident vérifié le plus récent : 121 jours ; aucun signal du jour)</a:t>
+              <a:t>Indice de confiance : faible (incident vérifié le plus récent : 122 jours ; aucun signal du jour)</a:t>
             </a:r>
             <a:endParaRPr lang="en-US" sz="1100" dirty="0"/>
           </a:p>
@@ -23428,7 +23684,7 @@
                 <a:ea typeface="Calibri" pitchFamily="34" charset="-122"/>
                 <a:cs typeface="Calibri" pitchFamily="34" charset="-120"/>
               </a:rPr>
-              <a:t>|  30/10/26   |   33</a:t>
+              <a:t>|  31/10/26   |   33</a:t>
             </a:r>
             <a:endParaRPr lang="en-US" sz="1000" dirty="0"/>
           </a:p>
@@ -23890,7 +24146,7 @@
                 <a:ea typeface="Calibri" pitchFamily="34" charset="-122"/>
                 <a:cs typeface="Calibri" pitchFamily="34" charset="-120"/>
               </a:rPr>
-              <a:t>KINDIA : UNE FEMME DE 68 ANS MEURT DANS UN INCENDIE À KÈNENDÉ</a:t>
+              <a:t>BOUBACAR YACINE DIALLO ALERTE : « SI NOUS N’Y PRENONS PAS GARDE, LA PRESSE TRADITIONNELLE RISQUE DE SUCCOMBER ET DE DEVENIR LA RISÉE DU PUBLIC…»</a:t>
             </a:r>
             <a:endParaRPr lang="en-US" sz="1300" dirty="0"/>
           </a:p>
@@ -23952,7 +24208,7 @@
                 <a:ea typeface="Calibri" pitchFamily="34" charset="-122"/>
                 <a:cs typeface="Calibri" pitchFamily="34" charset="-120"/>
               </a:rPr>
-              <a:t> — 28 octobre 2026, 15 h UTC   ·   </a:t>
+              <a:t> — 30 octobre 2026, 18 h UTC   ·   </a:t>
             </a:r>
             <a:pPr indent="0" marL="0">
               <a:spcAft>
@@ -23993,7 +24249,7 @@
                 <a:ea typeface="Calibri" pitchFamily="34" charset="-122"/>
                 <a:cs typeface="Calibri" pitchFamily="34" charset="-120"/>
               </a:rPr>
-              <a:t>INSÉCURITÉ À LABÉ : LE JOURNALISTE BOUBACAR GARKI DIALLO VICTIME DE CAMBRIOLAGE, SES ÉQUIPEMENTS DE TRAVAIL EMPORTÉ PAR LES MALFAITEURS</a:t>
+              <a:t>« NOUS SOMMES PRÊTS À PARTIR, MAIS… » : LE PLAIDOYER DES VENDEURS DE BÉTAIL DE TOMBOLIA</a:t>
             </a:r>
             <a:endParaRPr lang="en-US" sz="1300" dirty="0"/>
           </a:p>
@@ -24038,7 +24294,7 @@
                   </a:extLst>
                 </a:hlinkClick>
               </a:rPr>
-              <a:t>Guineematin.com</a:t>
+              <a:t>Guinee7.com</a:t>
             </a:r>
             <a:pPr indent="0" marL="0">
               <a:spcAft>
@@ -24055,7 +24311,24 @@
                 <a:ea typeface="Calibri" pitchFamily="34" charset="-122"/>
                 <a:cs typeface="Calibri" pitchFamily="34" charset="-120"/>
               </a:rPr>
-              <a:t> — 26 octobre 2026, 17 h UTC</a:t>
+              <a:t> — 30 octobre 2026, 15 h UTC   ·   </a:t>
+            </a:r>
+            <a:pPr indent="0" marL="0">
+              <a:spcAft>
+                <a:spcPts val="200"/>
+              </a:spcAft>
+              <a:buNone/>
+            </a:pPr>
+            <a:r>
+              <a:rPr lang="en-US" sz="1300" b="1" dirty="0">
+                <a:solidFill>
+                  <a:srgbClr val="1F2937"/>
+                </a:solidFill>
+                <a:latin typeface="Calibri" pitchFamily="34" charset="0"/>
+                <a:ea typeface="Calibri" pitchFamily="34" charset="-122"/>
+                <a:cs typeface="Calibri" pitchFamily="34" charset="-120"/>
+              </a:rPr>
+              <a:t>Cotation : Non confirmé</a:t>
             </a:r>
             <a:endParaRPr lang="en-US" sz="1300" dirty="0"/>
           </a:p>
@@ -24079,7 +24352,7 @@
                 <a:ea typeface="Calibri" pitchFamily="34" charset="-122"/>
                 <a:cs typeface="Calibri" pitchFamily="34" charset="-120"/>
               </a:rPr>
-              <a:t>MAIRIE DE DIXINN : POURQUOI LES FEMMES BALAYEUSES ONT RENONCÉ À LEUR MANIFESTATION</a:t>
+              <a:t>KINDIA : UNE FEMME DE 68 ANS MEURT DANS UN INCENDIE À KÈNENDÉ</a:t>
             </a:r>
             <a:endParaRPr lang="en-US" sz="1300" dirty="0"/>
           </a:p>
@@ -24124,7 +24397,7 @@
                   </a:extLst>
                 </a:hlinkClick>
               </a:rPr>
-              <a:t>Guinee7.com</a:t>
+              <a:t>Guineematin.com</a:t>
             </a:r>
             <a:pPr indent="0" marL="0">
               <a:spcAft>
@@ -24141,7 +24414,24 @@
                 <a:ea typeface="Calibri" pitchFamily="34" charset="-122"/>
                 <a:cs typeface="Calibri" pitchFamily="34" charset="-120"/>
               </a:rPr>
-              <a:t> — 26 octobre 2026, 14 h UTC</a:t>
+              <a:t> — 28 octobre 2026, 15 h UTC   ·   </a:t>
+            </a:r>
+            <a:pPr indent="0" marL="0">
+              <a:spcAft>
+                <a:spcPts val="200"/>
+              </a:spcAft>
+              <a:buNone/>
+            </a:pPr>
+            <a:r>
+              <a:rPr lang="en-US" sz="1300" b="1" dirty="0">
+                <a:solidFill>
+                  <a:srgbClr val="1F2937"/>
+                </a:solidFill>
+                <a:latin typeface="Calibri" pitchFamily="34" charset="0"/>
+                <a:ea typeface="Calibri" pitchFamily="34" charset="-122"/>
+                <a:cs typeface="Calibri" pitchFamily="34" charset="-120"/>
+              </a:rPr>
+              <a:t>Cotation : Non confirmé</a:t>
             </a:r>
             <a:endParaRPr lang="en-US" sz="1300" dirty="0"/>
           </a:p>
@@ -24225,7 +24515,7 @@
                 <a:ea typeface="Calibri" pitchFamily="34" charset="-122"/>
                 <a:cs typeface="Calibri" pitchFamily="34" charset="-120"/>
               </a:rPr>
-              <a:t>|  30/10/26   |   34</a:t>
+              <a:t>|  31/10/26   |   34</a:t>
             </a:r>
             <a:endParaRPr lang="en-US" sz="1000" dirty="0"/>
           </a:p>
@@ -24498,7 +24788,7 @@
                 <a:ea typeface="Calibri" pitchFamily="34" charset="-122"/>
                 <a:cs typeface="Calibri" pitchFamily="34" charset="-120"/>
               </a:rPr>
-              <a:t>APPEL À MANIFESTATION D’INTÉRÊT POUR LES SERVICES DE CONSULTANTS LOCAUX EN AUDIT</a:t>
+              <a:t>INSÉCURITÉ À LABÉ : LE JOURNALISTE BOUBACAR GARKI DIALLO VICTIME DE CAMBRIOLAGE, SES ÉQUIPEMENTS DE TRAVAIL EMPORTÉ PAR LES MALFAITEURS</a:t>
             </a:r>
             <a:endParaRPr lang="en-US" sz="1300" dirty="0"/>
           </a:p>
@@ -24560,7 +24850,7 @@
                 <a:ea typeface="Calibri" pitchFamily="34" charset="-122"/>
                 <a:cs typeface="Calibri" pitchFamily="34" charset="-120"/>
               </a:rPr>
-              <a:t> — 26 octobre 2026, 9 h UTC</a:t>
+              <a:t> — 26 octobre 2026, 17 h UTC</a:t>
             </a:r>
             <a:endParaRPr lang="en-US" sz="1300" dirty="0"/>
           </a:p>
@@ -24584,7 +24874,7 @@
                 <a:ea typeface="Calibri" pitchFamily="34" charset="-122"/>
                 <a:cs typeface="Calibri" pitchFamily="34" charset="-120"/>
               </a:rPr>
-              <a:t>KANKAN : UN INCENDIE CAUSE D’IMPORTANTS DÉGÂTS AU QUARTIER BORDO</a:t>
+              <a:t>MAIRIE DE DIXINN : POURQUOI LES FEMMES BALAYEUSES ONT RENONCÉ À LEUR MANIFESTATION</a:t>
             </a:r>
             <a:endParaRPr lang="en-US" sz="1300" dirty="0"/>
           </a:p>
@@ -24629,7 +24919,7 @@
                   </a:extLst>
                 </a:hlinkClick>
               </a:rPr>
-              <a:t>Guineematin.com</a:t>
+              <a:t>Guinee7.com</a:t>
             </a:r>
             <a:pPr indent="0" marL="0">
               <a:spcAft>
@@ -24646,7 +24936,7 @@
                 <a:ea typeface="Calibri" pitchFamily="34" charset="-122"/>
                 <a:cs typeface="Calibri" pitchFamily="34" charset="-120"/>
               </a:rPr>
-              <a:t> — 26 octobre 2026, 8 h UTC</a:t>
+              <a:t> — 26 octobre 2026, 14 h UTC</a:t>
             </a:r>
             <a:endParaRPr lang="en-US" sz="1300" dirty="0"/>
           </a:p>
@@ -24670,7 +24960,7 @@
                 <a:ea typeface="Calibri" pitchFamily="34" charset="-122"/>
                 <a:cs typeface="Calibri" pitchFamily="34" charset="-120"/>
               </a:rPr>
-              <a:t>LOI DE FINANCES RECTIFICATIVE 2026 : ENTRE CRISE PÉTROLIÈRE ET RETARDS DES PROJETS, LA MINISTRE DE L’ÉCONOMIE, MARIAMA CIRÉ SYLLA, S’EXPLIQUE</a:t>
+              <a:t>APPEL À MANIFESTATION D’INTÉRÊT POUR LES SERVICES DE CONSULTANTS LOCAUX EN AUDIT</a:t>
             </a:r>
             <a:endParaRPr lang="en-US" sz="1300" dirty="0"/>
           </a:p>
@@ -24732,7 +25022,7 @@
                 <a:ea typeface="Calibri" pitchFamily="34" charset="-122"/>
                 <a:cs typeface="Calibri" pitchFamily="34" charset="-120"/>
               </a:rPr>
-              <a:t> — 24 octobre 2026, 22 h UTC</a:t>
+              <a:t> — 26 octobre 2026, 9 h UTC</a:t>
             </a:r>
             <a:endParaRPr lang="en-US" sz="1300" dirty="0"/>
           </a:p>
@@ -24756,7 +25046,7 @@
                 <a:ea typeface="Calibri" pitchFamily="34" charset="-122"/>
                 <a:cs typeface="Calibri" pitchFamily="34" charset="-120"/>
               </a:rPr>
-              <a:t>ÉLECTION FÉGUIFOOT : L’ARGENT DES VOIX MENACE LE FOOTBALL</a:t>
+              <a:t>KANKAN : UN INCENDIE CAUSE D’IMPORTANTS DÉGÂTS AU QUARTIER BORDO</a:t>
             </a:r>
             <a:endParaRPr lang="en-US" sz="1300" dirty="0"/>
           </a:p>
@@ -24801,7 +25091,7 @@
                   </a:extLst>
                 </a:hlinkClick>
               </a:rPr>
-              <a:t>Guinee7.com</a:t>
+              <a:t>Guineematin.com</a:t>
             </a:r>
             <a:pPr indent="0" marL="0">
               <a:spcAft>
@@ -24818,7 +25108,7 @@
                 <a:ea typeface="Calibri" pitchFamily="34" charset="-122"/>
                 <a:cs typeface="Calibri" pitchFamily="34" charset="-120"/>
               </a:rPr>
-              <a:t> — 24 octobre 2026, 8 h UTC</a:t>
+              <a:t> — 26 octobre 2026, 8 h UTC</a:t>
             </a:r>
             <a:endParaRPr lang="en-US" sz="1300" dirty="0"/>
           </a:p>
@@ -24902,7 +25192,7 @@
                 <a:ea typeface="Calibri" pitchFamily="34" charset="-122"/>
                 <a:cs typeface="Calibri" pitchFamily="34" charset="-120"/>
               </a:rPr>
-              <a:t>|  30/10/26   |   35</a:t>
+              <a:t>|  31/10/26   |   35</a:t>
             </a:r>
             <a:endParaRPr lang="en-US" sz="1000" dirty="0"/>
           </a:p>
@@ -25218,7 +25508,7 @@
                 <a:ea typeface="Calibri" pitchFamily="34" charset="-122"/>
                 <a:cs typeface="Calibri" pitchFamily="34" charset="-120"/>
               </a:rPr>
-              <a:t>Indice de confiance : faible (incident vérifié le plus récent : 213 jours ; aucun signal du jour)</a:t>
+              <a:t>Indice de confiance : faible (incident vérifié le plus récent : 214 jours ; aucun signal du jour)</a:t>
             </a:r>
             <a:endParaRPr lang="en-US" sz="1100" dirty="0"/>
           </a:p>
@@ -25257,7 +25547,7 @@
                 <a:ea typeface="Arial Narrow" pitchFamily="34" charset="-122"/>
                 <a:cs typeface="Arial Narrow" pitchFamily="34" charset="-120"/>
               </a:rPr>
-              <a:t>Libéria : Un dauphin tué et massacré avant l'arrivée de l'équipe de secours de la NaFAA</a:t>
+              <a:t>Libéria : Un ancien responsable de la NSA, Jallah, cherche une nouvelle piste après une condamnation pour viol et enlèvement légaux</a:t>
             </a:r>
             <a:endParaRPr lang="en-US" sz="2200" dirty="0"/>
           </a:p>
@@ -25322,7 +25612,7 @@
                 <a:ea typeface="Calibri" pitchFamily="34" charset="-122"/>
                 <a:cs typeface="Calibri" pitchFamily="34" charset="-120"/>
               </a:rPr>
-              <a:t>Fait rapporté le mardi 27 octobre 2026. Lieu : Monrovia, Liberia. Actualité sécuritaire. Une seule source à ce stade (FrontPageAfrica — Liberia) : à confirmer par un second média.</a:t>
+              <a:t>Fait rapporté le vendredi 30 octobre 2026. Lieu : Monrovia, Liberia. Actualité sécuritaire. Une seule source à ce stade (FrontPageAfrica — Liberia) : à confirmer par un second média.</a:t>
             </a:r>
             <a:endParaRPr lang="en-US" sz="1400" dirty="0"/>
           </a:p>
@@ -25382,7 +25672,7 @@
                 <a:ea typeface="Calibri" pitchFamily="34" charset="-122"/>
                 <a:cs typeface="Calibri" pitchFamily="34" charset="-120"/>
               </a:rPr>
-              <a:t>« Monrovia — Ce qui a commencé comme un moment d'espoir pour les défenseurs de l'environnement s'est terminé par une frustration après qu'un dauphin qui s'est échoué à Miami Beach à Monrovia a été tué et… »</a:t>
+              <a:t>« Monrovia – Criminal Court “E” at the Temple of Justice has scheduled a hearing for Monday, November 2, at 10 a.m. on a motion for a new trial… »</a:t>
             </a:r>
             <a:endParaRPr lang="en-US" sz="1400" dirty="0"/>
           </a:p>
@@ -25425,7 +25715,7 @@
                 <a:ea typeface="Calibri" pitchFamily="34" charset="-122"/>
                 <a:cs typeface="Calibri" pitchFamily="34" charset="-120"/>
               </a:rPr>
-              <a:t>Menace armée sur les axes et localités de la zone : réévaluer les déplacements terrestres (horaires, convois, itinéraires de repli) et les consignes des sites et des personnels présents à proximité.</a:t>
+              <a:t>Risque d'enlèvement : discrétion des déplacements, suivi des personnels en mission et des visiteurs, vérification des procédures de crise et des contacts d'urgence.</a:t>
             </a:r>
             <a:endParaRPr lang="en-US" sz="1400" dirty="0"/>
           </a:p>
@@ -25489,7 +25779,7 @@
                 <a:ea typeface="Calibri" pitchFamily="34" charset="-122"/>
                 <a:cs typeface="Calibri" pitchFamily="34" charset="-120"/>
               </a:rPr>
-              <a:t> — 27 octobre 2026, 5 h UTC   ·   Cotation : Probable</a:t>
+              <a:t> — 30 octobre 2026, 7 h UTC   ·   Cotation : Probable</a:t>
             </a:r>
             <a:endParaRPr lang="en-US" sz="1400" dirty="0"/>
           </a:p>
@@ -25573,7 +25863,7 @@
                 <a:ea typeface="Calibri" pitchFamily="34" charset="-122"/>
                 <a:cs typeface="Calibri" pitchFamily="34" charset="-120"/>
               </a:rPr>
-              <a:t>|  30/10/26   |   36</a:t>
+              <a:t>|  31/10/26   |   36</a:t>
             </a:r>
             <a:endParaRPr lang="en-US" sz="1000" dirty="0"/>
           </a:p>
@@ -25896,7 +26186,7 @@
                 <a:ea typeface="Calibri" pitchFamily="34" charset="-122"/>
                 <a:cs typeface="Calibri" pitchFamily="34" charset="-120"/>
               </a:rPr>
-              <a:t>LIBÉRIA : LE JUGE CITE DES PREUVES POUR DÉCLARER PETER BON JALLAH, MEMBRE DU PERSONNEL DE LA NSA, COUPABLE DE VIOL ET D'ENLÈVEMENT</a:t>
+              <a:t>LIBÉRIA : UN DAUPHIN TUÉ ET MASSACRÉ AVANT L'ARRIVÉE DE L'ÉQUIPE DE SECOURS DE LA NAFAA</a:t>
             </a:r>
             <a:endParaRPr lang="en-US" sz="1300" dirty="0"/>
           </a:p>
@@ -25958,7 +26248,24 @@
                 <a:ea typeface="Calibri" pitchFamily="34" charset="-122"/>
                 <a:cs typeface="Calibri" pitchFamily="34" charset="-120"/>
               </a:rPr>
-              <a:t> — 23 octobre 2026, 15 h UTC</a:t>
+              <a:t> — 27 octobre 2026, 5 h UTC   ·   </a:t>
+            </a:r>
+            <a:pPr indent="0" marL="0">
+              <a:spcAft>
+                <a:spcPts val="200"/>
+              </a:spcAft>
+              <a:buNone/>
+            </a:pPr>
+            <a:r>
+              <a:rPr lang="en-US" sz="1300" b="1" dirty="0">
+                <a:solidFill>
+                  <a:srgbClr val="1F2937"/>
+                </a:solidFill>
+                <a:latin typeface="Calibri" pitchFamily="34" charset="0"/>
+                <a:ea typeface="Calibri" pitchFamily="34" charset="-122"/>
+                <a:cs typeface="Calibri" pitchFamily="34" charset="-120"/>
+              </a:rPr>
+              <a:t>Cotation : Probable</a:t>
             </a:r>
             <a:endParaRPr lang="en-US" sz="1300" dirty="0"/>
           </a:p>
@@ -25982,7 +26289,7 @@
                 <a:ea typeface="Calibri" pitchFamily="34" charset="-122"/>
                 <a:cs typeface="Calibri" pitchFamily="34" charset="-120"/>
               </a:rPr>
-              <a:t>LIBÉRIA : VICTIMES DE GUERRE ET SURVIVANTS MANIFESTENT DEVANT LE TRIBUNAL ET AU CAPITOLE ALORS QUE LE PRÉSIDENT DE LA CHAMBRE S'ENGAGE À SOUMETTRE LE PROJET DE LOI SUR LA COUR DEVANT LA PLÉNIÈRE MARDI</a:t>
+              <a:t>LIBÉRIA : LE JUGE CITE DES PREUVES POUR DÉCLARER PETER BON JALLAH, MEMBRE DU PERSONNEL DE LA NSA, COUPABLE DE VIOL ET D'ENLÈVEMENT</a:t>
             </a:r>
             <a:endParaRPr lang="en-US" sz="1300" dirty="0"/>
           </a:p>
@@ -26044,7 +26351,7 @@
                 <a:ea typeface="Calibri" pitchFamily="34" charset="-122"/>
                 <a:cs typeface="Calibri" pitchFamily="34" charset="-120"/>
               </a:rPr>
-              <a:t> — 23 octobre 2026, 5 h UTC</a:t>
+              <a:t> — 23 octobre 2026, 15 h UTC</a:t>
             </a:r>
             <a:endParaRPr lang="en-US" sz="1300" dirty="0"/>
           </a:p>
@@ -26068,7 +26375,7 @@
                 <a:ea typeface="Calibri" pitchFamily="34" charset="-122"/>
                 <a:cs typeface="Calibri" pitchFamily="34" charset="-120"/>
               </a:rPr>
-              <a:t>LE LIBÉRIA APPELLE À LA PARTICIPATION SIGNIFICATIVE DES FEMMES DEPUIS LES NÉGOCIATIONS DE PAIX JUSQU’À LA MISE EN ŒUVRE</a:t>
+              <a:t>LIBÉRIA : VICTIMES DE GUERRE ET SURVIVANTS MANIFESTENT DEVANT LE TRIBUNAL ET AU CAPITOLE ALORS QUE LE PRÉSIDENT DE LA CHAMBRE S'ENGAGE À SOUMETTRE LE PROJET DE LOI SUR LA COUR DEVANT LA PLÉNIÈRE MARDI</a:t>
             </a:r>
             <a:endParaRPr lang="en-US" sz="1300" dirty="0"/>
           </a:p>
@@ -26113,7 +26420,7 @@
                   </a:extLst>
                 </a:hlinkClick>
               </a:rPr>
-              <a:t>Global News Network Liberia</a:t>
+              <a:t>FrontPageAfrica — Liberia</a:t>
             </a:r>
             <a:pPr indent="0" marL="0">
               <a:spcAft>
@@ -26130,24 +26437,7 @@
                 <a:ea typeface="Calibri" pitchFamily="34" charset="-122"/>
                 <a:cs typeface="Calibri" pitchFamily="34" charset="-120"/>
               </a:rPr>
-              <a:t> — 29 octobre 2026, 9 h UTC   ·   </a:t>
-            </a:r>
-            <a:pPr indent="0" marL="0">
-              <a:spcAft>
-                <a:spcPts val="200"/>
-              </a:spcAft>
-              <a:buNone/>
-            </a:pPr>
-            <a:r>
-              <a:rPr lang="en-US" sz="1300" b="1" dirty="0">
-                <a:solidFill>
-                  <a:srgbClr val="1F2937"/>
-                </a:solidFill>
-                <a:latin typeface="Calibri" pitchFamily="34" charset="0"/>
-                <a:ea typeface="Calibri" pitchFamily="34" charset="-122"/>
-                <a:cs typeface="Calibri" pitchFamily="34" charset="-120"/>
-              </a:rPr>
-              <a:t>Cotation : Non confirmé</a:t>
+              <a:t> — 23 octobre 2026, 5 h UTC</a:t>
             </a:r>
             <a:endParaRPr lang="en-US" sz="1300" dirty="0"/>
           </a:p>
@@ -26171,7 +26461,7 @@
                 <a:ea typeface="Calibri" pitchFamily="34" charset="-122"/>
                 <a:cs typeface="Calibri" pitchFamily="34" charset="-120"/>
               </a:rPr>
-              <a:t>LE LIBÉRIA OUVRE LA VOIE À LA PRÉSIDENCE DU CONSEIL DE SÉCURITÉ DE L’ONU : LE MINISTRE DES AFFAIRES ÉTRANGÈRES NYANTI SOULIGNE LE PARCOURS HISTORIQUE DU PAYS, DES SANCTIONS AU LEADERSHIP MONDIAL</a:t>
+              <a:t>LE PÈRE ANTHONY AJOUTE L'AUTONOMISATION DES JEUNES À SON APOSTOLAT</a:t>
             </a:r>
             <a:endParaRPr lang="en-US" sz="1300" dirty="0"/>
           </a:p>
@@ -26216,7 +26506,7 @@
                   </a:extLst>
                 </a:hlinkClick>
               </a:rPr>
-              <a:t>FrontPageAfrica — Liberia</a:t>
+              <a:t>Global News Network Liberia</a:t>
             </a:r>
             <a:pPr indent="0" marL="0">
               <a:spcAft>
@@ -26233,7 +26523,7 @@
                 <a:ea typeface="Calibri" pitchFamily="34" charset="-122"/>
                 <a:cs typeface="Calibri" pitchFamily="34" charset="-120"/>
               </a:rPr>
-              <a:t> — 29 octobre 2026, 7 h UTC   ·   </a:t>
+              <a:t> — 30 octobre 2026, 13 h UTC   ·   </a:t>
             </a:r>
             <a:pPr indent="0" marL="0">
               <a:spcAft>
@@ -26250,7 +26540,7 @@
                 <a:ea typeface="Calibri" pitchFamily="34" charset="-122"/>
                 <a:cs typeface="Calibri" pitchFamily="34" charset="-120"/>
               </a:rPr>
-              <a:t>Cotation : Probable</a:t>
+              <a:t>Cotation : Non confirmé</a:t>
             </a:r>
             <a:endParaRPr lang="en-US" sz="1300" dirty="0"/>
           </a:p>
@@ -26274,7 +26564,7 @@
                 <a:ea typeface="Calibri" pitchFamily="34" charset="-122"/>
                 <a:cs typeface="Calibri" pitchFamily="34" charset="-120"/>
               </a:rPr>
-              <a:t>LIBÉRIA : DANS LE CADRE DE LA TENTATIVE DE LA DÉFENSE D’ANNULER LA CONDAMNATION DE PETER BON JALLAH</a:t>
+              <a:t>LE LIBÉRIA APPELLE À LA PARTICIPATION SIGNIFICATIVE DES FEMMES DEPUIS LES NÉGOCIATIONS DE PAIX JUSQU’À LA MISE EN ŒUVRE</a:t>
             </a:r>
             <a:endParaRPr lang="en-US" sz="1300" dirty="0"/>
           </a:p>
@@ -26319,7 +26609,7 @@
                   </a:extLst>
                 </a:hlinkClick>
               </a:rPr>
-              <a:t>FrontPageAfrica — Liberia</a:t>
+              <a:t>Global News Network Liberia</a:t>
             </a:r>
             <a:pPr indent="0" marL="0">
               <a:spcAft>
@@ -26336,7 +26626,7 @@
                 <a:ea typeface="Calibri" pitchFamily="34" charset="-122"/>
                 <a:cs typeface="Calibri" pitchFamily="34" charset="-120"/>
               </a:rPr>
-              <a:t> — 28 octobre 2026, 7 h UTC   ·   </a:t>
+              <a:t> — 29 octobre 2026, 9 h UTC   ·   </a:t>
             </a:r>
             <a:pPr indent="0" marL="0">
               <a:spcAft>
@@ -26353,7 +26643,7 @@
                 <a:ea typeface="Calibri" pitchFamily="34" charset="-122"/>
                 <a:cs typeface="Calibri" pitchFamily="34" charset="-120"/>
               </a:rPr>
-              <a:t>Cotation : Probable</a:t>
+              <a:t>Cotation : Non confirmé</a:t>
             </a:r>
             <a:endParaRPr lang="en-US" sz="1300" dirty="0"/>
           </a:p>
@@ -26437,7 +26727,7 @@
                 <a:ea typeface="Calibri" pitchFamily="34" charset="-122"/>
                 <a:cs typeface="Calibri" pitchFamily="34" charset="-120"/>
               </a:rPr>
-              <a:t>|  30/10/26   |   37</a:t>
+              <a:t>|  31/10/26   |   37</a:t>
             </a:r>
             <a:endParaRPr lang="en-US" sz="1000" dirty="0"/>
           </a:p>
@@ -26760,7 +27050,7 @@
                 <a:ea typeface="Calibri" pitchFamily="34" charset="-122"/>
                 <a:cs typeface="Calibri" pitchFamily="34" charset="-120"/>
               </a:rPr>
-              <a:t>LA VISION D'UN ANCIEN CHEF DE LA SÉCURITÉ POUR LE SERVICE D'IMMIGRATION DU LIBÉRIA JOUE ENFIN</a:t>
+              <a:t>LE LIBÉRIA OUVRE LA VOIE À LA PRÉSIDENCE DU CONSEIL DE SÉCURITÉ DE L’ONU : LE MINISTRE DES AFFAIRES ÉTRANGÈRES NYANTI SOULIGNE LE PARCOURS HISTORIQUE DU PAYS, DES SANCTIONS AU LEADERSHIP MONDIAL</a:t>
             </a:r>
             <a:endParaRPr lang="en-US" sz="1300" dirty="0"/>
           </a:p>
@@ -26822,7 +27112,24 @@
                 <a:ea typeface="Calibri" pitchFamily="34" charset="-122"/>
                 <a:cs typeface="Calibri" pitchFamily="34" charset="-120"/>
               </a:rPr>
-              <a:t> — 26 octobre 2026, 6 h UTC</a:t>
+              <a:t> — 29 octobre 2026, 7 h UTC   ·   </a:t>
+            </a:r>
+            <a:pPr indent="0" marL="0">
+              <a:spcAft>
+                <a:spcPts val="200"/>
+              </a:spcAft>
+              <a:buNone/>
+            </a:pPr>
+            <a:r>
+              <a:rPr lang="en-US" sz="1300" b="1" dirty="0">
+                <a:solidFill>
+                  <a:srgbClr val="1F2937"/>
+                </a:solidFill>
+                <a:latin typeface="Calibri" pitchFamily="34" charset="0"/>
+                <a:ea typeface="Calibri" pitchFamily="34" charset="-122"/>
+                <a:cs typeface="Calibri" pitchFamily="34" charset="-120"/>
+              </a:rPr>
+              <a:t>Cotation : Probable</a:t>
             </a:r>
             <a:endParaRPr lang="en-US" sz="1300" dirty="0"/>
           </a:p>
@@ -26846,7 +27153,7 @@
                 <a:ea typeface="Calibri" pitchFamily="34" charset="-122"/>
                 <a:cs typeface="Calibri" pitchFamily="34" charset="-120"/>
               </a:rPr>
-              <a:t>LE LIBÉRIA IMPOSE DES RÈGLES D'ISOLEMENT ET DE SURVEILLANCE DE 21 JOURS AUX VOYAGEURS FACE À LA MENACE RÉGIONALE D'EBOLA</a:t>
+              <a:t>LIBÉRIA : DANS LE CADRE DE LA TENTATIVE DE LA DÉFENSE D’ANNULER LA CONDAMNATION DE PETER BON JALLAH</a:t>
             </a:r>
             <a:endParaRPr lang="en-US" sz="1300" dirty="0"/>
           </a:p>
@@ -26891,7 +27198,7 @@
                   </a:extLst>
                 </a:hlinkClick>
               </a:rPr>
-              <a:t>Global News Network Liberia</a:t>
+              <a:t>FrontPageAfrica — Liberia</a:t>
             </a:r>
             <a:pPr indent="0" marL="0">
               <a:spcAft>
@@ -26908,7 +27215,24 @@
                 <a:ea typeface="Calibri" pitchFamily="34" charset="-122"/>
                 <a:cs typeface="Calibri" pitchFamily="34" charset="-120"/>
               </a:rPr>
-              <a:t> — 24 octobre 2026, 22 h UTC</a:t>
+              <a:t> — 28 octobre 2026, 7 h UTC   ·   </a:t>
+            </a:r>
+            <a:pPr indent="0" marL="0">
+              <a:spcAft>
+                <a:spcPts val="200"/>
+              </a:spcAft>
+              <a:buNone/>
+            </a:pPr>
+            <a:r>
+              <a:rPr lang="en-US" sz="1300" b="1" dirty="0">
+                <a:solidFill>
+                  <a:srgbClr val="1F2937"/>
+                </a:solidFill>
+                <a:latin typeface="Calibri" pitchFamily="34" charset="0"/>
+                <a:ea typeface="Calibri" pitchFamily="34" charset="-122"/>
+                <a:cs typeface="Calibri" pitchFamily="34" charset="-120"/>
+              </a:rPr>
+              <a:t>Cotation : Probable</a:t>
             </a:r>
             <a:endParaRPr lang="en-US" sz="1300" dirty="0"/>
           </a:p>
@@ -26932,7 +27256,7 @@
                 <a:ea typeface="Calibri" pitchFamily="34" charset="-122"/>
                 <a:cs typeface="Calibri" pitchFamily="34" charset="-120"/>
               </a:rPr>
-              <a:t>L'AFL TIRE SUR DEUX SOLDATS À LA SUITE D'UN ASSAUT</a:t>
+              <a:t>LA VISION D'UN ANCIEN CHEF DE LA SÉCURITÉ POUR LE SERVICE D'IMMIGRATION DU LIBÉRIA JOUE ENFIN</a:t>
             </a:r>
             <a:endParaRPr lang="en-US" sz="1300" dirty="0"/>
           </a:p>
@@ -26977,6 +27301,92 @@
                   </a:extLst>
                 </a:hlinkClick>
               </a:rPr>
+              <a:t>FrontPageAfrica — Liberia</a:t>
+            </a:r>
+            <a:pPr indent="0" marL="0">
+              <a:spcAft>
+                <a:spcPts val="200"/>
+              </a:spcAft>
+              <a:buNone/>
+            </a:pPr>
+            <a:r>
+              <a:rPr lang="en-US" sz="1300" dirty="0">
+                <a:solidFill>
+                  <a:srgbClr val="1F2937"/>
+                </a:solidFill>
+                <a:latin typeface="Calibri" pitchFamily="34" charset="0"/>
+                <a:ea typeface="Calibri" pitchFamily="34" charset="-122"/>
+                <a:cs typeface="Calibri" pitchFamily="34" charset="-120"/>
+              </a:rPr>
+              <a:t> — 26 octobre 2026, 6 h UTC</a:t>
+            </a:r>
+            <a:endParaRPr lang="en-US" sz="1300" dirty="0"/>
+          </a:p>
+          <a:p>
+            <a:pPr marL="342900" indent="-342900">
+              <a:spcBef>
+                <a:spcPts val="800"/>
+              </a:spcBef>
+              <a:spcAft>
+                <a:spcPts val="200"/>
+              </a:spcAft>
+              <a:buSzPct val="100000"/>
+              <a:buChar char="❑"/>
+            </a:pPr>
+            <a:r>
+              <a:rPr lang="en-US" sz="1400" b="1" u="sng" dirty="0">
+                <a:solidFill>
+                  <a:srgbClr val="1F6B5E"/>
+                </a:solidFill>
+                <a:latin typeface="Calibri" pitchFamily="34" charset="0"/>
+                <a:ea typeface="Calibri" pitchFamily="34" charset="-122"/>
+                <a:cs typeface="Calibri" pitchFamily="34" charset="-120"/>
+              </a:rPr>
+              <a:t>LE LIBÉRIA IMPOSE DES RÈGLES D'ISOLEMENT ET DE SURVEILLANCE DE 21 JOURS AUX VOYAGEURS FACE À LA MENACE RÉGIONALE D'EBOLA</a:t>
+            </a:r>
+            <a:endParaRPr lang="en-US" sz="1300" dirty="0"/>
+          </a:p>
+          <a:p>
+            <a:pPr lvl="1" marL="685800" indent="-342900">
+              <a:spcAft>
+                <a:spcPts val="200"/>
+              </a:spcAft>
+              <a:buSzPct val="100000"/>
+              <a:buChar char="▪"/>
+            </a:pPr>
+            <a:r>
+              <a:rPr lang="en-US" sz="1300" dirty="0">
+                <a:solidFill>
+                  <a:srgbClr val="1F2937"/>
+                </a:solidFill>
+                <a:latin typeface="Calibri" pitchFamily="34" charset="0"/>
+                <a:ea typeface="Calibri" pitchFamily="34" charset="-122"/>
+                <a:cs typeface="Calibri" pitchFamily="34" charset="-120"/>
+              </a:rPr>
+              <a:t>Source : </a:t>
+            </a:r>
+            <a:pPr indent="0" marL="0">
+              <a:spcAft>
+                <a:spcPts val="200"/>
+              </a:spcAft>
+              <a:buNone/>
+            </a:pPr>
+            <a:r>
+              <a:rPr lang="en-US" sz="1300" u="sng" dirty="0">
+                <a:solidFill>
+                  <a:srgbClr val="1F6B5E"/>
+                </a:solidFill>
+                <a:latin typeface="Calibri" pitchFamily="34" charset="0"/>
+                <a:ea typeface="Calibri" pitchFamily="34" charset="-122"/>
+                <a:cs typeface="Calibri" pitchFamily="34" charset="-120"/>
+                <a:hlinkClick r:id="rId4" invalidUrl="" action="" tgtFrame="" tooltip="" history="1" highlightClick="0" endSnd="0">
+                  <a:extLst>
+                    <a:ext uri="{A12FA001-AC4F-418D-AE19-62706E023703}">
+                      <ahyp:hlinkClr xmlns:ahyp="http://schemas.microsoft.com/office/drawing/2018/hyperlinkcolor" val="tx"/>
+                    </a:ext>
+                  </a:extLst>
+                </a:hlinkClick>
+              </a:rPr>
               <a:t>Global News Network Liberia</a:t>
             </a:r>
             <a:pPr indent="0" marL="0">
@@ -26994,7 +27404,7 @@
                 <a:ea typeface="Calibri" pitchFamily="34" charset="-122"/>
                 <a:cs typeface="Calibri" pitchFamily="34" charset="-120"/>
               </a:rPr>
-              <a:t> — 22 octobre 2026, 17 h UTC</a:t>
+              <a:t> — 24 octobre 2026, 22 h UTC</a:t>
             </a:r>
             <a:endParaRPr lang="en-US" sz="1300" dirty="0"/>
           </a:p>
@@ -27078,7 +27488,7 @@
                 <a:ea typeface="Calibri" pitchFamily="34" charset="-122"/>
                 <a:cs typeface="Calibri" pitchFamily="34" charset="-120"/>
               </a:rPr>
-              <a:t>|  30/10/26   |   38</a:t>
+              <a:t>|  31/10/26   |   38</a:t>
             </a:r>
             <a:endParaRPr lang="en-US" sz="1000" dirty="0"/>
           </a:p>
@@ -27344,7 +27754,7 @@
                 <a:ea typeface="Calibri" pitchFamily="34" charset="-122"/>
                 <a:cs typeface="Calibri" pitchFamily="34" charset="-120"/>
               </a:rPr>
-              <a:t>Indice de confiance : moyenne (incident vérifié le plus récent : 122 jours ; 5 signaux du jour)</a:t>
+              <a:t>Indice de confiance : moyenne (incident vérifié le plus récent : 123 jours ; 3 signaux du jour)</a:t>
             </a:r>
             <a:endParaRPr lang="en-US" sz="1100" dirty="0"/>
           </a:p>
@@ -27383,7 +27793,7 @@
                 <a:ea typeface="Arial Narrow" pitchFamily="34" charset="-122"/>
                 <a:cs typeface="Arial Narrow" pitchFamily="34" charset="-120"/>
               </a:rPr>
-              <a:t>Kaolack : un retraité retrouvé mort à son domicile, le corps en état de décomposition</a:t>
+              <a:t>Drame en Italie : un couple sénégalais retrouvé mort, leur bébé de 7 mois entre les mains des médecins</a:t>
             </a:r>
             <a:endParaRPr lang="en-US" sz="2200" dirty="0"/>
           </a:p>
@@ -27448,7 +27858,7 @@
                 <a:ea typeface="Calibri" pitchFamily="34" charset="-122"/>
                 <a:cs typeface="Calibri" pitchFamily="34" charset="-120"/>
               </a:rPr>
-              <a:t>Fait rapporté le jeudi 29 octobre 2026. Lieu : Sénégal. Actualité politique. Une seule source à ce stade (Seneweb) : à confirmer par un second média.</a:t>
+              <a:t>Fait rapporté le samedi 31 octobre 2026. Lieu : Sénégal. Actualité politique. Une seule source à ce stade (Seneweb) : à confirmer par un second média.</a:t>
             </a:r>
             <a:endParaRPr lang="en-US" sz="1400" dirty="0"/>
           </a:p>
@@ -27508,7 +27918,7 @@
                 <a:ea typeface="Calibri" pitchFamily="34" charset="-122"/>
                 <a:cs typeface="Calibri" pitchFamily="34" charset="-120"/>
               </a:rPr>
-              <a:t>« Le corps sans vie d'un homme a été découvert le mercredi 28 octobre 2026 dans une maison du quartier Cité Kébé, à Kaolack. »</a:t>
+              <a:t>« Une tragédie frappe une famille sénégalaise établie en Italie. Un couple de ressortissants sénégalais a été retrouvé mort à Bocca d’Enza, dans la province de Parme, à la suite d’une présumée intoxication au monoxyde de carbone. »</a:t>
             </a:r>
             <a:endParaRPr lang="en-US" sz="1400" dirty="0"/>
           </a:p>
@@ -27615,7 +28025,7 @@
                 <a:ea typeface="Calibri" pitchFamily="34" charset="-122"/>
                 <a:cs typeface="Calibri" pitchFamily="34" charset="-120"/>
               </a:rPr>
-              <a:t> — 29 octobre 2026, 22 h UTC   ·   Cotation : Probable</a:t>
+              <a:t> — 31 octobre 2026, 1 h UTC   ·   Cotation : Probable</a:t>
             </a:r>
             <a:endParaRPr lang="en-US" sz="1400" dirty="0"/>
           </a:p>
@@ -27771,7 +28181,7 @@
                 <a:ea typeface="Calibri" pitchFamily="34" charset="-122"/>
                 <a:cs typeface="Calibri" pitchFamily="34" charset="-120"/>
               </a:rPr>
-              <a:t>|  30/10/26   |   39</a:t>
+              <a:t>|  31/10/26   |   39</a:t>
             </a:r>
             <a:endParaRPr lang="en-US" sz="1000" dirty="0"/>
           </a:p>
@@ -28037,7 +28447,7 @@
                 <a:ea typeface="Calibri" pitchFamily="34" charset="-122"/>
                 <a:cs typeface="Calibri" pitchFamily="34" charset="-120"/>
               </a:rPr>
-              <a:t>Indice de confiance : moyenne (incident vérifié le plus récent : 122 jours ; 2 signaux du jour)</a:t>
+              <a:t>Indice de confiance : faible (incident vérifié le plus récent : 123 jours ; aucun signal du jour)</a:t>
             </a:r>
             <a:endParaRPr lang="en-US" sz="1100" dirty="0"/>
           </a:p>
@@ -28392,7 +28802,7 @@
                 <a:ea typeface="Calibri" pitchFamily="34" charset="-122"/>
                 <a:cs typeface="Calibri" pitchFamily="34" charset="-120"/>
               </a:rPr>
-              <a:t>|  30/10/26   |   4</a:t>
+              <a:t>|  31/10/26   |   4</a:t>
             </a:r>
             <a:endParaRPr lang="en-US" sz="1000" dirty="0"/>
           </a:p>
@@ -28665,7 +29075,7 @@
                 <a:ea typeface="Calibri" pitchFamily="34" charset="-122"/>
                 <a:cs typeface="Calibri" pitchFamily="34" charset="-120"/>
               </a:rPr>
-              <a:t>NGOR : UN CLIENT DU BAR-RESTAURANT TIMIS DÉFÉRÉ POUR TENTATIVE DE MEURTRE AVEC UN PIEU EN BOIS</a:t>
+              <a:t>MORT DE FALLOU SÈNE À L'UGB : LE GENDARME RECONNAÎT AVOIR OUVERT LE FEU SUR LES MANIFESTANTS,1AN FERME REQUIS DEVANT LE TRIBUNAL MILITAIRE</a:t>
             </a:r>
             <a:endParaRPr lang="en-US" sz="1300" dirty="0"/>
           </a:p>
@@ -28710,7 +29120,7 @@
                   </a:extLst>
                 </a:hlinkClick>
               </a:rPr>
-              <a:t>Seneweb</a:t>
+              <a:t>Pressafrik</a:t>
             </a:r>
             <a:pPr indent="0" marL="0">
               <a:spcAft>
@@ -28727,7 +29137,7 @@
                 <a:ea typeface="Calibri" pitchFamily="34" charset="-122"/>
                 <a:cs typeface="Calibri" pitchFamily="34" charset="-120"/>
               </a:rPr>
-              <a:t> — 29 octobre 2026, 14 h UTC   ·   </a:t>
+              <a:t> — 30 octobre 2026, 20 h UTC   ·   </a:t>
             </a:r>
             <a:pPr indent="0" marL="0">
               <a:spcAft>
@@ -28744,7 +29154,7 @@
                 <a:ea typeface="Calibri" pitchFamily="34" charset="-122"/>
                 <a:cs typeface="Calibri" pitchFamily="34" charset="-120"/>
               </a:rPr>
-              <a:t>Cotation : Probable</a:t>
+              <a:t>Cotation : Confirmé</a:t>
             </a:r>
             <a:endParaRPr lang="en-US" sz="1300" dirty="0"/>
           </a:p>
@@ -28768,7 +29178,7 @@
                 <a:ea typeface="Calibri" pitchFamily="34" charset="-122"/>
                 <a:cs typeface="Calibri" pitchFamily="34" charset="-120"/>
               </a:rPr>
-              <a:t>LE SUSPECT DE L’ATTENTAT DE TRAPPES RECONNAÎT AVOIR CIBLÉ DES PERSONNES MUSULMANES OU D’ORIGINE AFRICAINE</a:t>
+              <a:t>UN ENFANT DE 3 ANS TUÉ PAR UN BUS : LE RÉCIT POIGNANT D’UN TÉMOIN (VIDÉO)</a:t>
             </a:r>
             <a:endParaRPr lang="en-US" sz="1300" dirty="0"/>
           </a:p>
@@ -28789,7 +29199,7 @@
                 <a:ea typeface="Calibri" pitchFamily="34" charset="-122"/>
                 <a:cs typeface="Calibri" pitchFamily="34" charset="-120"/>
               </a:rPr>
-              <a:t>Source : </a:t>
+              <a:t>Sources : </a:t>
             </a:r>
             <a:pPr indent="0" marL="0">
               <a:spcAft>
@@ -28813,7 +29223,7 @@
                   </a:extLst>
                 </a:hlinkClick>
               </a:rPr>
-              <a:t>Dakar Actu</a:t>
+              <a:t>SeneNews · Dakar Actu</a:t>
             </a:r>
             <a:pPr indent="0" marL="0">
               <a:spcAft>
@@ -28830,7 +29240,7 @@
                 <a:ea typeface="Calibri" pitchFamily="34" charset="-122"/>
                 <a:cs typeface="Calibri" pitchFamily="34" charset="-120"/>
               </a:rPr>
-              <a:t> — 29 octobre 2026, 13 h UTC   ·   </a:t>
+              <a:t> — 30 octobre 2026, 13 h UTC   ·   </a:t>
             </a:r>
             <a:pPr indent="0" marL="0">
               <a:spcAft>
@@ -28847,7 +29257,7 @@
                 <a:ea typeface="Calibri" pitchFamily="34" charset="-122"/>
                 <a:cs typeface="Calibri" pitchFamily="34" charset="-120"/>
               </a:rPr>
-              <a:t>Cotation : Probable</a:t>
+              <a:t>Cotation : Confirmé</a:t>
             </a:r>
             <a:endParaRPr lang="en-US" sz="1300" dirty="0"/>
           </a:p>
@@ -28871,7 +29281,7 @@
                 <a:ea typeface="Calibri" pitchFamily="34" charset="-122"/>
                 <a:cs typeface="Calibri" pitchFamily="34" charset="-120"/>
               </a:rPr>
-              <a:t>KÉBÉMER : UN BERGER DE 17 ANS TUÉ DANS UNE PRÉSUMÉE ATTAQUE À LA MACHETTE</a:t>
+              <a:t>KAOLACK : DÉCOUVERTE D’UN HOMME DE 76 ANS MORT EN DÉCOMPOSITION À SON DOMICILE</a:t>
             </a:r>
             <a:endParaRPr lang="en-US" sz="1300" dirty="0"/>
           </a:p>
@@ -28916,7 +29326,7 @@
                   </a:extLst>
                 </a:hlinkClick>
               </a:rPr>
-              <a:t>Pressafrik · APS — Agence Sénégalaise Presse</a:t>
+              <a:t>SeneNews · Seneweb</a:t>
             </a:r>
             <a:pPr indent="0" marL="0">
               <a:spcAft>
@@ -28933,7 +29343,7 @@
                 <a:ea typeface="Calibri" pitchFamily="34" charset="-122"/>
                 <a:cs typeface="Calibri" pitchFamily="34" charset="-120"/>
               </a:rPr>
-              <a:t> — 29 octobre 2026, 12 h UTC   ·   </a:t>
+              <a:t> — 30 octobre 2026, 12 h UTC   ·   </a:t>
             </a:r>
             <a:pPr indent="0" marL="0">
               <a:spcAft>
@@ -28974,7 +29384,7 @@
                 <a:ea typeface="Calibri" pitchFamily="34" charset="-122"/>
                 <a:cs typeface="Calibri" pitchFamily="34" charset="-120"/>
               </a:rPr>
-              <a:t>MÉDINA FASS : UN ENFANT DE TROIS ANS TUÉ PAR UN BUS, DES VIOLENCES ÉCLATENT APRÈS LE CHOC</a:t>
+              <a:t>CISJORDANIE OCCUPÉE: L'OPÉRATION ISRAÉLIENNE SE POURSUIT À HÉBRON, 5000 PERSONNES SANS DOMICILE</a:t>
             </a:r>
             <a:endParaRPr lang="en-US" sz="1300" dirty="0"/>
           </a:p>
@@ -29036,7 +29446,7 @@
                 <a:ea typeface="Calibri" pitchFamily="34" charset="-122"/>
                 <a:cs typeface="Calibri" pitchFamily="34" charset="-120"/>
               </a:rPr>
-              <a:t> — 29 octobre 2026, 11 h UTC   ·   </a:t>
+              <a:t> — 30 octobre 2026, 12 h UTC   ·   </a:t>
             </a:r>
             <a:pPr indent="0" marL="0">
               <a:spcAft>
@@ -29077,7 +29487,7 @@
                 <a:ea typeface="Calibri" pitchFamily="34" charset="-122"/>
                 <a:cs typeface="Calibri" pitchFamily="34" charset="-120"/>
               </a:rPr>
-              <a:t>AFFAIRE AMINATA SY : ETRANGLÉE PENDANT 30 MINUTES, LA LYCÉENNE A SUBI DES ACTES DE BARBARIE APRÈS SA MORT</a:t>
+              <a:t>MORT DE FALLOU SÈNE : LE PROCÈS S’OUVRE HUIT ANS APRÈS LES ÉVÉNEMENTS À L’UGB</a:t>
             </a:r>
             <a:endParaRPr lang="en-US" sz="1300" dirty="0"/>
           </a:p>
@@ -29139,7 +29549,7 @@
                 <a:ea typeface="Calibri" pitchFamily="34" charset="-122"/>
                 <a:cs typeface="Calibri" pitchFamily="34" charset="-120"/>
               </a:rPr>
-              <a:t> — 29 octobre 2026, 8 h UTC   ·   </a:t>
+              <a:t> — 30 octobre 2026, 11 h UTC   ·   </a:t>
             </a:r>
             <a:pPr indent="0" marL="0">
               <a:spcAft>
@@ -29240,7 +29650,7 @@
                 <a:ea typeface="Calibri" pitchFamily="34" charset="-122"/>
                 <a:cs typeface="Calibri" pitchFamily="34" charset="-120"/>
               </a:rPr>
-              <a:t>|  30/10/26   |   40</a:t>
+              <a:t>|  31/10/26   |   40</a:t>
             </a:r>
             <a:endParaRPr lang="en-US" sz="1000" dirty="0"/>
           </a:p>
@@ -29513,7 +29923,7 @@
                 <a:ea typeface="Calibri" pitchFamily="34" charset="-122"/>
                 <a:cs typeface="Calibri" pitchFamily="34" charset="-120"/>
               </a:rPr>
-              <a:t>AMINATA SY : LE TUEUR S’EST ACHARNÉ SUR... LA DÉPOUILLE</a:t>
+              <a:t>« IL FAUT ARRÊTER OUSMANE SONKO » : ARONA DIOUF INVOQUE LES « VAR » ET CONTRE-ATTAQUE</a:t>
             </a:r>
             <a:endParaRPr lang="en-US" sz="1300" dirty="0"/>
           </a:p>
@@ -29558,7 +29968,7 @@
                   </a:extLst>
                 </a:hlinkClick>
               </a:rPr>
-              <a:t>Seneweb</a:t>
+              <a:t>SeneNews</a:t>
             </a:r>
             <a:pPr indent="0" marL="0">
               <a:spcAft>
@@ -29575,7 +29985,7 @@
                 <a:ea typeface="Calibri" pitchFamily="34" charset="-122"/>
                 <a:cs typeface="Calibri" pitchFamily="34" charset="-120"/>
               </a:rPr>
-              <a:t> — 29 octobre 2026, 7 h UTC   ·   </a:t>
+              <a:t> — 30 octobre 2026, 11 h UTC   ·   </a:t>
             </a:r>
             <a:pPr indent="0" marL="0">
               <a:spcAft>
@@ -29592,7 +30002,7 @@
                 <a:ea typeface="Calibri" pitchFamily="34" charset="-122"/>
                 <a:cs typeface="Calibri" pitchFamily="34" charset="-120"/>
               </a:rPr>
-              <a:t>Cotation : Probable</a:t>
+              <a:t>Cotation : Non confirmé</a:t>
             </a:r>
             <a:endParaRPr lang="en-US" sz="1300" dirty="0"/>
           </a:p>
@@ -29616,7 +30026,7 @@
                 <a:ea typeface="Calibri" pitchFamily="34" charset="-122"/>
                 <a:cs typeface="Calibri" pitchFamily="34" charset="-120"/>
               </a:rPr>
-              <a:t>MENACES DE MORT CONTRE SONKO : CE QUE PASTEF REPROCHE À DES CADRES DE KIIRAAY</a:t>
+              <a:t>“IMPOSTURE POLITIQUE”: BALLA FOFANA FOFANA ATTAQUE SONKO</a:t>
             </a:r>
             <a:endParaRPr lang="en-US" sz="1300" dirty="0"/>
           </a:p>
@@ -29661,7 +30071,7 @@
                   </a:extLst>
                 </a:hlinkClick>
               </a:rPr>
-              <a:t>Linfodrome</a:t>
+              <a:t>Seneweb</a:t>
             </a:r>
             <a:pPr indent="0" marL="0">
               <a:spcAft>
@@ -29678,7 +30088,7 @@
                 <a:ea typeface="Calibri" pitchFamily="34" charset="-122"/>
                 <a:cs typeface="Calibri" pitchFamily="34" charset="-120"/>
               </a:rPr>
-              <a:t> — 28 octobre 2026, 20 h UTC   ·   </a:t>
+              <a:t> — 30 octobre 2026, 0 h UTC   ·   </a:t>
             </a:r>
             <a:pPr indent="0" marL="0">
               <a:spcAft>
@@ -29719,7 +30129,7 @@
                 <a:ea typeface="Calibri" pitchFamily="34" charset="-122"/>
                 <a:cs typeface="Calibri" pitchFamily="34" charset="-120"/>
               </a:rPr>
-              <a:t>KÉDOUGOU : 6,7 MILLIONS DE FCFA EMPORTÉS LORS D’UNE ATTAQUE ARMÉE CONTRE UN SITE MINIER À FARANDING</a:t>
+              <a:t>NGOR : UN CLIENT DU BAR-RESTAURANT TIMIS DÉFÉRÉ POUR TENTATIVE DE MEURTRE AVEC UN PIEU EN BOIS</a:t>
             </a:r>
             <a:endParaRPr lang="en-US" sz="1300" dirty="0"/>
           </a:p>
@@ -29740,7 +30150,7 @@
                 <a:ea typeface="Calibri" pitchFamily="34" charset="-122"/>
                 <a:cs typeface="Calibri" pitchFamily="34" charset="-120"/>
               </a:rPr>
-              <a:t>Sources : </a:t>
+              <a:t>Source : </a:t>
             </a:r>
             <a:pPr indent="0" marL="0">
               <a:spcAft>
@@ -29764,7 +30174,7 @@
                   </a:extLst>
                 </a:hlinkClick>
               </a:rPr>
-              <a:t>Pressafrik · SeneNews</a:t>
+              <a:t>Seneweb</a:t>
             </a:r>
             <a:pPr indent="0" marL="0">
               <a:spcAft>
@@ -29781,7 +30191,7 @@
                 <a:ea typeface="Calibri" pitchFamily="34" charset="-122"/>
                 <a:cs typeface="Calibri" pitchFamily="34" charset="-120"/>
               </a:rPr>
-              <a:t> — 28 octobre 2026, 13 h UTC   ·   </a:t>
+              <a:t> — 29 octobre 2026, 14 h UTC   ·   </a:t>
             </a:r>
             <a:pPr indent="0" marL="0">
               <a:spcAft>
@@ -29798,7 +30208,7 @@
                 <a:ea typeface="Calibri" pitchFamily="34" charset="-122"/>
                 <a:cs typeface="Calibri" pitchFamily="34" charset="-120"/>
               </a:rPr>
-              <a:t>Cotation : Confirmé</a:t>
+              <a:t>Cotation : Probable</a:t>
             </a:r>
             <a:endParaRPr lang="en-US" sz="1300" dirty="0"/>
           </a:p>
@@ -29822,7 +30232,7 @@
                 <a:ea typeface="Calibri" pitchFamily="34" charset="-122"/>
                 <a:cs typeface="Calibri" pitchFamily="34" charset="-120"/>
               </a:rPr>
-              <a:t>TOUBA : UN JEUNE LIVREUR DE 22 ANS TUÉ À L'ARME BLANCHE AU QUARTIER 30 SERIGNE CHEIKH BOMBALI</a:t>
+              <a:t>LE SUSPECT DE L’ATTENTAT DE TRAPPES RECONNAÎT AVOIR CIBLÉ DES PERSONNES MUSULMANES OU D’ORIGINE AFRICAINE</a:t>
             </a:r>
             <a:endParaRPr lang="en-US" sz="1300" dirty="0"/>
           </a:p>
@@ -29867,7 +30277,7 @@
                   </a:extLst>
                 </a:hlinkClick>
               </a:rPr>
-              <a:t>Pressafrik</a:t>
+              <a:t>Dakar Actu</a:t>
             </a:r>
             <a:pPr indent="0" marL="0">
               <a:spcAft>
@@ -29884,7 +30294,7 @@
                 <a:ea typeface="Calibri" pitchFamily="34" charset="-122"/>
                 <a:cs typeface="Calibri" pitchFamily="34" charset="-120"/>
               </a:rPr>
-              <a:t> — 28 octobre 2026, 10 h UTC   ·   </a:t>
+              <a:t> — 29 octobre 2026, 13 h UTC   ·   </a:t>
             </a:r>
             <a:pPr indent="0" marL="0">
               <a:spcAft>
@@ -29985,7 +30395,7 @@
                 <a:ea typeface="Calibri" pitchFamily="34" charset="-122"/>
                 <a:cs typeface="Calibri" pitchFamily="34" charset="-120"/>
               </a:rPr>
-              <a:t>|  30/10/26   |   41</a:t>
+              <a:t>|  31/10/26   |   41</a:t>
             </a:r>
             <a:endParaRPr lang="en-US" sz="1000" dirty="0"/>
           </a:p>
@@ -30140,7 +30550,7 @@
                 <a:ea typeface="Calibri" pitchFamily="34" charset="-122"/>
                 <a:cs typeface="Calibri" pitchFamily="34" charset="-120"/>
               </a:rPr>
-              <a:t>|  30/10/26   |   42</a:t>
+              <a:t>|  31/10/26   |   42</a:t>
             </a:r>
             <a:endParaRPr lang="en-US" sz="1000" dirty="0"/>
           </a:p>
@@ -30722,7 +31132,7 @@
                 <a:ea typeface="Calibri" pitchFamily="34" charset="-122"/>
                 <a:cs typeface="Calibri" pitchFamily="34" charset="-120"/>
               </a:rPr>
-              <a:t>|  30/10/26   |   5</a:t>
+              <a:t>|  31/10/26   |   5</a:t>
             </a:r>
             <a:endParaRPr lang="en-US" sz="1000" dirty="0"/>
           </a:p>
@@ -31485,7 +31895,7 @@
                 <a:ea typeface="Calibri" pitchFamily="34" charset="-122"/>
                 <a:cs typeface="Calibri" pitchFamily="34" charset="-120"/>
               </a:rPr>
-              <a:t>|  30/10/26   |   6</a:t>
+              <a:t>|  31/10/26   |   6</a:t>
             </a:r>
             <a:endParaRPr lang="en-US" sz="1000" dirty="0"/>
           </a:p>
@@ -32127,7 +32537,7 @@
                 <a:ea typeface="Calibri" pitchFamily="34" charset="-122"/>
                 <a:cs typeface="Calibri" pitchFamily="34" charset="-120"/>
               </a:rPr>
-              <a:t>|  30/10/26   |   7</a:t>
+              <a:t>|  31/10/26   |   7</a:t>
             </a:r>
             <a:endParaRPr lang="en-US" sz="1000" dirty="0"/>
           </a:p>
@@ -32393,7 +32803,7 @@
                 <a:ea typeface="Calibri" pitchFamily="34" charset="-122"/>
                 <a:cs typeface="Calibri" pitchFamily="34" charset="-120"/>
               </a:rPr>
-              <a:t>Indice de confiance : moyenne (incident vérifié le plus récent : 122 jours ; 2 signaux du jour)</a:t>
+              <a:t>Indice de confiance : faible (incident vérifié le plus récent : 123 jours ; aucun signal du jour)</a:t>
             </a:r>
             <a:endParaRPr lang="en-US" sz="1100" dirty="0"/>
           </a:p>
@@ -32820,7 +33230,7 @@
                 <a:ea typeface="Calibri" pitchFamily="34" charset="-122"/>
                 <a:cs typeface="Calibri" pitchFamily="34" charset="-120"/>
               </a:rPr>
-              <a:t>|  30/10/26   |   8</a:t>
+              <a:t>|  31/10/26   |   8</a:t>
             </a:r>
             <a:endParaRPr lang="en-US" sz="1000" dirty="0"/>
           </a:p>
@@ -33093,7 +33503,7 @@
                 <a:ea typeface="Calibri" pitchFamily="34" charset="-122"/>
                 <a:cs typeface="Calibri" pitchFamily="34" charset="-120"/>
               </a:rPr>
-              <a:t>LUTTE CONTRE L'ORPAILLAGE ILLÉGAL À KORHOGO - ASSAHORÉ KONAN VEUT SANCTIONNER TOUTES LES COMPLICITÉS</a:t>
+              <a:t>CÔTE D’IVOIRE: UN ENSEMBLE D'ÉQUIPEMENTS DE 6 MILLIARDS FCFA POUR LUTTER CONTRE LA FIÈVRE JAUNE ET ÉBOLA</a:t>
             </a:r>
             <a:endParaRPr lang="en-US" sz="1300" dirty="0"/>
           </a:p>
@@ -33138,7 +33548,7 @@
                   </a:extLst>
                 </a:hlinkClick>
               </a:rPr>
-              <a:t>AllAfrica (CI)</a:t>
+              <a:t>Linfodrome</a:t>
             </a:r>
             <a:pPr indent="0" marL="0">
               <a:spcAft>
@@ -33155,7 +33565,7 @@
                 <a:ea typeface="Calibri" pitchFamily="34" charset="-122"/>
                 <a:cs typeface="Calibri" pitchFamily="34" charset="-120"/>
               </a:rPr>
-              <a:t> — 29 octobre 2026, 13 h UTC   ·   </a:t>
+              <a:t> — 29 octobre 2026, 23 h UTC   ·   </a:t>
             </a:r>
             <a:pPr indent="0" marL="0">
               <a:spcAft>
@@ -33196,7 +33606,7 @@
                 <a:ea typeface="Calibri" pitchFamily="34" charset="-122"/>
                 <a:cs typeface="Calibri" pitchFamily="34" charset="-120"/>
               </a:rPr>
-              <a:t>POMMES, BANANES, KIWIS : CETTE ERREUR DE RANGEMENT FAIT MÛRIR VOS FRUITS BEAUCOUP TROP VITE</a:t>
+              <a:t>LUTTE CONTRE L'ORPAILLAGE ILLÉGAL À KORHOGO - ASSAHORÉ KONAN VEUT SANCTIONNER TOUTES LES COMPLICITÉS</a:t>
             </a:r>
             <a:endParaRPr lang="en-US" sz="1300" dirty="0"/>
           </a:p>
@@ -33241,7 +33651,7 @@
                   </a:extLst>
                 </a:hlinkClick>
               </a:rPr>
-              <a:t>Linfodrome</a:t>
+              <a:t>AllAfrica (CI)</a:t>
             </a:r>
             <a:pPr indent="0" marL="0">
               <a:spcAft>
@@ -33258,7 +33668,7 @@
                 <a:ea typeface="Calibri" pitchFamily="34" charset="-122"/>
                 <a:cs typeface="Calibri" pitchFamily="34" charset="-120"/>
               </a:rPr>
-              <a:t> — 28 octobre 2026, 19 h UTC   ·   </a:t>
+              <a:t> — 29 octobre 2026, 13 h UTC   ·   </a:t>
             </a:r>
             <a:pPr indent="0" marL="0">
               <a:spcAft>
@@ -33299,7 +33709,7 @@
                 <a:ea typeface="Calibri" pitchFamily="34" charset="-122"/>
                 <a:cs typeface="Calibri" pitchFamily="34" charset="-120"/>
               </a:rPr>
-              <a:t>GASPILLAGE ALIMENTAIRE - LE CCESP PLAIDE POUR UN PACTE NATIONAL</a:t>
+              <a:t>POMMES, BANANES, KIWIS : CETTE ERREUR DE RANGEMENT FAIT MÛRIR VOS FRUITS BEAUCOUP TROP VITE</a:t>
             </a:r>
             <a:endParaRPr lang="en-US" sz="1300" dirty="0"/>
           </a:p>
@@ -33344,7 +33754,7 @@
                   </a:extLst>
                 </a:hlinkClick>
               </a:rPr>
-              <a:t>AllAfrica (CI)</a:t>
+              <a:t>Linfodrome</a:t>
             </a:r>
             <a:pPr indent="0" marL="0">
               <a:spcAft>
@@ -33361,7 +33771,7 @@
                 <a:ea typeface="Calibri" pitchFamily="34" charset="-122"/>
                 <a:cs typeface="Calibri" pitchFamily="34" charset="-120"/>
               </a:rPr>
-              <a:t> — 28 octobre 2026, 16 h UTC   ·   </a:t>
+              <a:t> — 28 octobre 2026, 19 h UTC   ·   </a:t>
             </a:r>
             <a:pPr indent="0" marL="0">
               <a:spcAft>
@@ -33402,7 +33812,7 @@
                 <a:ea typeface="Calibri" pitchFamily="34" charset="-122"/>
                 <a:cs typeface="Calibri" pitchFamily="34" charset="-120"/>
               </a:rPr>
-              <a:t>BOUNA : LES VICTIMES D’ACCIDENTS DE LA ROUTE POURRONT DÉSORMAIS PRISES EN CHARGE GRATUITEMENT AUX URGENCES</a:t>
+              <a:t>GASPILLAGE ALIMENTAIRE - LE CCESP PLAIDE POUR UN PACTE NATIONAL</a:t>
             </a:r>
             <a:endParaRPr lang="en-US" sz="1300" dirty="0"/>
           </a:p>
@@ -33447,7 +33857,7 @@
                   </a:extLst>
                 </a:hlinkClick>
               </a:rPr>
-              <a:t>Linfodrome</a:t>
+              <a:t>AllAfrica (CI)</a:t>
             </a:r>
             <a:pPr indent="0" marL="0">
               <a:spcAft>
@@ -33464,7 +33874,7 @@
                 <a:ea typeface="Calibri" pitchFamily="34" charset="-122"/>
                 <a:cs typeface="Calibri" pitchFamily="34" charset="-120"/>
               </a:rPr>
-              <a:t> — 28 octobre 2026, 12 h UTC   ·   </a:t>
+              <a:t> — 28 octobre 2026, 16 h UTC   ·   </a:t>
             </a:r>
             <a:pPr indent="0" marL="0">
               <a:spcAft>
@@ -33505,7 +33915,7 @@
                 <a:ea typeface="Calibri" pitchFamily="34" charset="-122"/>
                 <a:cs typeface="Calibri" pitchFamily="34" charset="-120"/>
               </a:rPr>
-              <a:t>CÔTE D'IVOIRE : LE GOUVERNEMENT MISE SUR LA PONADEPA II POUR ATTEINDRE LA SOUVERAINETÉ ALIMENTAIRE D'ICI 2030</a:t>
+              <a:t>BOUNA : LES VICTIMES D’ACCIDENTS DE LA ROUTE POURRONT DÉSORMAIS PRISES EN CHARGE GRATUITEMENT AUX URGENCES</a:t>
             </a:r>
             <a:endParaRPr lang="en-US" sz="1300" dirty="0"/>
           </a:p>
@@ -33550,7 +33960,7 @@
                   </a:extLst>
                 </a:hlinkClick>
               </a:rPr>
-              <a:t>Alwihda Info (Tchad)</a:t>
+              <a:t>Linfodrome</a:t>
             </a:r>
             <a:pPr indent="0" marL="0">
               <a:spcAft>
@@ -33567,7 +33977,7 @@
                 <a:ea typeface="Calibri" pitchFamily="34" charset="-122"/>
                 <a:cs typeface="Calibri" pitchFamily="34" charset="-120"/>
               </a:rPr>
-              <a:t> — 28 octobre 2026, 11 h UTC   ·   </a:t>
+              <a:t> — 28 octobre 2026, 12 h UTC   ·   </a:t>
             </a:r>
             <a:pPr indent="0" marL="0">
               <a:spcAft>
@@ -33668,7 +34078,7 @@
                 <a:ea typeface="Calibri" pitchFamily="34" charset="-122"/>
                 <a:cs typeface="Calibri" pitchFamily="34" charset="-120"/>
               </a:rPr>
-              <a:t>|  30/10/26   |   9</a:t>
+              <a:t>|  31/10/26   |   9</a:t>
             </a:r>
             <a:endParaRPr lang="en-US" sz="1000" dirty="0"/>
           </a:p>
